--- a/ReadZ_GCReW_Symposium_Poster_2026.pptx
+++ b/ReadZ_GCReW_Symposium_Poster_2026.pptx
@@ -135,7 +135,7 @@
 <file path=ppt/revisionInfo.xml><?xml version="1.0" encoding="utf-8"?>
 <p1510:revInfo xmlns:a="http://schemas.openxmlformats.org/drawingml/2006/main" xmlns:r="http://schemas.openxmlformats.org/officeDocument/2006/relationships" xmlns:p1510="http://schemas.microsoft.com/office/powerpoint/2015/10/main">
   <p1510:revLst>
-    <p1510:client id="{C361ACA4-D6F5-4BF7-A9F8-CB4C4CECE084}" v="42" dt="2026-03-10T20:30:30.236"/>
+    <p1510:client id="{B82716F6-75B8-4E39-A6D4-7E66C823071B}" v="25" dt="2026-03-12T20:26:21.074"/>
   </p1510:revLst>
 </p1510:revInfo>
 </file>
@@ -144,19 +144,19 @@
 <pc:chgInfo xmlns:a="http://schemas.openxmlformats.org/drawingml/2006/main" xmlns:r="http://schemas.openxmlformats.org/officeDocument/2006/relationships" xmlns:ac="http://schemas.microsoft.com/office/drawing/2013/main/command" xmlns:pc="http://schemas.microsoft.com/office/powerpoint/2013/main/command">
   <pc:docChgLst>
     <pc:chgData name="Read, Zoe" userId="b08cd0fd-26d2-470b-8ec0-c6e6cb2a79bd" providerId="ADAL" clId="{5AEB2719-95A5-4ED2-9E0E-ED462BB10526}"/>
-    <pc:docChg chg="undo custSel modSld">
-      <pc:chgData name="Read, Zoe" userId="b08cd0fd-26d2-470b-8ec0-c6e6cb2a79bd" providerId="ADAL" clId="{5AEB2719-95A5-4ED2-9E0E-ED462BB10526}" dt="2026-03-10T20:32:06.465" v="2361" actId="1076"/>
+    <pc:docChg chg="undo custSel addSld delSld modSld">
+      <pc:chgData name="Read, Zoe" userId="b08cd0fd-26d2-470b-8ec0-c6e6cb2a79bd" providerId="ADAL" clId="{5AEB2719-95A5-4ED2-9E0E-ED462BB10526}" dt="2026-03-12T20:26:39.354" v="3596" actId="1076"/>
       <pc:docMkLst>
         <pc:docMk/>
       </pc:docMkLst>
-      <pc:sldChg chg="addSp delSp modSp mod">
-        <pc:chgData name="Read, Zoe" userId="b08cd0fd-26d2-470b-8ec0-c6e6cb2a79bd" providerId="ADAL" clId="{5AEB2719-95A5-4ED2-9E0E-ED462BB10526}" dt="2026-03-10T20:32:06.465" v="2361" actId="1076"/>
+      <pc:sldChg chg="addSp delSp modSp mod modNotesTx">
+        <pc:chgData name="Read, Zoe" userId="b08cd0fd-26d2-470b-8ec0-c6e6cb2a79bd" providerId="ADAL" clId="{5AEB2719-95A5-4ED2-9E0E-ED462BB10526}" dt="2026-03-12T20:26:39.354" v="3596" actId="1076"/>
         <pc:sldMkLst>
           <pc:docMk/>
           <pc:sldMk cId="2005456116" sldId="257"/>
         </pc:sldMkLst>
         <pc:spChg chg="mod">
-          <ac:chgData name="Read, Zoe" userId="b08cd0fd-26d2-470b-8ec0-c6e6cb2a79bd" providerId="ADAL" clId="{5AEB2719-95A5-4ED2-9E0E-ED462BB10526}" dt="2026-03-06T17:08:42.361" v="157" actId="5793"/>
+          <ac:chgData name="Read, Zoe" userId="b08cd0fd-26d2-470b-8ec0-c6e6cb2a79bd" providerId="ADAL" clId="{5AEB2719-95A5-4ED2-9E0E-ED462BB10526}" dt="2026-03-12T20:26:36.594" v="3595" actId="1076"/>
           <ac:spMkLst>
             <pc:docMk/>
             <pc:sldMk cId="2005456116" sldId="257"/>
@@ -164,23 +164,15 @@
           </ac:spMkLst>
         </pc:spChg>
         <pc:spChg chg="mod">
-          <ac:chgData name="Read, Zoe" userId="b08cd0fd-26d2-470b-8ec0-c6e6cb2a79bd" providerId="ADAL" clId="{5AEB2719-95A5-4ED2-9E0E-ED462BB10526}" dt="2026-03-06T17:01:57.063" v="153" actId="20577"/>
+          <ac:chgData name="Read, Zoe" userId="b08cd0fd-26d2-470b-8ec0-c6e6cb2a79bd" providerId="ADAL" clId="{5AEB2719-95A5-4ED2-9E0E-ED462BB10526}" dt="2026-03-12T20:26:39.354" v="3596" actId="1076"/>
           <ac:spMkLst>
             <pc:docMk/>
             <pc:sldMk cId="2005456116" sldId="257"/>
             <ac:spMk id="3" creationId="{69275BAE-6112-7B97-7490-496A68DBDB86}"/>
           </ac:spMkLst>
         </pc:spChg>
-        <pc:spChg chg="del mod">
-          <ac:chgData name="Read, Zoe" userId="b08cd0fd-26d2-470b-8ec0-c6e6cb2a79bd" providerId="ADAL" clId="{5AEB2719-95A5-4ED2-9E0E-ED462BB10526}" dt="2026-03-10T20:22:26.675" v="1840" actId="478"/>
-          <ac:spMkLst>
-            <pc:docMk/>
-            <pc:sldMk cId="2005456116" sldId="257"/>
-            <ac:spMk id="4" creationId="{F1744425-34AA-4364-9092-1BDEEA96FD0B}"/>
-          </ac:spMkLst>
-        </pc:spChg>
         <pc:spChg chg="add mod">
-          <ac:chgData name="Read, Zoe" userId="b08cd0fd-26d2-470b-8ec0-c6e6cb2a79bd" providerId="ADAL" clId="{5AEB2719-95A5-4ED2-9E0E-ED462BB10526}" dt="2026-03-10T20:25:30.086" v="2085" actId="1076"/>
+          <ac:chgData name="Read, Zoe" userId="b08cd0fd-26d2-470b-8ec0-c6e6cb2a79bd" providerId="ADAL" clId="{5AEB2719-95A5-4ED2-9E0E-ED462BB10526}" dt="2026-03-12T20:26:21.074" v="3593" actId="1035"/>
           <ac:spMkLst>
             <pc:docMk/>
             <pc:sldMk cId="2005456116" sldId="257"/>
@@ -188,15 +180,23 @@
           </ac:spMkLst>
         </pc:spChg>
         <pc:spChg chg="add mod">
-          <ac:chgData name="Read, Zoe" userId="b08cd0fd-26d2-470b-8ec0-c6e6cb2a79bd" providerId="ADAL" clId="{5AEB2719-95A5-4ED2-9E0E-ED462BB10526}" dt="2026-03-10T20:27:42.693" v="2312" actId="5793"/>
+          <ac:chgData name="Read, Zoe" userId="b08cd0fd-26d2-470b-8ec0-c6e6cb2a79bd" providerId="ADAL" clId="{5AEB2719-95A5-4ED2-9E0E-ED462BB10526}" dt="2026-03-12T20:26:21.074" v="3593" actId="1035"/>
           <ac:spMkLst>
             <pc:docMk/>
             <pc:sldMk cId="2005456116" sldId="257"/>
             <ac:spMk id="7" creationId="{B580F8D7-E067-282C-0BEF-1FA899DCFD3B}"/>
           </ac:spMkLst>
         </pc:spChg>
+        <pc:spChg chg="del mod">
+          <ac:chgData name="Read, Zoe" userId="b08cd0fd-26d2-470b-8ec0-c6e6cb2a79bd" providerId="ADAL" clId="{5AEB2719-95A5-4ED2-9E0E-ED462BB10526}" dt="2026-03-12T20:26:30.998" v="3594" actId="478"/>
+          <ac:spMkLst>
+            <pc:docMk/>
+            <pc:sldMk cId="2005456116" sldId="257"/>
+            <ac:spMk id="8" creationId="{C27ACF02-AE38-EED1-52AD-AE57386B0269}"/>
+          </ac:spMkLst>
+        </pc:spChg>
         <pc:spChg chg="mod">
-          <ac:chgData name="Read, Zoe" userId="b08cd0fd-26d2-470b-8ec0-c6e6cb2a79bd" providerId="ADAL" clId="{5AEB2719-95A5-4ED2-9E0E-ED462BB10526}" dt="2026-03-10T20:22:48.981" v="1855" actId="1076"/>
+          <ac:chgData name="Read, Zoe" userId="b08cd0fd-26d2-470b-8ec0-c6e6cb2a79bd" providerId="ADAL" clId="{5AEB2719-95A5-4ED2-9E0E-ED462BB10526}" dt="2026-03-12T20:26:21.074" v="3593" actId="1035"/>
           <ac:spMkLst>
             <pc:docMk/>
             <pc:sldMk cId="2005456116" sldId="257"/>
@@ -204,23 +204,15 @@
           </ac:spMkLst>
         </pc:spChg>
         <pc:spChg chg="mod">
-          <ac:chgData name="Read, Zoe" userId="b08cd0fd-26d2-470b-8ec0-c6e6cb2a79bd" providerId="ADAL" clId="{5AEB2719-95A5-4ED2-9E0E-ED462BB10526}" dt="2026-03-10T20:20:11.421" v="1786" actId="1076"/>
+          <ac:chgData name="Read, Zoe" userId="b08cd0fd-26d2-470b-8ec0-c6e6cb2a79bd" providerId="ADAL" clId="{5AEB2719-95A5-4ED2-9E0E-ED462BB10526}" dt="2026-03-12T20:16:02.170" v="3521" actId="1076"/>
           <ac:spMkLst>
             <pc:docMk/>
             <pc:sldMk cId="2005456116" sldId="257"/>
             <ac:spMk id="17" creationId="{2BD42464-D16B-3701-0C0F-271BDE66BAA5}"/>
           </ac:spMkLst>
         </pc:spChg>
-        <pc:spChg chg="del mod">
-          <ac:chgData name="Read, Zoe" userId="b08cd0fd-26d2-470b-8ec0-c6e6cb2a79bd" providerId="ADAL" clId="{5AEB2719-95A5-4ED2-9E0E-ED462BB10526}" dt="2026-03-10T20:18:41.004" v="1745" actId="478"/>
-          <ac:spMkLst>
-            <pc:docMk/>
-            <pc:sldMk cId="2005456116" sldId="257"/>
-            <ac:spMk id="21" creationId="{F4FC7A76-BFFB-5CD0-D1F0-8E4D815B1A87}"/>
-          </ac:spMkLst>
-        </pc:spChg>
         <pc:spChg chg="mod">
-          <ac:chgData name="Read, Zoe" userId="b08cd0fd-26d2-470b-8ec0-c6e6cb2a79bd" providerId="ADAL" clId="{5AEB2719-95A5-4ED2-9E0E-ED462BB10526}" dt="2026-03-10T20:22:48.981" v="1855" actId="1076"/>
+          <ac:chgData name="Read, Zoe" userId="b08cd0fd-26d2-470b-8ec0-c6e6cb2a79bd" providerId="ADAL" clId="{5AEB2719-95A5-4ED2-9E0E-ED462BB10526}" dt="2026-03-12T20:16:02.170" v="3521" actId="1076"/>
           <ac:spMkLst>
             <pc:docMk/>
             <pc:sldMk cId="2005456116" sldId="257"/>
@@ -228,7 +220,7 @@
           </ac:spMkLst>
         </pc:spChg>
         <pc:spChg chg="mod">
-          <ac:chgData name="Read, Zoe" userId="b08cd0fd-26d2-470b-8ec0-c6e6cb2a79bd" providerId="ADAL" clId="{5AEB2719-95A5-4ED2-9E0E-ED462BB10526}" dt="2026-03-10T20:22:48.981" v="1855" actId="1076"/>
+          <ac:chgData name="Read, Zoe" userId="b08cd0fd-26d2-470b-8ec0-c6e6cb2a79bd" providerId="ADAL" clId="{5AEB2719-95A5-4ED2-9E0E-ED462BB10526}" dt="2026-03-12T20:16:02.170" v="3521" actId="1076"/>
           <ac:spMkLst>
             <pc:docMk/>
             <pc:sldMk cId="2005456116" sldId="257"/>
@@ -236,7 +228,7 @@
           </ac:spMkLst>
         </pc:spChg>
         <pc:spChg chg="mod">
-          <ac:chgData name="Read, Zoe" userId="b08cd0fd-26d2-470b-8ec0-c6e6cb2a79bd" providerId="ADAL" clId="{5AEB2719-95A5-4ED2-9E0E-ED462BB10526}" dt="2026-03-10T20:20:11.421" v="1786" actId="1076"/>
+          <ac:chgData name="Read, Zoe" userId="b08cd0fd-26d2-470b-8ec0-c6e6cb2a79bd" providerId="ADAL" clId="{5AEB2719-95A5-4ED2-9E0E-ED462BB10526}" dt="2026-03-12T20:16:02.170" v="3521" actId="1076"/>
           <ac:spMkLst>
             <pc:docMk/>
             <pc:sldMk cId="2005456116" sldId="257"/>
@@ -244,7 +236,7 @@
           </ac:spMkLst>
         </pc:spChg>
         <pc:spChg chg="mod">
-          <ac:chgData name="Read, Zoe" userId="b08cd0fd-26d2-470b-8ec0-c6e6cb2a79bd" providerId="ADAL" clId="{5AEB2719-95A5-4ED2-9E0E-ED462BB10526}" dt="2026-03-10T20:22:48.981" v="1855" actId="1076"/>
+          <ac:chgData name="Read, Zoe" userId="b08cd0fd-26d2-470b-8ec0-c6e6cb2a79bd" providerId="ADAL" clId="{5AEB2719-95A5-4ED2-9E0E-ED462BB10526}" dt="2026-03-12T20:26:21.074" v="3593" actId="1035"/>
           <ac:spMkLst>
             <pc:docMk/>
             <pc:sldMk cId="2005456116" sldId="257"/>
@@ -252,7 +244,7 @@
           </ac:spMkLst>
         </pc:spChg>
         <pc:spChg chg="mod">
-          <ac:chgData name="Read, Zoe" userId="b08cd0fd-26d2-470b-8ec0-c6e6cb2a79bd" providerId="ADAL" clId="{5AEB2719-95A5-4ED2-9E0E-ED462BB10526}" dt="2026-03-10T20:17:57.764" v="1739" actId="1076"/>
+          <ac:chgData name="Read, Zoe" userId="b08cd0fd-26d2-470b-8ec0-c6e6cb2a79bd" providerId="ADAL" clId="{5AEB2719-95A5-4ED2-9E0E-ED462BB10526}" dt="2026-03-12T20:26:21.074" v="3593" actId="1035"/>
           <ac:spMkLst>
             <pc:docMk/>
             <pc:sldMk cId="2005456116" sldId="257"/>
@@ -260,7 +252,7 @@
           </ac:spMkLst>
         </pc:spChg>
         <pc:spChg chg="mod">
-          <ac:chgData name="Read, Zoe" userId="b08cd0fd-26d2-470b-8ec0-c6e6cb2a79bd" providerId="ADAL" clId="{5AEB2719-95A5-4ED2-9E0E-ED462BB10526}" dt="2026-03-10T20:22:48.981" v="1855" actId="1076"/>
+          <ac:chgData name="Read, Zoe" userId="b08cd0fd-26d2-470b-8ec0-c6e6cb2a79bd" providerId="ADAL" clId="{5AEB2719-95A5-4ED2-9E0E-ED462BB10526}" dt="2026-03-12T20:16:02.170" v="3521" actId="1076"/>
           <ac:spMkLst>
             <pc:docMk/>
             <pc:sldMk cId="2005456116" sldId="257"/>
@@ -268,7 +260,7 @@
           </ac:spMkLst>
         </pc:spChg>
         <pc:spChg chg="mod">
-          <ac:chgData name="Read, Zoe" userId="b08cd0fd-26d2-470b-8ec0-c6e6cb2a79bd" providerId="ADAL" clId="{5AEB2719-95A5-4ED2-9E0E-ED462BB10526}" dt="2026-03-10T20:22:48.981" v="1855" actId="1076"/>
+          <ac:chgData name="Read, Zoe" userId="b08cd0fd-26d2-470b-8ec0-c6e6cb2a79bd" providerId="ADAL" clId="{5AEB2719-95A5-4ED2-9E0E-ED462BB10526}" dt="2026-03-12T20:26:21.074" v="3593" actId="1035"/>
           <ac:spMkLst>
             <pc:docMk/>
             <pc:sldMk cId="2005456116" sldId="257"/>
@@ -284,7 +276,7 @@
           </ac:spMkLst>
         </pc:spChg>
         <pc:spChg chg="mod">
-          <ac:chgData name="Read, Zoe" userId="b08cd0fd-26d2-470b-8ec0-c6e6cb2a79bd" providerId="ADAL" clId="{5AEB2719-95A5-4ED2-9E0E-ED462BB10526}" dt="2026-03-10T20:22:48.981" v="1855" actId="1076"/>
+          <ac:chgData name="Read, Zoe" userId="b08cd0fd-26d2-470b-8ec0-c6e6cb2a79bd" providerId="ADAL" clId="{5AEB2719-95A5-4ED2-9E0E-ED462BB10526}" dt="2026-03-12T20:26:21.074" v="3593" actId="1035"/>
           <ac:spMkLst>
             <pc:docMk/>
             <pc:sldMk cId="2005456116" sldId="257"/>
@@ -292,7 +284,7 @@
           </ac:spMkLst>
         </pc:spChg>
         <pc:spChg chg="mod">
-          <ac:chgData name="Read, Zoe" userId="b08cd0fd-26d2-470b-8ec0-c6e6cb2a79bd" providerId="ADAL" clId="{5AEB2719-95A5-4ED2-9E0E-ED462BB10526}" dt="2026-03-10T20:22:48.981" v="1855" actId="1076"/>
+          <ac:chgData name="Read, Zoe" userId="b08cd0fd-26d2-470b-8ec0-c6e6cb2a79bd" providerId="ADAL" clId="{5AEB2719-95A5-4ED2-9E0E-ED462BB10526}" dt="2026-03-12T20:26:21.074" v="3593" actId="1035"/>
           <ac:spMkLst>
             <pc:docMk/>
             <pc:sldMk cId="2005456116" sldId="257"/>
@@ -300,7 +292,7 @@
           </ac:spMkLst>
         </pc:spChg>
         <pc:spChg chg="mod">
-          <ac:chgData name="Read, Zoe" userId="b08cd0fd-26d2-470b-8ec0-c6e6cb2a79bd" providerId="ADAL" clId="{5AEB2719-95A5-4ED2-9E0E-ED462BB10526}" dt="2026-03-10T20:22:48.981" v="1855" actId="1076"/>
+          <ac:chgData name="Read, Zoe" userId="b08cd0fd-26d2-470b-8ec0-c6e6cb2a79bd" providerId="ADAL" clId="{5AEB2719-95A5-4ED2-9E0E-ED462BB10526}" dt="2026-03-12T20:16:02.170" v="3521" actId="1076"/>
           <ac:spMkLst>
             <pc:docMk/>
             <pc:sldMk cId="2005456116" sldId="257"/>
@@ -308,7 +300,7 @@
           </ac:spMkLst>
         </pc:spChg>
         <pc:spChg chg="add mod">
-          <ac:chgData name="Read, Zoe" userId="b08cd0fd-26d2-470b-8ec0-c6e6cb2a79bd" providerId="ADAL" clId="{5AEB2719-95A5-4ED2-9E0E-ED462BB10526}" dt="2026-03-10T20:17:53.899" v="1737" actId="20577"/>
+          <ac:chgData name="Read, Zoe" userId="b08cd0fd-26d2-470b-8ec0-c6e6cb2a79bd" providerId="ADAL" clId="{5AEB2719-95A5-4ED2-9E0E-ED462BB10526}" dt="2026-03-12T20:15:08.333" v="3512" actId="20577"/>
           <ac:spMkLst>
             <pc:docMk/>
             <pc:sldMk cId="2005456116" sldId="257"/>
@@ -316,127 +308,119 @@
           </ac:spMkLst>
         </pc:spChg>
         <pc:spChg chg="add mod">
-          <ac:chgData name="Read, Zoe" userId="b08cd0fd-26d2-470b-8ec0-c6e6cb2a79bd" providerId="ADAL" clId="{5AEB2719-95A5-4ED2-9E0E-ED462BB10526}" dt="2026-03-10T20:26:53.902" v="2251" actId="20577"/>
+          <ac:chgData name="Read, Zoe" userId="b08cd0fd-26d2-470b-8ec0-c6e6cb2a79bd" providerId="ADAL" clId="{5AEB2719-95A5-4ED2-9E0E-ED462BB10526}" dt="2026-03-12T20:16:16.234" v="3524" actId="1076"/>
           <ac:spMkLst>
             <pc:docMk/>
             <pc:sldMk cId="2005456116" sldId="257"/>
             <ac:spMk id="1034" creationId="{3B019716-EAFE-3F05-01D8-F3689D302ED2}"/>
           </ac:spMkLst>
         </pc:spChg>
-        <pc:spChg chg="add del mod">
-          <ac:chgData name="Read, Zoe" userId="b08cd0fd-26d2-470b-8ec0-c6e6cb2a79bd" providerId="ADAL" clId="{5AEB2719-95A5-4ED2-9E0E-ED462BB10526}" dt="2026-03-10T20:22:30.580" v="1841" actId="478"/>
+        <pc:spChg chg="add mod">
+          <ac:chgData name="Read, Zoe" userId="b08cd0fd-26d2-470b-8ec0-c6e6cb2a79bd" providerId="ADAL" clId="{5AEB2719-95A5-4ED2-9E0E-ED462BB10526}" dt="2026-03-12T20:16:28.154" v="3529" actId="1076"/>
           <ac:spMkLst>
             <pc:docMk/>
             <pc:sldMk cId="2005456116" sldId="257"/>
-            <ac:spMk id="1040" creationId="{8C956C30-65B3-1578-E320-9D8C8931FD35}"/>
+            <ac:spMk id="1035" creationId="{8DA61A9E-9FD6-923F-C6C1-69FD27ACDB80}"/>
           </ac:spMkLst>
         </pc:spChg>
         <pc:spChg chg="mod">
-          <ac:chgData name="Read, Zoe" userId="b08cd0fd-26d2-470b-8ec0-c6e6cb2a79bd" providerId="ADAL" clId="{5AEB2719-95A5-4ED2-9E0E-ED462BB10526}" dt="2026-03-10T20:28:09.815" v="2317" actId="14100"/>
+          <ac:chgData name="Read, Zoe" userId="b08cd0fd-26d2-470b-8ec0-c6e6cb2a79bd" providerId="ADAL" clId="{5AEB2719-95A5-4ED2-9E0E-ED462BB10526}" dt="2026-03-12T20:26:21.074" v="3593" actId="1035"/>
           <ac:spMkLst>
             <pc:docMk/>
             <pc:sldMk cId="2005456116" sldId="257"/>
             <ac:spMk id="1046" creationId="{3D22E29A-542C-2707-EE87-D32E923FD26A}"/>
           </ac:spMkLst>
         </pc:spChg>
+        <pc:grpChg chg="del">
+          <ac:chgData name="Read, Zoe" userId="b08cd0fd-26d2-470b-8ec0-c6e6cb2a79bd" providerId="ADAL" clId="{5AEB2719-95A5-4ED2-9E0E-ED462BB10526}" dt="2026-03-12T20:13:15.849" v="3367" actId="478"/>
+          <ac:grpSpMkLst>
+            <pc:docMk/>
+            <pc:sldMk cId="2005456116" sldId="257"/>
+            <ac:grpSpMk id="22" creationId="{2BFE48BE-D2C5-8243-5332-F748C7FB4EAC}"/>
+          </ac:grpSpMkLst>
+        </pc:grpChg>
         <pc:graphicFrameChg chg="mod modGraphic">
-          <ac:chgData name="Read, Zoe" userId="b08cd0fd-26d2-470b-8ec0-c6e6cb2a79bd" providerId="ADAL" clId="{5AEB2719-95A5-4ED2-9E0E-ED462BB10526}" dt="2026-03-10T20:19:41.830" v="1779" actId="1076"/>
+          <ac:chgData name="Read, Zoe" userId="b08cd0fd-26d2-470b-8ec0-c6e6cb2a79bd" providerId="ADAL" clId="{5AEB2719-95A5-4ED2-9E0E-ED462BB10526}" dt="2026-03-12T20:13:57.952" v="3393" actId="403"/>
           <ac:graphicFrameMkLst>
             <pc:docMk/>
             <pc:sldMk cId="2005456116" sldId="257"/>
             <ac:graphicFrameMk id="20" creationId="{6EE1AE5B-A26D-71DD-8EF3-D283BC117F1C}"/>
           </ac:graphicFrameMkLst>
         </pc:graphicFrameChg>
-        <pc:picChg chg="add mod">
-          <ac:chgData name="Read, Zoe" userId="b08cd0fd-26d2-470b-8ec0-c6e6cb2a79bd" providerId="ADAL" clId="{5AEB2719-95A5-4ED2-9E0E-ED462BB10526}" dt="2026-03-10T20:16:18.043" v="1349" actId="1076"/>
+        <pc:picChg chg="add mod modCrop">
+          <ac:chgData name="Read, Zoe" userId="b08cd0fd-26d2-470b-8ec0-c6e6cb2a79bd" providerId="ADAL" clId="{5AEB2719-95A5-4ED2-9E0E-ED462BB10526}" dt="2026-03-12T20:10:12.242" v="3170" actId="1076"/>
           <ac:picMkLst>
             <pc:docMk/>
             <pc:sldMk cId="2005456116" sldId="257"/>
             <ac:picMk id="9" creationId="{09EDF015-AC84-7DA3-BD5A-225267C491D7}"/>
           </ac:picMkLst>
         </pc:picChg>
-        <pc:picChg chg="add del mod">
-          <ac:chgData name="Read, Zoe" userId="b08cd0fd-26d2-470b-8ec0-c6e6cb2a79bd" providerId="ADAL" clId="{5AEB2719-95A5-4ED2-9E0E-ED462BB10526}" dt="2026-03-09T12:17:31.600" v="905" actId="478"/>
-          <ac:picMkLst>
-            <pc:docMk/>
-            <pc:sldMk cId="2005456116" sldId="257"/>
-            <ac:picMk id="9" creationId="{FF3A475C-502A-AE3E-6697-DF5A24EADBA6}"/>
-          </ac:picMkLst>
-        </pc:picChg>
-        <pc:picChg chg="add del mod">
-          <ac:chgData name="Read, Zoe" userId="b08cd0fd-26d2-470b-8ec0-c6e6cb2a79bd" providerId="ADAL" clId="{5AEB2719-95A5-4ED2-9E0E-ED462BB10526}" dt="2026-03-10T12:41:59.878" v="906" actId="478"/>
-          <ac:picMkLst>
-            <pc:docMk/>
-            <pc:sldMk cId="2005456116" sldId="257"/>
-            <ac:picMk id="10" creationId="{0A86C89A-5889-65B9-1137-F480341B9783}"/>
-          </ac:picMkLst>
-        </pc:picChg>
-        <pc:picChg chg="add mod modCrop">
-          <ac:chgData name="Read, Zoe" userId="b08cd0fd-26d2-470b-8ec0-c6e6cb2a79bd" providerId="ADAL" clId="{5AEB2719-95A5-4ED2-9E0E-ED462BB10526}" dt="2026-03-10T20:31:55.296" v="2358" actId="1076"/>
+        <pc:picChg chg="add mod ord modCrop">
+          <ac:chgData name="Read, Zoe" userId="b08cd0fd-26d2-470b-8ec0-c6e6cb2a79bd" providerId="ADAL" clId="{5AEB2719-95A5-4ED2-9E0E-ED462BB10526}" dt="2026-03-12T20:15:13.625" v="3513" actId="1076"/>
           <ac:picMkLst>
             <pc:docMk/>
             <pc:sldMk cId="2005456116" sldId="257"/>
             <ac:picMk id="11" creationId="{0144416F-2A82-F7CC-0427-8A36932666F6}"/>
           </ac:picMkLst>
         </pc:picChg>
-        <pc:picChg chg="add del mod">
-          <ac:chgData name="Read, Zoe" userId="b08cd0fd-26d2-470b-8ec0-c6e6cb2a79bd" providerId="ADAL" clId="{5AEB2719-95A5-4ED2-9E0E-ED462BB10526}" dt="2026-03-10T20:04:32.275" v="1005" actId="478"/>
+        <pc:picChg chg="add mod">
+          <ac:chgData name="Read, Zoe" userId="b08cd0fd-26d2-470b-8ec0-c6e6cb2a79bd" providerId="ADAL" clId="{5AEB2719-95A5-4ED2-9E0E-ED462BB10526}" dt="2026-03-12T20:16:30.754" v="3531" actId="1076"/>
           <ac:picMkLst>
             <pc:docMk/>
             <pc:sldMk cId="2005456116" sldId="257"/>
-            <ac:picMk id="13" creationId="{6D65798C-DAB9-914B-7ECA-E6D17BBC9E45}"/>
-          </ac:picMkLst>
-        </pc:picChg>
-        <pc:picChg chg="add del mod modCrop">
-          <ac:chgData name="Read, Zoe" userId="b08cd0fd-26d2-470b-8ec0-c6e6cb2a79bd" providerId="ADAL" clId="{5AEB2719-95A5-4ED2-9E0E-ED462BB10526}" dt="2026-03-10T20:25:16.564" v="2080" actId="478"/>
-          <ac:picMkLst>
-            <pc:docMk/>
-            <pc:sldMk cId="2005456116" sldId="257"/>
-            <ac:picMk id="14" creationId="{D874F7CA-9ADB-8489-D018-7E0521CCE737}"/>
+            <ac:picMk id="14" creationId="{37395166-1C97-2974-4774-B9647BFFD3B0}"/>
           </ac:picMkLst>
         </pc:picChg>
         <pc:picChg chg="add mod ord modCrop">
-          <ac:chgData name="Read, Zoe" userId="b08cd0fd-26d2-470b-8ec0-c6e6cb2a79bd" providerId="ADAL" clId="{5AEB2719-95A5-4ED2-9E0E-ED462BB10526}" dt="2026-03-10T20:32:06.465" v="2361" actId="1076"/>
+          <ac:chgData name="Read, Zoe" userId="b08cd0fd-26d2-470b-8ec0-c6e6cb2a79bd" providerId="ADAL" clId="{5AEB2719-95A5-4ED2-9E0E-ED462BB10526}" dt="2026-03-12T20:16:20.411" v="3526" actId="1076"/>
           <ac:picMkLst>
             <pc:docMk/>
             <pc:sldMk cId="2005456116" sldId="257"/>
             <ac:picMk id="15" creationId="{6F1E99EB-549B-E9F4-C4C6-CCFBCE759AD8}"/>
           </ac:picMkLst>
         </pc:picChg>
-        <pc:picChg chg="mod">
-          <ac:chgData name="Read, Zoe" userId="b08cd0fd-26d2-470b-8ec0-c6e6cb2a79bd" providerId="ADAL" clId="{5AEB2719-95A5-4ED2-9E0E-ED462BB10526}" dt="2026-03-10T20:19:38.843" v="1778" actId="1076"/>
+        <pc:picChg chg="del mod">
+          <ac:chgData name="Read, Zoe" userId="b08cd0fd-26d2-470b-8ec0-c6e6cb2a79bd" providerId="ADAL" clId="{5AEB2719-95A5-4ED2-9E0E-ED462BB10526}" dt="2026-03-12T20:13:02.055" v="3365" actId="478"/>
           <ac:picMkLst>
             <pc:docMk/>
             <pc:sldMk cId="2005456116" sldId="257"/>
             <ac:picMk id="19" creationId="{6F6CCBC1-FB78-D641-2558-44EE723465AE}"/>
           </ac:picMkLst>
         </pc:picChg>
-        <pc:picChg chg="add del mod">
-          <ac:chgData name="Read, Zoe" userId="b08cd0fd-26d2-470b-8ec0-c6e6cb2a79bd" providerId="ADAL" clId="{5AEB2719-95A5-4ED2-9E0E-ED462BB10526}" dt="2026-03-10T20:26:57.158" v="2252" actId="478"/>
+        <pc:picChg chg="del">
+          <ac:chgData name="Read, Zoe" userId="b08cd0fd-26d2-470b-8ec0-c6e6cb2a79bd" providerId="ADAL" clId="{5AEB2719-95A5-4ED2-9E0E-ED462BB10526}" dt="2026-03-12T20:13:15.849" v="3367" actId="478"/>
           <ac:picMkLst>
             <pc:docMk/>
             <pc:sldMk cId="2005456116" sldId="257"/>
-            <ac:picMk id="1037" creationId="{A7DEC9FE-198D-A3EA-927A-A1CE4F4AD7CD}"/>
+            <ac:picMk id="24" creationId="{04440FAB-EE3F-FD41-C5C0-9224F3ADC6B1}"/>
           </ac:picMkLst>
         </pc:picChg>
         <pc:picChg chg="add mod modCrop">
-          <ac:chgData name="Read, Zoe" userId="b08cd0fd-26d2-470b-8ec0-c6e6cb2a79bd" providerId="ADAL" clId="{5AEB2719-95A5-4ED2-9E0E-ED462BB10526}" dt="2026-03-10T20:32:03.328" v="2360" actId="1076"/>
+          <ac:chgData name="Read, Zoe" userId="b08cd0fd-26d2-470b-8ec0-c6e6cb2a79bd" providerId="ADAL" clId="{5AEB2719-95A5-4ED2-9E0E-ED462BB10526}" dt="2026-03-12T20:16:18.962" v="3525" actId="1076"/>
           <ac:picMkLst>
             <pc:docMk/>
             <pc:sldMk cId="2005456116" sldId="257"/>
             <ac:picMk id="1042" creationId="{04363E67-54FD-37B3-65BB-A8173A952E9D}"/>
           </ac:picMkLst>
         </pc:picChg>
+        <pc:cxnChg chg="add mod ord">
+          <ac:chgData name="Read, Zoe" userId="b08cd0fd-26d2-470b-8ec0-c6e6cb2a79bd" providerId="ADAL" clId="{5AEB2719-95A5-4ED2-9E0E-ED462BB10526}" dt="2026-03-12T20:16:25.990" v="3528" actId="166"/>
+          <ac:cxnSpMkLst>
+            <pc:docMk/>
+            <pc:sldMk cId="2005456116" sldId="257"/>
+            <ac:cxnSpMk id="21" creationId="{4DACE8AF-5A3B-350F-CBBD-990A9C27B8D4}"/>
+          </ac:cxnSpMkLst>
+        </pc:cxnChg>
         <pc:cxnChg chg="mod">
-          <ac:chgData name="Read, Zoe" userId="b08cd0fd-26d2-470b-8ec0-c6e6cb2a79bd" providerId="ADAL" clId="{5AEB2719-95A5-4ED2-9E0E-ED462BB10526}" dt="2026-03-09T12:04:41.371" v="863" actId="1076"/>
+          <ac:chgData name="Read, Zoe" userId="b08cd0fd-26d2-470b-8ec0-c6e6cb2a79bd" providerId="ADAL" clId="{5AEB2719-95A5-4ED2-9E0E-ED462BB10526}" dt="2026-03-12T19:11:58.622" v="2856" actId="1035"/>
           <ac:cxnSpMkLst>
             <pc:docMk/>
             <pc:sldMk cId="2005456116" sldId="257"/>
             <ac:cxnSpMk id="1031" creationId="{00BF45BC-03E3-27BE-C768-387C6B2C806C}"/>
           </ac:cxnSpMkLst>
         </pc:cxnChg>
-        <pc:cxnChg chg="add mod">
-          <ac:chgData name="Read, Zoe" userId="b08cd0fd-26d2-470b-8ec0-c6e6cb2a79bd" providerId="ADAL" clId="{5AEB2719-95A5-4ED2-9E0E-ED462BB10526}" dt="2026-03-10T20:16:23.659" v="1351" actId="1076"/>
+        <pc:cxnChg chg="add mod ord">
+          <ac:chgData name="Read, Zoe" userId="b08cd0fd-26d2-470b-8ec0-c6e6cb2a79bd" providerId="ADAL" clId="{5AEB2719-95A5-4ED2-9E0E-ED462BB10526}" dt="2026-03-12T20:12:17.256" v="3359" actId="167"/>
           <ac:cxnSpMkLst>
             <pc:docMk/>
             <pc:sldMk cId="2005456116" sldId="257"/>
@@ -444,7 +428,7 @@
           </ac:cxnSpMkLst>
         </pc:cxnChg>
         <pc:cxnChg chg="mod">
-          <ac:chgData name="Read, Zoe" userId="b08cd0fd-26d2-470b-8ec0-c6e6cb2a79bd" providerId="ADAL" clId="{5AEB2719-95A5-4ED2-9E0E-ED462BB10526}" dt="2026-03-10T20:16:16.282" v="1348" actId="1076"/>
+          <ac:chgData name="Read, Zoe" userId="b08cd0fd-26d2-470b-8ec0-c6e6cb2a79bd" providerId="ADAL" clId="{5AEB2719-95A5-4ED2-9E0E-ED462BB10526}" dt="2026-03-12T20:10:23.305" v="3171" actId="1076"/>
           <ac:cxnSpMkLst>
             <pc:docMk/>
             <pc:sldMk cId="2005456116" sldId="257"/>
@@ -452,7 +436,7 @@
           </ac:cxnSpMkLst>
         </pc:cxnChg>
         <pc:cxnChg chg="mod">
-          <ac:chgData name="Read, Zoe" userId="b08cd0fd-26d2-470b-8ec0-c6e6cb2a79bd" providerId="ADAL" clId="{5AEB2719-95A5-4ED2-9E0E-ED462BB10526}" dt="2026-03-10T20:28:20.311" v="2319" actId="1076"/>
+          <ac:chgData name="Read, Zoe" userId="b08cd0fd-26d2-470b-8ec0-c6e6cb2a79bd" providerId="ADAL" clId="{5AEB2719-95A5-4ED2-9E0E-ED462BB10526}" dt="2026-03-12T19:12:02.854" v="2857" actId="14100"/>
           <ac:cxnSpMkLst>
             <pc:docMk/>
             <pc:sldMk cId="2005456116" sldId="257"/>
@@ -460,15 +444,15 @@
           </ac:cxnSpMkLst>
         </pc:cxnChg>
         <pc:cxnChg chg="mod">
-          <ac:chgData name="Read, Zoe" userId="b08cd0fd-26d2-470b-8ec0-c6e6cb2a79bd" providerId="ADAL" clId="{5AEB2719-95A5-4ED2-9E0E-ED462BB10526}" dt="2026-03-10T20:22:58.932" v="1857" actId="1076"/>
+          <ac:chgData name="Read, Zoe" userId="b08cd0fd-26d2-470b-8ec0-c6e6cb2a79bd" providerId="ADAL" clId="{5AEB2719-95A5-4ED2-9E0E-ED462BB10526}" dt="2026-03-12T20:16:16.234" v="3524" actId="1076"/>
           <ac:cxnSpMkLst>
             <pc:docMk/>
             <pc:sldMk cId="2005456116" sldId="257"/>
             <ac:cxnSpMk id="1044" creationId="{8463A8F4-CE87-F09A-8258-6D6979B36D80}"/>
           </ac:cxnSpMkLst>
         </pc:cxnChg>
-        <pc:cxnChg chg="add mod">
-          <ac:chgData name="Read, Zoe" userId="b08cd0fd-26d2-470b-8ec0-c6e6cb2a79bd" providerId="ADAL" clId="{5AEB2719-95A5-4ED2-9E0E-ED462BB10526}" dt="2026-03-10T20:31:25.080" v="2356" actId="693"/>
+        <pc:cxnChg chg="add mod ord">
+          <ac:chgData name="Read, Zoe" userId="b08cd0fd-26d2-470b-8ec0-c6e6cb2a79bd" providerId="ADAL" clId="{5AEB2719-95A5-4ED2-9E0E-ED462BB10526}" dt="2026-03-12T20:12:17.256" v="3359" actId="167"/>
           <ac:cxnSpMkLst>
             <pc:docMk/>
             <pc:sldMk cId="2005456116" sldId="257"/>
@@ -476,55 +460,55 @@
           </ac:cxnSpMkLst>
         </pc:cxnChg>
         <pc:cxnChg chg="add mod">
-          <ac:chgData name="Read, Zoe" userId="b08cd0fd-26d2-470b-8ec0-c6e6cb2a79bd" providerId="ADAL" clId="{5AEB2719-95A5-4ED2-9E0E-ED462BB10526}" dt="2026-03-10T20:31:43.640" v="2357" actId="693"/>
+          <ac:chgData name="Read, Zoe" userId="b08cd0fd-26d2-470b-8ec0-c6e6cb2a79bd" providerId="ADAL" clId="{5AEB2719-95A5-4ED2-9E0E-ED462BB10526}" dt="2026-03-12T20:10:36.867" v="3175" actId="1076"/>
           <ac:cxnSpMkLst>
             <pc:docMk/>
             <pc:sldMk cId="2005456116" sldId="257"/>
             <ac:cxnSpMk id="1047" creationId="{375CA06C-A251-4ED8-A38F-281C7D414E0B}"/>
           </ac:cxnSpMkLst>
         </pc:cxnChg>
-        <pc:cxnChg chg="add mod">
-          <ac:chgData name="Read, Zoe" userId="b08cd0fd-26d2-470b-8ec0-c6e6cb2a79bd" providerId="ADAL" clId="{5AEB2719-95A5-4ED2-9E0E-ED462BB10526}" dt="2026-03-10T20:31:43.640" v="2357" actId="693"/>
+        <pc:cxnChg chg="add mod ord">
+          <ac:chgData name="Read, Zoe" userId="b08cd0fd-26d2-470b-8ec0-c6e6cb2a79bd" providerId="ADAL" clId="{5AEB2719-95A5-4ED2-9E0E-ED462BB10526}" dt="2026-03-12T20:12:17.256" v="3359" actId="167"/>
           <ac:cxnSpMkLst>
             <pc:docMk/>
             <pc:sldMk cId="2005456116" sldId="257"/>
             <ac:cxnSpMk id="1050" creationId="{D3DAFDEE-D9E5-1D68-8EB9-E51F04AB1645}"/>
           </ac:cxnSpMkLst>
         </pc:cxnChg>
-        <pc:cxnChg chg="add mod">
-          <ac:chgData name="Read, Zoe" userId="b08cd0fd-26d2-470b-8ec0-c6e6cb2a79bd" providerId="ADAL" clId="{5AEB2719-95A5-4ED2-9E0E-ED462BB10526}" dt="2026-03-10T20:31:43.640" v="2357" actId="693"/>
+        <pc:cxnChg chg="add mod ord">
+          <ac:chgData name="Read, Zoe" userId="b08cd0fd-26d2-470b-8ec0-c6e6cb2a79bd" providerId="ADAL" clId="{5AEB2719-95A5-4ED2-9E0E-ED462BB10526}" dt="2026-03-12T20:12:17.256" v="3359" actId="167"/>
           <ac:cxnSpMkLst>
             <pc:docMk/>
             <pc:sldMk cId="2005456116" sldId="257"/>
             <ac:cxnSpMk id="1051" creationId="{F2AFA6AA-F2FA-7B6D-89B6-C18FBAE3FB74}"/>
           </ac:cxnSpMkLst>
         </pc:cxnChg>
-        <pc:cxnChg chg="add mod">
-          <ac:chgData name="Read, Zoe" userId="b08cd0fd-26d2-470b-8ec0-c6e6cb2a79bd" providerId="ADAL" clId="{5AEB2719-95A5-4ED2-9E0E-ED462BB10526}" dt="2026-03-10T20:31:43.640" v="2357" actId="693"/>
+        <pc:cxnChg chg="add mod ord">
+          <ac:chgData name="Read, Zoe" userId="b08cd0fd-26d2-470b-8ec0-c6e6cb2a79bd" providerId="ADAL" clId="{5AEB2719-95A5-4ED2-9E0E-ED462BB10526}" dt="2026-03-12T20:12:17.256" v="3359" actId="167"/>
           <ac:cxnSpMkLst>
             <pc:docMk/>
             <pc:sldMk cId="2005456116" sldId="257"/>
             <ac:cxnSpMk id="1052" creationId="{9F2A7656-0EEE-7013-0DB8-ADC5FDA2A8B2}"/>
           </ac:cxnSpMkLst>
         </pc:cxnChg>
-        <pc:cxnChg chg="add mod">
-          <ac:chgData name="Read, Zoe" userId="b08cd0fd-26d2-470b-8ec0-c6e6cb2a79bd" providerId="ADAL" clId="{5AEB2719-95A5-4ED2-9E0E-ED462BB10526}" dt="2026-03-10T20:31:43.640" v="2357" actId="693"/>
+        <pc:cxnChg chg="add mod ord">
+          <ac:chgData name="Read, Zoe" userId="b08cd0fd-26d2-470b-8ec0-c6e6cb2a79bd" providerId="ADAL" clId="{5AEB2719-95A5-4ED2-9E0E-ED462BB10526}" dt="2026-03-12T20:12:17.256" v="3359" actId="167"/>
           <ac:cxnSpMkLst>
             <pc:docMk/>
             <pc:sldMk cId="2005456116" sldId="257"/>
             <ac:cxnSpMk id="1053" creationId="{45B61E4A-833A-BA3F-9B21-F25237F7E669}"/>
           </ac:cxnSpMkLst>
         </pc:cxnChg>
-        <pc:cxnChg chg="add mod">
-          <ac:chgData name="Read, Zoe" userId="b08cd0fd-26d2-470b-8ec0-c6e6cb2a79bd" providerId="ADAL" clId="{5AEB2719-95A5-4ED2-9E0E-ED462BB10526}" dt="2026-03-10T20:31:43.640" v="2357" actId="693"/>
+        <pc:cxnChg chg="add mod ord">
+          <ac:chgData name="Read, Zoe" userId="b08cd0fd-26d2-470b-8ec0-c6e6cb2a79bd" providerId="ADAL" clId="{5AEB2719-95A5-4ED2-9E0E-ED462BB10526}" dt="2026-03-12T20:12:17.256" v="3359" actId="167"/>
           <ac:cxnSpMkLst>
             <pc:docMk/>
             <pc:sldMk cId="2005456116" sldId="257"/>
             <ac:cxnSpMk id="1054" creationId="{B4545213-9D78-5A7D-F0ED-7247C7E86F0A}"/>
           </ac:cxnSpMkLst>
         </pc:cxnChg>
-        <pc:cxnChg chg="add mod">
-          <ac:chgData name="Read, Zoe" userId="b08cd0fd-26d2-470b-8ec0-c6e6cb2a79bd" providerId="ADAL" clId="{5AEB2719-95A5-4ED2-9E0E-ED462BB10526}" dt="2026-03-10T20:31:43.640" v="2357" actId="693"/>
+        <pc:cxnChg chg="add mod ord">
+          <ac:chgData name="Read, Zoe" userId="b08cd0fd-26d2-470b-8ec0-c6e6cb2a79bd" providerId="ADAL" clId="{5AEB2719-95A5-4ED2-9E0E-ED462BB10526}" dt="2026-03-12T20:12:17.256" v="3359" actId="167"/>
           <ac:cxnSpMkLst>
             <pc:docMk/>
             <pc:sldMk cId="2005456116" sldId="257"/>
@@ -532,7 +516,7 @@
           </ac:cxnSpMkLst>
         </pc:cxnChg>
         <pc:cxnChg chg="add mod">
-          <ac:chgData name="Read, Zoe" userId="b08cd0fd-26d2-470b-8ec0-c6e6cb2a79bd" providerId="ADAL" clId="{5AEB2719-95A5-4ED2-9E0E-ED462BB10526}" dt="2026-03-10T20:31:43.640" v="2357" actId="693"/>
+          <ac:chgData name="Read, Zoe" userId="b08cd0fd-26d2-470b-8ec0-c6e6cb2a79bd" providerId="ADAL" clId="{5AEB2719-95A5-4ED2-9E0E-ED462BB10526}" dt="2026-03-12T19:06:52.126" v="2440" actId="1076"/>
           <ac:cxnSpMkLst>
             <pc:docMk/>
             <pc:sldMk cId="2005456116" sldId="257"/>
@@ -540,7 +524,7 @@
           </ac:cxnSpMkLst>
         </pc:cxnChg>
         <pc:cxnChg chg="add mod">
-          <ac:chgData name="Read, Zoe" userId="b08cd0fd-26d2-470b-8ec0-c6e6cb2a79bd" providerId="ADAL" clId="{5AEB2719-95A5-4ED2-9E0E-ED462BB10526}" dt="2026-03-10T20:31:43.640" v="2357" actId="693"/>
+          <ac:chgData name="Read, Zoe" userId="b08cd0fd-26d2-470b-8ec0-c6e6cb2a79bd" providerId="ADAL" clId="{5AEB2719-95A5-4ED2-9E0E-ED462BB10526}" dt="2026-03-12T19:06:52.126" v="2440" actId="1076"/>
           <ac:cxnSpMkLst>
             <pc:docMk/>
             <pc:sldMk cId="2005456116" sldId="257"/>
@@ -555,6 +539,13 @@
             <ac:cxnSpMk id="1058" creationId="{60C150C5-AE9C-3C24-36BA-5DE7D6481E18}"/>
           </ac:cxnSpMkLst>
         </pc:cxnChg>
+      </pc:sldChg>
+      <pc:sldChg chg="add del">
+        <pc:chgData name="Read, Zoe" userId="b08cd0fd-26d2-470b-8ec0-c6e6cb2a79bd" providerId="ADAL" clId="{5AEB2719-95A5-4ED2-9E0E-ED462BB10526}" dt="2026-03-12T20:18:17.564" v="3533"/>
+        <pc:sldMkLst>
+          <pc:docMk/>
+          <pc:sldMk cId="2004079467" sldId="259"/>
+        </pc:sldMkLst>
       </pc:sldChg>
     </pc:docChg>
   </pc:docChgLst>
@@ -682,7 +673,7 @@
           <a:p>
             <a:fld id="{0407BD97-90D8-3541-9414-B17D17D02539}" type="datetimeFigureOut">
               <a:rPr lang="en-US" smtClean="0"/>
-              <a:t>3/10/2026</a:t>
+              <a:t>3/12/2026</a:t>
             </a:fld>
             <a:endParaRPr lang="en-US"/>
           </a:p>
@@ -999,31 +990,44 @@
           <a:lstStyle/>
           <a:p>
             <a:r>
-              <a:rPr lang="en-US" baseline="0" dirty="0"/>
-              <a:t>• Contact Digital Duplicating (375-2969, http://</a:t>
-            </a:r>
-            <a:r>
-              <a:rPr lang="en-US" baseline="0" dirty="0" err="1"/>
-              <a:t>digitalduplicating.pnl.gov</a:t>
-            </a:r>
-            <a:r>
-              <a:rPr lang="en-US" baseline="0" dirty="0"/>
-              <a:t>) to order poster printing and finishing services for your completed poster design.</a:t>
+              <a:rPr lang="en-US" sz="1800" b="1" dirty="0"/>
+              <a:t>Who do I add to credits? </a:t>
             </a:r>
           </a:p>
           <a:p>
-            <a:r>
-              <a:rPr lang="en-US" baseline="0" dirty="0"/>
-              <a:t>• Remember to have your poster cleared for public display/distribution through the ERICA Information Release system (http://</a:t>
-            </a:r>
-            <a:r>
-              <a:rPr lang="en-US" baseline="0" dirty="0" err="1"/>
-              <a:t>erica.pnl.gov</a:t>
-            </a:r>
-            <a:r>
-              <a:rPr lang="en-US" baseline="0" dirty="0"/>
-              <a:t>).</a:t>
-            </a:r>
+            <a:endParaRPr lang="en-US" sz="1800" b="1" dirty="0"/>
+          </a:p>
+          <a:p>
+            <a:r>
+              <a:rPr lang="en-US" sz="1800" b="1" dirty="0"/>
+              <a:t>, </a:t>
+            </a:r>
+            <a:r>
+              <a:rPr lang="en-US" sz="1800" dirty="0"/>
+              <a:t>Stephanie J. Wilson, Pat Megonigal, Alice Stearns, Evan Phillips, Ben Bond-Lamberty</a:t>
+            </a:r>
+          </a:p>
+          <a:p>
+            <a:r>
+              <a:rPr lang="en-US" sz="1600" baseline="30000" dirty="0"/>
+              <a:t>1</a:t>
+            </a:r>
+            <a:r>
+              <a:rPr lang="en-US" sz="1600" dirty="0"/>
+              <a:t>Smithsonian Environmental Research Center, Maryland, USA, </a:t>
+            </a:r>
+            <a:r>
+              <a:rPr lang="en-US" sz="1600" baseline="30000" dirty="0"/>
+              <a:t>2</a:t>
+            </a:r>
+            <a:r>
+              <a:rPr lang="en-US" sz="1600" dirty="0"/>
+              <a:t>Pacific Northwest National Laboratory</a:t>
+            </a:r>
+            <a:endParaRPr lang="en-US" dirty="0"/>
+          </a:p>
+          <a:p>
+            <a:endParaRPr lang="en-US" baseline="0" dirty="0"/>
           </a:p>
         </p:txBody>
       </p:sp>
@@ -2268,10 +2272,10 @@
       </p:grpSpPr>
       <p:pic>
         <p:nvPicPr>
-          <p:cNvPr id="15" name="Picture 14" descr="A graph of different colored lines&#10;&#10;AI-generated content may be incorrect.">
+          <p:cNvPr id="11" name="Picture 10" descr="A screenshot of a graph&#10;&#10;AI-generated content may be incorrect.">
             <a:extLst>
               <a:ext uri="{FF2B5EF4-FFF2-40B4-BE49-F238E27FC236}">
-                <a16:creationId xmlns:a16="http://schemas.microsoft.com/office/drawing/2014/main" id="{6F1E99EB-549B-E9F4-C4C6-CCFBCE759AD8}"/>
+                <a16:creationId xmlns:a16="http://schemas.microsoft.com/office/drawing/2014/main" id="{0144416F-2A82-F7CC-0427-8A36932666F6}"/>
               </a:ext>
             </a:extLst>
           </p:cNvPr>
@@ -2288,6 +2292,537 @@
               </a:ext>
             </a:extLst>
           </a:blip>
+          <a:srcRect r="4104"/>
+          <a:stretch>
+            <a:fillRect/>
+          </a:stretch>
+        </p:blipFill>
+        <p:spPr>
+          <a:xfrm>
+            <a:off x="17554806" y="16902663"/>
+            <a:ext cx="16232726" cy="10156496"/>
+          </a:xfrm>
+          <a:prstGeom prst="rect">
+            <a:avLst/>
+          </a:prstGeom>
+        </p:spPr>
+      </p:pic>
+      <p:cxnSp>
+        <p:nvCxnSpPr>
+          <p:cNvPr id="1032" name="Straight Connector 1031">
+            <a:extLst>
+              <a:ext uri="{FF2B5EF4-FFF2-40B4-BE49-F238E27FC236}">
+                <a16:creationId xmlns:a16="http://schemas.microsoft.com/office/drawing/2014/main" id="{15AF56DC-5EE6-BFA8-237F-07B49EFF2D22}"/>
+              </a:ext>
+            </a:extLst>
+          </p:cNvPr>
+          <p:cNvCxnSpPr>
+            <a:cxnSpLocks/>
+          </p:cNvCxnSpPr>
+          <p:nvPr/>
+        </p:nvCxnSpPr>
+        <p:spPr>
+          <a:xfrm>
+            <a:off x="18193524" y="27475279"/>
+            <a:ext cx="15099634" cy="0"/>
+          </a:xfrm>
+          <a:prstGeom prst="line">
+            <a:avLst/>
+          </a:prstGeom>
+          <a:ln>
+            <a:solidFill>
+              <a:srgbClr val="75BFE2"/>
+            </a:solidFill>
+          </a:ln>
+        </p:spPr>
+        <p:style>
+          <a:lnRef idx="1">
+            <a:schemeClr val="accent1"/>
+          </a:lnRef>
+          <a:fillRef idx="0">
+            <a:schemeClr val="accent1"/>
+          </a:fillRef>
+          <a:effectRef idx="0">
+            <a:schemeClr val="accent1"/>
+          </a:effectRef>
+          <a:fontRef idx="minor">
+            <a:schemeClr val="tx1"/>
+          </a:fontRef>
+        </p:style>
+      </p:cxnSp>
+      <p:cxnSp>
+        <p:nvCxnSpPr>
+          <p:cNvPr id="1045" name="Straight Connector 1044">
+            <a:extLst>
+              <a:ext uri="{FF2B5EF4-FFF2-40B4-BE49-F238E27FC236}">
+                <a16:creationId xmlns:a16="http://schemas.microsoft.com/office/drawing/2014/main" id="{BB33F361-7DB9-04C2-C03A-778C0DF80E8F}"/>
+              </a:ext>
+            </a:extLst>
+          </p:cNvPr>
+          <p:cNvCxnSpPr>
+            <a:cxnSpLocks/>
+          </p:cNvCxnSpPr>
+          <p:nvPr/>
+        </p:nvCxnSpPr>
+        <p:spPr>
+          <a:xfrm flipV="1">
+            <a:off x="20334390" y="21104778"/>
+            <a:ext cx="0" cy="165469"/>
+          </a:xfrm>
+          <a:prstGeom prst="line">
+            <a:avLst/>
+          </a:prstGeom>
+          <a:ln w="19050">
+            <a:prstDash val="lgDash"/>
+          </a:ln>
+        </p:spPr>
+        <p:style>
+          <a:lnRef idx="1">
+            <a:schemeClr val="dk1"/>
+          </a:lnRef>
+          <a:fillRef idx="0">
+            <a:schemeClr val="dk1"/>
+          </a:fillRef>
+          <a:effectRef idx="0">
+            <a:schemeClr val="dk1"/>
+          </a:effectRef>
+          <a:fontRef idx="minor">
+            <a:schemeClr val="tx1"/>
+          </a:fontRef>
+        </p:style>
+      </p:cxnSp>
+      <p:cxnSp>
+        <p:nvCxnSpPr>
+          <p:cNvPr id="1047" name="Straight Connector 1046">
+            <a:extLst>
+              <a:ext uri="{FF2B5EF4-FFF2-40B4-BE49-F238E27FC236}">
+                <a16:creationId xmlns:a16="http://schemas.microsoft.com/office/drawing/2014/main" id="{375CA06C-A251-4ED8-A38F-281C7D414E0B}"/>
+              </a:ext>
+            </a:extLst>
+          </p:cNvPr>
+          <p:cNvCxnSpPr>
+            <a:cxnSpLocks/>
+          </p:cNvCxnSpPr>
+          <p:nvPr/>
+        </p:nvCxnSpPr>
+        <p:spPr>
+          <a:xfrm flipV="1">
+            <a:off x="23687190" y="21104777"/>
+            <a:ext cx="0" cy="165469"/>
+          </a:xfrm>
+          <a:prstGeom prst="line">
+            <a:avLst/>
+          </a:prstGeom>
+          <a:ln w="19050">
+            <a:prstDash val="lgDash"/>
+          </a:ln>
+        </p:spPr>
+        <p:style>
+          <a:lnRef idx="1">
+            <a:schemeClr val="dk1"/>
+          </a:lnRef>
+          <a:fillRef idx="0">
+            <a:schemeClr val="dk1"/>
+          </a:fillRef>
+          <a:effectRef idx="0">
+            <a:schemeClr val="dk1"/>
+          </a:effectRef>
+          <a:fontRef idx="minor">
+            <a:schemeClr val="tx1"/>
+          </a:fontRef>
+        </p:style>
+      </p:cxnSp>
+      <p:cxnSp>
+        <p:nvCxnSpPr>
+          <p:cNvPr id="1050" name="Straight Connector 1049">
+            <a:extLst>
+              <a:ext uri="{FF2B5EF4-FFF2-40B4-BE49-F238E27FC236}">
+                <a16:creationId xmlns:a16="http://schemas.microsoft.com/office/drawing/2014/main" id="{D3DAFDEE-D9E5-1D68-8EB9-E51F04AB1645}"/>
+              </a:ext>
+            </a:extLst>
+          </p:cNvPr>
+          <p:cNvCxnSpPr>
+            <a:cxnSpLocks/>
+          </p:cNvCxnSpPr>
+          <p:nvPr/>
+        </p:nvCxnSpPr>
+        <p:spPr>
+          <a:xfrm flipV="1">
+            <a:off x="27725790" y="21104777"/>
+            <a:ext cx="0" cy="165469"/>
+          </a:xfrm>
+          <a:prstGeom prst="line">
+            <a:avLst/>
+          </a:prstGeom>
+          <a:ln w="19050">
+            <a:prstDash val="lgDash"/>
+          </a:ln>
+        </p:spPr>
+        <p:style>
+          <a:lnRef idx="1">
+            <a:schemeClr val="dk1"/>
+          </a:lnRef>
+          <a:fillRef idx="0">
+            <a:schemeClr val="dk1"/>
+          </a:fillRef>
+          <a:effectRef idx="0">
+            <a:schemeClr val="dk1"/>
+          </a:effectRef>
+          <a:fontRef idx="minor">
+            <a:schemeClr val="tx1"/>
+          </a:fontRef>
+        </p:style>
+      </p:cxnSp>
+      <p:cxnSp>
+        <p:nvCxnSpPr>
+          <p:cNvPr id="1051" name="Straight Connector 1050">
+            <a:extLst>
+              <a:ext uri="{FF2B5EF4-FFF2-40B4-BE49-F238E27FC236}">
+                <a16:creationId xmlns:a16="http://schemas.microsoft.com/office/drawing/2014/main" id="{F2AFA6AA-F2FA-7B6D-89B6-C18FBAE3FB74}"/>
+              </a:ext>
+            </a:extLst>
+          </p:cNvPr>
+          <p:cNvCxnSpPr>
+            <a:cxnSpLocks/>
+          </p:cNvCxnSpPr>
+          <p:nvPr/>
+        </p:nvCxnSpPr>
+        <p:spPr>
+          <a:xfrm flipV="1">
+            <a:off x="30545190" y="21104777"/>
+            <a:ext cx="0" cy="165469"/>
+          </a:xfrm>
+          <a:prstGeom prst="line">
+            <a:avLst/>
+          </a:prstGeom>
+          <a:ln w="19050">
+            <a:prstDash val="lgDash"/>
+          </a:ln>
+        </p:spPr>
+        <p:style>
+          <a:lnRef idx="1">
+            <a:schemeClr val="dk1"/>
+          </a:lnRef>
+          <a:fillRef idx="0">
+            <a:schemeClr val="dk1"/>
+          </a:fillRef>
+          <a:effectRef idx="0">
+            <a:schemeClr val="dk1"/>
+          </a:effectRef>
+          <a:fontRef idx="minor">
+            <a:schemeClr val="tx1"/>
+          </a:fontRef>
+        </p:style>
+      </p:cxnSp>
+      <p:cxnSp>
+        <p:nvCxnSpPr>
+          <p:cNvPr id="1052" name="Straight Connector 1051">
+            <a:extLst>
+              <a:ext uri="{FF2B5EF4-FFF2-40B4-BE49-F238E27FC236}">
+                <a16:creationId xmlns:a16="http://schemas.microsoft.com/office/drawing/2014/main" id="{9F2A7656-0EEE-7013-0DB8-ADC5FDA2A8B2}"/>
+              </a:ext>
+            </a:extLst>
+          </p:cNvPr>
+          <p:cNvCxnSpPr>
+            <a:cxnSpLocks/>
+          </p:cNvCxnSpPr>
+          <p:nvPr/>
+        </p:nvCxnSpPr>
+        <p:spPr>
+          <a:xfrm flipV="1">
+            <a:off x="32221590" y="21104777"/>
+            <a:ext cx="0" cy="165469"/>
+          </a:xfrm>
+          <a:prstGeom prst="line">
+            <a:avLst/>
+          </a:prstGeom>
+          <a:ln w="19050">
+            <a:prstDash val="lgDash"/>
+          </a:ln>
+        </p:spPr>
+        <p:style>
+          <a:lnRef idx="1">
+            <a:schemeClr val="dk1"/>
+          </a:lnRef>
+          <a:fillRef idx="0">
+            <a:schemeClr val="dk1"/>
+          </a:fillRef>
+          <a:effectRef idx="0">
+            <a:schemeClr val="dk1"/>
+          </a:effectRef>
+          <a:fontRef idx="minor">
+            <a:schemeClr val="tx1"/>
+          </a:fontRef>
+        </p:style>
+      </p:cxnSp>
+      <p:cxnSp>
+        <p:nvCxnSpPr>
+          <p:cNvPr id="1053" name="Straight Connector 1052">
+            <a:extLst>
+              <a:ext uri="{FF2B5EF4-FFF2-40B4-BE49-F238E27FC236}">
+                <a16:creationId xmlns:a16="http://schemas.microsoft.com/office/drawing/2014/main" id="{45B61E4A-833A-BA3F-9B21-F25237F7E669}"/>
+              </a:ext>
+            </a:extLst>
+          </p:cNvPr>
+          <p:cNvCxnSpPr>
+            <a:cxnSpLocks/>
+          </p:cNvCxnSpPr>
+          <p:nvPr/>
+        </p:nvCxnSpPr>
+        <p:spPr>
+          <a:xfrm flipV="1">
+            <a:off x="19572390" y="26086816"/>
+            <a:ext cx="0" cy="165469"/>
+          </a:xfrm>
+          <a:prstGeom prst="line">
+            <a:avLst/>
+          </a:prstGeom>
+          <a:ln w="19050">
+            <a:prstDash val="lgDash"/>
+          </a:ln>
+        </p:spPr>
+        <p:style>
+          <a:lnRef idx="1">
+            <a:schemeClr val="dk1"/>
+          </a:lnRef>
+          <a:fillRef idx="0">
+            <a:schemeClr val="dk1"/>
+          </a:fillRef>
+          <a:effectRef idx="0">
+            <a:schemeClr val="dk1"/>
+          </a:effectRef>
+          <a:fontRef idx="minor">
+            <a:schemeClr val="tx1"/>
+          </a:fontRef>
+        </p:style>
+      </p:cxnSp>
+      <p:cxnSp>
+        <p:nvCxnSpPr>
+          <p:cNvPr id="1054" name="Straight Connector 1053">
+            <a:extLst>
+              <a:ext uri="{FF2B5EF4-FFF2-40B4-BE49-F238E27FC236}">
+                <a16:creationId xmlns:a16="http://schemas.microsoft.com/office/drawing/2014/main" id="{B4545213-9D78-5A7D-F0ED-7247C7E86F0A}"/>
+              </a:ext>
+            </a:extLst>
+          </p:cNvPr>
+          <p:cNvCxnSpPr>
+            <a:cxnSpLocks/>
+          </p:cNvCxnSpPr>
+          <p:nvPr/>
+        </p:nvCxnSpPr>
+        <p:spPr>
+          <a:xfrm flipV="1">
+            <a:off x="22467990" y="26086816"/>
+            <a:ext cx="0" cy="165469"/>
+          </a:xfrm>
+          <a:prstGeom prst="line">
+            <a:avLst/>
+          </a:prstGeom>
+          <a:ln w="19050">
+            <a:prstDash val="lgDash"/>
+          </a:ln>
+        </p:spPr>
+        <p:style>
+          <a:lnRef idx="1">
+            <a:schemeClr val="dk1"/>
+          </a:lnRef>
+          <a:fillRef idx="0">
+            <a:schemeClr val="dk1"/>
+          </a:fillRef>
+          <a:effectRef idx="0">
+            <a:schemeClr val="dk1"/>
+          </a:effectRef>
+          <a:fontRef idx="minor">
+            <a:schemeClr val="tx1"/>
+          </a:fontRef>
+        </p:style>
+      </p:cxnSp>
+      <p:cxnSp>
+        <p:nvCxnSpPr>
+          <p:cNvPr id="1055" name="Straight Connector 1054">
+            <a:extLst>
+              <a:ext uri="{FF2B5EF4-FFF2-40B4-BE49-F238E27FC236}">
+                <a16:creationId xmlns:a16="http://schemas.microsoft.com/office/drawing/2014/main" id="{EAF13472-2A54-A942-9989-189633D8FC45}"/>
+              </a:ext>
+            </a:extLst>
+          </p:cNvPr>
+          <p:cNvCxnSpPr>
+            <a:cxnSpLocks/>
+          </p:cNvCxnSpPr>
+          <p:nvPr/>
+        </p:nvCxnSpPr>
+        <p:spPr>
+          <a:xfrm flipV="1">
+            <a:off x="23839590" y="26086816"/>
+            <a:ext cx="0" cy="165469"/>
+          </a:xfrm>
+          <a:prstGeom prst="line">
+            <a:avLst/>
+          </a:prstGeom>
+          <a:ln w="19050">
+            <a:prstDash val="lgDash"/>
+          </a:ln>
+        </p:spPr>
+        <p:style>
+          <a:lnRef idx="1">
+            <a:schemeClr val="dk1"/>
+          </a:lnRef>
+          <a:fillRef idx="0">
+            <a:schemeClr val="dk1"/>
+          </a:fillRef>
+          <a:effectRef idx="0">
+            <a:schemeClr val="dk1"/>
+          </a:effectRef>
+          <a:fontRef idx="minor">
+            <a:schemeClr val="tx1"/>
+          </a:fontRef>
+        </p:style>
+      </p:cxnSp>
+      <p:cxnSp>
+        <p:nvCxnSpPr>
+          <p:cNvPr id="1056" name="Straight Connector 1055">
+            <a:extLst>
+              <a:ext uri="{FF2B5EF4-FFF2-40B4-BE49-F238E27FC236}">
+                <a16:creationId xmlns:a16="http://schemas.microsoft.com/office/drawing/2014/main" id="{97023478-EBF1-C0B2-4640-43B6062C44A4}"/>
+              </a:ext>
+            </a:extLst>
+          </p:cNvPr>
+          <p:cNvCxnSpPr>
+            <a:cxnSpLocks/>
+          </p:cNvCxnSpPr>
+          <p:nvPr/>
+        </p:nvCxnSpPr>
+        <p:spPr>
+          <a:xfrm flipV="1">
+            <a:off x="27878190" y="26007090"/>
+            <a:ext cx="0" cy="165469"/>
+          </a:xfrm>
+          <a:prstGeom prst="line">
+            <a:avLst/>
+          </a:prstGeom>
+          <a:ln w="19050">
+            <a:prstDash val="lgDash"/>
+          </a:ln>
+        </p:spPr>
+        <p:style>
+          <a:lnRef idx="1">
+            <a:schemeClr val="dk1"/>
+          </a:lnRef>
+          <a:fillRef idx="0">
+            <a:schemeClr val="dk1"/>
+          </a:fillRef>
+          <a:effectRef idx="0">
+            <a:schemeClr val="dk1"/>
+          </a:effectRef>
+          <a:fontRef idx="minor">
+            <a:schemeClr val="tx1"/>
+          </a:fontRef>
+        </p:style>
+      </p:cxnSp>
+      <p:cxnSp>
+        <p:nvCxnSpPr>
+          <p:cNvPr id="1057" name="Straight Connector 1056">
+            <a:extLst>
+              <a:ext uri="{FF2B5EF4-FFF2-40B4-BE49-F238E27FC236}">
+                <a16:creationId xmlns:a16="http://schemas.microsoft.com/office/drawing/2014/main" id="{EABAA8CD-3573-D737-5C52-07AF46DD77DB}"/>
+              </a:ext>
+            </a:extLst>
+          </p:cNvPr>
+          <p:cNvCxnSpPr>
+            <a:cxnSpLocks/>
+          </p:cNvCxnSpPr>
+          <p:nvPr/>
+        </p:nvCxnSpPr>
+        <p:spPr>
+          <a:xfrm flipV="1">
+            <a:off x="30697590" y="26007090"/>
+            <a:ext cx="0" cy="165469"/>
+          </a:xfrm>
+          <a:prstGeom prst="line">
+            <a:avLst/>
+          </a:prstGeom>
+          <a:ln w="19050">
+            <a:prstDash val="lgDash"/>
+          </a:ln>
+        </p:spPr>
+        <p:style>
+          <a:lnRef idx="1">
+            <a:schemeClr val="dk1"/>
+          </a:lnRef>
+          <a:fillRef idx="0">
+            <a:schemeClr val="dk1"/>
+          </a:fillRef>
+          <a:effectRef idx="0">
+            <a:schemeClr val="dk1"/>
+          </a:effectRef>
+          <a:fontRef idx="minor">
+            <a:schemeClr val="tx1"/>
+          </a:fontRef>
+        </p:style>
+      </p:cxnSp>
+      <p:cxnSp>
+        <p:nvCxnSpPr>
+          <p:cNvPr id="1058" name="Straight Connector 1057">
+            <a:extLst>
+              <a:ext uri="{FF2B5EF4-FFF2-40B4-BE49-F238E27FC236}">
+                <a16:creationId xmlns:a16="http://schemas.microsoft.com/office/drawing/2014/main" id="{60C150C5-AE9C-3C24-36BA-5DE7D6481E18}"/>
+              </a:ext>
+            </a:extLst>
+          </p:cNvPr>
+          <p:cNvCxnSpPr>
+            <a:cxnSpLocks/>
+          </p:cNvCxnSpPr>
+          <p:nvPr/>
+        </p:nvCxnSpPr>
+        <p:spPr>
+          <a:xfrm flipV="1">
+            <a:off x="32145390" y="26007090"/>
+            <a:ext cx="0" cy="165469"/>
+          </a:xfrm>
+          <a:prstGeom prst="line">
+            <a:avLst/>
+          </a:prstGeom>
+          <a:ln w="19050">
+            <a:prstDash val="lgDash"/>
+          </a:ln>
+        </p:spPr>
+        <p:style>
+          <a:lnRef idx="1">
+            <a:schemeClr val="dk1"/>
+          </a:lnRef>
+          <a:fillRef idx="0">
+            <a:schemeClr val="dk1"/>
+          </a:fillRef>
+          <a:effectRef idx="0">
+            <a:schemeClr val="dk1"/>
+          </a:effectRef>
+          <a:fontRef idx="minor">
+            <a:schemeClr val="tx1"/>
+          </a:fontRef>
+        </p:style>
+      </p:cxnSp>
+      <p:pic>
+        <p:nvPicPr>
+          <p:cNvPr id="15" name="Picture 14" descr="A graph of different colored lines&#10;&#10;AI-generated content may be incorrect.">
+            <a:extLst>
+              <a:ext uri="{FF2B5EF4-FFF2-40B4-BE49-F238E27FC236}">
+                <a16:creationId xmlns:a16="http://schemas.microsoft.com/office/drawing/2014/main" id="{6F1E99EB-549B-E9F4-C4C6-CCFBCE759AD8}"/>
+              </a:ext>
+            </a:extLst>
+          </p:cNvPr>
+          <p:cNvPicPr>
+            <a:picLocks noChangeAspect="1"/>
+          </p:cNvPicPr>
+          <p:nvPr/>
+        </p:nvPicPr>
+        <p:blipFill>
+          <a:blip r:embed="rId5">
+            <a:extLst>
+              <a:ext uri="{28A0092B-C50C-407E-A947-70E740481C1C}">
+                <a14:useLocalDpi xmlns:a14="http://schemas.microsoft.com/office/drawing/2010/main" val="0"/>
+              </a:ext>
+            </a:extLst>
+          </a:blip>
           <a:srcRect l="88306" t="32174" b="33648"/>
           <a:stretch>
             <a:fillRect/>
@@ -2295,7 +2830,7 @@
         </p:blipFill>
         <p:spPr>
           <a:xfrm>
-            <a:off x="14754274" y="24592487"/>
+            <a:off x="14585669" y="19739617"/>
             <a:ext cx="2452944" cy="2389927"/>
           </a:xfrm>
           <a:prstGeom prst="rect">
@@ -2319,7 +2854,12 @@
             <p:ph type="title"/>
           </p:nvPr>
         </p:nvSpPr>
-        <p:spPr/>
+        <p:spPr>
+          <a:xfrm>
+            <a:off x="837036" y="978053"/>
+            <a:ext cx="26832555" cy="2580299"/>
+          </a:xfrm>
+        </p:spPr>
         <p:txBody>
           <a:bodyPr>
             <a:normAutofit/>
@@ -2328,7 +2868,7 @@
           <a:p>
             <a:r>
               <a:rPr lang="en-US" dirty="0"/>
-              <a:t>Porewater across time and depth trends…</a:t>
+              <a:t>Porewater sulfate varies spatially and temporally across the coastal terrestrial-aquatic interface</a:t>
             </a:r>
           </a:p>
         </p:txBody>
@@ -2351,8 +2891,8 @@
         </p:nvSpPr>
         <p:spPr>
           <a:xfrm>
-            <a:off x="1045635" y="4098632"/>
-            <a:ext cx="31415565" cy="1969364"/>
+            <a:off x="897042" y="3488618"/>
+            <a:ext cx="31415565" cy="1076230"/>
           </a:xfrm>
         </p:spPr>
         <p:txBody>
@@ -2365,201 +2905,9 @@
             </a:r>
             <a:r>
               <a:rPr lang="en-US" sz="3600" dirty="0"/>
-              <a:t>Stephanie J. Wilson, Pat Megonigal, Alice Stearns, Evan Phillips, Ben Bond-Lamberty</a:t>
-            </a:r>
-          </a:p>
-          <a:p>
-            <a:r>
-              <a:rPr lang="en-US" sz="3200" baseline="30000" dirty="0"/>
-              <a:t>1</a:t>
-            </a:r>
-            <a:r>
-              <a:rPr lang="en-US" sz="3200" dirty="0"/>
-              <a:t>Smithsonian Environmental Research Center, Maryland, USA, </a:t>
-            </a:r>
-            <a:r>
-              <a:rPr lang="en-US" sz="3200" baseline="30000" dirty="0"/>
-              <a:t>2</a:t>
-            </a:r>
-            <a:r>
-              <a:rPr lang="en-US" sz="3200" dirty="0"/>
-              <a:t>Pacific Northwest National Laboratory</a:t>
+              <a:t>Smithsonian Environmental Research Center, Maryland, USA</a:t>
             </a:r>
             <a:endParaRPr lang="en-US" dirty="0"/>
-          </a:p>
-        </p:txBody>
-      </p:sp>
-      <p:sp>
-        <p:nvSpPr>
-          <p:cNvPr id="8" name="Text Placeholder 2">
-            <a:extLst>
-              <a:ext uri="{FF2B5EF4-FFF2-40B4-BE49-F238E27FC236}">
-                <a16:creationId xmlns:a16="http://schemas.microsoft.com/office/drawing/2014/main" id="{C27ACF02-AE38-EED1-52AD-AE57386B0269}"/>
-              </a:ext>
-            </a:extLst>
-          </p:cNvPr>
-          <p:cNvSpPr txBox="1">
-            <a:spLocks/>
-          </p:cNvSpPr>
-          <p:nvPr/>
-        </p:nvSpPr>
-        <p:spPr>
-          <a:xfrm>
-            <a:off x="32122855" y="1292045"/>
-            <a:ext cx="2624345" cy="1025955"/>
-          </a:xfrm>
-          <a:prstGeom prst="rect">
-            <a:avLst/>
-          </a:prstGeom>
-        </p:spPr>
-        <p:txBody>
-          <a:bodyPr/>
-          <a:lstStyle>
-            <a:lvl1pPr marL="0" indent="0" algn="l" defTabSz="3309339" rtl="0" eaLnBrk="1" latinLnBrk="0" hangingPunct="1">
-              <a:spcBef>
-                <a:spcPct val="20000"/>
-              </a:spcBef>
-              <a:buFont typeface="Arial" pitchFamily="34" charset="0"/>
-              <a:buNone/>
-              <a:defRPr sz="4053" kern="1200">
-                <a:solidFill>
-                  <a:schemeClr val="tx1">
-                    <a:lumMod val="65000"/>
-                    <a:lumOff val="35000"/>
-                  </a:schemeClr>
-                </a:solidFill>
-                <a:latin typeface="Arial" panose="020B0604020202020204" pitchFamily="34" charset="0"/>
-                <a:ea typeface="+mn-ea"/>
-                <a:cs typeface="Arial" panose="020B0604020202020204" pitchFamily="34" charset="0"/>
-              </a:defRPr>
-            </a:lvl1pPr>
-            <a:lvl2pPr marL="2688837" indent="-1034168" algn="l" defTabSz="3309339" rtl="0" eaLnBrk="1" latinLnBrk="0" hangingPunct="1">
-              <a:spcBef>
-                <a:spcPct val="20000"/>
-              </a:spcBef>
-              <a:buFont typeface="Arial" pitchFamily="34" charset="0"/>
-              <a:buChar char="–"/>
-              <a:defRPr sz="10134" kern="1200">
-                <a:solidFill>
-                  <a:schemeClr val="tx1"/>
-                </a:solidFill>
-                <a:latin typeface="+mn-lt"/>
-                <a:ea typeface="+mn-ea"/>
-                <a:cs typeface="+mn-cs"/>
-              </a:defRPr>
-            </a:lvl2pPr>
-            <a:lvl3pPr marL="4136674" indent="-827335" algn="l" defTabSz="3309339" rtl="0" eaLnBrk="1" latinLnBrk="0" hangingPunct="1">
-              <a:spcBef>
-                <a:spcPct val="20000"/>
-              </a:spcBef>
-              <a:buFont typeface="Arial" pitchFamily="34" charset="0"/>
-              <a:buChar char="•"/>
-              <a:defRPr sz="8655" kern="1200">
-                <a:solidFill>
-                  <a:schemeClr val="tx1"/>
-                </a:solidFill>
-                <a:latin typeface="+mn-lt"/>
-                <a:ea typeface="+mn-ea"/>
-                <a:cs typeface="+mn-cs"/>
-              </a:defRPr>
-            </a:lvl3pPr>
-            <a:lvl4pPr marL="5791341" indent="-827335" algn="l" defTabSz="3309339" rtl="0" eaLnBrk="1" latinLnBrk="0" hangingPunct="1">
-              <a:spcBef>
-                <a:spcPct val="20000"/>
-              </a:spcBef>
-              <a:buFont typeface="Arial" pitchFamily="34" charset="0"/>
-              <a:buChar char="–"/>
-              <a:defRPr sz="7389" kern="1200">
-                <a:solidFill>
-                  <a:schemeClr val="tx1"/>
-                </a:solidFill>
-                <a:latin typeface="+mn-lt"/>
-                <a:ea typeface="+mn-ea"/>
-                <a:cs typeface="+mn-cs"/>
-              </a:defRPr>
-            </a:lvl4pPr>
-            <a:lvl5pPr marL="7446012" indent="-827335" algn="l" defTabSz="3309339" rtl="0" eaLnBrk="1" latinLnBrk="0" hangingPunct="1">
-              <a:spcBef>
-                <a:spcPct val="20000"/>
-              </a:spcBef>
-              <a:buFont typeface="Arial" pitchFamily="34" charset="0"/>
-              <a:buChar char="»"/>
-              <a:defRPr sz="7389" kern="1200">
-                <a:solidFill>
-                  <a:schemeClr val="tx1"/>
-                </a:solidFill>
-                <a:latin typeface="+mn-lt"/>
-                <a:ea typeface="+mn-ea"/>
-                <a:cs typeface="+mn-cs"/>
-              </a:defRPr>
-            </a:lvl5pPr>
-            <a:lvl6pPr marL="9100680" indent="-827335" algn="l" defTabSz="3309339" rtl="0" eaLnBrk="1" latinLnBrk="0" hangingPunct="1">
-              <a:spcBef>
-                <a:spcPct val="20000"/>
-              </a:spcBef>
-              <a:buFont typeface="Arial" pitchFamily="34" charset="0"/>
-              <a:buChar char="•"/>
-              <a:defRPr sz="7389" kern="1200">
-                <a:solidFill>
-                  <a:schemeClr val="tx1"/>
-                </a:solidFill>
-                <a:latin typeface="+mn-lt"/>
-                <a:ea typeface="+mn-ea"/>
-                <a:cs typeface="+mn-cs"/>
-              </a:defRPr>
-            </a:lvl6pPr>
-            <a:lvl7pPr marL="10755348" indent="-827335" algn="l" defTabSz="3309339" rtl="0" eaLnBrk="1" latinLnBrk="0" hangingPunct="1">
-              <a:spcBef>
-                <a:spcPct val="20000"/>
-              </a:spcBef>
-              <a:buFont typeface="Arial" pitchFamily="34" charset="0"/>
-              <a:buChar char="•"/>
-              <a:defRPr sz="7389" kern="1200">
-                <a:solidFill>
-                  <a:schemeClr val="tx1"/>
-                </a:solidFill>
-                <a:latin typeface="+mn-lt"/>
-                <a:ea typeface="+mn-ea"/>
-                <a:cs typeface="+mn-cs"/>
-              </a:defRPr>
-            </a:lvl7pPr>
-            <a:lvl8pPr marL="12410021" indent="-827335" algn="l" defTabSz="3309339" rtl="0" eaLnBrk="1" latinLnBrk="0" hangingPunct="1">
-              <a:spcBef>
-                <a:spcPct val="20000"/>
-              </a:spcBef>
-              <a:buFont typeface="Arial" pitchFamily="34" charset="0"/>
-              <a:buChar char="•"/>
-              <a:defRPr sz="7389" kern="1200">
-                <a:solidFill>
-                  <a:schemeClr val="tx1"/>
-                </a:solidFill>
-                <a:latin typeface="+mn-lt"/>
-                <a:ea typeface="+mn-ea"/>
-                <a:cs typeface="+mn-cs"/>
-              </a:defRPr>
-            </a:lvl8pPr>
-            <a:lvl9pPr marL="14064688" indent="-827335" algn="l" defTabSz="3309339" rtl="0" eaLnBrk="1" latinLnBrk="0" hangingPunct="1">
-              <a:spcBef>
-                <a:spcPct val="20000"/>
-              </a:spcBef>
-              <a:buFont typeface="Arial" pitchFamily="34" charset="0"/>
-              <a:buChar char="•"/>
-              <a:defRPr sz="7389" kern="1200">
-                <a:solidFill>
-                  <a:schemeClr val="tx1"/>
-                </a:solidFill>
-                <a:latin typeface="+mn-lt"/>
-                <a:ea typeface="+mn-ea"/>
-                <a:cs typeface="+mn-cs"/>
-              </a:defRPr>
-            </a:lvl9pPr>
-          </a:lstStyle>
-          <a:p>
-            <a:pPr algn="ctr"/>
-            <a:r>
-              <a:rPr lang="en-US" sz="4800" b="1" dirty="0"/>
-              <a:t>0668 </a:t>
-            </a:r>
           </a:p>
         </p:txBody>
       </p:sp>
@@ -2579,8 +2927,8 @@
         </p:nvSpPr>
         <p:spPr>
           <a:xfrm>
-            <a:off x="1197281" y="6132520"/>
-            <a:ext cx="4521917" cy="8155030"/>
+            <a:off x="778417" y="4668837"/>
+            <a:ext cx="16381197" cy="2712495"/>
           </a:xfrm>
           <a:prstGeom prst="rect">
             <a:avLst/>
@@ -2745,21 +3093,36 @@
               <a:buChar char="•"/>
             </a:pPr>
             <a:r>
-              <a:rPr lang="en-US" sz="3200" dirty="0">
+              <a:rPr lang="en-US" sz="2800" dirty="0"/>
+              <a:t>We monitor transects including upland coastal forest, forest transitioning to wetland, and wetlands </a:t>
+            </a:r>
+            <a:r>
+              <a:rPr lang="en-US" sz="2800" dirty="0">
                 <a:latin typeface="Arial" panose="020B0604020202020204" pitchFamily="34" charset="0"/>
                 <a:cs typeface="Arial" panose="020B0604020202020204" pitchFamily="34" charset="0"/>
               </a:rPr>
-              <a:t>Study sites: Four coastal wetlands in the Chesapeake Bay Region that are oligohaline, mesohaline, </a:t>
-            </a:r>
-            <a:r>
-              <a:rPr lang="en-US" sz="3200" dirty="0" err="1">
+              <a:t>in the Chesapeake Bay Region </a:t>
+            </a:r>
+            <a:r>
+              <a:rPr lang="en-US" sz="2800" dirty="0"/>
+              <a:t>at four sites </a:t>
+            </a:r>
+            <a:r>
+              <a:rPr lang="en-US" sz="2800" dirty="0">
+                <a:latin typeface="Arial" panose="020B0604020202020204" pitchFamily="34" charset="0"/>
+                <a:cs typeface="Arial" panose="020B0604020202020204" pitchFamily="34" charset="0"/>
+              </a:rPr>
+              <a:t>that are oligohaline, mesohaline, and </a:t>
+            </a:r>
+            <a:r>
+              <a:rPr lang="en-US" sz="2800" dirty="0" err="1">
                 <a:latin typeface="Arial" panose="020B0604020202020204" pitchFamily="34" charset="0"/>
                 <a:cs typeface="Arial" panose="020B0604020202020204" pitchFamily="34" charset="0"/>
               </a:rPr>
               <a:t>polyhaline</a:t>
             </a:r>
             <a:r>
-              <a:rPr lang="en-US" sz="3200" dirty="0">
+              <a:rPr lang="en-US" sz="2800" dirty="0">
                 <a:latin typeface="Arial" panose="020B0604020202020204" pitchFamily="34" charset="0"/>
                 <a:cs typeface="Arial" panose="020B0604020202020204" pitchFamily="34" charset="0"/>
               </a:rPr>
@@ -2772,7 +3135,7 @@
               <a:buChar char="•"/>
             </a:pPr>
             <a:r>
-              <a:rPr lang="en-US" sz="3200" dirty="0">
+              <a:rPr lang="en-US" sz="2800" dirty="0">
                 <a:latin typeface="Arial" panose="020B0604020202020204" pitchFamily="34" charset="0"/>
                 <a:cs typeface="Arial" panose="020B0604020202020204" pitchFamily="34" charset="0"/>
               </a:rPr>
@@ -2785,62 +3148,62 @@
               <a:buChar char="•"/>
             </a:pPr>
             <a:r>
-              <a:rPr lang="en-US" sz="3200" dirty="0">
+              <a:rPr lang="en-US" sz="2800" dirty="0">
                 <a:latin typeface="Arial" panose="020B0604020202020204" pitchFamily="34" charset="0"/>
                 <a:cs typeface="Arial" panose="020B0604020202020204" pitchFamily="34" charset="0"/>
               </a:rPr>
               <a:t>Analyzed for DIC, DOC, Total Alkalinity, CDOM, H</a:t>
             </a:r>
             <a:r>
-              <a:rPr lang="en-US" sz="3200" baseline="-25000" dirty="0">
+              <a:rPr lang="en-US" sz="2800" baseline="-25000" dirty="0">
                 <a:latin typeface="Arial" panose="020B0604020202020204" pitchFamily="34" charset="0"/>
                 <a:cs typeface="Arial" panose="020B0604020202020204" pitchFamily="34" charset="0"/>
               </a:rPr>
               <a:t>2</a:t>
             </a:r>
             <a:r>
-              <a:rPr lang="en-US" sz="3200" dirty="0">
+              <a:rPr lang="en-US" sz="2800" dirty="0">
                 <a:latin typeface="Arial" panose="020B0604020202020204" pitchFamily="34" charset="0"/>
                 <a:cs typeface="Arial" panose="020B0604020202020204" pitchFamily="34" charset="0"/>
               </a:rPr>
               <a:t>S, Cl</a:t>
             </a:r>
             <a:r>
-              <a:rPr lang="en-US" sz="3200" baseline="30000" dirty="0">
+              <a:rPr lang="en-US" sz="2800" baseline="30000" dirty="0">
                 <a:latin typeface="Arial" panose="020B0604020202020204" pitchFamily="34" charset="0"/>
                 <a:cs typeface="Arial" panose="020B0604020202020204" pitchFamily="34" charset="0"/>
               </a:rPr>
               <a:t>-</a:t>
             </a:r>
             <a:r>
-              <a:rPr lang="en-US" sz="3200" dirty="0">
+              <a:rPr lang="en-US" sz="2800" dirty="0">
                 <a:latin typeface="Arial" panose="020B0604020202020204" pitchFamily="34" charset="0"/>
                 <a:cs typeface="Arial" panose="020B0604020202020204" pitchFamily="34" charset="0"/>
               </a:rPr>
               <a:t>, Nutrients, and </a:t>
             </a:r>
             <a:r>
-              <a:rPr lang="en-US" sz="3200" b="1" dirty="0">
+              <a:rPr lang="en-US" sz="2800" b="1" dirty="0">
                 <a:latin typeface="Arial" panose="020B0604020202020204" pitchFamily="34" charset="0"/>
                 <a:cs typeface="Arial" panose="020B0604020202020204" pitchFamily="34" charset="0"/>
               </a:rPr>
               <a:t>SO</a:t>
             </a:r>
             <a:r>
-              <a:rPr lang="en-US" sz="3200" b="1" baseline="-25000" dirty="0">
+              <a:rPr lang="en-US" sz="2800" b="1" baseline="-25000" dirty="0">
                 <a:latin typeface="Arial" panose="020B0604020202020204" pitchFamily="34" charset="0"/>
                 <a:cs typeface="Arial" panose="020B0604020202020204" pitchFamily="34" charset="0"/>
               </a:rPr>
               <a:t>4</a:t>
             </a:r>
             <a:r>
-              <a:rPr lang="en-US" sz="3200" b="1" baseline="30000" dirty="0">
+              <a:rPr lang="en-US" sz="2800" b="1" baseline="30000" dirty="0">
                 <a:latin typeface="Arial" panose="020B0604020202020204" pitchFamily="34" charset="0"/>
                 <a:cs typeface="Arial" panose="020B0604020202020204" pitchFamily="34" charset="0"/>
               </a:rPr>
               <a:t>2-</a:t>
             </a:r>
-            <a:endParaRPr lang="en-US" sz="3200" dirty="0">
+            <a:endParaRPr lang="en-US" sz="2800" dirty="0">
               <a:latin typeface="Arial" panose="020B0604020202020204" pitchFamily="34" charset="0"/>
               <a:cs typeface="Arial" panose="020B0604020202020204" pitchFamily="34" charset="0"/>
             </a:endParaRPr>
@@ -2864,7 +3227,7 @@
         </p:nvCxnSpPr>
         <p:spPr>
           <a:xfrm>
-            <a:off x="685800" y="5577681"/>
+            <a:off x="685800" y="4605517"/>
             <a:ext cx="33375600" cy="0"/>
           </a:xfrm>
           <a:prstGeom prst="line">
@@ -2907,7 +3270,7 @@
         </p:nvCxnSpPr>
         <p:spPr>
           <a:xfrm>
-            <a:off x="18287087" y="15964384"/>
+            <a:off x="18199250" y="14540452"/>
             <a:ext cx="15862150" cy="0"/>
           </a:xfrm>
           <a:prstGeom prst="line">
@@ -2943,13 +3306,15 @@
               </a:ext>
             </a:extLst>
           </p:cNvPr>
-          <p:cNvCxnSpPr/>
+          <p:cNvCxnSpPr>
+            <a:cxnSpLocks/>
+          </p:cNvCxnSpPr>
           <p:nvPr/>
         </p:nvCxnSpPr>
         <p:spPr>
           <a:xfrm>
-            <a:off x="17185756" y="6067996"/>
-            <a:ext cx="0" cy="24460200"/>
+            <a:off x="17373600" y="4879335"/>
+            <a:ext cx="0" cy="26641242"/>
           </a:xfrm>
           <a:prstGeom prst="line">
             <a:avLst/>
@@ -2991,7 +3356,7 @@
         </p:nvCxnSpPr>
         <p:spPr>
           <a:xfrm>
-            <a:off x="1323606" y="18578844"/>
+            <a:off x="742675" y="15233361"/>
             <a:ext cx="15862150" cy="0"/>
           </a:xfrm>
           <a:prstGeom prst="line">
@@ -3034,7 +3399,7 @@
         </p:nvSpPr>
         <p:spPr>
           <a:xfrm>
-            <a:off x="18435346" y="16320059"/>
+            <a:off x="18348557" y="14944725"/>
             <a:ext cx="15095898" cy="2097650"/>
           </a:xfrm>
           <a:prstGeom prst="rect">
@@ -3204,7 +3569,25 @@
             </a:pPr>
             <a:r>
               <a:rPr lang="en-US" dirty="0"/>
-              <a:t>Sulfate tends to increase throughout a year and decrease at the start of a new year. </a:t>
+              <a:t>Sulfate tends to increase throughout the year and decrease at the start of a new year. </a:t>
+            </a:r>
+          </a:p>
+          <a:p>
+            <a:pPr marL="457200" indent="-457200">
+              <a:buFont typeface="Arial" pitchFamily="34" charset="0"/>
+              <a:buChar char="•"/>
+            </a:pPr>
+            <a:r>
+              <a:rPr lang="en-US" dirty="0"/>
+              <a:t>Sulfate appears to be increasing over time at the </a:t>
+            </a:r>
+            <a:r>
+              <a:rPr lang="en-US" dirty="0" err="1"/>
+              <a:t>GCReW</a:t>
+            </a:r>
+            <a:r>
+              <a:rPr lang="en-US" dirty="0"/>
+              <a:t> site. </a:t>
             </a:r>
           </a:p>
           <a:p>
@@ -3228,8 +3611,8 @@
         </p:nvSpPr>
         <p:spPr>
           <a:xfrm>
-            <a:off x="18435346" y="5715022"/>
-            <a:ext cx="15095898" cy="2328963"/>
+            <a:off x="18269342" y="4879335"/>
+            <a:ext cx="15095898" cy="2511262"/>
           </a:xfrm>
           <a:prstGeom prst="rect">
             <a:avLst/>
@@ -3389,12 +3772,12 @@
             <a:endParaRPr lang="en-US" dirty="0"/>
           </a:p>
           <a:p>
-            <a:pPr marL="1801581" lvl="1" indent="-457200">
+            <a:pPr marL="688975" lvl="1" indent="-457200">
               <a:buFont typeface="Arial" panose="020B0604020202020204" pitchFamily="34" charset="0"/>
               <a:buChar char="•"/>
             </a:pPr>
             <a:r>
-              <a:rPr lang="en-US" sz="2800" dirty="0">
+              <a:rPr lang="en-US" sz="3200" dirty="0">
                 <a:latin typeface="Arial" panose="020B0604020202020204" pitchFamily="34" charset="0"/>
                 <a:cs typeface="Arial" panose="020B0604020202020204" pitchFamily="34" charset="0"/>
               </a:rPr>
@@ -3402,18 +3785,32 @@
             </a:r>
           </a:p>
           <a:p>
-            <a:pPr marL="1801581" lvl="1" indent="-457200">
+            <a:pPr marL="688975" lvl="1" indent="-457200">
               <a:buFont typeface="Arial" panose="020B0604020202020204" pitchFamily="34" charset="0"/>
               <a:buChar char="•"/>
             </a:pPr>
             <a:r>
-              <a:rPr lang="en-US" sz="2800" dirty="0">
+              <a:rPr lang="en-US" sz="3200" dirty="0">
                 <a:latin typeface="Arial" panose="020B0604020202020204" pitchFamily="34" charset="0"/>
                 <a:cs typeface="Arial" panose="020B0604020202020204" pitchFamily="34" charset="0"/>
               </a:rPr>
-              <a:t>Sulfate concentration changes by depth, but this effect varies across site and zone</a:t>
-            </a:r>
-            <a:endParaRPr lang="en-US" sz="2800" dirty="0"/>
+              <a:t>Sulfate concentration changes by depth, but this effect varies across site and zone. For example, sulfate is much lower at the 45 cm depth at the </a:t>
+            </a:r>
+            <a:r>
+              <a:rPr lang="en-US" sz="3200" dirty="0" err="1">
+                <a:latin typeface="Arial" panose="020B0604020202020204" pitchFamily="34" charset="0"/>
+                <a:cs typeface="Arial" panose="020B0604020202020204" pitchFamily="34" charset="0"/>
+              </a:rPr>
+              <a:t>Moneystump</a:t>
+            </a:r>
+            <a:r>
+              <a:rPr lang="en-US" sz="3200" dirty="0">
+                <a:latin typeface="Arial" panose="020B0604020202020204" pitchFamily="34" charset="0"/>
+                <a:cs typeface="Arial" panose="020B0604020202020204" pitchFamily="34" charset="0"/>
+              </a:rPr>
+              <a:t> Wetland Zone compared to other depths; however, sulfate is consistent across depths at Goodwin. </a:t>
+            </a:r>
+            <a:endParaRPr lang="en-US" sz="3200" dirty="0"/>
           </a:p>
         </p:txBody>
       </p:sp>
@@ -3431,8 +3828,8 @@
         </p:nvSpPr>
         <p:spPr>
           <a:xfrm>
-            <a:off x="1297603" y="14950580"/>
-            <a:ext cx="15738541" cy="3000821"/>
+            <a:off x="933921" y="12399147"/>
+            <a:ext cx="15738541" cy="2693045"/>
           </a:xfrm>
           <a:prstGeom prst="rect">
             <a:avLst/>
@@ -3454,7 +3851,7 @@
               </a:spcAft>
             </a:pPr>
             <a:r>
-              <a:rPr lang="en-US" sz="3600" b="1" dirty="0">
+              <a:rPr lang="en-US" sz="3200" b="1" dirty="0">
                 <a:solidFill>
                   <a:srgbClr val="75BFE2"/>
                 </a:solidFill>
@@ -3464,7 +3861,7 @@
               <a:t>Hypothesis: </a:t>
             </a:r>
             <a:r>
-              <a:rPr lang="en-US" sz="3200" b="0" i="0" u="none" strike="noStrike" dirty="0">
+              <a:rPr lang="en-US" sz="2800" b="0" i="0" u="none" strike="noStrike" dirty="0">
                 <a:solidFill>
                   <a:srgbClr val="000000"/>
                 </a:solidFill>
@@ -3475,7 +3872,7 @@
               <a:t>There is a hierarchical structure to </a:t>
             </a:r>
             <a:r>
-              <a:rPr lang="en-US" sz="3200" b="0" i="0" u="sng" dirty="0">
+              <a:rPr lang="en-US" sz="2800" b="0" i="0" u="sng" dirty="0">
                 <a:solidFill>
                   <a:srgbClr val="000000"/>
                 </a:solidFill>
@@ -3486,7 +3883,7 @@
               <a:t>spatial </a:t>
             </a:r>
             <a:r>
-              <a:rPr lang="en-US" sz="3200" b="0" i="0" u="none" strike="noStrike" dirty="0">
+              <a:rPr lang="en-US" sz="2800" b="0" i="0" u="none" strike="noStrike" dirty="0">
                 <a:solidFill>
                   <a:srgbClr val="000000"/>
                 </a:solidFill>
@@ -3496,7 +3893,7 @@
               </a:rPr>
               <a:t>variation in ecosystem structure and function at the coastal TAI that is set by:</a:t>
             </a:r>
-            <a:endParaRPr lang="en-US" sz="3200" b="0" dirty="0">
+            <a:endParaRPr lang="en-US" sz="2800" b="0" dirty="0">
               <a:effectLst/>
               <a:latin typeface="Arial" panose="020B0604020202020204" pitchFamily="34" charset="0"/>
               <a:cs typeface="Arial" panose="020B0604020202020204" pitchFamily="34" charset="0"/>
@@ -3512,7 +3909,7 @@
               </a:spcAft>
             </a:pPr>
             <a:r>
-              <a:rPr lang="en-US" sz="3200" b="0" i="0" u="none" strike="noStrike" dirty="0">
+              <a:rPr lang="en-US" sz="2800" b="0" i="0" u="none" strike="noStrike" dirty="0">
                 <a:solidFill>
                   <a:srgbClr val="000000"/>
                 </a:solidFill>
@@ -3523,7 +3920,7 @@
               <a:t>1) the </a:t>
             </a:r>
             <a:r>
-              <a:rPr lang="en-US" sz="3200" b="1" i="0" u="none" strike="noStrike" dirty="0">
+              <a:rPr lang="en-US" sz="2800" b="1" i="0" u="none" strike="noStrike" dirty="0">
                 <a:solidFill>
                   <a:srgbClr val="000000"/>
                 </a:solidFill>
@@ -3533,7 +3930,7 @@
               </a:rPr>
               <a:t>depth and duration of soil saturation </a:t>
             </a:r>
-            <a:endParaRPr lang="en-US" sz="3200" b="0" dirty="0">
+            <a:endParaRPr lang="en-US" sz="2800" b="0" dirty="0">
               <a:effectLst/>
               <a:latin typeface="Arial" panose="020B0604020202020204" pitchFamily="34" charset="0"/>
               <a:cs typeface="Arial" panose="020B0604020202020204" pitchFamily="34" charset="0"/>
@@ -3549,7 +3946,7 @@
               </a:spcAft>
             </a:pPr>
             <a:r>
-              <a:rPr lang="en-US" sz="3200" b="0" i="0" u="none" strike="noStrike" dirty="0">
+              <a:rPr lang="en-US" sz="2800" b="0" i="0" u="none" strike="noStrike" dirty="0">
                 <a:solidFill>
                   <a:srgbClr val="000000"/>
                 </a:solidFill>
@@ -3560,7 +3957,7 @@
               <a:t>2) the abundance of </a:t>
             </a:r>
             <a:r>
-              <a:rPr lang="en-US" sz="3200" b="1" i="0" u="none" strike="noStrike" dirty="0">
+              <a:rPr lang="en-US" sz="2800" b="1" i="0" u="none" strike="noStrike" dirty="0">
                 <a:solidFill>
                   <a:srgbClr val="000000"/>
                 </a:solidFill>
@@ -3581,7 +3978,7 @@
               </a:spcAft>
             </a:pPr>
             <a:r>
-              <a:rPr lang="en-US" sz="3200" b="0" dirty="0">
+              <a:rPr lang="en-US" sz="2800" b="0" dirty="0">
                 <a:effectLst/>
                 <a:latin typeface="Arial" panose="020B0604020202020204" pitchFamily="34" charset="0"/>
                 <a:cs typeface="Arial" panose="020B0604020202020204" pitchFamily="34" charset="0"/>
@@ -3589,7 +3986,7 @@
               <a:t>3) their</a:t>
             </a:r>
             <a:r>
-              <a:rPr lang="en-US" sz="3200" b="1" dirty="0">
+              <a:rPr lang="en-US" sz="2800" b="1" dirty="0">
                 <a:effectLst/>
                 <a:latin typeface="Arial" panose="020B0604020202020204" pitchFamily="34" charset="0"/>
                 <a:cs typeface="Arial" panose="020B0604020202020204" pitchFamily="34" charset="0"/>
@@ -3597,14 +3994,14 @@
               <a:t> </a:t>
             </a:r>
             <a:r>
-              <a:rPr lang="en-US" sz="3200" dirty="0">
+              <a:rPr lang="en-US" sz="2800" dirty="0">
                 <a:effectLst/>
                 <a:latin typeface="Arial" panose="020B0604020202020204" pitchFamily="34" charset="0"/>
                 <a:cs typeface="Arial" panose="020B0604020202020204" pitchFamily="34" charset="0"/>
               </a:rPr>
               <a:t>interactions with plant traits</a:t>
             </a:r>
-            <a:endParaRPr lang="en-US" dirty="0">
+            <a:endParaRPr lang="en-US" sz="3600" dirty="0">
               <a:effectLst/>
               <a:latin typeface="Arial" panose="020B0604020202020204" pitchFamily="34" charset="0"/>
               <a:cs typeface="Arial" panose="020B0604020202020204" pitchFamily="34" charset="0"/>
@@ -3627,42 +4024,6 @@
           <p:nvPr/>
         </p:nvPicPr>
         <p:blipFill>
-          <a:blip r:embed="rId5">
-            <a:extLst>
-              <a:ext uri="{28A0092B-C50C-407E-A947-70E740481C1C}">
-                <a14:useLocalDpi xmlns:a14="http://schemas.microsoft.com/office/drawing/2010/main" val="0"/>
-              </a:ext>
-            </a:extLst>
-          </a:blip>
-          <a:stretch>
-            <a:fillRect/>
-          </a:stretch>
-        </p:blipFill>
-        <p:spPr>
-          <a:xfrm>
-            <a:off x="18017021" y="7627507"/>
-            <a:ext cx="16176652" cy="8088326"/>
-          </a:xfrm>
-          <a:prstGeom prst="rect">
-            <a:avLst/>
-          </a:prstGeom>
-        </p:spPr>
-      </p:pic>
-      <p:pic>
-        <p:nvPicPr>
-          <p:cNvPr id="11" name="Picture 10" descr="A screenshot of a graph&#10;&#10;AI-generated content may be incorrect.">
-            <a:extLst>
-              <a:ext uri="{FF2B5EF4-FFF2-40B4-BE49-F238E27FC236}">
-                <a16:creationId xmlns:a16="http://schemas.microsoft.com/office/drawing/2014/main" id="{0144416F-2A82-F7CC-0427-8A36932666F6}"/>
-              </a:ext>
-            </a:extLst>
-          </p:cNvPr>
-          <p:cNvPicPr>
-            <a:picLocks noChangeAspect="1"/>
-          </p:cNvPicPr>
-          <p:nvPr/>
-        </p:nvPicPr>
-        <p:blipFill>
           <a:blip r:embed="rId6">
             <a:extLst>
               <a:ext uri="{28A0092B-C50C-407E-A947-70E740481C1C}">
@@ -3670,15 +4031,15 @@
               </a:ext>
             </a:extLst>
           </a:blip>
-          <a:srcRect r="4104"/>
+          <a:srcRect t="3900"/>
           <a:stretch>
             <a:fillRect/>
           </a:stretch>
         </p:blipFill>
         <p:spPr>
           <a:xfrm>
-            <a:off x="17435945" y="18047725"/>
-            <a:ext cx="16949041" cy="10604680"/>
+            <a:off x="19206043" y="8261037"/>
+            <a:ext cx="13068565" cy="6279415"/>
           </a:xfrm>
           <a:prstGeom prst="rect">
             <a:avLst/>
@@ -3699,10 +4060,10 @@
         </p:nvGrpSpPr>
         <p:grpSpPr>
           <a:xfrm>
-            <a:off x="6329732" y="5885604"/>
-            <a:ext cx="10706412" cy="8510897"/>
-            <a:chOff x="293462" y="10162931"/>
-            <a:chExt cx="11002382" cy="7460357"/>
+            <a:off x="1412690" y="4404611"/>
+            <a:ext cx="14975825" cy="7819779"/>
+            <a:chOff x="-4093975" y="10585278"/>
+            <a:chExt cx="15389819" cy="7038010"/>
           </a:xfrm>
         </p:grpSpPr>
         <p:sp>
@@ -3893,10 +4254,10 @@
           </p:nvGrpSpPr>
           <p:grpSpPr>
             <a:xfrm>
-              <a:off x="293462" y="10658992"/>
-              <a:ext cx="11002382" cy="6964296"/>
-              <a:chOff x="272558" y="6524607"/>
-              <a:chExt cx="11002382" cy="6964296"/>
+              <a:off x="-4093975" y="13332543"/>
+              <a:ext cx="15389819" cy="4290745"/>
+              <a:chOff x="-4114879" y="9198158"/>
+              <a:chExt cx="15389819" cy="4290745"/>
             </a:xfrm>
           </p:grpSpPr>
           <p:graphicFrame>
@@ -3912,14 +4273,14 @@
               <p:nvPr>
                 <p:extLst>
                   <p:ext uri="{D42A27DB-BD31-4B8C-83A1-F6EECF244321}">
-                    <p14:modId xmlns:p14="http://schemas.microsoft.com/office/powerpoint/2010/main" val="2347804625"/>
+                    <p14:modId xmlns:p14="http://schemas.microsoft.com/office/powerpoint/2010/main" val="3241652528"/>
                   </p:ext>
                 </p:extLst>
               </p:nvPr>
             </p:nvGraphicFramePr>
             <p:xfrm>
-              <a:off x="323219" y="6524607"/>
-              <a:ext cx="3601065" cy="2264103"/>
+              <a:off x="-4114879" y="9683969"/>
+              <a:ext cx="3682599" cy="2585472"/>
             </p:xfrm>
             <a:graphic>
               <a:graphicData uri="http://schemas.openxmlformats.org/drawingml/2006/table">
@@ -3928,14 +4289,14 @@
                     <a:noFill/>
                   </a:tblPr>
                   <a:tblGrid>
-                    <a:gridCol w="2134149">
+                    <a:gridCol w="2182470">
                       <a:extLst>
                         <a:ext uri="{9D8B030D-6E8A-4147-A177-3AD203B41FA5}">
                           <a16:colId xmlns:a16="http://schemas.microsoft.com/office/drawing/2014/main" val="20000"/>
                         </a:ext>
                       </a:extLst>
                     </a:gridCol>
-                    <a:gridCol w="1370045">
+                    <a:gridCol w="1401065">
                       <a:extLst>
                         <a:ext uri="{9D8B030D-6E8A-4147-A177-3AD203B41FA5}">
                           <a16:colId xmlns:a16="http://schemas.microsoft.com/office/drawing/2014/main" val="20001"/>
@@ -3943,7 +4304,7 @@
                       </a:extLst>
                     </a:gridCol>
                   </a:tblGrid>
-                  <a:tr h="431010">
+                  <a:tr h="506206">
                     <a:tc>
                       <a:txBody>
                         <a:bodyPr/>
@@ -3962,7 +4323,7 @@
                             <a:buNone/>
                           </a:pPr>
                           <a:r>
-                            <a:rPr lang="en-US" sz="2000" u="none" strike="noStrike" cap="none" dirty="0">
+                            <a:rPr lang="en-US" sz="2400" u="none" strike="noStrike" cap="none" dirty="0">
                               <a:solidFill>
                                 <a:schemeClr val="lt1"/>
                               </a:solidFill>
@@ -3970,7 +4331,7 @@
                             </a:rPr>
                             <a:t>Site</a:t>
                           </a:r>
-                          <a:endParaRPr sz="2000" dirty="0">
+                          <a:endParaRPr sz="2400" dirty="0">
                             <a:latin typeface="+mj-lt"/>
                           </a:endParaRPr>
                         </a:p>
@@ -4035,7 +4396,7 @@
                             <a:buNone/>
                           </a:pPr>
                           <a:r>
-                            <a:rPr lang="en-US" sz="2000" u="none" strike="noStrike" cap="none" dirty="0">
+                            <a:rPr lang="en-US" sz="2400" u="none" strike="noStrike" cap="none" dirty="0">
                               <a:solidFill>
                                 <a:schemeClr val="lt1"/>
                               </a:solidFill>
@@ -4043,7 +4404,7 @@
                             </a:rPr>
                             <a:t>Salinity</a:t>
                           </a:r>
-                          <a:endParaRPr sz="2000" dirty="0">
+                          <a:endParaRPr sz="2400" dirty="0">
                             <a:latin typeface="+mj-lt"/>
                           </a:endParaRPr>
                         </a:p>
@@ -4096,7 +4457,7 @@
                       </a:ext>
                     </a:extLst>
                   </a:tr>
-                  <a:tr h="432073">
+                  <a:tr h="507454">
                     <a:tc>
                       <a:txBody>
                         <a:bodyPr/>
@@ -4115,12 +4476,12 @@
                             <a:buNone/>
                           </a:pPr>
                           <a:r>
-                            <a:rPr lang="en-US" sz="2000" dirty="0">
+                            <a:rPr lang="en-US" sz="2400" dirty="0">
                               <a:latin typeface="+mj-lt"/>
                             </a:rPr>
                             <a:t>Sweethall</a:t>
                           </a:r>
-                          <a:endParaRPr sz="2000" dirty="0">
+                          <a:endParaRPr sz="2400" dirty="0">
                             <a:latin typeface="+mj-lt"/>
                           </a:endParaRPr>
                         </a:p>
@@ -4182,7 +4543,7 @@
                             <a:buNone/>
                           </a:pPr>
                           <a:r>
-                            <a:rPr lang="en-US" sz="2000" u="none" strike="noStrike" cap="none" dirty="0">
+                            <a:rPr lang="en-US" sz="2400" u="none" strike="noStrike" cap="none" dirty="0">
                               <a:solidFill>
                                 <a:srgbClr val="000000"/>
                               </a:solidFill>
@@ -4190,7 +4551,7 @@
                             </a:rPr>
                             <a:t>0-2</a:t>
                           </a:r>
-                          <a:endParaRPr sz="2000" dirty="0">
+                          <a:endParaRPr sz="2400" dirty="0">
                             <a:latin typeface="+mj-lt"/>
                           </a:endParaRPr>
                         </a:p>
@@ -4240,7 +4601,7 @@
                       </a:ext>
                     </a:extLst>
                   </a:tr>
-                  <a:tr h="431010">
+                  <a:tr h="506206">
                     <a:tc>
                       <a:txBody>
                         <a:bodyPr/>
@@ -4259,7 +4620,7 @@
                             <a:buNone/>
                           </a:pPr>
                           <a:r>
-                            <a:rPr lang="en-US" sz="2000" u="none" strike="noStrike" cap="none" dirty="0">
+                            <a:rPr lang="en-US" sz="2400" u="none" strike="noStrike" cap="none" dirty="0">
                               <a:solidFill>
                                 <a:srgbClr val="000000"/>
                               </a:solidFill>
@@ -4267,7 +4628,7 @@
                             </a:rPr>
                             <a:t>GCReW</a:t>
                           </a:r>
-                          <a:endParaRPr sz="2000" dirty="0">
+                          <a:endParaRPr sz="2400" dirty="0">
                             <a:latin typeface="+mj-lt"/>
                           </a:endParaRPr>
                         </a:p>
@@ -4329,7 +4690,7 @@
                             <a:buNone/>
                           </a:pPr>
                           <a:r>
-                            <a:rPr lang="en-US" sz="2000" u="none" strike="noStrike" cap="none" dirty="0">
+                            <a:rPr lang="en-US" sz="2400" u="none" strike="noStrike" cap="none" dirty="0">
                               <a:solidFill>
                                 <a:srgbClr val="000000"/>
                               </a:solidFill>
@@ -4337,7 +4698,7 @@
                             </a:rPr>
                             <a:t>8-10</a:t>
                           </a:r>
-                          <a:endParaRPr sz="2000" dirty="0">
+                          <a:endParaRPr sz="2400" dirty="0">
                             <a:latin typeface="+mj-lt"/>
                           </a:endParaRPr>
                         </a:p>
@@ -4387,7 +4748,7 @@
                       </a:ext>
                     </a:extLst>
                   </a:tr>
-                  <a:tr h="526285">
+                  <a:tr h="0">
                     <a:tc>
                       <a:txBody>
                         <a:bodyPr/>
@@ -4406,7 +4767,7 @@
                             <a:buNone/>
                           </a:pPr>
                           <a:r>
-                            <a:rPr lang="en-US" sz="2000" u="none" strike="noStrike" cap="none" dirty="0">
+                            <a:rPr lang="en-US" sz="2400" u="none" strike="noStrike" cap="none" dirty="0">
                               <a:solidFill>
                                 <a:srgbClr val="000000"/>
                               </a:solidFill>
@@ -4415,12 +4776,12 @@
                             <a:t>M</a:t>
                           </a:r>
                           <a:r>
-                            <a:rPr lang="en-US" sz="2000" dirty="0">
+                            <a:rPr lang="en-US" sz="2400" dirty="0">
                               <a:latin typeface="+mj-lt"/>
                             </a:rPr>
                             <a:t>oneyStump</a:t>
                           </a:r>
-                          <a:endParaRPr sz="2000" dirty="0">
+                          <a:endParaRPr sz="2400" dirty="0">
                             <a:latin typeface="+mj-lt"/>
                           </a:endParaRPr>
                         </a:p>
@@ -4482,7 +4843,7 @@
                             <a:buNone/>
                           </a:pPr>
                           <a:r>
-                            <a:rPr lang="en-US" sz="2000" u="none" strike="noStrike" cap="none">
+                            <a:rPr lang="en-US" sz="2400" u="none" strike="noStrike" cap="none">
                               <a:solidFill>
                                 <a:srgbClr val="000000"/>
                               </a:solidFill>
@@ -4490,7 +4851,7 @@
                             </a:rPr>
                             <a:t>8-10</a:t>
                           </a:r>
-                          <a:endParaRPr sz="2000">
+                          <a:endParaRPr sz="2400">
                             <a:latin typeface="+mj-lt"/>
                           </a:endParaRPr>
                         </a:p>
@@ -4540,7 +4901,7 @@
                       </a:ext>
                     </a:extLst>
                   </a:tr>
-                  <a:tr h="762548">
+                  <a:tr h="895585">
                     <a:tc>
                       <a:txBody>
                         <a:bodyPr/>
@@ -4559,7 +4920,7 @@
                             <a:buNone/>
                           </a:pPr>
                           <a:r>
-                            <a:rPr lang="en-US" sz="2000" u="none" strike="noStrike" cap="none" dirty="0">
+                            <a:rPr lang="en-US" sz="2400" u="none" strike="noStrike" cap="none" dirty="0">
                               <a:solidFill>
                                 <a:srgbClr val="000000"/>
                               </a:solidFill>
@@ -4568,12 +4929,12 @@
                             <a:t>G</a:t>
                           </a:r>
                           <a:r>
-                            <a:rPr lang="en-US" sz="2000" dirty="0">
+                            <a:rPr lang="en-US" sz="2400" dirty="0">
                               <a:latin typeface="+mj-lt"/>
                             </a:rPr>
                             <a:t>oodwin Islands</a:t>
                           </a:r>
-                          <a:endParaRPr sz="2000" dirty="0">
+                          <a:endParaRPr sz="2400" dirty="0">
                             <a:latin typeface="+mj-lt"/>
                           </a:endParaRPr>
                         </a:p>
@@ -4635,7 +4996,7 @@
                             <a:buNone/>
                           </a:pPr>
                           <a:r>
-                            <a:rPr lang="en-US" sz="2000" u="none" strike="noStrike" cap="none" dirty="0">
+                            <a:rPr lang="en-US" sz="2400" u="none" strike="noStrike" cap="none" dirty="0">
                               <a:solidFill>
                                 <a:srgbClr val="000000"/>
                               </a:solidFill>
@@ -4643,7 +5004,7 @@
                             </a:rPr>
                             <a:t>18-20</a:t>
                           </a:r>
-                          <a:endParaRPr sz="2000" dirty="0">
+                          <a:endParaRPr sz="2400" dirty="0">
                             <a:latin typeface="+mj-lt"/>
                           </a:endParaRPr>
                         </a:p>
@@ -4699,10 +5060,10 @@
           </p:graphicFrame>
           <p:grpSp>
             <p:nvGrpSpPr>
-              <p:cNvPr id="22" name="Group 21">
+              <p:cNvPr id="23" name="Group 22">
                 <a:extLst>
                   <a:ext uri="{FF2B5EF4-FFF2-40B4-BE49-F238E27FC236}">
-                    <a16:creationId xmlns:a16="http://schemas.microsoft.com/office/drawing/2014/main" id="{2BFE48BE-D2C5-8243-5332-F748C7FB4EAC}"/>
+                    <a16:creationId xmlns:a16="http://schemas.microsoft.com/office/drawing/2014/main" id="{744546CE-2EC9-735C-F6B3-4A137D102F0F}"/>
                   </a:ext>
                 </a:extLst>
               </p:cNvPr>
@@ -4713,16 +5074,168 @@
               <a:xfrm>
                 <a:off x="272558" y="9198158"/>
                 <a:ext cx="11002382" cy="4290745"/>
-                <a:chOff x="272558" y="9198158"/>
-                <a:chExt cx="11002382" cy="4290745"/>
+                <a:chOff x="928742" y="15582937"/>
+                <a:chExt cx="9627773" cy="3356493"/>
               </a:xfrm>
             </p:grpSpPr>
+            <p:sp>
+              <p:nvSpPr>
+                <p:cNvPr id="25" name="TextBox 24">
+                  <a:extLst>
+                    <a:ext uri="{FF2B5EF4-FFF2-40B4-BE49-F238E27FC236}">
+                      <a16:creationId xmlns:a16="http://schemas.microsoft.com/office/drawing/2014/main" id="{A8454ACA-A266-32A3-C891-C89EAA9E01CB}"/>
+                    </a:ext>
+                  </a:extLst>
+                </p:cNvPr>
+                <p:cNvSpPr txBox="1"/>
+                <p:nvPr/>
+              </p:nvSpPr>
+              <p:spPr>
+                <a:xfrm>
+                  <a:off x="5924325" y="18335237"/>
+                  <a:ext cx="2668307" cy="584775"/>
+                </a:xfrm>
+                <a:prstGeom prst="rect">
+                  <a:avLst/>
+                </a:prstGeom>
+                <a:noFill/>
+              </p:spPr>
+              <p:txBody>
+                <a:bodyPr wrap="square">
+                  <a:spAutoFit/>
+                </a:bodyPr>
+                <a:lstStyle/>
+                <a:p>
+                  <a:pPr algn="ctr" rtl="0">
+                    <a:spcBef>
+                      <a:spcPts val="0"/>
+                    </a:spcBef>
+                    <a:spcAft>
+                      <a:spcPts val="0"/>
+                    </a:spcAft>
+                  </a:pPr>
+                  <a:r>
+                    <a:rPr lang="en-US" sz="3200" b="1" i="0" u="none" strike="noStrike" dirty="0">
+                      <a:solidFill>
+                        <a:srgbClr val="AD9335"/>
+                      </a:solidFill>
+                      <a:effectLst/>
+                      <a:latin typeface="Arial" panose="020B0604020202020204" pitchFamily="34" charset="0"/>
+                    </a:rPr>
+                    <a:t>Transition </a:t>
+                  </a:r>
+                  <a:endParaRPr lang="en-US" b="0" dirty="0">
+                    <a:effectLst/>
+                  </a:endParaRPr>
+                </a:p>
+              </p:txBody>
+            </p:sp>
+            <p:sp>
+              <p:nvSpPr>
+                <p:cNvPr id="26" name="TextBox 25">
+                  <a:extLst>
+                    <a:ext uri="{FF2B5EF4-FFF2-40B4-BE49-F238E27FC236}">
+                      <a16:creationId xmlns:a16="http://schemas.microsoft.com/office/drawing/2014/main" id="{484190F2-EFC3-A118-D2D7-FB24CCBD39B4}"/>
+                    </a:ext>
+                  </a:extLst>
+                </p:cNvPr>
+                <p:cNvSpPr txBox="1"/>
+                <p:nvPr/>
+              </p:nvSpPr>
+              <p:spPr>
+                <a:xfrm>
+                  <a:off x="3615900" y="18327135"/>
+                  <a:ext cx="2015164" cy="584775"/>
+                </a:xfrm>
+                <a:prstGeom prst="rect">
+                  <a:avLst/>
+                </a:prstGeom>
+                <a:noFill/>
+              </p:spPr>
+              <p:txBody>
+                <a:bodyPr wrap="square">
+                  <a:spAutoFit/>
+                </a:bodyPr>
+                <a:lstStyle/>
+                <a:p>
+                  <a:pPr algn="ctr" rtl="0">
+                    <a:spcBef>
+                      <a:spcPts val="0"/>
+                    </a:spcBef>
+                    <a:spcAft>
+                      <a:spcPts val="0"/>
+                    </a:spcAft>
+                  </a:pPr>
+                  <a:r>
+                    <a:rPr lang="en-US" sz="3200" b="1" i="0" u="none" strike="noStrike" dirty="0">
+                      <a:solidFill>
+                        <a:srgbClr val="7F7F7F"/>
+                      </a:solidFill>
+                      <a:effectLst/>
+                      <a:latin typeface="Arial" panose="020B0604020202020204" pitchFamily="34" charset="0"/>
+                    </a:rPr>
+                    <a:t>Upland </a:t>
+                  </a:r>
+                  <a:endParaRPr lang="en-US" dirty="0"/>
+                </a:p>
+              </p:txBody>
+            </p:sp>
+            <p:sp>
+              <p:nvSpPr>
+                <p:cNvPr id="27" name="TextBox 26">
+                  <a:extLst>
+                    <a:ext uri="{FF2B5EF4-FFF2-40B4-BE49-F238E27FC236}">
+                      <a16:creationId xmlns:a16="http://schemas.microsoft.com/office/drawing/2014/main" id="{E3FB73FF-BFA6-26DB-AA0A-F51D66FFA661}"/>
+                    </a:ext>
+                  </a:extLst>
+                </p:cNvPr>
+                <p:cNvSpPr txBox="1"/>
+                <p:nvPr/>
+              </p:nvSpPr>
+              <p:spPr>
+                <a:xfrm>
+                  <a:off x="8346715" y="18354655"/>
+                  <a:ext cx="2209800" cy="584775"/>
+                </a:xfrm>
+                <a:prstGeom prst="rect">
+                  <a:avLst/>
+                </a:prstGeom>
+                <a:noFill/>
+              </p:spPr>
+              <p:txBody>
+                <a:bodyPr wrap="square">
+                  <a:spAutoFit/>
+                </a:bodyPr>
+                <a:lstStyle/>
+                <a:p>
+                  <a:pPr algn="ctr" rtl="0">
+                    <a:spcBef>
+                      <a:spcPts val="0"/>
+                    </a:spcBef>
+                    <a:spcAft>
+                      <a:spcPts val="0"/>
+                    </a:spcAft>
+                  </a:pPr>
+                  <a:r>
+                    <a:rPr lang="en-US" sz="3200" b="1" i="0" u="none" strike="noStrike" dirty="0">
+                      <a:solidFill>
+                        <a:srgbClr val="214A2B"/>
+                      </a:solidFill>
+                      <a:effectLst/>
+                      <a:latin typeface="Arial" panose="020B0604020202020204" pitchFamily="34" charset="0"/>
+                    </a:rPr>
+                    <a:t>Wetland </a:t>
+                  </a:r>
+                  <a:endParaRPr lang="en-US" dirty="0"/>
+                </a:p>
+              </p:txBody>
+            </p:sp>
             <p:grpSp>
               <p:nvGrpSpPr>
-                <p:cNvPr id="23" name="Group 22">
+                <p:cNvPr id="28" name="Group 27">
                   <a:extLst>
                     <a:ext uri="{FF2B5EF4-FFF2-40B4-BE49-F238E27FC236}">
-                      <a16:creationId xmlns:a16="http://schemas.microsoft.com/office/drawing/2014/main" id="{744546CE-2EC9-735C-F6B3-4A137D102F0F}"/>
+                      <a16:creationId xmlns:a16="http://schemas.microsoft.com/office/drawing/2014/main" id="{971C545D-FDC3-D326-1EAC-5618EEB032BF}"/>
                     </a:ext>
                   </a:extLst>
                 </p:cNvPr>
@@ -4731,18 +5244,379 @@
               </p:nvGrpSpPr>
               <p:grpSpPr>
                 <a:xfrm>
-                  <a:off x="272558" y="9198158"/>
-                  <a:ext cx="11002382" cy="4290745"/>
-                  <a:chOff x="928742" y="15582937"/>
-                  <a:chExt cx="9627773" cy="3356493"/>
+                  <a:off x="928742" y="15582937"/>
+                  <a:ext cx="9424200" cy="3179751"/>
+                  <a:chOff x="899080" y="7578118"/>
+                  <a:chExt cx="9424200" cy="3179751"/>
                 </a:xfrm>
               </p:grpSpPr>
+              <p:pic>
+                <p:nvPicPr>
+                  <p:cNvPr id="29" name="Picture 14">
+                    <a:extLst>
+                      <a:ext uri="{FF2B5EF4-FFF2-40B4-BE49-F238E27FC236}">
+                        <a16:creationId xmlns:a16="http://schemas.microsoft.com/office/drawing/2014/main" id="{5D396374-1D6A-7D31-B4E5-8759728546FC}"/>
+                      </a:ext>
+                    </a:extLst>
+                  </p:cNvPr>
+                  <p:cNvPicPr>
+                    <a:picLocks noChangeAspect="1" noChangeArrowheads="1"/>
+                  </p:cNvPicPr>
+                  <p:nvPr/>
+                </p:nvPicPr>
+                <p:blipFill rotWithShape="1">
+                  <a:blip r:embed="rId7">
+                    <a:extLst>
+                      <a:ext uri="{28A0092B-C50C-407E-A947-70E740481C1C}">
+                        <a14:useLocalDpi xmlns:a14="http://schemas.microsoft.com/office/drawing/2010/main" val="0"/>
+                      </a:ext>
+                    </a:extLst>
+                  </a:blip>
+                  <a:srcRect l="23500" t="37555" r="55500" b="10000"/>
+                  <a:stretch/>
+                </p:blipFill>
+                <p:spPr bwMode="auto">
+                  <a:xfrm>
+                    <a:off x="899080" y="7578118"/>
+                    <a:ext cx="2263551" cy="3179751"/>
+                  </a:xfrm>
+                  <a:prstGeom prst="rect">
+                    <a:avLst/>
+                  </a:prstGeom>
+                  <a:noFill/>
+                  <a:ln>
+                    <a:solidFill>
+                      <a:schemeClr val="tx1"/>
+                    </a:solidFill>
+                  </a:ln>
+                  <a:extLst>
+                    <a:ext uri="{909E8E84-426E-40DD-AFC4-6F175D3DCCD1}">
+                      <a14:hiddenFill xmlns:a14="http://schemas.microsoft.com/office/drawing/2010/main">
+                        <a:solidFill>
+                          <a:srgbClr val="FFFFFF"/>
+                        </a:solidFill>
+                      </a14:hiddenFill>
+                    </a:ext>
+                  </a:extLst>
+                </p:spPr>
+              </p:pic>
+              <p:pic>
+                <p:nvPicPr>
+                  <p:cNvPr id="30" name="Picture 16">
+                    <a:extLst>
+                      <a:ext uri="{FF2B5EF4-FFF2-40B4-BE49-F238E27FC236}">
+                        <a16:creationId xmlns:a16="http://schemas.microsoft.com/office/drawing/2014/main" id="{2E43BF24-48A1-D61A-62BA-CC3D09328484}"/>
+                      </a:ext>
+                    </a:extLst>
+                  </p:cNvPr>
+                  <p:cNvPicPr>
+                    <a:picLocks noChangeAspect="1" noChangeArrowheads="1"/>
+                  </p:cNvPicPr>
+                  <p:nvPr/>
+                </p:nvPicPr>
+                <p:blipFill rotWithShape="1">
+                  <a:blip r:embed="rId8" cstate="print">
+                    <a:extLst>
+                      <a:ext uri="{28A0092B-C50C-407E-A947-70E740481C1C}">
+                        <a14:useLocalDpi xmlns:a14="http://schemas.microsoft.com/office/drawing/2010/main" val="0"/>
+                      </a:ext>
+                    </a:extLst>
+                  </a:blip>
+                  <a:srcRect t="28816" b="28777"/>
+                  <a:stretch/>
+                </p:blipFill>
+                <p:spPr bwMode="auto">
+                  <a:xfrm>
+                    <a:off x="3657600" y="8315169"/>
+                    <a:ext cx="6553200" cy="1851522"/>
+                  </a:xfrm>
+                  <a:prstGeom prst="rect">
+                    <a:avLst/>
+                  </a:prstGeom>
+                  <a:noFill/>
+                  <a:extLst>
+                    <a:ext uri="{909E8E84-426E-40DD-AFC4-6F175D3DCCD1}">
+                      <a14:hiddenFill xmlns:a14="http://schemas.microsoft.com/office/drawing/2010/main">
+                        <a:solidFill>
+                          <a:srgbClr val="FFFFFF"/>
+                        </a:solidFill>
+                      </a14:hiddenFill>
+                    </a:ext>
+                  </a:extLst>
+                </p:spPr>
+              </p:pic>
               <p:sp>
                 <p:nvSpPr>
-                  <p:cNvPr id="25" name="TextBox 24">
+                  <p:cNvPr id="31" name="Isosceles Triangle 9">
                     <a:extLst>
                       <a:ext uri="{FF2B5EF4-FFF2-40B4-BE49-F238E27FC236}">
-                        <a16:creationId xmlns:a16="http://schemas.microsoft.com/office/drawing/2014/main" id="{A8454ACA-A266-32A3-C891-C89EAA9E01CB}"/>
+                        <a16:creationId xmlns:a16="http://schemas.microsoft.com/office/drawing/2014/main" id="{9187A6BA-BC5B-ADEA-5C80-21A90D319C6D}"/>
+                      </a:ext>
+                    </a:extLst>
+                  </p:cNvPr>
+                  <p:cNvSpPr/>
+                  <p:nvPr/>
+                </p:nvSpPr>
+                <p:spPr>
+                  <a:xfrm rot="16200000">
+                    <a:off x="2022821" y="8767998"/>
+                    <a:ext cx="2072359" cy="965647"/>
+                  </a:xfrm>
+                  <a:custGeom>
+                    <a:avLst/>
+                    <a:gdLst>
+                      <a:gd name="connsiteX0" fmla="*/ 0 w 1858996"/>
+                      <a:gd name="connsiteY0" fmla="*/ 1119526 h 1119526"/>
+                      <a:gd name="connsiteX1" fmla="*/ 929498 w 1858996"/>
+                      <a:gd name="connsiteY1" fmla="*/ 0 h 1119526"/>
+                      <a:gd name="connsiteX2" fmla="*/ 1858996 w 1858996"/>
+                      <a:gd name="connsiteY2" fmla="*/ 1119526 h 1119526"/>
+                      <a:gd name="connsiteX3" fmla="*/ 0 w 1858996"/>
+                      <a:gd name="connsiteY3" fmla="*/ 1119526 h 1119526"/>
+                      <a:gd name="connsiteX0" fmla="*/ 0 w 1858996"/>
+                      <a:gd name="connsiteY0" fmla="*/ 1081426 h 1081426"/>
+                      <a:gd name="connsiteX1" fmla="*/ 1405748 w 1858996"/>
+                      <a:gd name="connsiteY1" fmla="*/ 0 h 1081426"/>
+                      <a:gd name="connsiteX2" fmla="*/ 1858996 w 1858996"/>
+                      <a:gd name="connsiteY2" fmla="*/ 1081426 h 1081426"/>
+                      <a:gd name="connsiteX3" fmla="*/ 0 w 1858996"/>
+                      <a:gd name="connsiteY3" fmla="*/ 1081426 h 1081426"/>
+                    </a:gdLst>
+                    <a:ahLst/>
+                    <a:cxnLst>
+                      <a:cxn ang="0">
+                        <a:pos x="connsiteX0" y="connsiteY0"/>
+                      </a:cxn>
+                      <a:cxn ang="0">
+                        <a:pos x="connsiteX1" y="connsiteY1"/>
+                      </a:cxn>
+                      <a:cxn ang="0">
+                        <a:pos x="connsiteX2" y="connsiteY2"/>
+                      </a:cxn>
+                      <a:cxn ang="0">
+                        <a:pos x="connsiteX3" y="connsiteY3"/>
+                      </a:cxn>
+                    </a:cxnLst>
+                    <a:rect l="l" t="t" r="r" b="b"/>
+                    <a:pathLst>
+                      <a:path w="1858996" h="1081426">
+                        <a:moveTo>
+                          <a:pt x="0" y="1081426"/>
+                        </a:moveTo>
+                        <a:lnTo>
+                          <a:pt x="1405748" y="0"/>
+                        </a:lnTo>
+                        <a:lnTo>
+                          <a:pt x="1858996" y="1081426"/>
+                        </a:lnTo>
+                        <a:lnTo>
+                          <a:pt x="0" y="1081426"/>
+                        </a:lnTo>
+                        <a:close/>
+                      </a:path>
+                    </a:pathLst>
+                  </a:custGeom>
+                  <a:solidFill>
+                    <a:srgbClr val="A6A6A6">
+                      <a:alpha val="60000"/>
+                    </a:srgbClr>
+                  </a:solidFill>
+                  <a:ln>
+                    <a:solidFill>
+                      <a:schemeClr val="tx1">
+                        <a:lumMod val="50000"/>
+                        <a:lumOff val="50000"/>
+                      </a:schemeClr>
+                    </a:solidFill>
+                  </a:ln>
+                </p:spPr>
+                <p:style>
+                  <a:lnRef idx="2">
+                    <a:schemeClr val="accent1">
+                      <a:shade val="50000"/>
+                    </a:schemeClr>
+                  </a:lnRef>
+                  <a:fillRef idx="1">
+                    <a:schemeClr val="accent1"/>
+                  </a:fillRef>
+                  <a:effectRef idx="0">
+                    <a:schemeClr val="accent1"/>
+                  </a:effectRef>
+                  <a:fontRef idx="minor">
+                    <a:schemeClr val="lt1"/>
+                  </a:fontRef>
+                </p:style>
+                <p:txBody>
+                  <a:bodyPr rtlCol="0" anchor="ctr"/>
+                  <a:lstStyle/>
+                  <a:p>
+                    <a:pPr algn="ctr"/>
+                    <a:endParaRPr lang="en-US"/>
+                  </a:p>
+                </p:txBody>
+              </p:sp>
+              <p:sp>
+                <p:nvSpPr>
+                  <p:cNvPr id="1024" name="Rectangle 1023">
+                    <a:extLst>
+                      <a:ext uri="{FF2B5EF4-FFF2-40B4-BE49-F238E27FC236}">
+                        <a16:creationId xmlns:a16="http://schemas.microsoft.com/office/drawing/2014/main" id="{534B1453-A12C-51C2-7D42-7A9A13707632}"/>
+                      </a:ext>
+                    </a:extLst>
+                  </p:cNvPr>
+                  <p:cNvSpPr/>
+                  <p:nvPr/>
+                </p:nvSpPr>
+                <p:spPr>
+                  <a:xfrm>
+                    <a:off x="3545120" y="8214640"/>
+                    <a:ext cx="2007627" cy="2072359"/>
+                  </a:xfrm>
+                  <a:prstGeom prst="rect">
+                    <a:avLst/>
+                  </a:prstGeom>
+                  <a:noFill/>
+                  <a:ln w="57150">
+                    <a:solidFill>
+                      <a:srgbClr val="777469"/>
+                    </a:solidFill>
+                  </a:ln>
+                </p:spPr>
+                <p:style>
+                  <a:lnRef idx="2">
+                    <a:schemeClr val="accent1">
+                      <a:shade val="50000"/>
+                    </a:schemeClr>
+                  </a:lnRef>
+                  <a:fillRef idx="1">
+                    <a:schemeClr val="accent1"/>
+                  </a:fillRef>
+                  <a:effectRef idx="0">
+                    <a:schemeClr val="accent1"/>
+                  </a:effectRef>
+                  <a:fontRef idx="minor">
+                    <a:schemeClr val="lt1"/>
+                  </a:fontRef>
+                </p:style>
+                <p:txBody>
+                  <a:bodyPr rtlCol="0" anchor="ctr"/>
+                  <a:lstStyle/>
+                  <a:p>
+                    <a:pPr algn="ctr"/>
+                    <a:endParaRPr lang="en-US"/>
+                  </a:p>
+                </p:txBody>
+              </p:sp>
+              <p:sp>
+                <p:nvSpPr>
+                  <p:cNvPr id="1025" name="Rectangle 1024">
+                    <a:extLst>
+                      <a:ext uri="{FF2B5EF4-FFF2-40B4-BE49-F238E27FC236}">
+                        <a16:creationId xmlns:a16="http://schemas.microsoft.com/office/drawing/2014/main" id="{9F20B42B-9512-BB49-4F59-11A4D0326422}"/>
+                      </a:ext>
+                    </a:extLst>
+                  </p:cNvPr>
+                  <p:cNvSpPr/>
+                  <p:nvPr/>
+                </p:nvSpPr>
+                <p:spPr>
+                  <a:xfrm>
+                    <a:off x="6079668" y="8214641"/>
+                    <a:ext cx="2209801" cy="2072359"/>
+                  </a:xfrm>
+                  <a:prstGeom prst="rect">
+                    <a:avLst/>
+                  </a:prstGeom>
+                  <a:noFill/>
+                  <a:ln w="57150">
+                    <a:solidFill>
+                      <a:srgbClr val="AD9335"/>
+                    </a:solidFill>
+                  </a:ln>
+                </p:spPr>
+                <p:style>
+                  <a:lnRef idx="2">
+                    <a:schemeClr val="accent1">
+                      <a:shade val="50000"/>
+                    </a:schemeClr>
+                  </a:lnRef>
+                  <a:fillRef idx="1">
+                    <a:schemeClr val="accent1"/>
+                  </a:fillRef>
+                  <a:effectRef idx="0">
+                    <a:schemeClr val="accent1"/>
+                  </a:effectRef>
+                  <a:fontRef idx="minor">
+                    <a:schemeClr val="lt1"/>
+                  </a:fontRef>
+                </p:style>
+                <p:txBody>
+                  <a:bodyPr rtlCol="0" anchor="ctr"/>
+                  <a:lstStyle/>
+                  <a:p>
+                    <a:pPr algn="ctr"/>
+                    <a:endParaRPr lang="en-US"/>
+                  </a:p>
+                </p:txBody>
+              </p:sp>
+              <p:sp>
+                <p:nvSpPr>
+                  <p:cNvPr id="1026" name="Rectangle 1025">
+                    <a:extLst>
+                      <a:ext uri="{FF2B5EF4-FFF2-40B4-BE49-F238E27FC236}">
+                        <a16:creationId xmlns:a16="http://schemas.microsoft.com/office/drawing/2014/main" id="{DE5C81FB-2A8D-A005-8B1C-169458704852}"/>
+                      </a:ext>
+                    </a:extLst>
+                  </p:cNvPr>
+                  <p:cNvSpPr/>
+                  <p:nvPr/>
+                </p:nvSpPr>
+                <p:spPr>
+                  <a:xfrm>
+                    <a:off x="8516357" y="8214641"/>
+                    <a:ext cx="1806923" cy="2072359"/>
+                  </a:xfrm>
+                  <a:prstGeom prst="rect">
+                    <a:avLst/>
+                  </a:prstGeom>
+                  <a:noFill/>
+                  <a:ln w="57150">
+                    <a:solidFill>
+                      <a:srgbClr val="214A2B"/>
+                    </a:solidFill>
+                  </a:ln>
+                </p:spPr>
+                <p:style>
+                  <a:lnRef idx="2">
+                    <a:schemeClr val="accent1">
+                      <a:shade val="50000"/>
+                    </a:schemeClr>
+                  </a:lnRef>
+                  <a:fillRef idx="1">
+                    <a:schemeClr val="accent1"/>
+                  </a:fillRef>
+                  <a:effectRef idx="0">
+                    <a:schemeClr val="accent1"/>
+                  </a:effectRef>
+                  <a:fontRef idx="minor">
+                    <a:schemeClr val="lt1"/>
+                  </a:fontRef>
+                </p:style>
+                <p:txBody>
+                  <a:bodyPr rtlCol="0" anchor="ctr"/>
+                  <a:lstStyle/>
+                  <a:p>
+                    <a:pPr algn="ctr"/>
+                    <a:endParaRPr lang="en-US"/>
+                  </a:p>
+                </p:txBody>
+              </p:sp>
+              <p:sp>
+                <p:nvSpPr>
+                  <p:cNvPr id="1027" name="TextBox 1026">
+                    <a:extLst>
+                      <a:ext uri="{FF2B5EF4-FFF2-40B4-BE49-F238E27FC236}">
+                        <a16:creationId xmlns:a16="http://schemas.microsoft.com/office/drawing/2014/main" id="{09B9D4B3-825A-6240-B76A-180647AC14FF}"/>
                       </a:ext>
                     </a:extLst>
                   </p:cNvPr>
@@ -4751,8 +5625,8 @@
                 </p:nvSpPr>
                 <p:spPr>
                   <a:xfrm>
-                    <a:off x="5924325" y="18335237"/>
-                    <a:ext cx="2668307" cy="584775"/>
+                    <a:off x="1101908" y="7662833"/>
+                    <a:ext cx="1750958" cy="253253"/>
                   </a:xfrm>
                   <a:prstGeom prst="rect">
                     <a:avLst/>
@@ -4760,41 +5634,24 @@
                   <a:noFill/>
                 </p:spPr>
                 <p:txBody>
-                  <a:bodyPr wrap="square">
+                  <a:bodyPr wrap="square" rtlCol="0">
                     <a:spAutoFit/>
                   </a:bodyPr>
                   <a:lstStyle/>
                   <a:p>
-                    <a:pPr algn="ctr" rtl="0">
-                      <a:spcBef>
-                        <a:spcPts val="0"/>
-                      </a:spcBef>
-                      <a:spcAft>
-                        <a:spcPts val="0"/>
-                      </a:spcAft>
-                    </a:pPr>
                     <a:r>
-                      <a:rPr lang="en-US" sz="3200" b="1" i="0" u="none" strike="noStrike" dirty="0">
-                        <a:solidFill>
-                          <a:srgbClr val="AD9335"/>
-                        </a:solidFill>
-                        <a:effectLst/>
-                        <a:latin typeface="Arial" panose="020B0604020202020204" pitchFamily="34" charset="0"/>
-                      </a:rPr>
-                      <a:t>Transition </a:t>
+                      <a:rPr lang="en-US" sz="1800" dirty="0"/>
+                      <a:t>GCReW</a:t>
                     </a:r>
-                    <a:endParaRPr lang="en-US" b="0" dirty="0">
-                      <a:effectLst/>
-                    </a:endParaRPr>
                   </a:p>
                 </p:txBody>
               </p:sp>
               <p:sp>
                 <p:nvSpPr>
-                  <p:cNvPr id="26" name="TextBox 25">
+                  <p:cNvPr id="1028" name="TextBox 1027">
                     <a:extLst>
                       <a:ext uri="{FF2B5EF4-FFF2-40B4-BE49-F238E27FC236}">
-                        <a16:creationId xmlns:a16="http://schemas.microsoft.com/office/drawing/2014/main" id="{484190F2-EFC3-A118-D2D7-FB24CCBD39B4}"/>
+                        <a16:creationId xmlns:a16="http://schemas.microsoft.com/office/drawing/2014/main" id="{21EEE5BE-6B05-FC7D-1F1A-67A39BAA5CDA}"/>
                       </a:ext>
                     </a:extLst>
                   </p:cNvPr>
@@ -4803,8 +5660,8 @@
                 </p:nvSpPr>
                 <p:spPr>
                   <a:xfrm>
-                    <a:off x="3615900" y="18327135"/>
-                    <a:ext cx="2015164" cy="584775"/>
+                    <a:off x="1261457" y="8174021"/>
+                    <a:ext cx="1750958" cy="253253"/>
                   </a:xfrm>
                   <a:prstGeom prst="rect">
                     <a:avLst/>
@@ -4812,39 +5669,24 @@
                   <a:noFill/>
                 </p:spPr>
                 <p:txBody>
-                  <a:bodyPr wrap="square">
+                  <a:bodyPr wrap="square" rtlCol="0">
                     <a:spAutoFit/>
                   </a:bodyPr>
                   <a:lstStyle/>
                   <a:p>
-                    <a:pPr algn="ctr" rtl="0">
-                      <a:spcBef>
-                        <a:spcPts val="0"/>
-                      </a:spcBef>
-                      <a:spcAft>
-                        <a:spcPts val="0"/>
-                      </a:spcAft>
-                    </a:pPr>
                     <a:r>
-                      <a:rPr lang="en-US" sz="3200" b="1" i="0" u="none" strike="noStrike" dirty="0">
-                        <a:solidFill>
-                          <a:srgbClr val="7F7F7F"/>
-                        </a:solidFill>
-                        <a:effectLst/>
-                        <a:latin typeface="Arial" panose="020B0604020202020204" pitchFamily="34" charset="0"/>
-                      </a:rPr>
-                      <a:t>Upland </a:t>
+                      <a:rPr lang="en-US" sz="1800" dirty="0"/>
+                      <a:t>Money Stump</a:t>
                     </a:r>
-                    <a:endParaRPr lang="en-US" dirty="0"/>
                   </a:p>
                 </p:txBody>
               </p:sp>
               <p:sp>
                 <p:nvSpPr>
-                  <p:cNvPr id="27" name="TextBox 26">
+                  <p:cNvPr id="1029" name="TextBox 1028">
                     <a:extLst>
                       <a:ext uri="{FF2B5EF4-FFF2-40B4-BE49-F238E27FC236}">
-                        <a16:creationId xmlns:a16="http://schemas.microsoft.com/office/drawing/2014/main" id="{E3FB73FF-BFA6-26DB-AA0A-F51D66FFA661}"/>
+                        <a16:creationId xmlns:a16="http://schemas.microsoft.com/office/drawing/2014/main" id="{C7415B56-3138-683E-A33F-94BF1FC8C347}"/>
                       </a:ext>
                     </a:extLst>
                   </p:cNvPr>
@@ -4853,8 +5695,8 @@
                 </p:nvSpPr>
                 <p:spPr>
                   <a:xfrm>
-                    <a:off x="8346715" y="18354655"/>
-                    <a:ext cx="2209800" cy="584775"/>
+                    <a:off x="1778391" y="9662022"/>
+                    <a:ext cx="1750958" cy="253253"/>
                   </a:xfrm>
                   <a:prstGeom prst="rect">
                     <a:avLst/>
@@ -4862,662 +5704,57 @@
                   <a:noFill/>
                 </p:spPr>
                 <p:txBody>
-                  <a:bodyPr wrap="square">
+                  <a:bodyPr wrap="square" rtlCol="0">
                     <a:spAutoFit/>
                   </a:bodyPr>
                   <a:lstStyle/>
                   <a:p>
-                    <a:pPr algn="ctr" rtl="0">
-                      <a:spcBef>
-                        <a:spcPts val="0"/>
-                      </a:spcBef>
-                      <a:spcAft>
-                        <a:spcPts val="0"/>
-                      </a:spcAft>
-                    </a:pPr>
                     <a:r>
-                      <a:rPr lang="en-US" sz="3200" b="1" i="0" u="none" strike="noStrike" dirty="0">
-                        <a:solidFill>
-                          <a:srgbClr val="214A2B"/>
-                        </a:solidFill>
-                        <a:effectLst/>
-                        <a:latin typeface="Arial" panose="020B0604020202020204" pitchFamily="34" charset="0"/>
-                      </a:rPr>
-                      <a:t>Wetland </a:t>
+                      <a:rPr lang="en-US" sz="1800" dirty="0"/>
+                      <a:t>Goodwin Islands</a:t>
                     </a:r>
-                    <a:endParaRPr lang="en-US" dirty="0"/>
                   </a:p>
                 </p:txBody>
               </p:sp>
-              <p:grpSp>
-                <p:nvGrpSpPr>
-                  <p:cNvPr id="28" name="Group 27">
+              <p:sp>
+                <p:nvSpPr>
+                  <p:cNvPr id="1030" name="TextBox 1029">
                     <a:extLst>
                       <a:ext uri="{FF2B5EF4-FFF2-40B4-BE49-F238E27FC236}">
-                        <a16:creationId xmlns:a16="http://schemas.microsoft.com/office/drawing/2014/main" id="{971C545D-FDC3-D326-1EAC-5618EEB032BF}"/>
+                        <a16:creationId xmlns:a16="http://schemas.microsoft.com/office/drawing/2014/main" id="{65E00C91-BBF6-45C7-C690-D1D7A6D871AE}"/>
                       </a:ext>
                     </a:extLst>
                   </p:cNvPr>
-                  <p:cNvGrpSpPr/>
+                  <p:cNvSpPr txBox="1"/>
                   <p:nvPr/>
-                </p:nvGrpSpPr>
-                <p:grpSpPr>
+                </p:nvSpPr>
+                <p:spPr>
                   <a:xfrm>
-                    <a:off x="928742" y="15582937"/>
-                    <a:ext cx="9424200" cy="3179751"/>
-                    <a:chOff x="899080" y="7578118"/>
-                    <a:chExt cx="9424200" cy="3179751"/>
+                    <a:off x="1014980" y="9118251"/>
+                    <a:ext cx="1750958" cy="253253"/>
                   </a:xfrm>
-                </p:grpSpPr>
-                <p:pic>
-                  <p:nvPicPr>
-                    <p:cNvPr id="29" name="Picture 14">
-                      <a:extLst>
-                        <a:ext uri="{FF2B5EF4-FFF2-40B4-BE49-F238E27FC236}">
-                          <a16:creationId xmlns:a16="http://schemas.microsoft.com/office/drawing/2014/main" id="{5D396374-1D6A-7D31-B4E5-8759728546FC}"/>
-                        </a:ext>
-                      </a:extLst>
-                    </p:cNvPr>
-                    <p:cNvPicPr>
-                      <a:picLocks noChangeAspect="1" noChangeArrowheads="1"/>
-                    </p:cNvPicPr>
-                    <p:nvPr/>
-                  </p:nvPicPr>
-                  <p:blipFill rotWithShape="1">
-                    <a:blip r:embed="rId7">
-                      <a:extLst>
-                        <a:ext uri="{28A0092B-C50C-407E-A947-70E740481C1C}">
-                          <a14:useLocalDpi xmlns:a14="http://schemas.microsoft.com/office/drawing/2010/main" val="0"/>
-                        </a:ext>
-                      </a:extLst>
-                    </a:blip>
-                    <a:srcRect l="23500" t="37555" r="55500" b="10000"/>
-                    <a:stretch/>
-                  </p:blipFill>
-                  <p:spPr bwMode="auto">
-                    <a:xfrm>
-                      <a:off x="899080" y="7578118"/>
-                      <a:ext cx="2263551" cy="3179751"/>
-                    </a:xfrm>
-                    <a:prstGeom prst="rect">
-                      <a:avLst/>
-                    </a:prstGeom>
-                    <a:noFill/>
-                    <a:ln>
-                      <a:solidFill>
-                        <a:schemeClr val="tx1"/>
-                      </a:solidFill>
-                    </a:ln>
-                    <a:extLst>
-                      <a:ext uri="{909E8E84-426E-40DD-AFC4-6F175D3DCCD1}">
-                        <a14:hiddenFill xmlns:a14="http://schemas.microsoft.com/office/drawing/2010/main">
-                          <a:solidFill>
-                            <a:srgbClr val="FFFFFF"/>
-                          </a:solidFill>
-                        </a14:hiddenFill>
-                      </a:ext>
-                    </a:extLst>
-                  </p:spPr>
-                </p:pic>
-                <p:pic>
-                  <p:nvPicPr>
-                    <p:cNvPr id="30" name="Picture 16">
-                      <a:extLst>
-                        <a:ext uri="{FF2B5EF4-FFF2-40B4-BE49-F238E27FC236}">
-                          <a16:creationId xmlns:a16="http://schemas.microsoft.com/office/drawing/2014/main" id="{2E43BF24-48A1-D61A-62BA-CC3D09328484}"/>
-                        </a:ext>
-                      </a:extLst>
-                    </p:cNvPr>
-                    <p:cNvPicPr>
-                      <a:picLocks noChangeAspect="1" noChangeArrowheads="1"/>
-                    </p:cNvPicPr>
-                    <p:nvPr/>
-                  </p:nvPicPr>
-                  <p:blipFill rotWithShape="1">
-                    <a:blip r:embed="rId8" cstate="print">
-                      <a:extLst>
-                        <a:ext uri="{28A0092B-C50C-407E-A947-70E740481C1C}">
-                          <a14:useLocalDpi xmlns:a14="http://schemas.microsoft.com/office/drawing/2010/main" val="0"/>
-                        </a:ext>
-                      </a:extLst>
-                    </a:blip>
-                    <a:srcRect t="28816" b="28777"/>
-                    <a:stretch/>
-                  </p:blipFill>
-                  <p:spPr bwMode="auto">
-                    <a:xfrm>
-                      <a:off x="3657600" y="8315169"/>
-                      <a:ext cx="6553200" cy="1851522"/>
-                    </a:xfrm>
-                    <a:prstGeom prst="rect">
-                      <a:avLst/>
-                    </a:prstGeom>
-                    <a:noFill/>
-                    <a:extLst>
-                      <a:ext uri="{909E8E84-426E-40DD-AFC4-6F175D3DCCD1}">
-                        <a14:hiddenFill xmlns:a14="http://schemas.microsoft.com/office/drawing/2010/main">
-                          <a:solidFill>
-                            <a:srgbClr val="FFFFFF"/>
-                          </a:solidFill>
-                        </a14:hiddenFill>
-                      </a:ext>
-                    </a:extLst>
-                  </p:spPr>
-                </p:pic>
-                <p:sp>
-                  <p:nvSpPr>
-                    <p:cNvPr id="31" name="Isosceles Triangle 9">
-                      <a:extLst>
-                        <a:ext uri="{FF2B5EF4-FFF2-40B4-BE49-F238E27FC236}">
-                          <a16:creationId xmlns:a16="http://schemas.microsoft.com/office/drawing/2014/main" id="{9187A6BA-BC5B-ADEA-5C80-21A90D319C6D}"/>
-                        </a:ext>
-                      </a:extLst>
-                    </p:cNvPr>
-                    <p:cNvSpPr/>
-                    <p:nvPr/>
-                  </p:nvSpPr>
-                  <p:spPr>
-                    <a:xfrm rot="16200000">
-                      <a:off x="2022821" y="8767998"/>
-                      <a:ext cx="2072359" cy="965647"/>
-                    </a:xfrm>
-                    <a:custGeom>
-                      <a:avLst/>
-                      <a:gdLst>
-                        <a:gd name="connsiteX0" fmla="*/ 0 w 1858996"/>
-                        <a:gd name="connsiteY0" fmla="*/ 1119526 h 1119526"/>
-                        <a:gd name="connsiteX1" fmla="*/ 929498 w 1858996"/>
-                        <a:gd name="connsiteY1" fmla="*/ 0 h 1119526"/>
-                        <a:gd name="connsiteX2" fmla="*/ 1858996 w 1858996"/>
-                        <a:gd name="connsiteY2" fmla="*/ 1119526 h 1119526"/>
-                        <a:gd name="connsiteX3" fmla="*/ 0 w 1858996"/>
-                        <a:gd name="connsiteY3" fmla="*/ 1119526 h 1119526"/>
-                        <a:gd name="connsiteX0" fmla="*/ 0 w 1858996"/>
-                        <a:gd name="connsiteY0" fmla="*/ 1081426 h 1081426"/>
-                        <a:gd name="connsiteX1" fmla="*/ 1405748 w 1858996"/>
-                        <a:gd name="connsiteY1" fmla="*/ 0 h 1081426"/>
-                        <a:gd name="connsiteX2" fmla="*/ 1858996 w 1858996"/>
-                        <a:gd name="connsiteY2" fmla="*/ 1081426 h 1081426"/>
-                        <a:gd name="connsiteX3" fmla="*/ 0 w 1858996"/>
-                        <a:gd name="connsiteY3" fmla="*/ 1081426 h 1081426"/>
-                      </a:gdLst>
-                      <a:ahLst/>
-                      <a:cxnLst>
-                        <a:cxn ang="0">
-                          <a:pos x="connsiteX0" y="connsiteY0"/>
-                        </a:cxn>
-                        <a:cxn ang="0">
-                          <a:pos x="connsiteX1" y="connsiteY1"/>
-                        </a:cxn>
-                        <a:cxn ang="0">
-                          <a:pos x="connsiteX2" y="connsiteY2"/>
-                        </a:cxn>
-                        <a:cxn ang="0">
-                          <a:pos x="connsiteX3" y="connsiteY3"/>
-                        </a:cxn>
-                      </a:cxnLst>
-                      <a:rect l="l" t="t" r="r" b="b"/>
-                      <a:pathLst>
-                        <a:path w="1858996" h="1081426">
-                          <a:moveTo>
-                            <a:pt x="0" y="1081426"/>
-                          </a:moveTo>
-                          <a:lnTo>
-                            <a:pt x="1405748" y="0"/>
-                          </a:lnTo>
-                          <a:lnTo>
-                            <a:pt x="1858996" y="1081426"/>
-                          </a:lnTo>
-                          <a:lnTo>
-                            <a:pt x="0" y="1081426"/>
-                          </a:lnTo>
-                          <a:close/>
-                        </a:path>
-                      </a:pathLst>
-                    </a:custGeom>
-                    <a:solidFill>
-                      <a:srgbClr val="A6A6A6">
-                        <a:alpha val="60000"/>
-                      </a:srgbClr>
-                    </a:solidFill>
-                    <a:ln>
-                      <a:solidFill>
-                        <a:schemeClr val="tx1">
-                          <a:lumMod val="50000"/>
-                          <a:lumOff val="50000"/>
-                        </a:schemeClr>
-                      </a:solidFill>
-                    </a:ln>
-                  </p:spPr>
-                  <p:style>
-                    <a:lnRef idx="2">
-                      <a:schemeClr val="accent1">
-                        <a:shade val="50000"/>
-                      </a:schemeClr>
-                    </a:lnRef>
-                    <a:fillRef idx="1">
-                      <a:schemeClr val="accent1"/>
-                    </a:fillRef>
-                    <a:effectRef idx="0">
-                      <a:schemeClr val="accent1"/>
-                    </a:effectRef>
-                    <a:fontRef idx="minor">
-                      <a:schemeClr val="lt1"/>
-                    </a:fontRef>
-                  </p:style>
-                  <p:txBody>
-                    <a:bodyPr rtlCol="0" anchor="ctr"/>
-                    <a:lstStyle/>
-                    <a:p>
-                      <a:pPr algn="ctr"/>
-                      <a:endParaRPr lang="en-US"/>
-                    </a:p>
-                  </p:txBody>
-                </p:sp>
-                <p:sp>
-                  <p:nvSpPr>
-                    <p:cNvPr id="1024" name="Rectangle 1023">
-                      <a:extLst>
-                        <a:ext uri="{FF2B5EF4-FFF2-40B4-BE49-F238E27FC236}">
-                          <a16:creationId xmlns:a16="http://schemas.microsoft.com/office/drawing/2014/main" id="{534B1453-A12C-51C2-7D42-7A9A13707632}"/>
-                        </a:ext>
-                      </a:extLst>
-                    </p:cNvPr>
-                    <p:cNvSpPr/>
-                    <p:nvPr/>
-                  </p:nvSpPr>
-                  <p:spPr>
-                    <a:xfrm>
-                      <a:off x="3545120" y="8214640"/>
-                      <a:ext cx="2007627" cy="2072359"/>
-                    </a:xfrm>
-                    <a:prstGeom prst="rect">
-                      <a:avLst/>
-                    </a:prstGeom>
-                    <a:noFill/>
-                    <a:ln w="57150">
-                      <a:solidFill>
-                        <a:srgbClr val="777469"/>
-                      </a:solidFill>
-                    </a:ln>
-                  </p:spPr>
-                  <p:style>
-                    <a:lnRef idx="2">
-                      <a:schemeClr val="accent1">
-                        <a:shade val="50000"/>
-                      </a:schemeClr>
-                    </a:lnRef>
-                    <a:fillRef idx="1">
-                      <a:schemeClr val="accent1"/>
-                    </a:fillRef>
-                    <a:effectRef idx="0">
-                      <a:schemeClr val="accent1"/>
-                    </a:effectRef>
-                    <a:fontRef idx="minor">
-                      <a:schemeClr val="lt1"/>
-                    </a:fontRef>
-                  </p:style>
-                  <p:txBody>
-                    <a:bodyPr rtlCol="0" anchor="ctr"/>
-                    <a:lstStyle/>
-                    <a:p>
-                      <a:pPr algn="ctr"/>
-                      <a:endParaRPr lang="en-US"/>
-                    </a:p>
-                  </p:txBody>
-                </p:sp>
-                <p:sp>
-                  <p:nvSpPr>
-                    <p:cNvPr id="1025" name="Rectangle 1024">
-                      <a:extLst>
-                        <a:ext uri="{FF2B5EF4-FFF2-40B4-BE49-F238E27FC236}">
-                          <a16:creationId xmlns:a16="http://schemas.microsoft.com/office/drawing/2014/main" id="{9F20B42B-9512-BB49-4F59-11A4D0326422}"/>
-                        </a:ext>
-                      </a:extLst>
-                    </p:cNvPr>
-                    <p:cNvSpPr/>
-                    <p:nvPr/>
-                  </p:nvSpPr>
-                  <p:spPr>
-                    <a:xfrm>
-                      <a:off x="6079668" y="8214641"/>
-                      <a:ext cx="2209801" cy="2072359"/>
-                    </a:xfrm>
-                    <a:prstGeom prst="rect">
-                      <a:avLst/>
-                    </a:prstGeom>
-                    <a:noFill/>
-                    <a:ln w="57150">
-                      <a:solidFill>
-                        <a:srgbClr val="AD9335"/>
-                      </a:solidFill>
-                    </a:ln>
-                  </p:spPr>
-                  <p:style>
-                    <a:lnRef idx="2">
-                      <a:schemeClr val="accent1">
-                        <a:shade val="50000"/>
-                      </a:schemeClr>
-                    </a:lnRef>
-                    <a:fillRef idx="1">
-                      <a:schemeClr val="accent1"/>
-                    </a:fillRef>
-                    <a:effectRef idx="0">
-                      <a:schemeClr val="accent1"/>
-                    </a:effectRef>
-                    <a:fontRef idx="minor">
-                      <a:schemeClr val="lt1"/>
-                    </a:fontRef>
-                  </p:style>
-                  <p:txBody>
-                    <a:bodyPr rtlCol="0" anchor="ctr"/>
-                    <a:lstStyle/>
-                    <a:p>
-                      <a:pPr algn="ctr"/>
-                      <a:endParaRPr lang="en-US"/>
-                    </a:p>
-                  </p:txBody>
-                </p:sp>
-                <p:sp>
-                  <p:nvSpPr>
-                    <p:cNvPr id="1026" name="Rectangle 1025">
-                      <a:extLst>
-                        <a:ext uri="{FF2B5EF4-FFF2-40B4-BE49-F238E27FC236}">
-                          <a16:creationId xmlns:a16="http://schemas.microsoft.com/office/drawing/2014/main" id="{DE5C81FB-2A8D-A005-8B1C-169458704852}"/>
-                        </a:ext>
-                      </a:extLst>
-                    </p:cNvPr>
-                    <p:cNvSpPr/>
-                    <p:nvPr/>
-                  </p:nvSpPr>
-                  <p:spPr>
-                    <a:xfrm>
-                      <a:off x="8516357" y="8214641"/>
-                      <a:ext cx="1806923" cy="2072359"/>
-                    </a:xfrm>
-                    <a:prstGeom prst="rect">
-                      <a:avLst/>
-                    </a:prstGeom>
-                    <a:noFill/>
-                    <a:ln w="57150">
-                      <a:solidFill>
-                        <a:srgbClr val="214A2B"/>
-                      </a:solidFill>
-                    </a:ln>
-                  </p:spPr>
-                  <p:style>
-                    <a:lnRef idx="2">
-                      <a:schemeClr val="accent1">
-                        <a:shade val="50000"/>
-                      </a:schemeClr>
-                    </a:lnRef>
-                    <a:fillRef idx="1">
-                      <a:schemeClr val="accent1"/>
-                    </a:fillRef>
-                    <a:effectRef idx="0">
-                      <a:schemeClr val="accent1"/>
-                    </a:effectRef>
-                    <a:fontRef idx="minor">
-                      <a:schemeClr val="lt1"/>
-                    </a:fontRef>
-                  </p:style>
-                  <p:txBody>
-                    <a:bodyPr rtlCol="0" anchor="ctr"/>
-                    <a:lstStyle/>
-                    <a:p>
-                      <a:pPr algn="ctr"/>
-                      <a:endParaRPr lang="en-US"/>
-                    </a:p>
-                  </p:txBody>
-                </p:sp>
-                <p:sp>
-                  <p:nvSpPr>
-                    <p:cNvPr id="1027" name="TextBox 1026">
-                      <a:extLst>
-                        <a:ext uri="{FF2B5EF4-FFF2-40B4-BE49-F238E27FC236}">
-                          <a16:creationId xmlns:a16="http://schemas.microsoft.com/office/drawing/2014/main" id="{09B9D4B3-825A-6240-B76A-180647AC14FF}"/>
-                        </a:ext>
-                      </a:extLst>
-                    </p:cNvPr>
-                    <p:cNvSpPr txBox="1"/>
-                    <p:nvPr/>
-                  </p:nvSpPr>
-                  <p:spPr>
-                    <a:xfrm>
-                      <a:off x="1101908" y="7662833"/>
-                      <a:ext cx="1750958" cy="253253"/>
-                    </a:xfrm>
-                    <a:prstGeom prst="rect">
-                      <a:avLst/>
-                    </a:prstGeom>
-                    <a:noFill/>
-                  </p:spPr>
-                  <p:txBody>
-                    <a:bodyPr wrap="square" rtlCol="0">
-                      <a:spAutoFit/>
-                    </a:bodyPr>
-                    <a:lstStyle/>
-                    <a:p>
-                      <a:r>
-                        <a:rPr lang="en-US" sz="1800" dirty="0"/>
-                        <a:t>GCReW</a:t>
-                      </a:r>
-                    </a:p>
-                  </p:txBody>
-                </p:sp>
-                <p:sp>
-                  <p:nvSpPr>
-                    <p:cNvPr id="1028" name="TextBox 1027">
-                      <a:extLst>
-                        <a:ext uri="{FF2B5EF4-FFF2-40B4-BE49-F238E27FC236}">
-                          <a16:creationId xmlns:a16="http://schemas.microsoft.com/office/drawing/2014/main" id="{21EEE5BE-6B05-FC7D-1F1A-67A39BAA5CDA}"/>
-                        </a:ext>
-                      </a:extLst>
-                    </p:cNvPr>
-                    <p:cNvSpPr txBox="1"/>
-                    <p:nvPr/>
-                  </p:nvSpPr>
-                  <p:spPr>
-                    <a:xfrm>
-                      <a:off x="1261457" y="8174021"/>
-                      <a:ext cx="1750958" cy="253253"/>
-                    </a:xfrm>
-                    <a:prstGeom prst="rect">
-                      <a:avLst/>
-                    </a:prstGeom>
-                    <a:noFill/>
-                  </p:spPr>
-                  <p:txBody>
-                    <a:bodyPr wrap="square" rtlCol="0">
-                      <a:spAutoFit/>
-                    </a:bodyPr>
-                    <a:lstStyle/>
-                    <a:p>
-                      <a:r>
-                        <a:rPr lang="en-US" sz="1800" dirty="0"/>
-                        <a:t>Money Stump</a:t>
-                      </a:r>
-                    </a:p>
-                  </p:txBody>
-                </p:sp>
-                <p:sp>
-                  <p:nvSpPr>
-                    <p:cNvPr id="1029" name="TextBox 1028">
-                      <a:extLst>
-                        <a:ext uri="{FF2B5EF4-FFF2-40B4-BE49-F238E27FC236}">
-                          <a16:creationId xmlns:a16="http://schemas.microsoft.com/office/drawing/2014/main" id="{C7415B56-3138-683E-A33F-94BF1FC8C347}"/>
-                        </a:ext>
-                      </a:extLst>
-                    </p:cNvPr>
-                    <p:cNvSpPr txBox="1"/>
-                    <p:nvPr/>
-                  </p:nvSpPr>
-                  <p:spPr>
-                    <a:xfrm>
-                      <a:off x="1778391" y="9662022"/>
-                      <a:ext cx="1750958" cy="253253"/>
-                    </a:xfrm>
-                    <a:prstGeom prst="rect">
-                      <a:avLst/>
-                    </a:prstGeom>
-                    <a:noFill/>
-                  </p:spPr>
-                  <p:txBody>
-                    <a:bodyPr wrap="square" rtlCol="0">
-                      <a:spAutoFit/>
-                    </a:bodyPr>
-                    <a:lstStyle/>
-                    <a:p>
-                      <a:r>
-                        <a:rPr lang="en-US" sz="1800" dirty="0"/>
-                        <a:t>Goodwin Islands</a:t>
-                      </a:r>
-                    </a:p>
-                  </p:txBody>
-                </p:sp>
-                <p:sp>
-                  <p:nvSpPr>
-                    <p:cNvPr id="1030" name="TextBox 1029">
-                      <a:extLst>
-                        <a:ext uri="{FF2B5EF4-FFF2-40B4-BE49-F238E27FC236}">
-                          <a16:creationId xmlns:a16="http://schemas.microsoft.com/office/drawing/2014/main" id="{65E00C91-BBF6-45C7-C690-D1D7A6D871AE}"/>
-                        </a:ext>
-                      </a:extLst>
-                    </p:cNvPr>
-                    <p:cNvSpPr txBox="1"/>
-                    <p:nvPr/>
-                  </p:nvSpPr>
-                  <p:spPr>
-                    <a:xfrm>
-                      <a:off x="1014980" y="9118251"/>
-                      <a:ext cx="1750958" cy="253253"/>
-                    </a:xfrm>
-                    <a:prstGeom prst="rect">
-                      <a:avLst/>
-                    </a:prstGeom>
-                    <a:noFill/>
-                  </p:spPr>
-                  <p:txBody>
-                    <a:bodyPr wrap="square" rtlCol="0">
-                      <a:spAutoFit/>
-                    </a:bodyPr>
-                    <a:lstStyle/>
-                    <a:p>
-                      <a:r>
-                        <a:rPr lang="en-US" sz="1800" dirty="0"/>
-                        <a:t>Sweethall</a:t>
-                      </a:r>
-                    </a:p>
-                  </p:txBody>
-                </p:sp>
-              </p:grpSp>
+                  <a:prstGeom prst="rect">
+                    <a:avLst/>
+                  </a:prstGeom>
+                  <a:noFill/>
+                </p:spPr>
+                <p:txBody>
+                  <a:bodyPr wrap="square" rtlCol="0">
+                    <a:spAutoFit/>
+                  </a:bodyPr>
+                  <a:lstStyle/>
+                  <a:p>
+                    <a:r>
+                      <a:rPr lang="en-US" sz="1800" dirty="0"/>
+                      <a:t>Sweethall</a:t>
+                    </a:r>
+                  </a:p>
+                </p:txBody>
+              </p:sp>
             </p:grpSp>
-            <p:pic>
-              <p:nvPicPr>
-                <p:cNvPr id="24" name="Picture 23">
-                  <a:extLst>
-                    <a:ext uri="{FF2B5EF4-FFF2-40B4-BE49-F238E27FC236}">
-                      <a16:creationId xmlns:a16="http://schemas.microsoft.com/office/drawing/2014/main" id="{04440FAB-EE3F-FD41-C5C0-9224F3ADC6B1}"/>
-                    </a:ext>
-                  </a:extLst>
-                </p:cNvPr>
-                <p:cNvPicPr>
-                  <a:picLocks noChangeAspect="1"/>
-                </p:cNvPicPr>
-                <p:nvPr/>
-              </p:nvPicPr>
-              <p:blipFill>
-                <a:blip r:embed="rId9"/>
-                <a:stretch>
-                  <a:fillRect/>
-                </a:stretch>
-              </p:blipFill>
-              <p:spPr>
-                <a:xfrm>
-                  <a:off x="5314931" y="9397100"/>
-                  <a:ext cx="3920968" cy="492320"/>
-                </a:xfrm>
-                <a:prstGeom prst="rect">
-                  <a:avLst/>
-                </a:prstGeom>
-              </p:spPr>
-            </p:pic>
           </p:grpSp>
         </p:grpSp>
-        <p:pic>
-          <p:nvPicPr>
-            <p:cNvPr id="19" name="Picture 18">
-              <a:extLst>
-                <a:ext uri="{FF2B5EF4-FFF2-40B4-BE49-F238E27FC236}">
-                  <a16:creationId xmlns:a16="http://schemas.microsoft.com/office/drawing/2014/main" id="{6F6CCBC1-FB78-D641-2558-44EE723465AE}"/>
-                </a:ext>
-              </a:extLst>
-            </p:cNvPr>
-            <p:cNvPicPr>
-              <a:picLocks noChangeAspect="1"/>
-            </p:cNvPicPr>
-            <p:nvPr/>
-          </p:nvPicPr>
-          <p:blipFill>
-            <a:blip r:embed="rId10"/>
-            <a:stretch>
-              <a:fillRect/>
-            </a:stretch>
-          </p:blipFill>
-          <p:spPr>
-            <a:xfrm>
-              <a:off x="3968630" y="10162931"/>
-              <a:ext cx="6188276" cy="3169612"/>
-            </a:xfrm>
-            <a:prstGeom prst="rect">
-              <a:avLst/>
-            </a:prstGeom>
-          </p:spPr>
-        </p:pic>
       </p:grpSp>
-      <p:cxnSp>
-        <p:nvCxnSpPr>
-          <p:cNvPr id="1032" name="Straight Connector 1031">
-            <a:extLst>
-              <a:ext uri="{FF2B5EF4-FFF2-40B4-BE49-F238E27FC236}">
-                <a16:creationId xmlns:a16="http://schemas.microsoft.com/office/drawing/2014/main" id="{15AF56DC-5EE6-BFA8-237F-07B49EFF2D22}"/>
-              </a:ext>
-            </a:extLst>
-          </p:cNvPr>
-          <p:cNvCxnSpPr>
-            <a:cxnSpLocks/>
-          </p:cNvCxnSpPr>
-          <p:nvPr/>
-        </p:nvCxnSpPr>
-        <p:spPr>
-          <a:xfrm>
-            <a:off x="18169647" y="28966102"/>
-            <a:ext cx="15862150" cy="0"/>
-          </a:xfrm>
-          <a:prstGeom prst="line">
-            <a:avLst/>
-          </a:prstGeom>
-          <a:ln>
-            <a:solidFill>
-              <a:srgbClr val="75BFE2"/>
-            </a:solidFill>
-          </a:ln>
-        </p:spPr>
-        <p:style>
-          <a:lnRef idx="1">
-            <a:schemeClr val="accent1"/>
-          </a:lnRef>
-          <a:fillRef idx="0">
-            <a:schemeClr val="accent1"/>
-          </a:fillRef>
-          <a:effectRef idx="0">
-            <a:schemeClr val="accent1"/>
-          </a:effectRef>
-          <a:fontRef idx="minor">
-            <a:schemeClr val="tx1"/>
-          </a:fontRef>
-        </p:style>
-      </p:cxnSp>
       <p:sp>
         <p:nvSpPr>
           <p:cNvPr id="1033" name="Text Placeholder 3">
@@ -5534,8 +5771,8 @@
         </p:nvSpPr>
         <p:spPr>
           <a:xfrm>
-            <a:off x="18669260" y="29593497"/>
-            <a:ext cx="13411199" cy="2746844"/>
+            <a:off x="18624523" y="27832532"/>
+            <a:ext cx="14861984" cy="3400317"/>
           </a:xfrm>
           <a:prstGeom prst="rect">
             <a:avLst/>
@@ -5701,8 +5938,45 @@
             </a:pPr>
             <a:r>
               <a:rPr lang="en-US" dirty="0"/>
-              <a:t>Sulfate varies by depth, site, zone, and throughout the year</a:t>
-            </a:r>
+              <a:t>Porewater sulfate varies predictably across sites and zones, increasing from the upland forest to the wetland. </a:t>
+            </a:r>
+          </a:p>
+          <a:p>
+            <a:pPr marL="457200" indent="-457200">
+              <a:buFont typeface="Arial" pitchFamily="34" charset="0"/>
+              <a:buChar char="•"/>
+            </a:pPr>
+            <a:r>
+              <a:rPr lang="en-US" dirty="0"/>
+              <a:t>Porewater sulfate is moderated by salinity, water level/content, and electrical conductivity. </a:t>
+            </a:r>
+          </a:p>
+          <a:p>
+            <a:pPr marL="457200" indent="-457200">
+              <a:buFont typeface="Arial" pitchFamily="34" charset="0"/>
+              <a:buChar char="•"/>
+            </a:pPr>
+            <a:r>
+              <a:rPr lang="en-US" dirty="0"/>
+              <a:t>Sulfate varies less predictably across depths, as this effect varies by site and zone. </a:t>
+            </a:r>
+          </a:p>
+          <a:p>
+            <a:pPr marL="457200" indent="-457200">
+              <a:buFont typeface="Arial" pitchFamily="34" charset="0"/>
+              <a:buChar char="•"/>
+            </a:pPr>
+            <a:r>
+              <a:rPr lang="en-US" dirty="0"/>
+              <a:t>Sulfate increases throughout the season, and at one site, increases across years. </a:t>
+            </a:r>
+          </a:p>
+          <a:p>
+            <a:pPr marL="457200" indent="-457200">
+              <a:buFont typeface="Arial" pitchFamily="34" charset="0"/>
+              <a:buChar char="•"/>
+            </a:pPr>
+            <a:endParaRPr lang="en-US" dirty="0"/>
           </a:p>
           <a:p>
             <a:pPr marL="457200" indent="-457200">
@@ -5732,7 +6006,7 @@
         </p:nvSpPr>
         <p:spPr>
           <a:xfrm>
-            <a:off x="1574127" y="19173251"/>
+            <a:off x="1242798" y="15436171"/>
             <a:ext cx="15429360" cy="8155030"/>
           </a:xfrm>
           <a:prstGeom prst="rect">
@@ -5897,23 +6171,23 @@
               <a:buChar char="•"/>
             </a:pPr>
             <a:r>
-              <a:rPr lang="en-US" sz="3200" dirty="0"/>
+              <a:rPr lang="en-US" sz="2800" dirty="0"/>
               <a:t>Porewater was analyzed for </a:t>
             </a:r>
             <a:r>
-              <a:rPr lang="en-US" sz="3200" b="1" dirty="0"/>
+              <a:rPr lang="en-US" sz="2800" b="1" dirty="0"/>
               <a:t>SO</a:t>
             </a:r>
             <a:r>
-              <a:rPr lang="en-US" sz="3200" b="1" baseline="-25000" dirty="0"/>
+              <a:rPr lang="en-US" sz="2800" b="1" baseline="-25000" dirty="0"/>
               <a:t>4</a:t>
             </a:r>
             <a:r>
-              <a:rPr lang="en-US" sz="3200" b="1" baseline="30000" dirty="0"/>
+              <a:rPr lang="en-US" sz="2800" b="1" baseline="30000" dirty="0"/>
               <a:t>2-</a:t>
             </a:r>
             <a:r>
-              <a:rPr lang="en-US" sz="3200" dirty="0"/>
+              <a:rPr lang="en-US" sz="2800" dirty="0"/>
               <a:t> in 2,293 samples</a:t>
             </a:r>
           </a:p>
@@ -5923,8 +6197,8 @@
               <a:buChar char="•"/>
             </a:pPr>
             <a:r>
-              <a:rPr lang="en-US" sz="3200" dirty="0"/>
-              <a:t>Sulfate increased from Upland Forest through transition zones to the wetland</a:t>
+              <a:rPr lang="en-US" sz="2800" dirty="0"/>
+              <a:t>Sulfate increased from upland forest through transition zones to the wetland</a:t>
             </a:r>
           </a:p>
           <a:p>
@@ -5933,23 +6207,23 @@
               <a:buChar char="•"/>
             </a:pPr>
             <a:r>
-              <a:rPr lang="en-US" sz="3200" dirty="0"/>
+              <a:rPr lang="en-US" sz="2800" dirty="0"/>
               <a:t>Sulfate also increased from </a:t>
             </a:r>
             <a:r>
-              <a:rPr lang="en-US" sz="3200" dirty="0" err="1"/>
+              <a:rPr lang="en-US" sz="2800" dirty="0" err="1"/>
               <a:t>Sweethall</a:t>
             </a:r>
             <a:r>
-              <a:rPr lang="en-US" sz="3200" dirty="0"/>
+              <a:rPr lang="en-US" sz="2800" dirty="0"/>
               <a:t> site (oligohaline) to Goodwin Islands site (</a:t>
             </a:r>
             <a:r>
-              <a:rPr lang="en-US" sz="3200" dirty="0" err="1"/>
+              <a:rPr lang="en-US" sz="2800" dirty="0" err="1"/>
               <a:t>polyhaline</a:t>
             </a:r>
             <a:r>
-              <a:rPr lang="en-US" sz="3200" dirty="0"/>
+              <a:rPr lang="en-US" sz="2800" dirty="0"/>
               <a:t>). </a:t>
             </a:r>
           </a:p>
@@ -5959,7 +6233,7 @@
               <a:buChar char="•"/>
             </a:pPr>
             <a:r>
-              <a:rPr lang="en-US" sz="3200" dirty="0"/>
+              <a:rPr lang="en-US" sz="2800" dirty="0"/>
               <a:t>Surface water was a source of sulfate into these ecosystems. </a:t>
             </a:r>
           </a:p>
@@ -5994,7 +6268,7 @@
           <p:nvPr/>
         </p:nvPicPr>
         <p:blipFill>
-          <a:blip r:embed="rId11">
+          <a:blip r:embed="rId9">
             <a:extLst>
               <a:ext uri="{28A0092B-C50C-407E-A947-70E740481C1C}">
                 <a14:useLocalDpi xmlns:a14="http://schemas.microsoft.com/office/drawing/2010/main" val="0"/>
@@ -6008,20 +6282,247 @@
         </p:blipFill>
         <p:spPr>
           <a:xfrm>
-            <a:off x="472797" y="22829833"/>
-            <a:ext cx="14217136" cy="8155031"/>
+            <a:off x="2677555" y="18193266"/>
+            <a:ext cx="11541659" cy="6620362"/>
           </a:xfrm>
           <a:prstGeom prst="rect">
             <a:avLst/>
           </a:prstGeom>
         </p:spPr>
       </p:pic>
+      <p:pic>
+        <p:nvPicPr>
+          <p:cNvPr id="14" name="Picture 13" descr="A graph of water level and value&#10;&#10;AI-generated content may be incorrect.">
+            <a:extLst>
+              <a:ext uri="{FF2B5EF4-FFF2-40B4-BE49-F238E27FC236}">
+                <a16:creationId xmlns:a16="http://schemas.microsoft.com/office/drawing/2014/main" id="{37395166-1C97-2974-4774-B9647BFFD3B0}"/>
+              </a:ext>
+            </a:extLst>
+          </p:cNvPr>
+          <p:cNvPicPr>
+            <a:picLocks noChangeAspect="1"/>
+          </p:cNvPicPr>
+          <p:nvPr/>
+        </p:nvPicPr>
+        <p:blipFill>
+          <a:blip r:embed="rId10">
+            <a:extLst>
+              <a:ext uri="{28A0092B-C50C-407E-A947-70E740481C1C}">
+                <a14:useLocalDpi xmlns:a14="http://schemas.microsoft.com/office/drawing/2010/main" val="0"/>
+              </a:ext>
+            </a:extLst>
+          </a:blip>
+          <a:stretch>
+            <a:fillRect/>
+          </a:stretch>
+        </p:blipFill>
+        <p:spPr>
+          <a:xfrm>
+            <a:off x="1454042" y="26789484"/>
+            <a:ext cx="13716027" cy="5486411"/>
+          </a:xfrm>
+          <a:prstGeom prst="rect">
+            <a:avLst/>
+          </a:prstGeom>
+        </p:spPr>
+      </p:pic>
+      <p:sp>
+        <p:nvSpPr>
+          <p:cNvPr id="1035" name="Text Placeholder 3">
+            <a:extLst>
+              <a:ext uri="{FF2B5EF4-FFF2-40B4-BE49-F238E27FC236}">
+                <a16:creationId xmlns:a16="http://schemas.microsoft.com/office/drawing/2014/main" id="{8DA61A9E-9FD6-923F-C6C1-69FD27ACDB80}"/>
+              </a:ext>
+            </a:extLst>
+          </p:cNvPr>
+          <p:cNvSpPr txBox="1">
+            <a:spLocks/>
+          </p:cNvSpPr>
+          <p:nvPr/>
+        </p:nvSpPr>
+        <p:spPr>
+          <a:xfrm>
+            <a:off x="981439" y="24958265"/>
+            <a:ext cx="15095898" cy="2097650"/>
+          </a:xfrm>
+          <a:prstGeom prst="rect">
+            <a:avLst/>
+          </a:prstGeom>
+          <a:ln>
+            <a:noFill/>
+          </a:ln>
+        </p:spPr>
+        <p:txBody>
+          <a:bodyPr/>
+          <a:lstStyle>
+            <a:lvl1pPr marL="0" indent="0" algn="l" defTabSz="1654622" rtl="0" eaLnBrk="1" latinLnBrk="0" hangingPunct="1">
+              <a:spcBef>
+                <a:spcPct val="20000"/>
+              </a:spcBef>
+              <a:buFont typeface="Arial" pitchFamily="34" charset="0"/>
+              <a:buNone/>
+              <a:defRPr lang="en-US" sz="2850" kern="1200" dirty="0">
+                <a:solidFill>
+                  <a:schemeClr val="tx1"/>
+                </a:solidFill>
+                <a:latin typeface="Arial" panose="020B0604020202020204" pitchFamily="34" charset="0"/>
+                <a:ea typeface="+mn-ea"/>
+                <a:cs typeface="Arial" panose="020B0604020202020204" pitchFamily="34" charset="0"/>
+              </a:defRPr>
+            </a:lvl1pPr>
+            <a:lvl2pPr marL="1344381" indent="-517070" algn="l" defTabSz="1654622" rtl="0" eaLnBrk="1" latinLnBrk="0" hangingPunct="1">
+              <a:spcBef>
+                <a:spcPct val="20000"/>
+              </a:spcBef>
+              <a:buFont typeface="Arial" pitchFamily="34" charset="0"/>
+              <a:buChar char="–"/>
+              <a:defRPr sz="5067" kern="1200">
+                <a:solidFill>
+                  <a:schemeClr val="tx1"/>
+                </a:solidFill>
+                <a:latin typeface="+mn-lt"/>
+                <a:ea typeface="+mn-ea"/>
+                <a:cs typeface="+mn-cs"/>
+              </a:defRPr>
+            </a:lvl2pPr>
+            <a:lvl3pPr marL="2068278" indent="-413656" algn="l" defTabSz="1654622" rtl="0" eaLnBrk="1" latinLnBrk="0" hangingPunct="1">
+              <a:spcBef>
+                <a:spcPct val="20000"/>
+              </a:spcBef>
+              <a:buFont typeface="Arial" pitchFamily="34" charset="0"/>
+              <a:buChar char="•"/>
+              <a:defRPr sz="4328" kern="1200">
+                <a:solidFill>
+                  <a:schemeClr val="tx1"/>
+                </a:solidFill>
+                <a:latin typeface="+mn-lt"/>
+                <a:ea typeface="+mn-ea"/>
+                <a:cs typeface="+mn-cs"/>
+              </a:defRPr>
+            </a:lvl3pPr>
+            <a:lvl4pPr marL="2895590" indent="-413656" algn="l" defTabSz="1654622" rtl="0" eaLnBrk="1" latinLnBrk="0" hangingPunct="1">
+              <a:spcBef>
+                <a:spcPct val="20000"/>
+              </a:spcBef>
+              <a:buFont typeface="Arial" pitchFamily="34" charset="0"/>
+              <a:buChar char="–"/>
+              <a:defRPr sz="3695" kern="1200">
+                <a:solidFill>
+                  <a:schemeClr val="tx1"/>
+                </a:solidFill>
+                <a:latin typeface="+mn-lt"/>
+                <a:ea typeface="+mn-ea"/>
+                <a:cs typeface="+mn-cs"/>
+              </a:defRPr>
+            </a:lvl4pPr>
+            <a:lvl5pPr marL="3722900" indent="-413656" algn="l" defTabSz="1654622" rtl="0" eaLnBrk="1" latinLnBrk="0" hangingPunct="1">
+              <a:spcBef>
+                <a:spcPct val="20000"/>
+              </a:spcBef>
+              <a:buFont typeface="Arial" pitchFamily="34" charset="0"/>
+              <a:buChar char="»"/>
+              <a:defRPr sz="3695" kern="1200">
+                <a:solidFill>
+                  <a:schemeClr val="tx1"/>
+                </a:solidFill>
+                <a:latin typeface="+mn-lt"/>
+                <a:ea typeface="+mn-ea"/>
+                <a:cs typeface="+mn-cs"/>
+              </a:defRPr>
+            </a:lvl5pPr>
+            <a:lvl6pPr marL="4550212" indent="-413656" algn="l" defTabSz="1654622" rtl="0" eaLnBrk="1" latinLnBrk="0" hangingPunct="1">
+              <a:spcBef>
+                <a:spcPct val="20000"/>
+              </a:spcBef>
+              <a:buFont typeface="Arial" pitchFamily="34" charset="0"/>
+              <a:buChar char="•"/>
+              <a:defRPr sz="3695" kern="1200">
+                <a:solidFill>
+                  <a:schemeClr val="tx1"/>
+                </a:solidFill>
+                <a:latin typeface="+mn-lt"/>
+                <a:ea typeface="+mn-ea"/>
+                <a:cs typeface="+mn-cs"/>
+              </a:defRPr>
+            </a:lvl6pPr>
+            <a:lvl7pPr marL="5377522" indent="-413656" algn="l" defTabSz="1654622" rtl="0" eaLnBrk="1" latinLnBrk="0" hangingPunct="1">
+              <a:spcBef>
+                <a:spcPct val="20000"/>
+              </a:spcBef>
+              <a:buFont typeface="Arial" pitchFamily="34" charset="0"/>
+              <a:buChar char="•"/>
+              <a:defRPr sz="3695" kern="1200">
+                <a:solidFill>
+                  <a:schemeClr val="tx1"/>
+                </a:solidFill>
+                <a:latin typeface="+mn-lt"/>
+                <a:ea typeface="+mn-ea"/>
+                <a:cs typeface="+mn-cs"/>
+              </a:defRPr>
+            </a:lvl7pPr>
+            <a:lvl8pPr marL="6204835" indent="-413656" algn="l" defTabSz="1654622" rtl="0" eaLnBrk="1" latinLnBrk="0" hangingPunct="1">
+              <a:spcBef>
+                <a:spcPct val="20000"/>
+              </a:spcBef>
+              <a:buFont typeface="Arial" pitchFamily="34" charset="0"/>
+              <a:buChar char="•"/>
+              <a:defRPr sz="3695" kern="1200">
+                <a:solidFill>
+                  <a:schemeClr val="tx1"/>
+                </a:solidFill>
+                <a:latin typeface="+mn-lt"/>
+                <a:ea typeface="+mn-ea"/>
+                <a:cs typeface="+mn-cs"/>
+              </a:defRPr>
+            </a:lvl8pPr>
+            <a:lvl9pPr marL="7032146" indent="-413656" algn="l" defTabSz="1654622" rtl="0" eaLnBrk="1" latinLnBrk="0" hangingPunct="1">
+              <a:spcBef>
+                <a:spcPct val="20000"/>
+              </a:spcBef>
+              <a:buFont typeface="Arial" pitchFamily="34" charset="0"/>
+              <a:buChar char="•"/>
+              <a:defRPr sz="3695" kern="1200">
+                <a:solidFill>
+                  <a:schemeClr val="tx1"/>
+                </a:solidFill>
+                <a:latin typeface="+mn-lt"/>
+                <a:ea typeface="+mn-ea"/>
+                <a:cs typeface="+mn-cs"/>
+              </a:defRPr>
+            </a:lvl9pPr>
+          </a:lstStyle>
+          <a:p>
+            <a:r>
+              <a:rPr lang="en-US" sz="3600" b="1" dirty="0">
+                <a:solidFill>
+                  <a:srgbClr val="75BFE2"/>
+                </a:solidFill>
+              </a:rPr>
+              <a:t>Environmental variables</a:t>
+            </a:r>
+            <a:endParaRPr lang="en-US" b="1" dirty="0"/>
+          </a:p>
+          <a:p>
+            <a:pPr marL="457200" indent="-457200">
+              <a:buFont typeface="Arial" pitchFamily="34" charset="0"/>
+              <a:buChar char="•"/>
+            </a:pPr>
+            <a:r>
+              <a:rPr lang="en-US" dirty="0"/>
+              <a:t>Sulfate increases with increasing groundwater salinity, groundwater water level, soil electrical conductivity, and soil volumetric water content. </a:t>
+            </a:r>
+          </a:p>
+          <a:p>
+            <a:endParaRPr lang="en-US" dirty="0"/>
+          </a:p>
+        </p:txBody>
+      </p:sp>
       <p:cxnSp>
         <p:nvCxnSpPr>
-          <p:cNvPr id="1045" name="Straight Connector 1044">
+          <p:cNvPr id="21" name="Straight Connector 20">
             <a:extLst>
               <a:ext uri="{FF2B5EF4-FFF2-40B4-BE49-F238E27FC236}">
-                <a16:creationId xmlns:a16="http://schemas.microsoft.com/office/drawing/2014/main" id="{BB33F361-7DB9-04C2-C03A-778C0DF80E8F}"/>
+                <a16:creationId xmlns:a16="http://schemas.microsoft.com/office/drawing/2014/main" id="{4DACE8AF-5A3B-350F-CBBD-990A9C27B8D4}"/>
               </a:ext>
             </a:extLst>
           </p:cNvPr>
@@ -6031,436 +6532,28 @@
           <p:nvPr/>
         </p:nvCxnSpPr>
         <p:spPr>
-          <a:xfrm flipV="1">
-            <a:off x="20955000" y="18578843"/>
-            <a:ext cx="0" cy="3915238"/>
+          <a:xfrm>
+            <a:off x="863299" y="24744165"/>
+            <a:ext cx="15099634" cy="0"/>
           </a:xfrm>
           <a:prstGeom prst="line">
             <a:avLst/>
           </a:prstGeom>
-          <a:ln w="19050">
-            <a:prstDash val="lgDash"/>
+          <a:ln>
+            <a:solidFill>
+              <a:srgbClr val="75BFE2"/>
+            </a:solidFill>
           </a:ln>
         </p:spPr>
         <p:style>
           <a:lnRef idx="1">
-            <a:schemeClr val="dk1"/>
+            <a:schemeClr val="accent1"/>
           </a:lnRef>
           <a:fillRef idx="0">
-            <a:schemeClr val="dk1"/>
+            <a:schemeClr val="accent1"/>
           </a:fillRef>
           <a:effectRef idx="0">
-            <a:schemeClr val="dk1"/>
-          </a:effectRef>
-          <a:fontRef idx="minor">
-            <a:schemeClr val="tx1"/>
-          </a:fontRef>
-        </p:style>
-      </p:cxnSp>
-      <p:cxnSp>
-        <p:nvCxnSpPr>
-          <p:cNvPr id="1047" name="Straight Connector 1046">
-            <a:extLst>
-              <a:ext uri="{FF2B5EF4-FFF2-40B4-BE49-F238E27FC236}">
-                <a16:creationId xmlns:a16="http://schemas.microsoft.com/office/drawing/2014/main" id="{375CA06C-A251-4ED8-A38F-281C7D414E0B}"/>
-              </a:ext>
-            </a:extLst>
-          </p:cNvPr>
-          <p:cNvCxnSpPr>
-            <a:cxnSpLocks/>
-          </p:cNvCxnSpPr>
-          <p:nvPr/>
-        </p:nvCxnSpPr>
-        <p:spPr>
-          <a:xfrm flipV="1">
-            <a:off x="24307800" y="18578843"/>
-            <a:ext cx="0" cy="3915237"/>
-          </a:xfrm>
-          <a:prstGeom prst="line">
-            <a:avLst/>
-          </a:prstGeom>
-          <a:ln w="19050">
-            <a:prstDash val="lgDash"/>
-          </a:ln>
-        </p:spPr>
-        <p:style>
-          <a:lnRef idx="1">
-            <a:schemeClr val="dk1"/>
-          </a:lnRef>
-          <a:fillRef idx="0">
-            <a:schemeClr val="dk1"/>
-          </a:fillRef>
-          <a:effectRef idx="0">
-            <a:schemeClr val="dk1"/>
-          </a:effectRef>
-          <a:fontRef idx="minor">
-            <a:schemeClr val="tx1"/>
-          </a:fontRef>
-        </p:style>
-      </p:cxnSp>
-      <p:cxnSp>
-        <p:nvCxnSpPr>
-          <p:cNvPr id="1050" name="Straight Connector 1049">
-            <a:extLst>
-              <a:ext uri="{FF2B5EF4-FFF2-40B4-BE49-F238E27FC236}">
-                <a16:creationId xmlns:a16="http://schemas.microsoft.com/office/drawing/2014/main" id="{D3DAFDEE-D9E5-1D68-8EB9-E51F04AB1645}"/>
-              </a:ext>
-            </a:extLst>
-          </p:cNvPr>
-          <p:cNvCxnSpPr>
-            <a:cxnSpLocks/>
-          </p:cNvCxnSpPr>
-          <p:nvPr/>
-        </p:nvCxnSpPr>
-        <p:spPr>
-          <a:xfrm flipV="1">
-            <a:off x="28346400" y="18578842"/>
-            <a:ext cx="0" cy="3915238"/>
-          </a:xfrm>
-          <a:prstGeom prst="line">
-            <a:avLst/>
-          </a:prstGeom>
-          <a:ln w="19050">
-            <a:prstDash val="lgDash"/>
-          </a:ln>
-        </p:spPr>
-        <p:style>
-          <a:lnRef idx="1">
-            <a:schemeClr val="dk1"/>
-          </a:lnRef>
-          <a:fillRef idx="0">
-            <a:schemeClr val="dk1"/>
-          </a:fillRef>
-          <a:effectRef idx="0">
-            <a:schemeClr val="dk1"/>
-          </a:effectRef>
-          <a:fontRef idx="minor">
-            <a:schemeClr val="tx1"/>
-          </a:fontRef>
-        </p:style>
-      </p:cxnSp>
-      <p:cxnSp>
-        <p:nvCxnSpPr>
-          <p:cNvPr id="1051" name="Straight Connector 1050">
-            <a:extLst>
-              <a:ext uri="{FF2B5EF4-FFF2-40B4-BE49-F238E27FC236}">
-                <a16:creationId xmlns:a16="http://schemas.microsoft.com/office/drawing/2014/main" id="{F2AFA6AA-F2FA-7B6D-89B6-C18FBAE3FB74}"/>
-              </a:ext>
-            </a:extLst>
-          </p:cNvPr>
-          <p:cNvCxnSpPr>
-            <a:cxnSpLocks/>
-          </p:cNvCxnSpPr>
-          <p:nvPr/>
-        </p:nvCxnSpPr>
-        <p:spPr>
-          <a:xfrm flipV="1">
-            <a:off x="31165800" y="18578842"/>
-            <a:ext cx="0" cy="3915238"/>
-          </a:xfrm>
-          <a:prstGeom prst="line">
-            <a:avLst/>
-          </a:prstGeom>
-          <a:ln w="19050">
-            <a:prstDash val="lgDash"/>
-          </a:ln>
-        </p:spPr>
-        <p:style>
-          <a:lnRef idx="1">
-            <a:schemeClr val="dk1"/>
-          </a:lnRef>
-          <a:fillRef idx="0">
-            <a:schemeClr val="dk1"/>
-          </a:fillRef>
-          <a:effectRef idx="0">
-            <a:schemeClr val="dk1"/>
-          </a:effectRef>
-          <a:fontRef idx="minor">
-            <a:schemeClr val="tx1"/>
-          </a:fontRef>
-        </p:style>
-      </p:cxnSp>
-      <p:cxnSp>
-        <p:nvCxnSpPr>
-          <p:cNvPr id="1052" name="Straight Connector 1051">
-            <a:extLst>
-              <a:ext uri="{FF2B5EF4-FFF2-40B4-BE49-F238E27FC236}">
-                <a16:creationId xmlns:a16="http://schemas.microsoft.com/office/drawing/2014/main" id="{9F2A7656-0EEE-7013-0DB8-ADC5FDA2A8B2}"/>
-              </a:ext>
-            </a:extLst>
-          </p:cNvPr>
-          <p:cNvCxnSpPr>
-            <a:cxnSpLocks/>
-          </p:cNvCxnSpPr>
-          <p:nvPr/>
-        </p:nvCxnSpPr>
-        <p:spPr>
-          <a:xfrm flipV="1">
-            <a:off x="32842200" y="18578842"/>
-            <a:ext cx="0" cy="3915238"/>
-          </a:xfrm>
-          <a:prstGeom prst="line">
-            <a:avLst/>
-          </a:prstGeom>
-          <a:ln w="19050">
-            <a:prstDash val="lgDash"/>
-          </a:ln>
-        </p:spPr>
-        <p:style>
-          <a:lnRef idx="1">
-            <a:schemeClr val="dk1"/>
-          </a:lnRef>
-          <a:fillRef idx="0">
-            <a:schemeClr val="dk1"/>
-          </a:fillRef>
-          <a:effectRef idx="0">
-            <a:schemeClr val="dk1"/>
-          </a:effectRef>
-          <a:fontRef idx="minor">
-            <a:schemeClr val="tx1"/>
-          </a:fontRef>
-        </p:style>
-      </p:cxnSp>
-      <p:cxnSp>
-        <p:nvCxnSpPr>
-          <p:cNvPr id="1053" name="Straight Connector 1052">
-            <a:extLst>
-              <a:ext uri="{FF2B5EF4-FFF2-40B4-BE49-F238E27FC236}">
-                <a16:creationId xmlns:a16="http://schemas.microsoft.com/office/drawing/2014/main" id="{45B61E4A-833A-BA3F-9B21-F25237F7E669}"/>
-              </a:ext>
-            </a:extLst>
-          </p:cNvPr>
-          <p:cNvCxnSpPr>
-            <a:cxnSpLocks/>
-          </p:cNvCxnSpPr>
-          <p:nvPr/>
-        </p:nvCxnSpPr>
-        <p:spPr>
-          <a:xfrm flipV="1">
-            <a:off x="20193000" y="23560881"/>
-            <a:ext cx="0" cy="3915238"/>
-          </a:xfrm>
-          <a:prstGeom prst="line">
-            <a:avLst/>
-          </a:prstGeom>
-          <a:ln w="19050">
-            <a:prstDash val="lgDash"/>
-          </a:ln>
-        </p:spPr>
-        <p:style>
-          <a:lnRef idx="1">
-            <a:schemeClr val="dk1"/>
-          </a:lnRef>
-          <a:fillRef idx="0">
-            <a:schemeClr val="dk1"/>
-          </a:fillRef>
-          <a:effectRef idx="0">
-            <a:schemeClr val="dk1"/>
-          </a:effectRef>
-          <a:fontRef idx="minor">
-            <a:schemeClr val="tx1"/>
-          </a:fontRef>
-        </p:style>
-      </p:cxnSp>
-      <p:cxnSp>
-        <p:nvCxnSpPr>
-          <p:cNvPr id="1054" name="Straight Connector 1053">
-            <a:extLst>
-              <a:ext uri="{FF2B5EF4-FFF2-40B4-BE49-F238E27FC236}">
-                <a16:creationId xmlns:a16="http://schemas.microsoft.com/office/drawing/2014/main" id="{B4545213-9D78-5A7D-F0ED-7247C7E86F0A}"/>
-              </a:ext>
-            </a:extLst>
-          </p:cNvPr>
-          <p:cNvCxnSpPr>
-            <a:cxnSpLocks/>
-          </p:cNvCxnSpPr>
-          <p:nvPr/>
-        </p:nvCxnSpPr>
-        <p:spPr>
-          <a:xfrm flipV="1">
-            <a:off x="23088600" y="23560881"/>
-            <a:ext cx="0" cy="3915238"/>
-          </a:xfrm>
-          <a:prstGeom prst="line">
-            <a:avLst/>
-          </a:prstGeom>
-          <a:ln w="19050">
-            <a:prstDash val="lgDash"/>
-          </a:ln>
-        </p:spPr>
-        <p:style>
-          <a:lnRef idx="1">
-            <a:schemeClr val="dk1"/>
-          </a:lnRef>
-          <a:fillRef idx="0">
-            <a:schemeClr val="dk1"/>
-          </a:fillRef>
-          <a:effectRef idx="0">
-            <a:schemeClr val="dk1"/>
-          </a:effectRef>
-          <a:fontRef idx="minor">
-            <a:schemeClr val="tx1"/>
-          </a:fontRef>
-        </p:style>
-      </p:cxnSp>
-      <p:cxnSp>
-        <p:nvCxnSpPr>
-          <p:cNvPr id="1055" name="Straight Connector 1054">
-            <a:extLst>
-              <a:ext uri="{FF2B5EF4-FFF2-40B4-BE49-F238E27FC236}">
-                <a16:creationId xmlns:a16="http://schemas.microsoft.com/office/drawing/2014/main" id="{EAF13472-2A54-A942-9989-189633D8FC45}"/>
-              </a:ext>
-            </a:extLst>
-          </p:cNvPr>
-          <p:cNvCxnSpPr>
-            <a:cxnSpLocks/>
-          </p:cNvCxnSpPr>
-          <p:nvPr/>
-        </p:nvCxnSpPr>
-        <p:spPr>
-          <a:xfrm flipV="1">
-            <a:off x="24460200" y="23560881"/>
-            <a:ext cx="0" cy="3915238"/>
-          </a:xfrm>
-          <a:prstGeom prst="line">
-            <a:avLst/>
-          </a:prstGeom>
-          <a:ln w="19050">
-            <a:prstDash val="lgDash"/>
-          </a:ln>
-        </p:spPr>
-        <p:style>
-          <a:lnRef idx="1">
-            <a:schemeClr val="dk1"/>
-          </a:lnRef>
-          <a:fillRef idx="0">
-            <a:schemeClr val="dk1"/>
-          </a:fillRef>
-          <a:effectRef idx="0">
-            <a:schemeClr val="dk1"/>
-          </a:effectRef>
-          <a:fontRef idx="minor">
-            <a:schemeClr val="tx1"/>
-          </a:fontRef>
-        </p:style>
-      </p:cxnSp>
-      <p:cxnSp>
-        <p:nvCxnSpPr>
-          <p:cNvPr id="1056" name="Straight Connector 1055">
-            <a:extLst>
-              <a:ext uri="{FF2B5EF4-FFF2-40B4-BE49-F238E27FC236}">
-                <a16:creationId xmlns:a16="http://schemas.microsoft.com/office/drawing/2014/main" id="{97023478-EBF1-C0B2-4640-43B6062C44A4}"/>
-              </a:ext>
-            </a:extLst>
-          </p:cNvPr>
-          <p:cNvCxnSpPr>
-            <a:cxnSpLocks/>
-          </p:cNvCxnSpPr>
-          <p:nvPr/>
-        </p:nvCxnSpPr>
-        <p:spPr>
-          <a:xfrm flipV="1">
-            <a:off x="28498800" y="23481155"/>
-            <a:ext cx="0" cy="3915238"/>
-          </a:xfrm>
-          <a:prstGeom prst="line">
-            <a:avLst/>
-          </a:prstGeom>
-          <a:ln w="19050">
-            <a:prstDash val="lgDash"/>
-          </a:ln>
-        </p:spPr>
-        <p:style>
-          <a:lnRef idx="1">
-            <a:schemeClr val="dk1"/>
-          </a:lnRef>
-          <a:fillRef idx="0">
-            <a:schemeClr val="dk1"/>
-          </a:fillRef>
-          <a:effectRef idx="0">
-            <a:schemeClr val="dk1"/>
-          </a:effectRef>
-          <a:fontRef idx="minor">
-            <a:schemeClr val="tx1"/>
-          </a:fontRef>
-        </p:style>
-      </p:cxnSp>
-      <p:cxnSp>
-        <p:nvCxnSpPr>
-          <p:cNvPr id="1057" name="Straight Connector 1056">
-            <a:extLst>
-              <a:ext uri="{FF2B5EF4-FFF2-40B4-BE49-F238E27FC236}">
-                <a16:creationId xmlns:a16="http://schemas.microsoft.com/office/drawing/2014/main" id="{EABAA8CD-3573-D737-5C52-07AF46DD77DB}"/>
-              </a:ext>
-            </a:extLst>
-          </p:cNvPr>
-          <p:cNvCxnSpPr>
-            <a:cxnSpLocks/>
-          </p:cNvCxnSpPr>
-          <p:nvPr/>
-        </p:nvCxnSpPr>
-        <p:spPr>
-          <a:xfrm flipV="1">
-            <a:off x="31318200" y="23481155"/>
-            <a:ext cx="0" cy="3915238"/>
-          </a:xfrm>
-          <a:prstGeom prst="line">
-            <a:avLst/>
-          </a:prstGeom>
-          <a:ln w="19050">
-            <a:prstDash val="lgDash"/>
-          </a:ln>
-        </p:spPr>
-        <p:style>
-          <a:lnRef idx="1">
-            <a:schemeClr val="dk1"/>
-          </a:lnRef>
-          <a:fillRef idx="0">
-            <a:schemeClr val="dk1"/>
-          </a:fillRef>
-          <a:effectRef idx="0">
-            <a:schemeClr val="dk1"/>
-          </a:effectRef>
-          <a:fontRef idx="minor">
-            <a:schemeClr val="tx1"/>
-          </a:fontRef>
-        </p:style>
-      </p:cxnSp>
-      <p:cxnSp>
-        <p:nvCxnSpPr>
-          <p:cNvPr id="1058" name="Straight Connector 1057">
-            <a:extLst>
-              <a:ext uri="{FF2B5EF4-FFF2-40B4-BE49-F238E27FC236}">
-                <a16:creationId xmlns:a16="http://schemas.microsoft.com/office/drawing/2014/main" id="{60C150C5-AE9C-3C24-36BA-5DE7D6481E18}"/>
-              </a:ext>
-            </a:extLst>
-          </p:cNvPr>
-          <p:cNvCxnSpPr>
-            <a:cxnSpLocks/>
-          </p:cNvCxnSpPr>
-          <p:nvPr/>
-        </p:nvCxnSpPr>
-        <p:spPr>
-          <a:xfrm flipV="1">
-            <a:off x="32766000" y="23481155"/>
-            <a:ext cx="0" cy="3915238"/>
-          </a:xfrm>
-          <a:prstGeom prst="line">
-            <a:avLst/>
-          </a:prstGeom>
-          <a:ln w="19050">
-            <a:prstDash val="lgDash"/>
-          </a:ln>
-        </p:spPr>
-        <p:style>
-          <a:lnRef idx="1">
-            <a:schemeClr val="dk1"/>
-          </a:lnRef>
-          <a:fillRef idx="0">
-            <a:schemeClr val="dk1"/>
-          </a:fillRef>
-          <a:effectRef idx="0">
-            <a:schemeClr val="dk1"/>
+            <a:schemeClr val="accent1"/>
           </a:effectRef>
           <a:fontRef idx="minor">
             <a:schemeClr val="tx1"/>

--- a/ReadZ_GCReW_Symposium_Poster_2026.pptx
+++ b/ReadZ_GCReW_Symposium_Poster_2026.pptx
@@ -135,7 +135,7 @@
 <file path=ppt/revisionInfo.xml><?xml version="1.0" encoding="utf-8"?>
 <p1510:revInfo xmlns:a="http://schemas.openxmlformats.org/drawingml/2006/main" xmlns:r="http://schemas.openxmlformats.org/officeDocument/2006/relationships" xmlns:p1510="http://schemas.microsoft.com/office/powerpoint/2015/10/main">
   <p1510:revLst>
-    <p1510:client id="{B82716F6-75B8-4E39-A6D4-7E66C823071B}" v="25" dt="2026-03-12T20:26:21.074"/>
+    <p1510:client id="{B82716F6-75B8-4E39-A6D4-7E66C823071B}" v="66" dt="2026-03-13T15:58:09.715"/>
   </p1510:revLst>
 </p1510:revInfo>
 </file>
@@ -145,18 +145,18 @@
   <pc:docChgLst>
     <pc:chgData name="Read, Zoe" userId="b08cd0fd-26d2-470b-8ec0-c6e6cb2a79bd" providerId="ADAL" clId="{5AEB2719-95A5-4ED2-9E0E-ED462BB10526}"/>
     <pc:docChg chg="undo custSel addSld delSld modSld">
-      <pc:chgData name="Read, Zoe" userId="b08cd0fd-26d2-470b-8ec0-c6e6cb2a79bd" providerId="ADAL" clId="{5AEB2719-95A5-4ED2-9E0E-ED462BB10526}" dt="2026-03-12T20:26:39.354" v="3596" actId="1076"/>
+      <pc:chgData name="Read, Zoe" userId="b08cd0fd-26d2-470b-8ec0-c6e6cb2a79bd" providerId="ADAL" clId="{5AEB2719-95A5-4ED2-9E0E-ED462BB10526}" dt="2026-03-13T16:03:05.847" v="5463" actId="1035"/>
       <pc:docMkLst>
         <pc:docMk/>
       </pc:docMkLst>
       <pc:sldChg chg="addSp delSp modSp mod modNotesTx">
-        <pc:chgData name="Read, Zoe" userId="b08cd0fd-26d2-470b-8ec0-c6e6cb2a79bd" providerId="ADAL" clId="{5AEB2719-95A5-4ED2-9E0E-ED462BB10526}" dt="2026-03-12T20:26:39.354" v="3596" actId="1076"/>
+        <pc:chgData name="Read, Zoe" userId="b08cd0fd-26d2-470b-8ec0-c6e6cb2a79bd" providerId="ADAL" clId="{5AEB2719-95A5-4ED2-9E0E-ED462BB10526}" dt="2026-03-13T16:03:05.847" v="5463" actId="1035"/>
         <pc:sldMkLst>
           <pc:docMk/>
           <pc:sldMk cId="2005456116" sldId="257"/>
         </pc:sldMkLst>
         <pc:spChg chg="mod">
-          <ac:chgData name="Read, Zoe" userId="b08cd0fd-26d2-470b-8ec0-c6e6cb2a79bd" providerId="ADAL" clId="{5AEB2719-95A5-4ED2-9E0E-ED462BB10526}" dt="2026-03-12T20:26:36.594" v="3595" actId="1076"/>
+          <ac:chgData name="Read, Zoe" userId="b08cd0fd-26d2-470b-8ec0-c6e6cb2a79bd" providerId="ADAL" clId="{5AEB2719-95A5-4ED2-9E0E-ED462BB10526}" dt="2026-03-13T14:12:22.411" v="3683" actId="1035"/>
           <ac:spMkLst>
             <pc:docMk/>
             <pc:sldMk cId="2005456116" sldId="257"/>
@@ -164,7 +164,7 @@
           </ac:spMkLst>
         </pc:spChg>
         <pc:spChg chg="mod">
-          <ac:chgData name="Read, Zoe" userId="b08cd0fd-26d2-470b-8ec0-c6e6cb2a79bd" providerId="ADAL" clId="{5AEB2719-95A5-4ED2-9E0E-ED462BB10526}" dt="2026-03-12T20:26:39.354" v="3596" actId="1076"/>
+          <ac:chgData name="Read, Zoe" userId="b08cd0fd-26d2-470b-8ec0-c6e6cb2a79bd" providerId="ADAL" clId="{5AEB2719-95A5-4ED2-9E0E-ED462BB10526}" dt="2026-03-13T14:13:07.872" v="3705"/>
           <ac:spMkLst>
             <pc:docMk/>
             <pc:sldMk cId="2005456116" sldId="257"/>
@@ -172,15 +172,15 @@
           </ac:spMkLst>
         </pc:spChg>
         <pc:spChg chg="add mod">
-          <ac:chgData name="Read, Zoe" userId="b08cd0fd-26d2-470b-8ec0-c6e6cb2a79bd" providerId="ADAL" clId="{5AEB2719-95A5-4ED2-9E0E-ED462BB10526}" dt="2026-03-12T20:26:21.074" v="3593" actId="1035"/>
+          <ac:chgData name="Read, Zoe" userId="b08cd0fd-26d2-470b-8ec0-c6e6cb2a79bd" providerId="ADAL" clId="{5AEB2719-95A5-4ED2-9E0E-ED462BB10526}" dt="2026-03-13T15:50:37.852" v="5095" actId="1036"/>
           <ac:spMkLst>
             <pc:docMk/>
             <pc:sldMk cId="2005456116" sldId="257"/>
             <ac:spMk id="5" creationId="{611D73CC-38EE-87A4-659B-7AFB71426A3B}"/>
           </ac:spMkLst>
         </pc:spChg>
-        <pc:spChg chg="add mod">
-          <ac:chgData name="Read, Zoe" userId="b08cd0fd-26d2-470b-8ec0-c6e6cb2a79bd" providerId="ADAL" clId="{5AEB2719-95A5-4ED2-9E0E-ED462BB10526}" dt="2026-03-12T20:26:21.074" v="3593" actId="1035"/>
+        <pc:spChg chg="add mod ord">
+          <ac:chgData name="Read, Zoe" userId="b08cd0fd-26d2-470b-8ec0-c6e6cb2a79bd" providerId="ADAL" clId="{5AEB2719-95A5-4ED2-9E0E-ED462BB10526}" dt="2026-03-13T15:23:26.809" v="5040" actId="1036"/>
           <ac:spMkLst>
             <pc:docMk/>
             <pc:sldMk cId="2005456116" sldId="257"/>
@@ -196,7 +196,7 @@
           </ac:spMkLst>
         </pc:spChg>
         <pc:spChg chg="mod">
-          <ac:chgData name="Read, Zoe" userId="b08cd0fd-26d2-470b-8ec0-c6e6cb2a79bd" providerId="ADAL" clId="{5AEB2719-95A5-4ED2-9E0E-ED462BB10526}" dt="2026-03-12T20:26:21.074" v="3593" actId="1035"/>
+          <ac:chgData name="Read, Zoe" userId="b08cd0fd-26d2-470b-8ec0-c6e6cb2a79bd" providerId="ADAL" clId="{5AEB2719-95A5-4ED2-9E0E-ED462BB10526}" dt="2026-03-13T15:56:17.329" v="5363" actId="1036"/>
           <ac:spMkLst>
             <pc:docMk/>
             <pc:sldMk cId="2005456116" sldId="257"/>
@@ -204,7 +204,7 @@
           </ac:spMkLst>
         </pc:spChg>
         <pc:spChg chg="mod">
-          <ac:chgData name="Read, Zoe" userId="b08cd0fd-26d2-470b-8ec0-c6e6cb2a79bd" providerId="ADAL" clId="{5AEB2719-95A5-4ED2-9E0E-ED462BB10526}" dt="2026-03-12T20:16:02.170" v="3521" actId="1076"/>
+          <ac:chgData name="Read, Zoe" userId="b08cd0fd-26d2-470b-8ec0-c6e6cb2a79bd" providerId="ADAL" clId="{5AEB2719-95A5-4ED2-9E0E-ED462BB10526}" dt="2026-03-13T15:50:15.459" v="5087" actId="1036"/>
           <ac:spMkLst>
             <pc:docMk/>
             <pc:sldMk cId="2005456116" sldId="257"/>
@@ -212,7 +212,7 @@
           </ac:spMkLst>
         </pc:spChg>
         <pc:spChg chg="mod">
-          <ac:chgData name="Read, Zoe" userId="b08cd0fd-26d2-470b-8ec0-c6e6cb2a79bd" providerId="ADAL" clId="{5AEB2719-95A5-4ED2-9E0E-ED462BB10526}" dt="2026-03-12T20:16:02.170" v="3521" actId="1076"/>
+          <ac:chgData name="Read, Zoe" userId="b08cd0fd-26d2-470b-8ec0-c6e6cb2a79bd" providerId="ADAL" clId="{5AEB2719-95A5-4ED2-9E0E-ED462BB10526}" dt="2026-03-13T15:50:15.459" v="5087" actId="1036"/>
           <ac:spMkLst>
             <pc:docMk/>
             <pc:sldMk cId="2005456116" sldId="257"/>
@@ -220,7 +220,7 @@
           </ac:spMkLst>
         </pc:spChg>
         <pc:spChg chg="mod">
-          <ac:chgData name="Read, Zoe" userId="b08cd0fd-26d2-470b-8ec0-c6e6cb2a79bd" providerId="ADAL" clId="{5AEB2719-95A5-4ED2-9E0E-ED462BB10526}" dt="2026-03-12T20:16:02.170" v="3521" actId="1076"/>
+          <ac:chgData name="Read, Zoe" userId="b08cd0fd-26d2-470b-8ec0-c6e6cb2a79bd" providerId="ADAL" clId="{5AEB2719-95A5-4ED2-9E0E-ED462BB10526}" dt="2026-03-13T15:50:15.459" v="5087" actId="1036"/>
           <ac:spMkLst>
             <pc:docMk/>
             <pc:sldMk cId="2005456116" sldId="257"/>
@@ -228,7 +228,7 @@
           </ac:spMkLst>
         </pc:spChg>
         <pc:spChg chg="mod">
-          <ac:chgData name="Read, Zoe" userId="b08cd0fd-26d2-470b-8ec0-c6e6cb2a79bd" providerId="ADAL" clId="{5AEB2719-95A5-4ED2-9E0E-ED462BB10526}" dt="2026-03-12T20:16:02.170" v="3521" actId="1076"/>
+          <ac:chgData name="Read, Zoe" userId="b08cd0fd-26d2-470b-8ec0-c6e6cb2a79bd" providerId="ADAL" clId="{5AEB2719-95A5-4ED2-9E0E-ED462BB10526}" dt="2026-03-13T15:50:15.459" v="5087" actId="1036"/>
           <ac:spMkLst>
             <pc:docMk/>
             <pc:sldMk cId="2005456116" sldId="257"/>
@@ -236,7 +236,7 @@
           </ac:spMkLst>
         </pc:spChg>
         <pc:spChg chg="mod">
-          <ac:chgData name="Read, Zoe" userId="b08cd0fd-26d2-470b-8ec0-c6e6cb2a79bd" providerId="ADAL" clId="{5AEB2719-95A5-4ED2-9E0E-ED462BB10526}" dt="2026-03-12T20:26:21.074" v="3593" actId="1035"/>
+          <ac:chgData name="Read, Zoe" userId="b08cd0fd-26d2-470b-8ec0-c6e6cb2a79bd" providerId="ADAL" clId="{5AEB2719-95A5-4ED2-9E0E-ED462BB10526}" dt="2026-03-13T15:50:15.459" v="5087" actId="1036"/>
           <ac:spMkLst>
             <pc:docMk/>
             <pc:sldMk cId="2005456116" sldId="257"/>
@@ -244,7 +244,7 @@
           </ac:spMkLst>
         </pc:spChg>
         <pc:spChg chg="mod">
-          <ac:chgData name="Read, Zoe" userId="b08cd0fd-26d2-470b-8ec0-c6e6cb2a79bd" providerId="ADAL" clId="{5AEB2719-95A5-4ED2-9E0E-ED462BB10526}" dt="2026-03-12T20:26:21.074" v="3593" actId="1035"/>
+          <ac:chgData name="Read, Zoe" userId="b08cd0fd-26d2-470b-8ec0-c6e6cb2a79bd" providerId="ADAL" clId="{5AEB2719-95A5-4ED2-9E0E-ED462BB10526}" dt="2026-03-13T15:50:15.459" v="5087" actId="1036"/>
           <ac:spMkLst>
             <pc:docMk/>
             <pc:sldMk cId="2005456116" sldId="257"/>
@@ -252,7 +252,7 @@
           </ac:spMkLst>
         </pc:spChg>
         <pc:spChg chg="mod">
-          <ac:chgData name="Read, Zoe" userId="b08cd0fd-26d2-470b-8ec0-c6e6cb2a79bd" providerId="ADAL" clId="{5AEB2719-95A5-4ED2-9E0E-ED462BB10526}" dt="2026-03-12T20:16:02.170" v="3521" actId="1076"/>
+          <ac:chgData name="Read, Zoe" userId="b08cd0fd-26d2-470b-8ec0-c6e6cb2a79bd" providerId="ADAL" clId="{5AEB2719-95A5-4ED2-9E0E-ED462BB10526}" dt="2026-03-13T15:50:15.459" v="5087" actId="1036"/>
           <ac:spMkLst>
             <pc:docMk/>
             <pc:sldMk cId="2005456116" sldId="257"/>
@@ -276,7 +276,7 @@
           </ac:spMkLst>
         </pc:spChg>
         <pc:spChg chg="mod">
-          <ac:chgData name="Read, Zoe" userId="b08cd0fd-26d2-470b-8ec0-c6e6cb2a79bd" providerId="ADAL" clId="{5AEB2719-95A5-4ED2-9E0E-ED462BB10526}" dt="2026-03-12T20:26:21.074" v="3593" actId="1035"/>
+          <ac:chgData name="Read, Zoe" userId="b08cd0fd-26d2-470b-8ec0-c6e6cb2a79bd" providerId="ADAL" clId="{5AEB2719-95A5-4ED2-9E0E-ED462BB10526}" dt="2026-03-13T15:50:15.459" v="5087" actId="1036"/>
           <ac:spMkLst>
             <pc:docMk/>
             <pc:sldMk cId="2005456116" sldId="257"/>
@@ -284,7 +284,7 @@
           </ac:spMkLst>
         </pc:spChg>
         <pc:spChg chg="mod">
-          <ac:chgData name="Read, Zoe" userId="b08cd0fd-26d2-470b-8ec0-c6e6cb2a79bd" providerId="ADAL" clId="{5AEB2719-95A5-4ED2-9E0E-ED462BB10526}" dt="2026-03-12T20:26:21.074" v="3593" actId="1035"/>
+          <ac:chgData name="Read, Zoe" userId="b08cd0fd-26d2-470b-8ec0-c6e6cb2a79bd" providerId="ADAL" clId="{5AEB2719-95A5-4ED2-9E0E-ED462BB10526}" dt="2026-03-13T15:50:15.459" v="5087" actId="1036"/>
           <ac:spMkLst>
             <pc:docMk/>
             <pc:sldMk cId="2005456116" sldId="257"/>
@@ -292,7 +292,7 @@
           </ac:spMkLst>
         </pc:spChg>
         <pc:spChg chg="mod">
-          <ac:chgData name="Read, Zoe" userId="b08cd0fd-26d2-470b-8ec0-c6e6cb2a79bd" providerId="ADAL" clId="{5AEB2719-95A5-4ED2-9E0E-ED462BB10526}" dt="2026-03-12T20:16:02.170" v="3521" actId="1076"/>
+          <ac:chgData name="Read, Zoe" userId="b08cd0fd-26d2-470b-8ec0-c6e6cb2a79bd" providerId="ADAL" clId="{5AEB2719-95A5-4ED2-9E0E-ED462BB10526}" dt="2026-03-13T15:50:15.459" v="5087" actId="1036"/>
           <ac:spMkLst>
             <pc:docMk/>
             <pc:sldMk cId="2005456116" sldId="257"/>
@@ -300,7 +300,7 @@
           </ac:spMkLst>
         </pc:spChg>
         <pc:spChg chg="add mod">
-          <ac:chgData name="Read, Zoe" userId="b08cd0fd-26d2-470b-8ec0-c6e6cb2a79bd" providerId="ADAL" clId="{5AEB2719-95A5-4ED2-9E0E-ED462BB10526}" dt="2026-03-12T20:15:08.333" v="3512" actId="20577"/>
+          <ac:chgData name="Read, Zoe" userId="b08cd0fd-26d2-470b-8ec0-c6e6cb2a79bd" providerId="ADAL" clId="{5AEB2719-95A5-4ED2-9E0E-ED462BB10526}" dt="2026-03-13T15:23:06.072" v="5035" actId="255"/>
           <ac:spMkLst>
             <pc:docMk/>
             <pc:sldMk cId="2005456116" sldId="257"/>
@@ -308,7 +308,7 @@
           </ac:spMkLst>
         </pc:spChg>
         <pc:spChg chg="add mod">
-          <ac:chgData name="Read, Zoe" userId="b08cd0fd-26d2-470b-8ec0-c6e6cb2a79bd" providerId="ADAL" clId="{5AEB2719-95A5-4ED2-9E0E-ED462BB10526}" dt="2026-03-12T20:16:16.234" v="3524" actId="1076"/>
+          <ac:chgData name="Read, Zoe" userId="b08cd0fd-26d2-470b-8ec0-c6e6cb2a79bd" providerId="ADAL" clId="{5AEB2719-95A5-4ED2-9E0E-ED462BB10526}" dt="2026-03-13T15:20:46.824" v="5011" actId="113"/>
           <ac:spMkLst>
             <pc:docMk/>
             <pc:sldMk cId="2005456116" sldId="257"/>
@@ -316,7 +316,7 @@
           </ac:spMkLst>
         </pc:spChg>
         <pc:spChg chg="add mod">
-          <ac:chgData name="Read, Zoe" userId="b08cd0fd-26d2-470b-8ec0-c6e6cb2a79bd" providerId="ADAL" clId="{5AEB2719-95A5-4ED2-9E0E-ED462BB10526}" dt="2026-03-12T20:16:28.154" v="3529" actId="1076"/>
+          <ac:chgData name="Read, Zoe" userId="b08cd0fd-26d2-470b-8ec0-c6e6cb2a79bd" providerId="ADAL" clId="{5AEB2719-95A5-4ED2-9E0E-ED462BB10526}" dt="2026-03-13T16:03:03.034" v="5459" actId="14100"/>
           <ac:spMkLst>
             <pc:docMk/>
             <pc:sldMk cId="2005456116" sldId="257"/>
@@ -324,11 +324,19 @@
           </ac:spMkLst>
         </pc:spChg>
         <pc:spChg chg="mod">
-          <ac:chgData name="Read, Zoe" userId="b08cd0fd-26d2-470b-8ec0-c6e6cb2a79bd" providerId="ADAL" clId="{5AEB2719-95A5-4ED2-9E0E-ED462BB10526}" dt="2026-03-12T20:26:21.074" v="3593" actId="1035"/>
+          <ac:chgData name="Read, Zoe" userId="b08cd0fd-26d2-470b-8ec0-c6e6cb2a79bd" providerId="ADAL" clId="{5AEB2719-95A5-4ED2-9E0E-ED462BB10526}" dt="2026-03-13T15:21:03.987" v="5014" actId="255"/>
           <ac:spMkLst>
             <pc:docMk/>
             <pc:sldMk cId="2005456116" sldId="257"/>
             <ac:spMk id="1046" creationId="{3D22E29A-542C-2707-EE87-D32E923FD26A}"/>
+          </ac:spMkLst>
+        </pc:spChg>
+        <pc:spChg chg="add mod">
+          <ac:chgData name="Read, Zoe" userId="b08cd0fd-26d2-470b-8ec0-c6e6cb2a79bd" providerId="ADAL" clId="{5AEB2719-95A5-4ED2-9E0E-ED462BB10526}" dt="2026-03-13T16:02:51.168" v="5458" actId="5793"/>
+          <ac:spMkLst>
+            <pc:docMk/>
+            <pc:sldMk cId="2005456116" sldId="257"/>
+            <ac:spMk id="1106" creationId="{990614C8-403D-9EED-A601-7B130D60F6F4}"/>
           </ac:spMkLst>
         </pc:spChg>
         <pc:grpChg chg="del">
@@ -347,36 +355,60 @@
             <ac:graphicFrameMk id="20" creationId="{6EE1AE5B-A26D-71DD-8EF3-D283BC117F1C}"/>
           </ac:graphicFrameMkLst>
         </pc:graphicFrameChg>
-        <pc:picChg chg="add mod modCrop">
-          <ac:chgData name="Read, Zoe" userId="b08cd0fd-26d2-470b-8ec0-c6e6cb2a79bd" providerId="ADAL" clId="{5AEB2719-95A5-4ED2-9E0E-ED462BB10526}" dt="2026-03-12T20:10:12.242" v="3170" actId="1076"/>
+        <pc:picChg chg="add del mod">
+          <ac:chgData name="Read, Zoe" userId="b08cd0fd-26d2-470b-8ec0-c6e6cb2a79bd" providerId="ADAL" clId="{5AEB2719-95A5-4ED2-9E0E-ED462BB10526}" dt="2026-03-13T14:36:32.963" v="3889" actId="478"/>
+          <ac:picMkLst>
+            <pc:docMk/>
+            <pc:sldMk cId="2005456116" sldId="257"/>
+            <ac:picMk id="6" creationId="{E193A4F9-DEAF-C6DE-2623-1C1E36DBB696}"/>
+          </ac:picMkLst>
+        </pc:picChg>
+        <pc:picChg chg="add del mod modCrop">
+          <ac:chgData name="Read, Zoe" userId="b08cd0fd-26d2-470b-8ec0-c6e6cb2a79bd" providerId="ADAL" clId="{5AEB2719-95A5-4ED2-9E0E-ED462BB10526}" dt="2026-03-13T14:35:54.830" v="3882" actId="478"/>
           <ac:picMkLst>
             <pc:docMk/>
             <pc:sldMk cId="2005456116" sldId="257"/>
             <ac:picMk id="9" creationId="{09EDF015-AC84-7DA3-BD5A-225267C491D7}"/>
           </ac:picMkLst>
         </pc:picChg>
+        <pc:picChg chg="add del mod">
+          <ac:chgData name="Read, Zoe" userId="b08cd0fd-26d2-470b-8ec0-c6e6cb2a79bd" providerId="ADAL" clId="{5AEB2719-95A5-4ED2-9E0E-ED462BB10526}" dt="2026-03-13T14:37:42.624" v="3894" actId="478"/>
+          <ac:picMkLst>
+            <pc:docMk/>
+            <pc:sldMk cId="2005456116" sldId="257"/>
+            <ac:picMk id="10" creationId="{87488FFA-0267-8CB3-3D6F-2F08271CB032}"/>
+          </ac:picMkLst>
+        </pc:picChg>
         <pc:picChg chg="add mod ord modCrop">
-          <ac:chgData name="Read, Zoe" userId="b08cd0fd-26d2-470b-8ec0-c6e6cb2a79bd" providerId="ADAL" clId="{5AEB2719-95A5-4ED2-9E0E-ED462BB10526}" dt="2026-03-12T20:15:13.625" v="3513" actId="1076"/>
+          <ac:chgData name="Read, Zoe" userId="b08cd0fd-26d2-470b-8ec0-c6e6cb2a79bd" providerId="ADAL" clId="{5AEB2719-95A5-4ED2-9E0E-ED462BB10526}" dt="2026-03-13T15:05:28.661" v="4916" actId="1076"/>
           <ac:picMkLst>
             <pc:docMk/>
             <pc:sldMk cId="2005456116" sldId="257"/>
             <ac:picMk id="11" creationId="{0144416F-2A82-F7CC-0427-8A36932666F6}"/>
           </ac:picMkLst>
         </pc:picChg>
-        <pc:picChg chg="add mod">
-          <ac:chgData name="Read, Zoe" userId="b08cd0fd-26d2-470b-8ec0-c6e6cb2a79bd" providerId="ADAL" clId="{5AEB2719-95A5-4ED2-9E0E-ED462BB10526}" dt="2026-03-12T20:16:30.754" v="3531" actId="1076"/>
+        <pc:picChg chg="add del mod">
+          <ac:chgData name="Read, Zoe" userId="b08cd0fd-26d2-470b-8ec0-c6e6cb2a79bd" providerId="ADAL" clId="{5AEB2719-95A5-4ED2-9E0E-ED462BB10526}" dt="2026-03-13T15:26:55.493" v="5045" actId="478"/>
           <ac:picMkLst>
             <pc:docMk/>
             <pc:sldMk cId="2005456116" sldId="257"/>
             <ac:picMk id="14" creationId="{37395166-1C97-2974-4774-B9647BFFD3B0}"/>
           </ac:picMkLst>
         </pc:picChg>
-        <pc:picChg chg="add mod ord modCrop">
-          <ac:chgData name="Read, Zoe" userId="b08cd0fd-26d2-470b-8ec0-c6e6cb2a79bd" providerId="ADAL" clId="{5AEB2719-95A5-4ED2-9E0E-ED462BB10526}" dt="2026-03-12T20:16:20.411" v="3526" actId="1076"/>
+        <pc:picChg chg="add del mod ord modCrop">
+          <ac:chgData name="Read, Zoe" userId="b08cd0fd-26d2-470b-8ec0-c6e6cb2a79bd" providerId="ADAL" clId="{5AEB2719-95A5-4ED2-9E0E-ED462BB10526}" dt="2026-03-13T15:13:14.944" v="4945" actId="478"/>
           <ac:picMkLst>
             <pc:docMk/>
             <pc:sldMk cId="2005456116" sldId="257"/>
             <ac:picMk id="15" creationId="{6F1E99EB-549B-E9F4-C4C6-CCFBCE759AD8}"/>
+          </ac:picMkLst>
+        </pc:picChg>
+        <pc:picChg chg="add del mod">
+          <ac:chgData name="Read, Zoe" userId="b08cd0fd-26d2-470b-8ec0-c6e6cb2a79bd" providerId="ADAL" clId="{5AEB2719-95A5-4ED2-9E0E-ED462BB10526}" dt="2026-03-13T14:58:09.041" v="4859" actId="478"/>
+          <ac:picMkLst>
+            <pc:docMk/>
+            <pc:sldMk cId="2005456116" sldId="257"/>
+            <ac:picMk id="19" creationId="{4A548E57-4FEC-FC9E-37C8-9C6818770C12}"/>
           </ac:picMkLst>
         </pc:picChg>
         <pc:picChg chg="del mod">
@@ -395,16 +427,232 @@
             <ac:picMk id="24" creationId="{04440FAB-EE3F-FD41-C5C0-9224F3ADC6B1}"/>
           </ac:picMkLst>
         </pc:picChg>
-        <pc:picChg chg="add mod modCrop">
-          <ac:chgData name="Read, Zoe" userId="b08cd0fd-26d2-470b-8ec0-c6e6cb2a79bd" providerId="ADAL" clId="{5AEB2719-95A5-4ED2-9E0E-ED462BB10526}" dt="2026-03-12T20:16:18.962" v="3525" actId="1076"/>
+        <pc:picChg chg="add del mod">
+          <ac:chgData name="Read, Zoe" userId="b08cd0fd-26d2-470b-8ec0-c6e6cb2a79bd" providerId="ADAL" clId="{5AEB2719-95A5-4ED2-9E0E-ED462BB10526}" dt="2026-03-13T15:01:01.939" v="4868" actId="478"/>
+          <ac:picMkLst>
+            <pc:docMk/>
+            <pc:sldMk cId="2005456116" sldId="257"/>
+            <ac:picMk id="24" creationId="{3F0569DE-707F-D9F1-1D75-6E1DDB13B5E4}"/>
+          </ac:picMkLst>
+        </pc:picChg>
+        <pc:picChg chg="add del mod ord">
+          <ac:chgData name="Read, Zoe" userId="b08cd0fd-26d2-470b-8ec0-c6e6cb2a79bd" providerId="ADAL" clId="{5AEB2719-95A5-4ED2-9E0E-ED462BB10526}" dt="2026-03-13T15:01:53.310" v="4884" actId="478"/>
+          <ac:picMkLst>
+            <pc:docMk/>
+            <pc:sldMk cId="2005456116" sldId="257"/>
+            <ac:picMk id="1038" creationId="{79B545FE-4759-2D41-AC8C-49367F5FD302}"/>
+          </ac:picMkLst>
+        </pc:picChg>
+        <pc:picChg chg="add del mod">
+          <ac:chgData name="Read, Zoe" userId="b08cd0fd-26d2-470b-8ec0-c6e6cb2a79bd" providerId="ADAL" clId="{5AEB2719-95A5-4ED2-9E0E-ED462BB10526}" dt="2026-03-13T15:02:36.270" v="4894" actId="478"/>
+          <ac:picMkLst>
+            <pc:docMk/>
+            <pc:sldMk cId="2005456116" sldId="257"/>
+            <ac:picMk id="1041" creationId="{C6F1CF14-BF24-F636-555B-EE0412FF8575}"/>
+          </ac:picMkLst>
+        </pc:picChg>
+        <pc:picChg chg="add del mod modCrop">
+          <ac:chgData name="Read, Zoe" userId="b08cd0fd-26d2-470b-8ec0-c6e6cb2a79bd" providerId="ADAL" clId="{5AEB2719-95A5-4ED2-9E0E-ED462BB10526}" dt="2026-03-13T15:13:14.944" v="4945" actId="478"/>
           <ac:picMkLst>
             <pc:docMk/>
             <pc:sldMk cId="2005456116" sldId="257"/>
             <ac:picMk id="1042" creationId="{04363E67-54FD-37B3-65BB-A8173A952E9D}"/>
           </ac:picMkLst>
         </pc:picChg>
+        <pc:picChg chg="add del mod">
+          <ac:chgData name="Read, Zoe" userId="b08cd0fd-26d2-470b-8ec0-c6e6cb2a79bd" providerId="ADAL" clId="{5AEB2719-95A5-4ED2-9E0E-ED462BB10526}" dt="2026-03-13T15:06:17.977" v="4922" actId="478"/>
+          <ac:picMkLst>
+            <pc:docMk/>
+            <pc:sldMk cId="2005456116" sldId="257"/>
+            <ac:picMk id="1048" creationId="{3A2666A1-2DC7-950A-723E-6840B5BC5392}"/>
+          </ac:picMkLst>
+        </pc:picChg>
+        <pc:picChg chg="add del mod">
+          <ac:chgData name="Read, Zoe" userId="b08cd0fd-26d2-470b-8ec0-c6e6cb2a79bd" providerId="ADAL" clId="{5AEB2719-95A5-4ED2-9E0E-ED462BB10526}" dt="2026-03-13T15:06:58.060" v="4929" actId="478"/>
+          <ac:picMkLst>
+            <pc:docMk/>
+            <pc:sldMk cId="2005456116" sldId="257"/>
+            <ac:picMk id="1059" creationId="{EB3694CB-2E69-2599-592D-A9902BAD3ADD}"/>
+          </ac:picMkLst>
+        </pc:picChg>
+        <pc:picChg chg="add del mod">
+          <ac:chgData name="Read, Zoe" userId="b08cd0fd-26d2-470b-8ec0-c6e6cb2a79bd" providerId="ADAL" clId="{5AEB2719-95A5-4ED2-9E0E-ED462BB10526}" dt="2026-03-13T15:07:38.327" v="4937" actId="478"/>
+          <ac:picMkLst>
+            <pc:docMk/>
+            <pc:sldMk cId="2005456116" sldId="257"/>
+            <ac:picMk id="1061" creationId="{5C64DEE6-3355-98B2-AC38-10A3DD327236}"/>
+          </ac:picMkLst>
+        </pc:picChg>
+        <pc:picChg chg="add del mod">
+          <ac:chgData name="Read, Zoe" userId="b08cd0fd-26d2-470b-8ec0-c6e6cb2a79bd" providerId="ADAL" clId="{5AEB2719-95A5-4ED2-9E0E-ED462BB10526}" dt="2026-03-13T15:08:12.270" v="4943" actId="478"/>
+          <ac:picMkLst>
+            <pc:docMk/>
+            <pc:sldMk cId="2005456116" sldId="257"/>
+            <ac:picMk id="1063" creationId="{AC1EC631-C193-3A00-6730-F1F2DABABD96}"/>
+          </ac:picMkLst>
+        </pc:picChg>
+        <pc:picChg chg="add del mod">
+          <ac:chgData name="Read, Zoe" userId="b08cd0fd-26d2-470b-8ec0-c6e6cb2a79bd" providerId="ADAL" clId="{5AEB2719-95A5-4ED2-9E0E-ED462BB10526}" dt="2026-03-13T15:22:30.164" v="5023" actId="478"/>
+          <ac:picMkLst>
+            <pc:docMk/>
+            <pc:sldMk cId="2005456116" sldId="257"/>
+            <ac:picMk id="1065" creationId="{D9220666-D88E-9558-B956-D1D5B159C76E}"/>
+          </ac:picMkLst>
+        </pc:picChg>
+        <pc:picChg chg="add del mod">
+          <ac:chgData name="Read, Zoe" userId="b08cd0fd-26d2-470b-8ec0-c6e6cb2a79bd" providerId="ADAL" clId="{5AEB2719-95A5-4ED2-9E0E-ED462BB10526}" dt="2026-03-13T15:14:14.848" v="4949" actId="478"/>
+          <ac:picMkLst>
+            <pc:docMk/>
+            <pc:sldMk cId="2005456116" sldId="257"/>
+            <ac:picMk id="1067" creationId="{2E554507-40AB-39F1-06F7-5ACA98D452FD}"/>
+          </ac:picMkLst>
+        </pc:picChg>
+        <pc:picChg chg="add del mod">
+          <ac:chgData name="Read, Zoe" userId="b08cd0fd-26d2-470b-8ec0-c6e6cb2a79bd" providerId="ADAL" clId="{5AEB2719-95A5-4ED2-9E0E-ED462BB10526}" dt="2026-03-13T15:14:29.167" v="4954" actId="478"/>
+          <ac:picMkLst>
+            <pc:docMk/>
+            <pc:sldMk cId="2005456116" sldId="257"/>
+            <ac:picMk id="1069" creationId="{8D91DBDB-9E9E-52CB-55AD-9A637EFC0709}"/>
+          </ac:picMkLst>
+        </pc:picChg>
+        <pc:picChg chg="add del mod">
+          <ac:chgData name="Read, Zoe" userId="b08cd0fd-26d2-470b-8ec0-c6e6cb2a79bd" providerId="ADAL" clId="{5AEB2719-95A5-4ED2-9E0E-ED462BB10526}" dt="2026-03-13T15:15:01.560" v="4958" actId="478"/>
+          <ac:picMkLst>
+            <pc:docMk/>
+            <pc:sldMk cId="2005456116" sldId="257"/>
+            <ac:picMk id="1071" creationId="{FEABA2EA-EFA6-54BC-2013-B77804E53F02}"/>
+          </ac:picMkLst>
+        </pc:picChg>
+        <pc:picChg chg="add del mod">
+          <ac:chgData name="Read, Zoe" userId="b08cd0fd-26d2-470b-8ec0-c6e6cb2a79bd" providerId="ADAL" clId="{5AEB2719-95A5-4ED2-9E0E-ED462BB10526}" dt="2026-03-13T15:15:41.221" v="4963" actId="478"/>
+          <ac:picMkLst>
+            <pc:docMk/>
+            <pc:sldMk cId="2005456116" sldId="257"/>
+            <ac:picMk id="1073" creationId="{5466ADED-34D8-BA58-93D9-9F5AE1DBBC21}"/>
+          </ac:picMkLst>
+        </pc:picChg>
+        <pc:picChg chg="add del mod">
+          <ac:chgData name="Read, Zoe" userId="b08cd0fd-26d2-470b-8ec0-c6e6cb2a79bd" providerId="ADAL" clId="{5AEB2719-95A5-4ED2-9E0E-ED462BB10526}" dt="2026-03-13T15:16:18.449" v="4968" actId="478"/>
+          <ac:picMkLst>
+            <pc:docMk/>
+            <pc:sldMk cId="2005456116" sldId="257"/>
+            <ac:picMk id="1075" creationId="{AAEC5A0E-A8A7-5F3D-FF7E-D5A1310DC25F}"/>
+          </ac:picMkLst>
+        </pc:picChg>
+        <pc:picChg chg="add del mod">
+          <ac:chgData name="Read, Zoe" userId="b08cd0fd-26d2-470b-8ec0-c6e6cb2a79bd" providerId="ADAL" clId="{5AEB2719-95A5-4ED2-9E0E-ED462BB10526}" dt="2026-03-13T15:16:58.206" v="4975" actId="478"/>
+          <ac:picMkLst>
+            <pc:docMk/>
+            <pc:sldMk cId="2005456116" sldId="257"/>
+            <ac:picMk id="1077" creationId="{FFBEF150-4996-ACCF-2FF8-42C26451A7FE}"/>
+          </ac:picMkLst>
+        </pc:picChg>
+        <pc:picChg chg="add del mod ord">
+          <ac:chgData name="Read, Zoe" userId="b08cd0fd-26d2-470b-8ec0-c6e6cb2a79bd" providerId="ADAL" clId="{5AEB2719-95A5-4ED2-9E0E-ED462BB10526}" dt="2026-03-13T15:20:09.550" v="4992" actId="478"/>
+          <ac:picMkLst>
+            <pc:docMk/>
+            <pc:sldMk cId="2005456116" sldId="257"/>
+            <ac:picMk id="1079" creationId="{E89868C9-5DDE-C444-4252-B8FA393EF2CE}"/>
+          </ac:picMkLst>
+        </pc:picChg>
+        <pc:picChg chg="add mod ord">
+          <ac:chgData name="Read, Zoe" userId="b08cd0fd-26d2-470b-8ec0-c6e6cb2a79bd" providerId="ADAL" clId="{5AEB2719-95A5-4ED2-9E0E-ED462BB10526}" dt="2026-03-13T15:23:17.079" v="5036" actId="1076"/>
+          <ac:picMkLst>
+            <pc:docMk/>
+            <pc:sldMk cId="2005456116" sldId="257"/>
+            <ac:picMk id="1081" creationId="{E751C4E4-E854-FE7E-1EF9-268DA1A23024}"/>
+          </ac:picMkLst>
+        </pc:picChg>
+        <pc:picChg chg="add del mod">
+          <ac:chgData name="Read, Zoe" userId="b08cd0fd-26d2-470b-8ec0-c6e6cb2a79bd" providerId="ADAL" clId="{5AEB2719-95A5-4ED2-9E0E-ED462BB10526}" dt="2026-03-13T15:22:37.877" v="5027" actId="478"/>
+          <ac:picMkLst>
+            <pc:docMk/>
+            <pc:sldMk cId="2005456116" sldId="257"/>
+            <ac:picMk id="1083" creationId="{79DA7F69-4E83-B1E5-DFEA-930123DA7F46}"/>
+          </ac:picMkLst>
+        </pc:picChg>
+        <pc:picChg chg="add mod">
+          <ac:chgData name="Read, Zoe" userId="b08cd0fd-26d2-470b-8ec0-c6e6cb2a79bd" providerId="ADAL" clId="{5AEB2719-95A5-4ED2-9E0E-ED462BB10526}" dt="2026-03-13T15:23:32.914" v="5041" actId="1076"/>
+          <ac:picMkLst>
+            <pc:docMk/>
+            <pc:sldMk cId="2005456116" sldId="257"/>
+            <ac:picMk id="1085" creationId="{9E2D53CD-2078-3011-EB8F-F1979C9B3B22}"/>
+          </ac:picMkLst>
+        </pc:picChg>
+        <pc:picChg chg="add del mod">
+          <ac:chgData name="Read, Zoe" userId="b08cd0fd-26d2-470b-8ec0-c6e6cb2a79bd" providerId="ADAL" clId="{5AEB2719-95A5-4ED2-9E0E-ED462BB10526}" dt="2026-03-13T15:27:09.698" v="5050" actId="478"/>
+          <ac:picMkLst>
+            <pc:docMk/>
+            <pc:sldMk cId="2005456116" sldId="257"/>
+            <ac:picMk id="1088" creationId="{6780A67C-EA16-F57D-656A-1D4EE2D0B56B}"/>
+          </ac:picMkLst>
+        </pc:picChg>
+        <pc:picChg chg="add del mod">
+          <ac:chgData name="Read, Zoe" userId="b08cd0fd-26d2-470b-8ec0-c6e6cb2a79bd" providerId="ADAL" clId="{5AEB2719-95A5-4ED2-9E0E-ED462BB10526}" dt="2026-03-13T15:27:37.034" v="5056" actId="478"/>
+          <ac:picMkLst>
+            <pc:docMk/>
+            <pc:sldMk cId="2005456116" sldId="257"/>
+            <ac:picMk id="1090" creationId="{22F59BC5-2C35-DDF1-6E10-AC204BAEB7DC}"/>
+          </ac:picMkLst>
+        </pc:picChg>
+        <pc:picChg chg="add del mod">
+          <ac:chgData name="Read, Zoe" userId="b08cd0fd-26d2-470b-8ec0-c6e6cb2a79bd" providerId="ADAL" clId="{5AEB2719-95A5-4ED2-9E0E-ED462BB10526}" dt="2026-03-13T15:28:10.572" v="5061" actId="478"/>
+          <ac:picMkLst>
+            <pc:docMk/>
+            <pc:sldMk cId="2005456116" sldId="257"/>
+            <ac:picMk id="1092" creationId="{B289EE1B-058F-1CF1-4DE6-B6EEE7938A9B}"/>
+          </ac:picMkLst>
+        </pc:picChg>
+        <pc:picChg chg="add del mod">
+          <ac:chgData name="Read, Zoe" userId="b08cd0fd-26d2-470b-8ec0-c6e6cb2a79bd" providerId="ADAL" clId="{5AEB2719-95A5-4ED2-9E0E-ED462BB10526}" dt="2026-03-13T15:29:43.633" v="5069" actId="478"/>
+          <ac:picMkLst>
+            <pc:docMk/>
+            <pc:sldMk cId="2005456116" sldId="257"/>
+            <ac:picMk id="1094" creationId="{F50E4DC2-8AE0-9280-8B55-572851BC47EC}"/>
+          </ac:picMkLst>
+        </pc:picChg>
+        <pc:picChg chg="add del mod">
+          <ac:chgData name="Read, Zoe" userId="b08cd0fd-26d2-470b-8ec0-c6e6cb2a79bd" providerId="ADAL" clId="{5AEB2719-95A5-4ED2-9E0E-ED462BB10526}" dt="2026-03-13T15:30:15.570" v="5071" actId="478"/>
+          <ac:picMkLst>
+            <pc:docMk/>
+            <pc:sldMk cId="2005456116" sldId="257"/>
+            <ac:picMk id="1096" creationId="{19A9F59A-6905-0461-921F-53D44D6FE9B4}"/>
+          </ac:picMkLst>
+        </pc:picChg>
+        <pc:picChg chg="add del mod">
+          <ac:chgData name="Read, Zoe" userId="b08cd0fd-26d2-470b-8ec0-c6e6cb2a79bd" providerId="ADAL" clId="{5AEB2719-95A5-4ED2-9E0E-ED462BB10526}" dt="2026-03-13T15:31:42.114" v="5079" actId="478"/>
+          <ac:picMkLst>
+            <pc:docMk/>
+            <pc:sldMk cId="2005456116" sldId="257"/>
+            <ac:picMk id="1098" creationId="{371F0427-7C9D-A089-1550-355CC41A1B47}"/>
+          </ac:picMkLst>
+        </pc:picChg>
+        <pc:picChg chg="add del mod">
+          <ac:chgData name="Read, Zoe" userId="b08cd0fd-26d2-470b-8ec0-c6e6cb2a79bd" providerId="ADAL" clId="{5AEB2719-95A5-4ED2-9E0E-ED462BB10526}" dt="2026-03-13T15:54:01.795" v="5096" actId="478"/>
+          <ac:picMkLst>
+            <pc:docMk/>
+            <pc:sldMk cId="2005456116" sldId="257"/>
+            <ac:picMk id="1100" creationId="{A43F5C94-F21D-A325-C5D6-3A47C4C3B61F}"/>
+          </ac:picMkLst>
+        </pc:picChg>
+        <pc:picChg chg="add del mod">
+          <ac:chgData name="Read, Zoe" userId="b08cd0fd-26d2-470b-8ec0-c6e6cb2a79bd" providerId="ADAL" clId="{5AEB2719-95A5-4ED2-9E0E-ED462BB10526}" dt="2026-03-13T15:57:59.527" v="5369" actId="478"/>
+          <ac:picMkLst>
+            <pc:docMk/>
+            <pc:sldMk cId="2005456116" sldId="257"/>
+            <ac:picMk id="1102" creationId="{409410D1-8C61-C5F2-2ED0-8AE9EB772068}"/>
+          </ac:picMkLst>
+        </pc:picChg>
+        <pc:picChg chg="add mod">
+          <ac:chgData name="Read, Zoe" userId="b08cd0fd-26d2-470b-8ec0-c6e6cb2a79bd" providerId="ADAL" clId="{5AEB2719-95A5-4ED2-9E0E-ED462BB10526}" dt="2026-03-13T16:03:05.847" v="5463" actId="1035"/>
+          <ac:picMkLst>
+            <pc:docMk/>
+            <pc:sldMk cId="2005456116" sldId="257"/>
+            <ac:picMk id="1104" creationId="{BB487FD2-0D02-18A0-8E65-73832FF97000}"/>
+          </ac:picMkLst>
+        </pc:picChg>
         <pc:cxnChg chg="add mod ord">
-          <ac:chgData name="Read, Zoe" userId="b08cd0fd-26d2-470b-8ec0-c6e6cb2a79bd" providerId="ADAL" clId="{5AEB2719-95A5-4ED2-9E0E-ED462BB10526}" dt="2026-03-12T20:16:25.990" v="3528" actId="166"/>
+          <ac:chgData name="Read, Zoe" userId="b08cd0fd-26d2-470b-8ec0-c6e6cb2a79bd" providerId="ADAL" clId="{5AEB2719-95A5-4ED2-9E0E-ED462BB10526}" dt="2026-03-13T15:23:44.503" v="5042" actId="14100"/>
           <ac:cxnSpMkLst>
             <pc:docMk/>
             <pc:sldMk cId="2005456116" sldId="257"/>
@@ -412,7 +660,7 @@
           </ac:cxnSpMkLst>
         </pc:cxnChg>
         <pc:cxnChg chg="mod">
-          <ac:chgData name="Read, Zoe" userId="b08cd0fd-26d2-470b-8ec0-c6e6cb2a79bd" providerId="ADAL" clId="{5AEB2719-95A5-4ED2-9E0E-ED462BB10526}" dt="2026-03-12T19:11:58.622" v="2856" actId="1035"/>
+          <ac:chgData name="Read, Zoe" userId="b08cd0fd-26d2-470b-8ec0-c6e6cb2a79bd" providerId="ADAL" clId="{5AEB2719-95A5-4ED2-9E0E-ED462BB10526}" dt="2026-03-13T15:03:40.670" v="4904" actId="1036"/>
           <ac:cxnSpMkLst>
             <pc:docMk/>
             <pc:sldMk cId="2005456116" sldId="257"/>
@@ -420,7 +668,7 @@
           </ac:cxnSpMkLst>
         </pc:cxnChg>
         <pc:cxnChg chg="add mod ord">
-          <ac:chgData name="Read, Zoe" userId="b08cd0fd-26d2-470b-8ec0-c6e6cb2a79bd" providerId="ADAL" clId="{5AEB2719-95A5-4ED2-9E0E-ED462BB10526}" dt="2026-03-12T20:12:17.256" v="3359" actId="167"/>
+          <ac:chgData name="Read, Zoe" userId="b08cd0fd-26d2-470b-8ec0-c6e6cb2a79bd" providerId="ADAL" clId="{5AEB2719-95A5-4ED2-9E0E-ED462BB10526}" dt="2026-03-13T15:05:21.038" v="4913" actId="1076"/>
           <ac:cxnSpMkLst>
             <pc:docMk/>
             <pc:sldMk cId="2005456116" sldId="257"/>
@@ -428,7 +676,7 @@
           </ac:cxnSpMkLst>
         </pc:cxnChg>
         <pc:cxnChg chg="mod">
-          <ac:chgData name="Read, Zoe" userId="b08cd0fd-26d2-470b-8ec0-c6e6cb2a79bd" providerId="ADAL" clId="{5AEB2719-95A5-4ED2-9E0E-ED462BB10526}" dt="2026-03-12T20:10:23.305" v="3171" actId="1076"/>
+          <ac:chgData name="Read, Zoe" userId="b08cd0fd-26d2-470b-8ec0-c6e6cb2a79bd" providerId="ADAL" clId="{5AEB2719-95A5-4ED2-9E0E-ED462BB10526}" dt="2026-03-13T14:47:43.111" v="4643" actId="1035"/>
           <ac:cxnSpMkLst>
             <pc:docMk/>
             <pc:sldMk cId="2005456116" sldId="257"/>
@@ -436,7 +684,7 @@
           </ac:cxnSpMkLst>
         </pc:cxnChg>
         <pc:cxnChg chg="mod">
-          <ac:chgData name="Read, Zoe" userId="b08cd0fd-26d2-470b-8ec0-c6e6cb2a79bd" providerId="ADAL" clId="{5AEB2719-95A5-4ED2-9E0E-ED462BB10526}" dt="2026-03-12T19:12:02.854" v="2857" actId="14100"/>
+          <ac:chgData name="Read, Zoe" userId="b08cd0fd-26d2-470b-8ec0-c6e6cb2a79bd" providerId="ADAL" clId="{5AEB2719-95A5-4ED2-9E0E-ED462BB10526}" dt="2026-03-13T15:03:37.399" v="4902" actId="1036"/>
           <ac:cxnSpMkLst>
             <pc:docMk/>
             <pc:sldMk cId="2005456116" sldId="257"/>
@@ -444,55 +692,55 @@
           </ac:cxnSpMkLst>
         </pc:cxnChg>
         <pc:cxnChg chg="mod">
-          <ac:chgData name="Read, Zoe" userId="b08cd0fd-26d2-470b-8ec0-c6e6cb2a79bd" providerId="ADAL" clId="{5AEB2719-95A5-4ED2-9E0E-ED462BB10526}" dt="2026-03-12T20:16:16.234" v="3524" actId="1076"/>
+          <ac:chgData name="Read, Zoe" userId="b08cd0fd-26d2-470b-8ec0-c6e6cb2a79bd" providerId="ADAL" clId="{5AEB2719-95A5-4ED2-9E0E-ED462BB10526}" dt="2026-03-13T15:50:34.459" v="5094" actId="1035"/>
           <ac:cxnSpMkLst>
             <pc:docMk/>
             <pc:sldMk cId="2005456116" sldId="257"/>
             <ac:cxnSpMk id="1044" creationId="{8463A8F4-CE87-F09A-8258-6D6979B36D80}"/>
           </ac:cxnSpMkLst>
         </pc:cxnChg>
-        <pc:cxnChg chg="add mod ord">
-          <ac:chgData name="Read, Zoe" userId="b08cd0fd-26d2-470b-8ec0-c6e6cb2a79bd" providerId="ADAL" clId="{5AEB2719-95A5-4ED2-9E0E-ED462BB10526}" dt="2026-03-12T20:12:17.256" v="3359" actId="167"/>
+        <pc:cxnChg chg="add del mod ord">
+          <ac:chgData name="Read, Zoe" userId="b08cd0fd-26d2-470b-8ec0-c6e6cb2a79bd" providerId="ADAL" clId="{5AEB2719-95A5-4ED2-9E0E-ED462BB10526}" dt="2026-03-13T14:43:58.200" v="4435" actId="478"/>
           <ac:cxnSpMkLst>
             <pc:docMk/>
             <pc:sldMk cId="2005456116" sldId="257"/>
             <ac:cxnSpMk id="1045" creationId="{BB33F361-7DB9-04C2-C03A-778C0DF80E8F}"/>
           </ac:cxnSpMkLst>
         </pc:cxnChg>
-        <pc:cxnChg chg="add mod">
-          <ac:chgData name="Read, Zoe" userId="b08cd0fd-26d2-470b-8ec0-c6e6cb2a79bd" providerId="ADAL" clId="{5AEB2719-95A5-4ED2-9E0E-ED462BB10526}" dt="2026-03-12T20:10:36.867" v="3175" actId="1076"/>
+        <pc:cxnChg chg="add del mod">
+          <ac:chgData name="Read, Zoe" userId="b08cd0fd-26d2-470b-8ec0-c6e6cb2a79bd" providerId="ADAL" clId="{5AEB2719-95A5-4ED2-9E0E-ED462BB10526}" dt="2026-03-13T14:43:58.200" v="4435" actId="478"/>
           <ac:cxnSpMkLst>
             <pc:docMk/>
             <pc:sldMk cId="2005456116" sldId="257"/>
             <ac:cxnSpMk id="1047" creationId="{375CA06C-A251-4ED8-A38F-281C7D414E0B}"/>
           </ac:cxnSpMkLst>
         </pc:cxnChg>
-        <pc:cxnChg chg="add mod ord">
-          <ac:chgData name="Read, Zoe" userId="b08cd0fd-26d2-470b-8ec0-c6e6cb2a79bd" providerId="ADAL" clId="{5AEB2719-95A5-4ED2-9E0E-ED462BB10526}" dt="2026-03-12T20:12:17.256" v="3359" actId="167"/>
+        <pc:cxnChg chg="add del mod ord">
+          <ac:chgData name="Read, Zoe" userId="b08cd0fd-26d2-470b-8ec0-c6e6cb2a79bd" providerId="ADAL" clId="{5AEB2719-95A5-4ED2-9E0E-ED462BB10526}" dt="2026-03-13T14:43:58.200" v="4435" actId="478"/>
           <ac:cxnSpMkLst>
             <pc:docMk/>
             <pc:sldMk cId="2005456116" sldId="257"/>
             <ac:cxnSpMk id="1050" creationId="{D3DAFDEE-D9E5-1D68-8EB9-E51F04AB1645}"/>
           </ac:cxnSpMkLst>
         </pc:cxnChg>
-        <pc:cxnChg chg="add mod ord">
-          <ac:chgData name="Read, Zoe" userId="b08cd0fd-26d2-470b-8ec0-c6e6cb2a79bd" providerId="ADAL" clId="{5AEB2719-95A5-4ED2-9E0E-ED462BB10526}" dt="2026-03-12T20:12:17.256" v="3359" actId="167"/>
+        <pc:cxnChg chg="add del mod ord">
+          <ac:chgData name="Read, Zoe" userId="b08cd0fd-26d2-470b-8ec0-c6e6cb2a79bd" providerId="ADAL" clId="{5AEB2719-95A5-4ED2-9E0E-ED462BB10526}" dt="2026-03-13T14:43:58.200" v="4435" actId="478"/>
           <ac:cxnSpMkLst>
             <pc:docMk/>
             <pc:sldMk cId="2005456116" sldId="257"/>
             <ac:cxnSpMk id="1051" creationId="{F2AFA6AA-F2FA-7B6D-89B6-C18FBAE3FB74}"/>
           </ac:cxnSpMkLst>
         </pc:cxnChg>
-        <pc:cxnChg chg="add mod ord">
-          <ac:chgData name="Read, Zoe" userId="b08cd0fd-26d2-470b-8ec0-c6e6cb2a79bd" providerId="ADAL" clId="{5AEB2719-95A5-4ED2-9E0E-ED462BB10526}" dt="2026-03-12T20:12:17.256" v="3359" actId="167"/>
+        <pc:cxnChg chg="add del mod ord">
+          <ac:chgData name="Read, Zoe" userId="b08cd0fd-26d2-470b-8ec0-c6e6cb2a79bd" providerId="ADAL" clId="{5AEB2719-95A5-4ED2-9E0E-ED462BB10526}" dt="2026-03-13T14:43:58.200" v="4435" actId="478"/>
           <ac:cxnSpMkLst>
             <pc:docMk/>
             <pc:sldMk cId="2005456116" sldId="257"/>
             <ac:cxnSpMk id="1052" creationId="{9F2A7656-0EEE-7013-0DB8-ADC5FDA2A8B2}"/>
           </ac:cxnSpMkLst>
         </pc:cxnChg>
-        <pc:cxnChg chg="add mod ord">
-          <ac:chgData name="Read, Zoe" userId="b08cd0fd-26d2-470b-8ec0-c6e6cb2a79bd" providerId="ADAL" clId="{5AEB2719-95A5-4ED2-9E0E-ED462BB10526}" dt="2026-03-12T20:12:17.256" v="3359" actId="167"/>
+        <pc:cxnChg chg="add del mod ord">
+          <ac:chgData name="Read, Zoe" userId="b08cd0fd-26d2-470b-8ec0-c6e6cb2a79bd" providerId="ADAL" clId="{5AEB2719-95A5-4ED2-9E0E-ED462BB10526}" dt="2026-03-13T14:43:58.200" v="4435" actId="478"/>
           <ac:cxnSpMkLst>
             <pc:docMk/>
             <pc:sldMk cId="2005456116" sldId="257"/>
@@ -507,32 +755,32 @@
             <ac:cxnSpMk id="1054" creationId="{B4545213-9D78-5A7D-F0ED-7247C7E86F0A}"/>
           </ac:cxnSpMkLst>
         </pc:cxnChg>
-        <pc:cxnChg chg="add mod ord">
-          <ac:chgData name="Read, Zoe" userId="b08cd0fd-26d2-470b-8ec0-c6e6cb2a79bd" providerId="ADAL" clId="{5AEB2719-95A5-4ED2-9E0E-ED462BB10526}" dt="2026-03-12T20:12:17.256" v="3359" actId="167"/>
+        <pc:cxnChg chg="add del mod ord">
+          <ac:chgData name="Read, Zoe" userId="b08cd0fd-26d2-470b-8ec0-c6e6cb2a79bd" providerId="ADAL" clId="{5AEB2719-95A5-4ED2-9E0E-ED462BB10526}" dt="2026-03-13T14:43:58.200" v="4435" actId="478"/>
           <ac:cxnSpMkLst>
             <pc:docMk/>
             <pc:sldMk cId="2005456116" sldId="257"/>
             <ac:cxnSpMk id="1055" creationId="{EAF13472-2A54-A942-9989-189633D8FC45}"/>
           </ac:cxnSpMkLst>
         </pc:cxnChg>
-        <pc:cxnChg chg="add mod">
-          <ac:chgData name="Read, Zoe" userId="b08cd0fd-26d2-470b-8ec0-c6e6cb2a79bd" providerId="ADAL" clId="{5AEB2719-95A5-4ED2-9E0E-ED462BB10526}" dt="2026-03-12T19:06:52.126" v="2440" actId="1076"/>
+        <pc:cxnChg chg="add del mod">
+          <ac:chgData name="Read, Zoe" userId="b08cd0fd-26d2-470b-8ec0-c6e6cb2a79bd" providerId="ADAL" clId="{5AEB2719-95A5-4ED2-9E0E-ED462BB10526}" dt="2026-03-13T14:43:58.200" v="4435" actId="478"/>
           <ac:cxnSpMkLst>
             <pc:docMk/>
             <pc:sldMk cId="2005456116" sldId="257"/>
             <ac:cxnSpMk id="1056" creationId="{97023478-EBF1-C0B2-4640-43B6062C44A4}"/>
           </ac:cxnSpMkLst>
         </pc:cxnChg>
-        <pc:cxnChg chg="add mod">
-          <ac:chgData name="Read, Zoe" userId="b08cd0fd-26d2-470b-8ec0-c6e6cb2a79bd" providerId="ADAL" clId="{5AEB2719-95A5-4ED2-9E0E-ED462BB10526}" dt="2026-03-12T19:06:52.126" v="2440" actId="1076"/>
+        <pc:cxnChg chg="add del mod">
+          <ac:chgData name="Read, Zoe" userId="b08cd0fd-26d2-470b-8ec0-c6e6cb2a79bd" providerId="ADAL" clId="{5AEB2719-95A5-4ED2-9E0E-ED462BB10526}" dt="2026-03-13T14:43:58.200" v="4435" actId="478"/>
           <ac:cxnSpMkLst>
             <pc:docMk/>
             <pc:sldMk cId="2005456116" sldId="257"/>
             <ac:cxnSpMk id="1057" creationId="{EABAA8CD-3573-D737-5C52-07AF46DD77DB}"/>
           </ac:cxnSpMkLst>
         </pc:cxnChg>
-        <pc:cxnChg chg="add mod">
-          <ac:chgData name="Read, Zoe" userId="b08cd0fd-26d2-470b-8ec0-c6e6cb2a79bd" providerId="ADAL" clId="{5AEB2719-95A5-4ED2-9E0E-ED462BB10526}" dt="2026-03-10T20:31:43.640" v="2357" actId="693"/>
+        <pc:cxnChg chg="add del mod">
+          <ac:chgData name="Read, Zoe" userId="b08cd0fd-26d2-470b-8ec0-c6e6cb2a79bd" providerId="ADAL" clId="{5AEB2719-95A5-4ED2-9E0E-ED462BB10526}" dt="2026-03-13T14:43:58.200" v="4435" actId="478"/>
           <ac:cxnSpMkLst>
             <pc:docMk/>
             <pc:sldMk cId="2005456116" sldId="257"/>
@@ -554,11 +802,11 @@
 
 <file path=ppt/comments/modernComment_101_7788D4F4.xml><?xml version="1.0" encoding="utf-8"?>
 <p188:cmLst xmlns:a="http://schemas.openxmlformats.org/drawingml/2006/main" xmlns:r="http://schemas.openxmlformats.org/officeDocument/2006/relationships" xmlns:p188="http://schemas.microsoft.com/office/powerpoint/2018/8/main">
-  <p188:cm id="{C554005E-3DFA-4299-9DD0-B44794E496C1}" authorId="{50137B73-C207-1407-898B-797CE70D2312}" created="2026-03-06T17:25:40.921">
+  <p188:cm id="{B8A07343-8EBD-4063-9515-C0EDE7CA19F0}" authorId="{50137B73-C207-1407-898B-797CE70D2312}" created="2026-03-13T14:20:44.092">
     <ac:deMkLst xmlns:ac="http://schemas.microsoft.com/office/drawing/2013/main/command">
       <pc:docMk xmlns:pc="http://schemas.microsoft.com/office/powerpoint/2013/main/command"/>
       <pc:sldMk xmlns:pc="http://schemas.microsoft.com/office/powerpoint/2013/main/command" cId="2005456116" sldId="257"/>
-      <ac:picMk id="10" creationId="{0A86C89A-5889-65B9-1137-F480341B9783}"/>
+      <ac:picMk id="9" creationId="{09EDF015-AC84-7DA3-BD5A-225267C491D7}"/>
     </ac:deMkLst>
     <p188:txBody>
       <a:bodyPr/>
@@ -566,16 +814,16 @@
       <a:p>
         <a:r>
           <a:rPr lang="en-US"/>
-          <a:t>Add a title that includes: “Fig 1. SO4 values across sites and zones. N samples = ?” and maybe have the Sites and Zones written out here. </a:t>
+          <a:t>Print the anova table into a csv for Steph to look at</a:t>
         </a:r>
       </a:p>
     </p188:txBody>
   </p188:cm>
-  <p188:cm id="{D8865092-41B9-4A7A-8291-CC012781D643}" authorId="{50137B73-C207-1407-898B-797CE70D2312}" created="2026-03-06T17:31:19.747">
+  <p188:cm id="{F7D370C0-1A77-42D9-8499-1F9C74E5F229}" authorId="{50137B73-C207-1407-898B-797CE70D2312}" created="2026-03-13T16:00:05.398">
     <ac:deMkLst xmlns:ac="http://schemas.microsoft.com/office/drawing/2013/main/command">
       <pc:docMk xmlns:pc="http://schemas.microsoft.com/office/powerpoint/2013/main/command"/>
       <pc:sldMk xmlns:pc="http://schemas.microsoft.com/office/powerpoint/2013/main/command" cId="2005456116" sldId="257"/>
-      <ac:picMk id="13" creationId="{6D65798C-DAB9-914B-7ECA-E6D17BBC9E45}"/>
+      <ac:picMk id="1104" creationId="{BB487FD2-0D02-18A0-8E65-73832FF97000}"/>
     </ac:deMkLst>
     <p188:txBody>
       <a:bodyPr/>
@@ -583,7 +831,7 @@
       <a:p>
         <a:r>
           <a:rPr lang="en-US"/>
-          <a:t>Switch the depth to the y-axis and sulfate to the y-axis and color by zone</a:t>
+          <a:t>I should try to add the values and units to the x-axes of these graphs</a:t>
         </a:r>
       </a:p>
     </p188:txBody>
@@ -673,7 +921,7 @@
           <a:p>
             <a:fld id="{0407BD97-90D8-3541-9414-B17D17D02539}" type="datetimeFigureOut">
               <a:rPr lang="en-US" smtClean="0"/>
-              <a:t>3/12/2026</a:t>
+              <a:t>3/13/2026</a:t>
             </a:fld>
             <a:endParaRPr lang="en-US"/>
           </a:p>
@@ -989,45 +1237,34 @@
           <a:bodyPr/>
           <a:lstStyle/>
           <a:p>
-            <a:r>
-              <a:rPr lang="en-US" sz="1800" b="1" dirty="0"/>
-              <a:t>Who do I add to credits? </a:t>
+            <a:pPr marL="285750" indent="-285750">
+              <a:buFontTx/>
+              <a:buChar char="-"/>
+            </a:pPr>
+            <a:r>
+              <a:rPr lang="en-US" baseline="0" dirty="0"/>
+              <a:t>Make sure all plots are the same font size</a:t>
             </a:r>
           </a:p>
           <a:p>
-            <a:endParaRPr lang="en-US" sz="1800" b="1" dirty="0"/>
+            <a:pPr marL="285750" indent="-285750">
+              <a:buFontTx/>
+              <a:buChar char="-"/>
+            </a:pPr>
+            <a:r>
+              <a:rPr lang="en-US" baseline="0" dirty="0"/>
+              <a:t>-Color env variables plot by depth? Check which depth sensors I used (10 cm ones?) Or color by site? </a:t>
+            </a:r>
           </a:p>
           <a:p>
-            <a:r>
-              <a:rPr lang="en-US" sz="1800" b="1" dirty="0"/>
-              <a:t>, </a:t>
-            </a:r>
-            <a:r>
-              <a:rPr lang="en-US" sz="1800" dirty="0"/>
-              <a:t>Stephanie J. Wilson, Pat Megonigal, Alice Stearns, Evan Phillips, Ben Bond-Lamberty</a:t>
-            </a:r>
-          </a:p>
-          <a:p>
-            <a:r>
-              <a:rPr lang="en-US" sz="1600" baseline="30000" dirty="0"/>
-              <a:t>1</a:t>
-            </a:r>
-            <a:r>
-              <a:rPr lang="en-US" sz="1600" dirty="0"/>
-              <a:t>Smithsonian Environmental Research Center, Maryland, USA, </a:t>
-            </a:r>
-            <a:r>
-              <a:rPr lang="en-US" sz="1600" baseline="30000" dirty="0"/>
-              <a:t>2</a:t>
-            </a:r>
-            <a:r>
-              <a:rPr lang="en-US" sz="1600" dirty="0"/>
-              <a:t>Pacific Northwest National Laboratory</a:t>
-            </a:r>
-            <a:endParaRPr lang="en-US" dirty="0"/>
-          </a:p>
-          <a:p>
-            <a:endParaRPr lang="en-US" baseline="0" dirty="0"/>
+            <a:pPr marL="285750" indent="-285750">
+              <a:buFontTx/>
+              <a:buChar char="-"/>
+            </a:pPr>
+            <a:r>
+              <a:rPr lang="en-US" baseline="0" dirty="0"/>
+              <a:t>- If have time, could try adding stacked x-axis with month and year below it </a:t>
+            </a:r>
           </a:p>
         </p:txBody>
       </p:sp>
@@ -2272,10 +2509,10 @@
       </p:grpSpPr>
       <p:pic>
         <p:nvPicPr>
-          <p:cNvPr id="11" name="Picture 10" descr="A screenshot of a graph&#10;&#10;AI-generated content may be incorrect.">
+          <p:cNvPr id="1081" name="Picture 1080" descr="A chart of different colored boxes&#10;&#10;AI-generated content may be incorrect.">
             <a:extLst>
               <a:ext uri="{FF2B5EF4-FFF2-40B4-BE49-F238E27FC236}">
-                <a16:creationId xmlns:a16="http://schemas.microsoft.com/office/drawing/2014/main" id="{0144416F-2A82-F7CC-0427-8A36932666F6}"/>
+                <a16:creationId xmlns:a16="http://schemas.microsoft.com/office/drawing/2014/main" id="{E751C4E4-E854-FE7E-1EF9-268DA1A23024}"/>
               </a:ext>
             </a:extLst>
           </p:cNvPr>
@@ -2292,6 +2529,42 @@
               </a:ext>
             </a:extLst>
           </a:blip>
+          <a:stretch>
+            <a:fillRect/>
+          </a:stretch>
+        </p:blipFill>
+        <p:spPr>
+          <a:xfrm>
+            <a:off x="440597" y="18530902"/>
+            <a:ext cx="16459233" cy="6400813"/>
+          </a:xfrm>
+          <a:prstGeom prst="rect">
+            <a:avLst/>
+          </a:prstGeom>
+        </p:spPr>
+      </p:pic>
+      <p:pic>
+        <p:nvPicPr>
+          <p:cNvPr id="11" name="Picture 10" descr="A screenshot of a graph&#10;&#10;AI-generated content may be incorrect.">
+            <a:extLst>
+              <a:ext uri="{FF2B5EF4-FFF2-40B4-BE49-F238E27FC236}">
+                <a16:creationId xmlns:a16="http://schemas.microsoft.com/office/drawing/2014/main" id="{0144416F-2A82-F7CC-0427-8A36932666F6}"/>
+              </a:ext>
+            </a:extLst>
+          </p:cNvPr>
+          <p:cNvPicPr>
+            <a:picLocks noChangeAspect="1"/>
+          </p:cNvPicPr>
+          <p:nvPr/>
+        </p:nvPicPr>
+        <p:blipFill>
+          <a:blip r:embed="rId5">
+            <a:extLst>
+              <a:ext uri="{28A0092B-C50C-407E-A947-70E740481C1C}">
+                <a14:useLocalDpi xmlns:a14="http://schemas.microsoft.com/office/drawing/2010/main" val="0"/>
+              </a:ext>
+            </a:extLst>
+          </a:blip>
           <a:srcRect r="4104"/>
           <a:stretch>
             <a:fillRect/>
@@ -2299,8 +2572,8 @@
         </p:blipFill>
         <p:spPr>
           <a:xfrm>
-            <a:off x="17554806" y="16902663"/>
-            <a:ext cx="16232726" cy="10156496"/>
+            <a:off x="17722867" y="18667011"/>
+            <a:ext cx="16135719" cy="10095800"/>
           </a:xfrm>
           <a:prstGeom prst="rect">
             <a:avLst/>
@@ -2323,7 +2596,7 @@
         </p:nvCxnSpPr>
         <p:spPr>
           <a:xfrm>
-            <a:off x="18193524" y="27475279"/>
+            <a:off x="18238506" y="29047276"/>
             <a:ext cx="15099634" cy="0"/>
           </a:xfrm>
           <a:prstGeom prst="line">
@@ -2350,494 +2623,6 @@
           </a:fontRef>
         </p:style>
       </p:cxnSp>
-      <p:cxnSp>
-        <p:nvCxnSpPr>
-          <p:cNvPr id="1045" name="Straight Connector 1044">
-            <a:extLst>
-              <a:ext uri="{FF2B5EF4-FFF2-40B4-BE49-F238E27FC236}">
-                <a16:creationId xmlns:a16="http://schemas.microsoft.com/office/drawing/2014/main" id="{BB33F361-7DB9-04C2-C03A-778C0DF80E8F}"/>
-              </a:ext>
-            </a:extLst>
-          </p:cNvPr>
-          <p:cNvCxnSpPr>
-            <a:cxnSpLocks/>
-          </p:cNvCxnSpPr>
-          <p:nvPr/>
-        </p:nvCxnSpPr>
-        <p:spPr>
-          <a:xfrm flipV="1">
-            <a:off x="20334390" y="21104778"/>
-            <a:ext cx="0" cy="165469"/>
-          </a:xfrm>
-          <a:prstGeom prst="line">
-            <a:avLst/>
-          </a:prstGeom>
-          <a:ln w="19050">
-            <a:prstDash val="lgDash"/>
-          </a:ln>
-        </p:spPr>
-        <p:style>
-          <a:lnRef idx="1">
-            <a:schemeClr val="dk1"/>
-          </a:lnRef>
-          <a:fillRef idx="0">
-            <a:schemeClr val="dk1"/>
-          </a:fillRef>
-          <a:effectRef idx="0">
-            <a:schemeClr val="dk1"/>
-          </a:effectRef>
-          <a:fontRef idx="minor">
-            <a:schemeClr val="tx1"/>
-          </a:fontRef>
-        </p:style>
-      </p:cxnSp>
-      <p:cxnSp>
-        <p:nvCxnSpPr>
-          <p:cNvPr id="1047" name="Straight Connector 1046">
-            <a:extLst>
-              <a:ext uri="{FF2B5EF4-FFF2-40B4-BE49-F238E27FC236}">
-                <a16:creationId xmlns:a16="http://schemas.microsoft.com/office/drawing/2014/main" id="{375CA06C-A251-4ED8-A38F-281C7D414E0B}"/>
-              </a:ext>
-            </a:extLst>
-          </p:cNvPr>
-          <p:cNvCxnSpPr>
-            <a:cxnSpLocks/>
-          </p:cNvCxnSpPr>
-          <p:nvPr/>
-        </p:nvCxnSpPr>
-        <p:spPr>
-          <a:xfrm flipV="1">
-            <a:off x="23687190" y="21104777"/>
-            <a:ext cx="0" cy="165469"/>
-          </a:xfrm>
-          <a:prstGeom prst="line">
-            <a:avLst/>
-          </a:prstGeom>
-          <a:ln w="19050">
-            <a:prstDash val="lgDash"/>
-          </a:ln>
-        </p:spPr>
-        <p:style>
-          <a:lnRef idx="1">
-            <a:schemeClr val="dk1"/>
-          </a:lnRef>
-          <a:fillRef idx="0">
-            <a:schemeClr val="dk1"/>
-          </a:fillRef>
-          <a:effectRef idx="0">
-            <a:schemeClr val="dk1"/>
-          </a:effectRef>
-          <a:fontRef idx="minor">
-            <a:schemeClr val="tx1"/>
-          </a:fontRef>
-        </p:style>
-      </p:cxnSp>
-      <p:cxnSp>
-        <p:nvCxnSpPr>
-          <p:cNvPr id="1050" name="Straight Connector 1049">
-            <a:extLst>
-              <a:ext uri="{FF2B5EF4-FFF2-40B4-BE49-F238E27FC236}">
-                <a16:creationId xmlns:a16="http://schemas.microsoft.com/office/drawing/2014/main" id="{D3DAFDEE-D9E5-1D68-8EB9-E51F04AB1645}"/>
-              </a:ext>
-            </a:extLst>
-          </p:cNvPr>
-          <p:cNvCxnSpPr>
-            <a:cxnSpLocks/>
-          </p:cNvCxnSpPr>
-          <p:nvPr/>
-        </p:nvCxnSpPr>
-        <p:spPr>
-          <a:xfrm flipV="1">
-            <a:off x="27725790" y="21104777"/>
-            <a:ext cx="0" cy="165469"/>
-          </a:xfrm>
-          <a:prstGeom prst="line">
-            <a:avLst/>
-          </a:prstGeom>
-          <a:ln w="19050">
-            <a:prstDash val="lgDash"/>
-          </a:ln>
-        </p:spPr>
-        <p:style>
-          <a:lnRef idx="1">
-            <a:schemeClr val="dk1"/>
-          </a:lnRef>
-          <a:fillRef idx="0">
-            <a:schemeClr val="dk1"/>
-          </a:fillRef>
-          <a:effectRef idx="0">
-            <a:schemeClr val="dk1"/>
-          </a:effectRef>
-          <a:fontRef idx="minor">
-            <a:schemeClr val="tx1"/>
-          </a:fontRef>
-        </p:style>
-      </p:cxnSp>
-      <p:cxnSp>
-        <p:nvCxnSpPr>
-          <p:cNvPr id="1051" name="Straight Connector 1050">
-            <a:extLst>
-              <a:ext uri="{FF2B5EF4-FFF2-40B4-BE49-F238E27FC236}">
-                <a16:creationId xmlns:a16="http://schemas.microsoft.com/office/drawing/2014/main" id="{F2AFA6AA-F2FA-7B6D-89B6-C18FBAE3FB74}"/>
-              </a:ext>
-            </a:extLst>
-          </p:cNvPr>
-          <p:cNvCxnSpPr>
-            <a:cxnSpLocks/>
-          </p:cNvCxnSpPr>
-          <p:nvPr/>
-        </p:nvCxnSpPr>
-        <p:spPr>
-          <a:xfrm flipV="1">
-            <a:off x="30545190" y="21104777"/>
-            <a:ext cx="0" cy="165469"/>
-          </a:xfrm>
-          <a:prstGeom prst="line">
-            <a:avLst/>
-          </a:prstGeom>
-          <a:ln w="19050">
-            <a:prstDash val="lgDash"/>
-          </a:ln>
-        </p:spPr>
-        <p:style>
-          <a:lnRef idx="1">
-            <a:schemeClr val="dk1"/>
-          </a:lnRef>
-          <a:fillRef idx="0">
-            <a:schemeClr val="dk1"/>
-          </a:fillRef>
-          <a:effectRef idx="0">
-            <a:schemeClr val="dk1"/>
-          </a:effectRef>
-          <a:fontRef idx="minor">
-            <a:schemeClr val="tx1"/>
-          </a:fontRef>
-        </p:style>
-      </p:cxnSp>
-      <p:cxnSp>
-        <p:nvCxnSpPr>
-          <p:cNvPr id="1052" name="Straight Connector 1051">
-            <a:extLst>
-              <a:ext uri="{FF2B5EF4-FFF2-40B4-BE49-F238E27FC236}">
-                <a16:creationId xmlns:a16="http://schemas.microsoft.com/office/drawing/2014/main" id="{9F2A7656-0EEE-7013-0DB8-ADC5FDA2A8B2}"/>
-              </a:ext>
-            </a:extLst>
-          </p:cNvPr>
-          <p:cNvCxnSpPr>
-            <a:cxnSpLocks/>
-          </p:cNvCxnSpPr>
-          <p:nvPr/>
-        </p:nvCxnSpPr>
-        <p:spPr>
-          <a:xfrm flipV="1">
-            <a:off x="32221590" y="21104777"/>
-            <a:ext cx="0" cy="165469"/>
-          </a:xfrm>
-          <a:prstGeom prst="line">
-            <a:avLst/>
-          </a:prstGeom>
-          <a:ln w="19050">
-            <a:prstDash val="lgDash"/>
-          </a:ln>
-        </p:spPr>
-        <p:style>
-          <a:lnRef idx="1">
-            <a:schemeClr val="dk1"/>
-          </a:lnRef>
-          <a:fillRef idx="0">
-            <a:schemeClr val="dk1"/>
-          </a:fillRef>
-          <a:effectRef idx="0">
-            <a:schemeClr val="dk1"/>
-          </a:effectRef>
-          <a:fontRef idx="minor">
-            <a:schemeClr val="tx1"/>
-          </a:fontRef>
-        </p:style>
-      </p:cxnSp>
-      <p:cxnSp>
-        <p:nvCxnSpPr>
-          <p:cNvPr id="1053" name="Straight Connector 1052">
-            <a:extLst>
-              <a:ext uri="{FF2B5EF4-FFF2-40B4-BE49-F238E27FC236}">
-                <a16:creationId xmlns:a16="http://schemas.microsoft.com/office/drawing/2014/main" id="{45B61E4A-833A-BA3F-9B21-F25237F7E669}"/>
-              </a:ext>
-            </a:extLst>
-          </p:cNvPr>
-          <p:cNvCxnSpPr>
-            <a:cxnSpLocks/>
-          </p:cNvCxnSpPr>
-          <p:nvPr/>
-        </p:nvCxnSpPr>
-        <p:spPr>
-          <a:xfrm flipV="1">
-            <a:off x="19572390" y="26086816"/>
-            <a:ext cx="0" cy="165469"/>
-          </a:xfrm>
-          <a:prstGeom prst="line">
-            <a:avLst/>
-          </a:prstGeom>
-          <a:ln w="19050">
-            <a:prstDash val="lgDash"/>
-          </a:ln>
-        </p:spPr>
-        <p:style>
-          <a:lnRef idx="1">
-            <a:schemeClr val="dk1"/>
-          </a:lnRef>
-          <a:fillRef idx="0">
-            <a:schemeClr val="dk1"/>
-          </a:fillRef>
-          <a:effectRef idx="0">
-            <a:schemeClr val="dk1"/>
-          </a:effectRef>
-          <a:fontRef idx="minor">
-            <a:schemeClr val="tx1"/>
-          </a:fontRef>
-        </p:style>
-      </p:cxnSp>
-      <p:cxnSp>
-        <p:nvCxnSpPr>
-          <p:cNvPr id="1054" name="Straight Connector 1053">
-            <a:extLst>
-              <a:ext uri="{FF2B5EF4-FFF2-40B4-BE49-F238E27FC236}">
-                <a16:creationId xmlns:a16="http://schemas.microsoft.com/office/drawing/2014/main" id="{B4545213-9D78-5A7D-F0ED-7247C7E86F0A}"/>
-              </a:ext>
-            </a:extLst>
-          </p:cNvPr>
-          <p:cNvCxnSpPr>
-            <a:cxnSpLocks/>
-          </p:cNvCxnSpPr>
-          <p:nvPr/>
-        </p:nvCxnSpPr>
-        <p:spPr>
-          <a:xfrm flipV="1">
-            <a:off x="22467990" y="26086816"/>
-            <a:ext cx="0" cy="165469"/>
-          </a:xfrm>
-          <a:prstGeom prst="line">
-            <a:avLst/>
-          </a:prstGeom>
-          <a:ln w="19050">
-            <a:prstDash val="lgDash"/>
-          </a:ln>
-        </p:spPr>
-        <p:style>
-          <a:lnRef idx="1">
-            <a:schemeClr val="dk1"/>
-          </a:lnRef>
-          <a:fillRef idx="0">
-            <a:schemeClr val="dk1"/>
-          </a:fillRef>
-          <a:effectRef idx="0">
-            <a:schemeClr val="dk1"/>
-          </a:effectRef>
-          <a:fontRef idx="minor">
-            <a:schemeClr val="tx1"/>
-          </a:fontRef>
-        </p:style>
-      </p:cxnSp>
-      <p:cxnSp>
-        <p:nvCxnSpPr>
-          <p:cNvPr id="1055" name="Straight Connector 1054">
-            <a:extLst>
-              <a:ext uri="{FF2B5EF4-FFF2-40B4-BE49-F238E27FC236}">
-                <a16:creationId xmlns:a16="http://schemas.microsoft.com/office/drawing/2014/main" id="{EAF13472-2A54-A942-9989-189633D8FC45}"/>
-              </a:ext>
-            </a:extLst>
-          </p:cNvPr>
-          <p:cNvCxnSpPr>
-            <a:cxnSpLocks/>
-          </p:cNvCxnSpPr>
-          <p:nvPr/>
-        </p:nvCxnSpPr>
-        <p:spPr>
-          <a:xfrm flipV="1">
-            <a:off x="23839590" y="26086816"/>
-            <a:ext cx="0" cy="165469"/>
-          </a:xfrm>
-          <a:prstGeom prst="line">
-            <a:avLst/>
-          </a:prstGeom>
-          <a:ln w="19050">
-            <a:prstDash val="lgDash"/>
-          </a:ln>
-        </p:spPr>
-        <p:style>
-          <a:lnRef idx="1">
-            <a:schemeClr val="dk1"/>
-          </a:lnRef>
-          <a:fillRef idx="0">
-            <a:schemeClr val="dk1"/>
-          </a:fillRef>
-          <a:effectRef idx="0">
-            <a:schemeClr val="dk1"/>
-          </a:effectRef>
-          <a:fontRef idx="minor">
-            <a:schemeClr val="tx1"/>
-          </a:fontRef>
-        </p:style>
-      </p:cxnSp>
-      <p:cxnSp>
-        <p:nvCxnSpPr>
-          <p:cNvPr id="1056" name="Straight Connector 1055">
-            <a:extLst>
-              <a:ext uri="{FF2B5EF4-FFF2-40B4-BE49-F238E27FC236}">
-                <a16:creationId xmlns:a16="http://schemas.microsoft.com/office/drawing/2014/main" id="{97023478-EBF1-C0B2-4640-43B6062C44A4}"/>
-              </a:ext>
-            </a:extLst>
-          </p:cNvPr>
-          <p:cNvCxnSpPr>
-            <a:cxnSpLocks/>
-          </p:cNvCxnSpPr>
-          <p:nvPr/>
-        </p:nvCxnSpPr>
-        <p:spPr>
-          <a:xfrm flipV="1">
-            <a:off x="27878190" y="26007090"/>
-            <a:ext cx="0" cy="165469"/>
-          </a:xfrm>
-          <a:prstGeom prst="line">
-            <a:avLst/>
-          </a:prstGeom>
-          <a:ln w="19050">
-            <a:prstDash val="lgDash"/>
-          </a:ln>
-        </p:spPr>
-        <p:style>
-          <a:lnRef idx="1">
-            <a:schemeClr val="dk1"/>
-          </a:lnRef>
-          <a:fillRef idx="0">
-            <a:schemeClr val="dk1"/>
-          </a:fillRef>
-          <a:effectRef idx="0">
-            <a:schemeClr val="dk1"/>
-          </a:effectRef>
-          <a:fontRef idx="minor">
-            <a:schemeClr val="tx1"/>
-          </a:fontRef>
-        </p:style>
-      </p:cxnSp>
-      <p:cxnSp>
-        <p:nvCxnSpPr>
-          <p:cNvPr id="1057" name="Straight Connector 1056">
-            <a:extLst>
-              <a:ext uri="{FF2B5EF4-FFF2-40B4-BE49-F238E27FC236}">
-                <a16:creationId xmlns:a16="http://schemas.microsoft.com/office/drawing/2014/main" id="{EABAA8CD-3573-D737-5C52-07AF46DD77DB}"/>
-              </a:ext>
-            </a:extLst>
-          </p:cNvPr>
-          <p:cNvCxnSpPr>
-            <a:cxnSpLocks/>
-          </p:cNvCxnSpPr>
-          <p:nvPr/>
-        </p:nvCxnSpPr>
-        <p:spPr>
-          <a:xfrm flipV="1">
-            <a:off x="30697590" y="26007090"/>
-            <a:ext cx="0" cy="165469"/>
-          </a:xfrm>
-          <a:prstGeom prst="line">
-            <a:avLst/>
-          </a:prstGeom>
-          <a:ln w="19050">
-            <a:prstDash val="lgDash"/>
-          </a:ln>
-        </p:spPr>
-        <p:style>
-          <a:lnRef idx="1">
-            <a:schemeClr val="dk1"/>
-          </a:lnRef>
-          <a:fillRef idx="0">
-            <a:schemeClr val="dk1"/>
-          </a:fillRef>
-          <a:effectRef idx="0">
-            <a:schemeClr val="dk1"/>
-          </a:effectRef>
-          <a:fontRef idx="minor">
-            <a:schemeClr val="tx1"/>
-          </a:fontRef>
-        </p:style>
-      </p:cxnSp>
-      <p:cxnSp>
-        <p:nvCxnSpPr>
-          <p:cNvPr id="1058" name="Straight Connector 1057">
-            <a:extLst>
-              <a:ext uri="{FF2B5EF4-FFF2-40B4-BE49-F238E27FC236}">
-                <a16:creationId xmlns:a16="http://schemas.microsoft.com/office/drawing/2014/main" id="{60C150C5-AE9C-3C24-36BA-5DE7D6481E18}"/>
-              </a:ext>
-            </a:extLst>
-          </p:cNvPr>
-          <p:cNvCxnSpPr>
-            <a:cxnSpLocks/>
-          </p:cNvCxnSpPr>
-          <p:nvPr/>
-        </p:nvCxnSpPr>
-        <p:spPr>
-          <a:xfrm flipV="1">
-            <a:off x="32145390" y="26007090"/>
-            <a:ext cx="0" cy="165469"/>
-          </a:xfrm>
-          <a:prstGeom prst="line">
-            <a:avLst/>
-          </a:prstGeom>
-          <a:ln w="19050">
-            <a:prstDash val="lgDash"/>
-          </a:ln>
-        </p:spPr>
-        <p:style>
-          <a:lnRef idx="1">
-            <a:schemeClr val="dk1"/>
-          </a:lnRef>
-          <a:fillRef idx="0">
-            <a:schemeClr val="dk1"/>
-          </a:fillRef>
-          <a:effectRef idx="0">
-            <a:schemeClr val="dk1"/>
-          </a:effectRef>
-          <a:fontRef idx="minor">
-            <a:schemeClr val="tx1"/>
-          </a:fontRef>
-        </p:style>
-      </p:cxnSp>
-      <p:pic>
-        <p:nvPicPr>
-          <p:cNvPr id="15" name="Picture 14" descr="A graph of different colored lines&#10;&#10;AI-generated content may be incorrect.">
-            <a:extLst>
-              <a:ext uri="{FF2B5EF4-FFF2-40B4-BE49-F238E27FC236}">
-                <a16:creationId xmlns:a16="http://schemas.microsoft.com/office/drawing/2014/main" id="{6F1E99EB-549B-E9F4-C4C6-CCFBCE759AD8}"/>
-              </a:ext>
-            </a:extLst>
-          </p:cNvPr>
-          <p:cNvPicPr>
-            <a:picLocks noChangeAspect="1"/>
-          </p:cNvPicPr>
-          <p:nvPr/>
-        </p:nvPicPr>
-        <p:blipFill>
-          <a:blip r:embed="rId5">
-            <a:extLst>
-              <a:ext uri="{28A0092B-C50C-407E-A947-70E740481C1C}">
-                <a14:useLocalDpi xmlns:a14="http://schemas.microsoft.com/office/drawing/2010/main" val="0"/>
-              </a:ext>
-            </a:extLst>
-          </a:blip>
-          <a:srcRect l="88306" t="32174" b="33648"/>
-          <a:stretch>
-            <a:fillRect/>
-          </a:stretch>
-        </p:blipFill>
-        <p:spPr>
-          <a:xfrm>
-            <a:off x="14585669" y="19739617"/>
-            <a:ext cx="2452944" cy="2389927"/>
-          </a:xfrm>
-          <a:prstGeom prst="rect">
-            <a:avLst/>
-          </a:prstGeom>
-        </p:spPr>
-      </p:pic>
       <p:sp>
         <p:nvSpPr>
           <p:cNvPr id="2" name="Title 1">
@@ -2856,7 +2641,7 @@
         </p:nvSpPr>
         <p:spPr>
           <a:xfrm>
-            <a:off x="837036" y="978053"/>
+            <a:off x="837036" y="777081"/>
             <a:ext cx="26832555" cy="2580299"/>
           </a:xfrm>
         </p:spPr>
@@ -2891,8 +2676,8 @@
         </p:nvSpPr>
         <p:spPr>
           <a:xfrm>
-            <a:off x="897042" y="3488618"/>
-            <a:ext cx="31415565" cy="1076230"/>
+            <a:off x="837036" y="3238453"/>
+            <a:ext cx="31415565" cy="1247708"/>
           </a:xfrm>
         </p:spPr>
         <p:txBody>
@@ -2905,9 +2690,30 @@
             </a:r>
             <a:r>
               <a:rPr lang="en-US" sz="3600" dirty="0"/>
-              <a:t>Smithsonian Environmental Research Center, Maryland, USA</a:t>
-            </a:r>
-            <a:endParaRPr lang="en-US" dirty="0"/>
+              <a:t>Stephanie J. Wilson, Alice Stearns, Evan Phillips, Nathan Chin, Pat Megonigal, Ben Bond-Lamberty, </a:t>
+            </a:r>
+            <a:r>
+              <a:rPr lang="en-US" sz="3600" b="1" dirty="0"/>
+              <a:t>and COMPASS team </a:t>
+            </a:r>
+          </a:p>
+          <a:p>
+            <a:r>
+              <a:rPr lang="en-US" sz="3600" baseline="30000" dirty="0"/>
+              <a:t>1</a:t>
+            </a:r>
+            <a:r>
+              <a:rPr lang="en-US" sz="3600" dirty="0"/>
+              <a:t>Smithsonian Environmental Research Center, Maryland, USA, </a:t>
+            </a:r>
+            <a:r>
+              <a:rPr lang="en-US" sz="3600" baseline="30000" dirty="0"/>
+              <a:t>2</a:t>
+            </a:r>
+            <a:r>
+              <a:rPr lang="en-US" sz="3600" dirty="0"/>
+              <a:t>Pacific Northwest National Laboratory</a:t>
+            </a:r>
           </a:p>
         </p:txBody>
       </p:sp>
@@ -2927,8 +2733,8 @@
         </p:nvSpPr>
         <p:spPr>
           <a:xfrm>
-            <a:off x="778417" y="4668837"/>
-            <a:ext cx="16381197" cy="2712495"/>
+            <a:off x="778417" y="4846740"/>
+            <a:ext cx="16381197" cy="3778941"/>
           </a:xfrm>
           <a:prstGeom prst="rect">
             <a:avLst/>
@@ -3139,7 +2945,71 @@
                 <a:latin typeface="Arial" panose="020B0604020202020204" pitchFamily="34" charset="0"/>
                 <a:cs typeface="Arial" panose="020B0604020202020204" pitchFamily="34" charset="0"/>
               </a:rPr>
-              <a:t>Porewater sampling from 2022-2025  </a:t>
+              <a:t>Porewater sampling from 2022-2025 </a:t>
+            </a:r>
+            <a:r>
+              <a:rPr lang="en-US" sz="2800" dirty="0">
+                <a:latin typeface="Arial" panose="020B0604020202020204" pitchFamily="34" charset="0"/>
+                <a:cs typeface="Arial" panose="020B0604020202020204" pitchFamily="34" charset="0"/>
+                <a:sym typeface="Wingdings" panose="05000000000000000000" pitchFamily="2" charset="2"/>
+              </a:rPr>
+              <a:t> </a:t>
+            </a:r>
+            <a:r>
+              <a:rPr lang="en-US" sz="2800" dirty="0">
+                <a:latin typeface="Arial" panose="020B0604020202020204" pitchFamily="34" charset="0"/>
+                <a:cs typeface="Arial" panose="020B0604020202020204" pitchFamily="34" charset="0"/>
+              </a:rPr>
+              <a:t>Analyzed for DIC, DOC, Total Alkalinity, CDOM, H</a:t>
+            </a:r>
+            <a:r>
+              <a:rPr lang="en-US" sz="2800" baseline="-25000" dirty="0">
+                <a:latin typeface="Arial" panose="020B0604020202020204" pitchFamily="34" charset="0"/>
+                <a:cs typeface="Arial" panose="020B0604020202020204" pitchFamily="34" charset="0"/>
+              </a:rPr>
+              <a:t>2</a:t>
+            </a:r>
+            <a:r>
+              <a:rPr lang="en-US" sz="2800" dirty="0">
+                <a:latin typeface="Arial" panose="020B0604020202020204" pitchFamily="34" charset="0"/>
+                <a:cs typeface="Arial" panose="020B0604020202020204" pitchFamily="34" charset="0"/>
+              </a:rPr>
+              <a:t>S, Cl</a:t>
+            </a:r>
+            <a:r>
+              <a:rPr lang="en-US" sz="2800" baseline="30000" dirty="0">
+                <a:latin typeface="Arial" panose="020B0604020202020204" pitchFamily="34" charset="0"/>
+                <a:cs typeface="Arial" panose="020B0604020202020204" pitchFamily="34" charset="0"/>
+              </a:rPr>
+              <a:t>-</a:t>
+            </a:r>
+            <a:r>
+              <a:rPr lang="en-US" sz="2800" dirty="0">
+                <a:latin typeface="Arial" panose="020B0604020202020204" pitchFamily="34" charset="0"/>
+                <a:cs typeface="Arial" panose="020B0604020202020204" pitchFamily="34" charset="0"/>
+              </a:rPr>
+              <a:t>, Nutrients, and </a:t>
+            </a:r>
+            <a:r>
+              <a:rPr lang="en-US" sz="2800" b="1" dirty="0">
+                <a:latin typeface="Arial" panose="020B0604020202020204" pitchFamily="34" charset="0"/>
+                <a:cs typeface="Arial" panose="020B0604020202020204" pitchFamily="34" charset="0"/>
+              </a:rPr>
+              <a:t>SO</a:t>
+            </a:r>
+            <a:r>
+              <a:rPr lang="en-US" sz="2800" b="1" baseline="-25000" dirty="0">
+                <a:latin typeface="Arial" panose="020B0604020202020204" pitchFamily="34" charset="0"/>
+                <a:cs typeface="Arial" panose="020B0604020202020204" pitchFamily="34" charset="0"/>
+              </a:rPr>
+              <a:t>4</a:t>
+            </a:r>
+            <a:r>
+              <a:rPr lang="en-US" sz="2800" b="1" baseline="30000" dirty="0">
+                <a:latin typeface="Arial" panose="020B0604020202020204" pitchFamily="34" charset="0"/>
+                <a:cs typeface="Arial" panose="020B0604020202020204" pitchFamily="34" charset="0"/>
+              </a:rPr>
+              <a:t>2-</a:t>
             </a:r>
           </a:p>
           <a:p>
@@ -3148,65 +3018,13 @@
               <a:buChar char="•"/>
             </a:pPr>
             <a:r>
-              <a:rPr lang="en-US" sz="2800" dirty="0">
-                <a:latin typeface="Arial" panose="020B0604020202020204" pitchFamily="34" charset="0"/>
-                <a:cs typeface="Arial" panose="020B0604020202020204" pitchFamily="34" charset="0"/>
-              </a:rPr>
-              <a:t>Analyzed for DIC, DOC, Total Alkalinity, CDOM, H</a:t>
-            </a:r>
-            <a:r>
-              <a:rPr lang="en-US" sz="2800" baseline="-25000" dirty="0">
-                <a:latin typeface="Arial" panose="020B0604020202020204" pitchFamily="34" charset="0"/>
-                <a:cs typeface="Arial" panose="020B0604020202020204" pitchFamily="34" charset="0"/>
-              </a:rPr>
-              <a:t>2</a:t>
-            </a:r>
-            <a:r>
-              <a:rPr lang="en-US" sz="2800" dirty="0">
-                <a:latin typeface="Arial" panose="020B0604020202020204" pitchFamily="34" charset="0"/>
-                <a:cs typeface="Arial" panose="020B0604020202020204" pitchFamily="34" charset="0"/>
-              </a:rPr>
-              <a:t>S, Cl</a:t>
-            </a:r>
-            <a:r>
-              <a:rPr lang="en-US" sz="2800" baseline="30000" dirty="0">
-                <a:latin typeface="Arial" panose="020B0604020202020204" pitchFamily="34" charset="0"/>
-                <a:cs typeface="Arial" panose="020B0604020202020204" pitchFamily="34" charset="0"/>
-              </a:rPr>
-              <a:t>-</a:t>
-            </a:r>
-            <a:r>
-              <a:rPr lang="en-US" sz="2800" dirty="0">
-                <a:latin typeface="Arial" panose="020B0604020202020204" pitchFamily="34" charset="0"/>
-                <a:cs typeface="Arial" panose="020B0604020202020204" pitchFamily="34" charset="0"/>
-              </a:rPr>
-              <a:t>, Nutrients, and </a:t>
-            </a:r>
-            <a:r>
-              <a:rPr lang="en-US" sz="2800" b="1" dirty="0">
-                <a:latin typeface="Arial" panose="020B0604020202020204" pitchFamily="34" charset="0"/>
-                <a:cs typeface="Arial" panose="020B0604020202020204" pitchFamily="34" charset="0"/>
-              </a:rPr>
-              <a:t>SO</a:t>
-            </a:r>
-            <a:r>
-              <a:rPr lang="en-US" sz="2800" b="1" baseline="-25000" dirty="0">
-                <a:latin typeface="Arial" panose="020B0604020202020204" pitchFamily="34" charset="0"/>
-                <a:cs typeface="Arial" panose="020B0604020202020204" pitchFamily="34" charset="0"/>
-              </a:rPr>
-              <a:t>4</a:t>
-            </a:r>
-            <a:r>
-              <a:rPr lang="en-US" sz="2800" b="1" baseline="30000" dirty="0">
-                <a:latin typeface="Arial" panose="020B0604020202020204" pitchFamily="34" charset="0"/>
-                <a:cs typeface="Arial" panose="020B0604020202020204" pitchFamily="34" charset="0"/>
-              </a:rPr>
-              <a:t>2-</a:t>
-            </a:r>
-            <a:endParaRPr lang="en-US" sz="2800" dirty="0">
-              <a:latin typeface="Arial" panose="020B0604020202020204" pitchFamily="34" charset="0"/>
-              <a:cs typeface="Arial" panose="020B0604020202020204" pitchFamily="34" charset="0"/>
-            </a:endParaRPr>
+              <a:rPr lang="en-US" sz="2800" dirty="0" err="1"/>
+              <a:t>Aquatroll</a:t>
+            </a:r>
+            <a:r>
+              <a:rPr lang="en-US" sz="2800" dirty="0"/>
+              <a:t> AQ600 sensors deployed in the field, collecting continuous ground and soil water and salinity values</a:t>
+            </a:r>
           </a:p>
           <a:p>
             <a:endParaRPr lang="en-US" sz="2800" dirty="0"/>
@@ -3227,7 +3045,7 @@
         </p:nvCxnSpPr>
         <p:spPr>
           <a:xfrm>
-            <a:off x="685800" y="4605517"/>
+            <a:off x="685800" y="4739481"/>
             <a:ext cx="33375600" cy="0"/>
           </a:xfrm>
           <a:prstGeom prst="line">
@@ -3270,7 +3088,7 @@
         </p:nvCxnSpPr>
         <p:spPr>
           <a:xfrm>
-            <a:off x="18199250" y="14540452"/>
+            <a:off x="18067079" y="16169481"/>
             <a:ext cx="15862150" cy="0"/>
           </a:xfrm>
           <a:prstGeom prst="line">
@@ -3313,7 +3131,7 @@
         </p:nvCxnSpPr>
         <p:spPr>
           <a:xfrm>
-            <a:off x="17373600" y="4879335"/>
+            <a:off x="17385664" y="5073039"/>
             <a:ext cx="0" cy="26641242"/>
           </a:xfrm>
           <a:prstGeom prst="line">
@@ -3356,7 +3174,7 @@
         </p:nvCxnSpPr>
         <p:spPr>
           <a:xfrm>
-            <a:off x="742675" y="15233361"/>
+            <a:off x="742675" y="15483681"/>
             <a:ext cx="15862150" cy="0"/>
           </a:xfrm>
           <a:prstGeom prst="line">
@@ -3399,7 +3217,7 @@
         </p:nvSpPr>
         <p:spPr>
           <a:xfrm>
-            <a:off x="18348557" y="14944725"/>
+            <a:off x="18450205" y="16504674"/>
             <a:ext cx="15095898" cy="2097650"/>
           </a:xfrm>
           <a:prstGeom prst="rect">
@@ -3558,7 +3376,7 @@
               <a:t>Seasonal variation</a:t>
             </a:r>
             <a:r>
-              <a:rPr lang="en-US" b="1" dirty="0"/>
+              <a:rPr lang="en-US" sz="3600" b="1" dirty="0"/>
               <a:t> </a:t>
             </a:r>
           </a:p>
@@ -3568,7 +3386,7 @@
               <a:buChar char="•"/>
             </a:pPr>
             <a:r>
-              <a:rPr lang="en-US" dirty="0"/>
+              <a:rPr lang="en-US" sz="2800" dirty="0"/>
               <a:t>Sulfate tends to increase throughout the year and decrease at the start of a new year. </a:t>
             </a:r>
           </a:p>
@@ -3578,239 +3396,20 @@
               <a:buChar char="•"/>
             </a:pPr>
             <a:r>
-              <a:rPr lang="en-US" dirty="0"/>
+              <a:rPr lang="en-US" sz="2800" dirty="0"/>
               <a:t>Sulfate appears to be increasing over time at the </a:t>
             </a:r>
             <a:r>
-              <a:rPr lang="en-US" dirty="0" err="1"/>
+              <a:rPr lang="en-US" sz="2800" dirty="0" err="1"/>
               <a:t>GCReW</a:t>
             </a:r>
             <a:r>
-              <a:rPr lang="en-US" dirty="0"/>
+              <a:rPr lang="en-US" sz="2800" dirty="0"/>
               <a:t> site. </a:t>
             </a:r>
           </a:p>
           <a:p>
             <a:endParaRPr lang="en-US" dirty="0"/>
-          </a:p>
-        </p:txBody>
-      </p:sp>
-      <p:sp>
-        <p:nvSpPr>
-          <p:cNvPr id="7" name="Text Placeholder 3">
-            <a:extLst>
-              <a:ext uri="{FF2B5EF4-FFF2-40B4-BE49-F238E27FC236}">
-                <a16:creationId xmlns:a16="http://schemas.microsoft.com/office/drawing/2014/main" id="{B580F8D7-E067-282C-0BEF-1FA899DCFD3B}"/>
-              </a:ext>
-            </a:extLst>
-          </p:cNvPr>
-          <p:cNvSpPr txBox="1">
-            <a:spLocks/>
-          </p:cNvSpPr>
-          <p:nvPr/>
-        </p:nvSpPr>
-        <p:spPr>
-          <a:xfrm>
-            <a:off x="18269342" y="4879335"/>
-            <a:ext cx="15095898" cy="2511262"/>
-          </a:xfrm>
-          <a:prstGeom prst="rect">
-            <a:avLst/>
-          </a:prstGeom>
-          <a:ln>
-            <a:noFill/>
-          </a:ln>
-        </p:spPr>
-        <p:txBody>
-          <a:bodyPr/>
-          <a:lstStyle>
-            <a:lvl1pPr marL="0" indent="0" algn="l" defTabSz="1654622" rtl="0" eaLnBrk="1" latinLnBrk="0" hangingPunct="1">
-              <a:spcBef>
-                <a:spcPct val="20000"/>
-              </a:spcBef>
-              <a:buFont typeface="Arial" pitchFamily="34" charset="0"/>
-              <a:buNone/>
-              <a:defRPr lang="en-US" sz="2850" kern="1200" dirty="0">
-                <a:solidFill>
-                  <a:schemeClr val="tx1"/>
-                </a:solidFill>
-                <a:latin typeface="Arial" panose="020B0604020202020204" pitchFamily="34" charset="0"/>
-                <a:ea typeface="+mn-ea"/>
-                <a:cs typeface="Arial" panose="020B0604020202020204" pitchFamily="34" charset="0"/>
-              </a:defRPr>
-            </a:lvl1pPr>
-            <a:lvl2pPr marL="1344381" indent="-517070" algn="l" defTabSz="1654622" rtl="0" eaLnBrk="1" latinLnBrk="0" hangingPunct="1">
-              <a:spcBef>
-                <a:spcPct val="20000"/>
-              </a:spcBef>
-              <a:buFont typeface="Arial" pitchFamily="34" charset="0"/>
-              <a:buChar char="–"/>
-              <a:defRPr sz="5067" kern="1200">
-                <a:solidFill>
-                  <a:schemeClr val="tx1"/>
-                </a:solidFill>
-                <a:latin typeface="+mn-lt"/>
-                <a:ea typeface="+mn-ea"/>
-                <a:cs typeface="+mn-cs"/>
-              </a:defRPr>
-            </a:lvl2pPr>
-            <a:lvl3pPr marL="2068278" indent="-413656" algn="l" defTabSz="1654622" rtl="0" eaLnBrk="1" latinLnBrk="0" hangingPunct="1">
-              <a:spcBef>
-                <a:spcPct val="20000"/>
-              </a:spcBef>
-              <a:buFont typeface="Arial" pitchFamily="34" charset="0"/>
-              <a:buChar char="•"/>
-              <a:defRPr sz="4328" kern="1200">
-                <a:solidFill>
-                  <a:schemeClr val="tx1"/>
-                </a:solidFill>
-                <a:latin typeface="+mn-lt"/>
-                <a:ea typeface="+mn-ea"/>
-                <a:cs typeface="+mn-cs"/>
-              </a:defRPr>
-            </a:lvl3pPr>
-            <a:lvl4pPr marL="2895590" indent="-413656" algn="l" defTabSz="1654622" rtl="0" eaLnBrk="1" latinLnBrk="0" hangingPunct="1">
-              <a:spcBef>
-                <a:spcPct val="20000"/>
-              </a:spcBef>
-              <a:buFont typeface="Arial" pitchFamily="34" charset="0"/>
-              <a:buChar char="–"/>
-              <a:defRPr sz="3695" kern="1200">
-                <a:solidFill>
-                  <a:schemeClr val="tx1"/>
-                </a:solidFill>
-                <a:latin typeface="+mn-lt"/>
-                <a:ea typeface="+mn-ea"/>
-                <a:cs typeface="+mn-cs"/>
-              </a:defRPr>
-            </a:lvl4pPr>
-            <a:lvl5pPr marL="3722900" indent="-413656" algn="l" defTabSz="1654622" rtl="0" eaLnBrk="1" latinLnBrk="0" hangingPunct="1">
-              <a:spcBef>
-                <a:spcPct val="20000"/>
-              </a:spcBef>
-              <a:buFont typeface="Arial" pitchFamily="34" charset="0"/>
-              <a:buChar char="»"/>
-              <a:defRPr sz="3695" kern="1200">
-                <a:solidFill>
-                  <a:schemeClr val="tx1"/>
-                </a:solidFill>
-                <a:latin typeface="+mn-lt"/>
-                <a:ea typeface="+mn-ea"/>
-                <a:cs typeface="+mn-cs"/>
-              </a:defRPr>
-            </a:lvl5pPr>
-            <a:lvl6pPr marL="4550212" indent="-413656" algn="l" defTabSz="1654622" rtl="0" eaLnBrk="1" latinLnBrk="0" hangingPunct="1">
-              <a:spcBef>
-                <a:spcPct val="20000"/>
-              </a:spcBef>
-              <a:buFont typeface="Arial" pitchFamily="34" charset="0"/>
-              <a:buChar char="•"/>
-              <a:defRPr sz="3695" kern="1200">
-                <a:solidFill>
-                  <a:schemeClr val="tx1"/>
-                </a:solidFill>
-                <a:latin typeface="+mn-lt"/>
-                <a:ea typeface="+mn-ea"/>
-                <a:cs typeface="+mn-cs"/>
-              </a:defRPr>
-            </a:lvl6pPr>
-            <a:lvl7pPr marL="5377522" indent="-413656" algn="l" defTabSz="1654622" rtl="0" eaLnBrk="1" latinLnBrk="0" hangingPunct="1">
-              <a:spcBef>
-                <a:spcPct val="20000"/>
-              </a:spcBef>
-              <a:buFont typeface="Arial" pitchFamily="34" charset="0"/>
-              <a:buChar char="•"/>
-              <a:defRPr sz="3695" kern="1200">
-                <a:solidFill>
-                  <a:schemeClr val="tx1"/>
-                </a:solidFill>
-                <a:latin typeface="+mn-lt"/>
-                <a:ea typeface="+mn-ea"/>
-                <a:cs typeface="+mn-cs"/>
-              </a:defRPr>
-            </a:lvl7pPr>
-            <a:lvl8pPr marL="6204835" indent="-413656" algn="l" defTabSz="1654622" rtl="0" eaLnBrk="1" latinLnBrk="0" hangingPunct="1">
-              <a:spcBef>
-                <a:spcPct val="20000"/>
-              </a:spcBef>
-              <a:buFont typeface="Arial" pitchFamily="34" charset="0"/>
-              <a:buChar char="•"/>
-              <a:defRPr sz="3695" kern="1200">
-                <a:solidFill>
-                  <a:schemeClr val="tx1"/>
-                </a:solidFill>
-                <a:latin typeface="+mn-lt"/>
-                <a:ea typeface="+mn-ea"/>
-                <a:cs typeface="+mn-cs"/>
-              </a:defRPr>
-            </a:lvl8pPr>
-            <a:lvl9pPr marL="7032146" indent="-413656" algn="l" defTabSz="1654622" rtl="0" eaLnBrk="1" latinLnBrk="0" hangingPunct="1">
-              <a:spcBef>
-                <a:spcPct val="20000"/>
-              </a:spcBef>
-              <a:buFont typeface="Arial" pitchFamily="34" charset="0"/>
-              <a:buChar char="•"/>
-              <a:defRPr sz="3695" kern="1200">
-                <a:solidFill>
-                  <a:schemeClr val="tx1"/>
-                </a:solidFill>
-                <a:latin typeface="+mn-lt"/>
-                <a:ea typeface="+mn-ea"/>
-                <a:cs typeface="+mn-cs"/>
-              </a:defRPr>
-            </a:lvl9pPr>
-          </a:lstStyle>
-          <a:p>
-            <a:r>
-              <a:rPr lang="en-US" sz="3600" b="1" dirty="0">
-                <a:solidFill>
-                  <a:srgbClr val="75BFE2"/>
-                </a:solidFill>
-              </a:rPr>
-              <a:t>Depth</a:t>
-            </a:r>
-            <a:endParaRPr lang="en-US" dirty="0"/>
-          </a:p>
-          <a:p>
-            <a:pPr marL="688975" lvl="1" indent="-457200">
-              <a:buFont typeface="Arial" panose="020B0604020202020204" pitchFamily="34" charset="0"/>
-              <a:buChar char="•"/>
-            </a:pPr>
-            <a:r>
-              <a:rPr lang="en-US" sz="3200" dirty="0">
-                <a:latin typeface="Arial" panose="020B0604020202020204" pitchFamily="34" charset="0"/>
-                <a:cs typeface="Arial" panose="020B0604020202020204" pitchFamily="34" charset="0"/>
-              </a:rPr>
-              <a:t>Porewater was sampled at three depths: 10, 20, and 45 cm</a:t>
-            </a:r>
-          </a:p>
-          <a:p>
-            <a:pPr marL="688975" lvl="1" indent="-457200">
-              <a:buFont typeface="Arial" panose="020B0604020202020204" pitchFamily="34" charset="0"/>
-              <a:buChar char="•"/>
-            </a:pPr>
-            <a:r>
-              <a:rPr lang="en-US" sz="3200" dirty="0">
-                <a:latin typeface="Arial" panose="020B0604020202020204" pitchFamily="34" charset="0"/>
-                <a:cs typeface="Arial" panose="020B0604020202020204" pitchFamily="34" charset="0"/>
-              </a:rPr>
-              <a:t>Sulfate concentration changes by depth, but this effect varies across site and zone. For example, sulfate is much lower at the 45 cm depth at the </a:t>
-            </a:r>
-            <a:r>
-              <a:rPr lang="en-US" sz="3200" dirty="0" err="1">
-                <a:latin typeface="Arial" panose="020B0604020202020204" pitchFamily="34" charset="0"/>
-                <a:cs typeface="Arial" panose="020B0604020202020204" pitchFamily="34" charset="0"/>
-              </a:rPr>
-              <a:t>Moneystump</a:t>
-            </a:r>
-            <a:r>
-              <a:rPr lang="en-US" sz="3200" dirty="0">
-                <a:latin typeface="Arial" panose="020B0604020202020204" pitchFamily="34" charset="0"/>
-                <a:cs typeface="Arial" panose="020B0604020202020204" pitchFamily="34" charset="0"/>
-              </a:rPr>
-              <a:t> Wetland Zone compared to other depths; however, sulfate is consistent across depths at Goodwin. </a:t>
-            </a:r>
-            <a:endParaRPr lang="en-US" sz="3200" dirty="0"/>
           </a:p>
         </p:txBody>
       </p:sp>
@@ -3828,7 +3427,7 @@
         </p:nvSpPr>
         <p:spPr>
           <a:xfrm>
-            <a:off x="933921" y="12399147"/>
+            <a:off x="1035122" y="12638236"/>
             <a:ext cx="15738541" cy="2693045"/>
           </a:xfrm>
           <a:prstGeom prst="rect">
@@ -3909,7 +3508,7 @@
               </a:spcAft>
             </a:pPr>
             <a:r>
-              <a:rPr lang="en-US" sz="2800" b="0" i="0" u="none" strike="noStrike" dirty="0">
+              <a:rPr lang="en-US" sz="2800" b="1" i="0" u="none" strike="noStrike" dirty="0">
                 <a:solidFill>
                   <a:srgbClr val="000000"/>
                 </a:solidFill>
@@ -3917,20 +3516,9 @@
                 <a:latin typeface="Arial" panose="020B0604020202020204" pitchFamily="34" charset="0"/>
                 <a:cs typeface="Arial" panose="020B0604020202020204" pitchFamily="34" charset="0"/>
               </a:rPr>
-              <a:t>1) the </a:t>
-            </a:r>
-            <a:r>
-              <a:rPr lang="en-US" sz="2800" b="1" i="0" u="none" strike="noStrike" dirty="0">
-                <a:solidFill>
-                  <a:srgbClr val="000000"/>
-                </a:solidFill>
-                <a:effectLst/>
-                <a:latin typeface="Arial" panose="020B0604020202020204" pitchFamily="34" charset="0"/>
-                <a:cs typeface="Arial" panose="020B0604020202020204" pitchFamily="34" charset="0"/>
-              </a:rPr>
-              <a:t>depth and duration of soil saturation </a:t>
-            </a:r>
-            <a:endParaRPr lang="en-US" sz="2800" b="0" dirty="0">
+              <a:t>1) the depth and duration of soil saturation </a:t>
+            </a:r>
+            <a:endParaRPr lang="en-US" sz="2800" b="1" dirty="0">
               <a:effectLst/>
               <a:latin typeface="Arial" panose="020B0604020202020204" pitchFamily="34" charset="0"/>
               <a:cs typeface="Arial" panose="020B0604020202020204" pitchFamily="34" charset="0"/>
@@ -3946,7 +3534,7 @@
               </a:spcAft>
             </a:pPr>
             <a:r>
-              <a:rPr lang="en-US" sz="2800" b="0" i="0" u="none" strike="noStrike" dirty="0">
+              <a:rPr lang="en-US" sz="2800" b="1" i="0" u="none" strike="noStrike" dirty="0">
                 <a:solidFill>
                   <a:srgbClr val="000000"/>
                 </a:solidFill>
@@ -3954,18 +3542,7 @@
                 <a:latin typeface="Arial" panose="020B0604020202020204" pitchFamily="34" charset="0"/>
                 <a:cs typeface="Arial" panose="020B0604020202020204" pitchFamily="34" charset="0"/>
               </a:rPr>
-              <a:t>2) the abundance of </a:t>
-            </a:r>
-            <a:r>
-              <a:rPr lang="en-US" sz="2800" b="1" i="0" u="none" strike="noStrike" dirty="0">
-                <a:solidFill>
-                  <a:srgbClr val="000000"/>
-                </a:solidFill>
-                <a:effectLst/>
-                <a:latin typeface="Arial" panose="020B0604020202020204" pitchFamily="34" charset="0"/>
-                <a:cs typeface="Arial" panose="020B0604020202020204" pitchFamily="34" charset="0"/>
-              </a:rPr>
-              <a:t>redox-sensitive elements</a:t>
+              <a:t>2) the abundance of redox-sensitive elements</a:t>
             </a:r>
           </a:p>
           <a:p>
@@ -4009,43 +3586,6 @@
           </a:p>
         </p:txBody>
       </p:sp>
-      <p:pic>
-        <p:nvPicPr>
-          <p:cNvPr id="9" name="Picture 8" descr="A graph of different types of lines&#10;&#10;AI-generated content may be incorrect.">
-            <a:extLst>
-              <a:ext uri="{FF2B5EF4-FFF2-40B4-BE49-F238E27FC236}">
-                <a16:creationId xmlns:a16="http://schemas.microsoft.com/office/drawing/2014/main" id="{09EDF015-AC84-7DA3-BD5A-225267C491D7}"/>
-              </a:ext>
-            </a:extLst>
-          </p:cNvPr>
-          <p:cNvPicPr>
-            <a:picLocks noChangeAspect="1"/>
-          </p:cNvPicPr>
-          <p:nvPr/>
-        </p:nvPicPr>
-        <p:blipFill>
-          <a:blip r:embed="rId6">
-            <a:extLst>
-              <a:ext uri="{28A0092B-C50C-407E-A947-70E740481C1C}">
-                <a14:useLocalDpi xmlns:a14="http://schemas.microsoft.com/office/drawing/2010/main" val="0"/>
-              </a:ext>
-            </a:extLst>
-          </a:blip>
-          <a:srcRect t="3900"/>
-          <a:stretch>
-            <a:fillRect/>
-          </a:stretch>
-        </p:blipFill>
-        <p:spPr>
-          <a:xfrm>
-            <a:off x="19206043" y="8261037"/>
-            <a:ext cx="13068565" cy="6279415"/>
-          </a:xfrm>
-          <a:prstGeom prst="rect">
-            <a:avLst/>
-          </a:prstGeom>
-        </p:spPr>
-      </p:pic>
       <p:grpSp>
         <p:nvGrpSpPr>
           <p:cNvPr id="16" name="Group 15">
@@ -4060,7 +3600,7 @@
         </p:nvGrpSpPr>
         <p:grpSpPr>
           <a:xfrm>
-            <a:off x="1412690" y="4404611"/>
+            <a:off x="1185837" y="4996902"/>
             <a:ext cx="14975825" cy="7819779"/>
             <a:chOff x="-4093975" y="10585278"/>
             <a:chExt cx="15389819" cy="7038010"/>
@@ -5265,7 +4805,7 @@
                   <p:nvPr/>
                 </p:nvPicPr>
                 <p:blipFill rotWithShape="1">
-                  <a:blip r:embed="rId7">
+                  <a:blip r:embed="rId6">
                     <a:extLst>
                       <a:ext uri="{28A0092B-C50C-407E-A947-70E740481C1C}">
                         <a14:useLocalDpi xmlns:a14="http://schemas.microsoft.com/office/drawing/2010/main" val="0"/>
@@ -5315,7 +4855,7 @@
                   <p:nvPr/>
                 </p:nvPicPr>
                 <p:blipFill rotWithShape="1">
-                  <a:blip r:embed="rId8" cstate="print">
+                  <a:blip r:embed="rId7" cstate="print">
                     <a:extLst>
                       <a:ext uri="{28A0092B-C50C-407E-A947-70E740481C1C}">
                         <a14:useLocalDpi xmlns:a14="http://schemas.microsoft.com/office/drawing/2010/main" val="0"/>
@@ -5771,8 +5311,8 @@
         </p:nvSpPr>
         <p:spPr>
           <a:xfrm>
-            <a:off x="18624523" y="27832532"/>
-            <a:ext cx="14861984" cy="3400317"/>
+            <a:off x="18166504" y="29396420"/>
+            <a:ext cx="14861984" cy="2752090"/>
           </a:xfrm>
           <a:prstGeom prst="rect">
             <a:avLst/>
@@ -5929,7 +5469,7 @@
               </a:rPr>
               <a:t>Take-home messages</a:t>
             </a:r>
-            <a:endParaRPr lang="en-US" b="1" dirty="0"/>
+            <a:endParaRPr lang="en-US" sz="3600" b="1" dirty="0"/>
           </a:p>
           <a:p>
             <a:pPr marL="457200" indent="-457200">
@@ -5937,8 +5477,8 @@
               <a:buChar char="•"/>
             </a:pPr>
             <a:r>
-              <a:rPr lang="en-US" dirty="0"/>
-              <a:t>Porewater sulfate varies predictably across sites and zones, increasing from the upland forest to the wetland. </a:t>
+              <a:rPr lang="en-US" sz="2800" dirty="0"/>
+              <a:t>Sulfate, a redox-sensitive element, was affected by soil saturation and depth, although this effect varies across the TAI. </a:t>
             </a:r>
           </a:p>
           <a:p>
@@ -5947,46 +5487,9 @@
               <a:buChar char="•"/>
             </a:pPr>
             <a:r>
-              <a:rPr lang="en-US" dirty="0"/>
-              <a:t>Porewater sulfate is moderated by salinity, water level/content, and electrical conductivity. </a:t>
-            </a:r>
-          </a:p>
-          <a:p>
-            <a:pPr marL="457200" indent="-457200">
-              <a:buFont typeface="Arial" pitchFamily="34" charset="0"/>
-              <a:buChar char="•"/>
-            </a:pPr>
-            <a:r>
-              <a:rPr lang="en-US" dirty="0"/>
-              <a:t>Sulfate varies less predictably across depths, as this effect varies by site and zone. </a:t>
-            </a:r>
-          </a:p>
-          <a:p>
-            <a:pPr marL="457200" indent="-457200">
-              <a:buFont typeface="Arial" pitchFamily="34" charset="0"/>
-              <a:buChar char="•"/>
-            </a:pPr>
-            <a:r>
-              <a:rPr lang="en-US" dirty="0"/>
-              <a:t>Sulfate increases throughout the season, and at one site, increases across years. </a:t>
-            </a:r>
-          </a:p>
-          <a:p>
-            <a:pPr marL="457200" indent="-457200">
-              <a:buFont typeface="Arial" pitchFamily="34" charset="0"/>
-              <a:buChar char="•"/>
-            </a:pPr>
-            <a:endParaRPr lang="en-US" dirty="0"/>
-          </a:p>
-          <a:p>
-            <a:pPr marL="457200" indent="-457200">
-              <a:buFont typeface="Arial" pitchFamily="34" charset="0"/>
-              <a:buChar char="•"/>
-            </a:pPr>
-            <a:endParaRPr lang="en-US" dirty="0"/>
-          </a:p>
-          <a:p>
-            <a:endParaRPr lang="en-US" dirty="0"/>
+              <a:rPr lang="en-US" sz="2800" dirty="0"/>
+              <a:t>In the future, we can examine the sulfate-depth relationship to determine if there are patterns that explain its variability across sites and zones. </a:t>
+            </a:r>
           </a:p>
         </p:txBody>
       </p:sp>
@@ -6006,7 +5509,7 @@
         </p:nvSpPr>
         <p:spPr>
           <a:xfrm>
-            <a:off x="1242798" y="15436171"/>
+            <a:off x="1270093" y="15559881"/>
             <a:ext cx="15429360" cy="8155030"/>
           </a:xfrm>
           <a:prstGeom prst="rect">
@@ -6172,23 +5675,19 @@
             </a:pPr>
             <a:r>
               <a:rPr lang="en-US" sz="2800" dirty="0"/>
-              <a:t>Porewater was analyzed for </a:t>
-            </a:r>
-            <a:r>
-              <a:rPr lang="en-US" sz="2800" b="1" dirty="0"/>
-              <a:t>SO</a:t>
-            </a:r>
-            <a:r>
-              <a:rPr lang="en-US" sz="2800" b="1" baseline="-25000" dirty="0"/>
+              <a:t>Porewater was analyzed for Sulfate (SO</a:t>
+            </a:r>
+            <a:r>
+              <a:rPr lang="en-US" sz="2800" baseline="-25000" dirty="0"/>
               <a:t>4</a:t>
             </a:r>
             <a:r>
-              <a:rPr lang="en-US" sz="2800" b="1" baseline="30000" dirty="0"/>
+              <a:rPr lang="en-US" sz="2800" baseline="30000" dirty="0"/>
               <a:t>2-</a:t>
             </a:r>
             <a:r>
               <a:rPr lang="en-US" sz="2800" dirty="0"/>
-              <a:t> in 2,293 samples</a:t>
+              <a:t>) in 2,293 samples</a:t>
             </a:r>
           </a:p>
           <a:p>
@@ -6253,79 +5752,6 @@
           </a:p>
         </p:txBody>
       </p:sp>
-      <p:pic>
-        <p:nvPicPr>
-          <p:cNvPr id="1042" name="Picture 1041" descr="A graph of different colored squares&#10;&#10;AI-generated content may be incorrect.">
-            <a:extLst>
-              <a:ext uri="{FF2B5EF4-FFF2-40B4-BE49-F238E27FC236}">
-                <a16:creationId xmlns:a16="http://schemas.microsoft.com/office/drawing/2014/main" id="{04363E67-54FD-37B3-65BB-A8173A952E9D}"/>
-              </a:ext>
-            </a:extLst>
-          </p:cNvPr>
-          <p:cNvPicPr>
-            <a:picLocks noChangeAspect="1"/>
-          </p:cNvPicPr>
-          <p:nvPr/>
-        </p:nvPicPr>
-        <p:blipFill>
-          <a:blip r:embed="rId9">
-            <a:extLst>
-              <a:ext uri="{28A0092B-C50C-407E-A947-70E740481C1C}">
-                <a14:useLocalDpi xmlns:a14="http://schemas.microsoft.com/office/drawing/2010/main" val="0"/>
-              </a:ext>
-            </a:extLst>
-          </a:blip>
-          <a:srcRect t="4399"/>
-          <a:stretch>
-            <a:fillRect/>
-          </a:stretch>
-        </p:blipFill>
-        <p:spPr>
-          <a:xfrm>
-            <a:off x="2677555" y="18193266"/>
-            <a:ext cx="11541659" cy="6620362"/>
-          </a:xfrm>
-          <a:prstGeom prst="rect">
-            <a:avLst/>
-          </a:prstGeom>
-        </p:spPr>
-      </p:pic>
-      <p:pic>
-        <p:nvPicPr>
-          <p:cNvPr id="14" name="Picture 13" descr="A graph of water level and value&#10;&#10;AI-generated content may be incorrect.">
-            <a:extLst>
-              <a:ext uri="{FF2B5EF4-FFF2-40B4-BE49-F238E27FC236}">
-                <a16:creationId xmlns:a16="http://schemas.microsoft.com/office/drawing/2014/main" id="{37395166-1C97-2974-4774-B9647BFFD3B0}"/>
-              </a:ext>
-            </a:extLst>
-          </p:cNvPr>
-          <p:cNvPicPr>
-            <a:picLocks noChangeAspect="1"/>
-          </p:cNvPicPr>
-          <p:nvPr/>
-        </p:nvPicPr>
-        <p:blipFill>
-          <a:blip r:embed="rId10">
-            <a:extLst>
-              <a:ext uri="{28A0092B-C50C-407E-A947-70E740481C1C}">
-                <a14:useLocalDpi xmlns:a14="http://schemas.microsoft.com/office/drawing/2010/main" val="0"/>
-              </a:ext>
-            </a:extLst>
-          </a:blip>
-          <a:stretch>
-            <a:fillRect/>
-          </a:stretch>
-        </p:blipFill>
-        <p:spPr>
-          <a:xfrm>
-            <a:off x="1454042" y="26789484"/>
-            <a:ext cx="13716027" cy="5486411"/>
-          </a:xfrm>
-          <a:prstGeom prst="rect">
-            <a:avLst/>
-          </a:prstGeom>
-        </p:spPr>
-      </p:pic>
       <p:sp>
         <p:nvSpPr>
           <p:cNvPr id="1035" name="Text Placeholder 3">
@@ -6342,8 +5768,8 @@
         </p:nvSpPr>
         <p:spPr>
           <a:xfrm>
-            <a:off x="981439" y="24958265"/>
-            <a:ext cx="15095898" cy="2097650"/>
+            <a:off x="18029138" y="4968081"/>
+            <a:ext cx="15939643" cy="2996291"/>
           </a:xfrm>
           <a:prstGeom prst="rect">
             <a:avLst/>
@@ -6508,12 +5934,224 @@
               <a:buChar char="•"/>
             </a:pPr>
             <a:r>
-              <a:rPr lang="en-US" dirty="0"/>
+              <a:rPr lang="en-US" sz="2800" dirty="0"/>
               <a:t>Sulfate increases with increasing groundwater salinity, groundwater water level, soil electrical conductivity, and soil volumetric water content. </a:t>
             </a:r>
           </a:p>
           <a:p>
-            <a:endParaRPr lang="en-US" dirty="0"/>
+            <a:pPr marL="457200" indent="-457200">
+              <a:buFont typeface="Arial" pitchFamily="34" charset="0"/>
+              <a:buChar char="•"/>
+            </a:pPr>
+            <a:r>
+              <a:rPr lang="en-US" sz="2800" dirty="0"/>
+              <a:t>Sulfate at all depths increase with soil electrical conductivity and soil volumetric water content, which were measured at 10 cm, indicating that similar processes may be occurring at all depths. </a:t>
+            </a:r>
+          </a:p>
+        </p:txBody>
+      </p:sp>
+      <p:sp>
+        <p:nvSpPr>
+          <p:cNvPr id="7" name="Text Placeholder 3">
+            <a:extLst>
+              <a:ext uri="{FF2B5EF4-FFF2-40B4-BE49-F238E27FC236}">
+                <a16:creationId xmlns:a16="http://schemas.microsoft.com/office/drawing/2014/main" id="{B580F8D7-E067-282C-0BEF-1FA899DCFD3B}"/>
+              </a:ext>
+            </a:extLst>
+          </p:cNvPr>
+          <p:cNvSpPr txBox="1">
+            <a:spLocks/>
+          </p:cNvSpPr>
+          <p:nvPr/>
+        </p:nvSpPr>
+        <p:spPr>
+          <a:xfrm>
+            <a:off x="888614" y="24794643"/>
+            <a:ext cx="15095898" cy="2423838"/>
+          </a:xfrm>
+          <a:prstGeom prst="rect">
+            <a:avLst/>
+          </a:prstGeom>
+          <a:ln>
+            <a:noFill/>
+          </a:ln>
+        </p:spPr>
+        <p:txBody>
+          <a:bodyPr/>
+          <a:lstStyle>
+            <a:lvl1pPr marL="0" indent="0" algn="l" defTabSz="1654622" rtl="0" eaLnBrk="1" latinLnBrk="0" hangingPunct="1">
+              <a:spcBef>
+                <a:spcPct val="20000"/>
+              </a:spcBef>
+              <a:buFont typeface="Arial" pitchFamily="34" charset="0"/>
+              <a:buNone/>
+              <a:defRPr lang="en-US" sz="2850" kern="1200" dirty="0">
+                <a:solidFill>
+                  <a:schemeClr val="tx1"/>
+                </a:solidFill>
+                <a:latin typeface="Arial" panose="020B0604020202020204" pitchFamily="34" charset="0"/>
+                <a:ea typeface="+mn-ea"/>
+                <a:cs typeface="Arial" panose="020B0604020202020204" pitchFamily="34" charset="0"/>
+              </a:defRPr>
+            </a:lvl1pPr>
+            <a:lvl2pPr marL="1344381" indent="-517070" algn="l" defTabSz="1654622" rtl="0" eaLnBrk="1" latinLnBrk="0" hangingPunct="1">
+              <a:spcBef>
+                <a:spcPct val="20000"/>
+              </a:spcBef>
+              <a:buFont typeface="Arial" pitchFamily="34" charset="0"/>
+              <a:buChar char="–"/>
+              <a:defRPr sz="5067" kern="1200">
+                <a:solidFill>
+                  <a:schemeClr val="tx1"/>
+                </a:solidFill>
+                <a:latin typeface="+mn-lt"/>
+                <a:ea typeface="+mn-ea"/>
+                <a:cs typeface="+mn-cs"/>
+              </a:defRPr>
+            </a:lvl2pPr>
+            <a:lvl3pPr marL="2068278" indent="-413656" algn="l" defTabSz="1654622" rtl="0" eaLnBrk="1" latinLnBrk="0" hangingPunct="1">
+              <a:spcBef>
+                <a:spcPct val="20000"/>
+              </a:spcBef>
+              <a:buFont typeface="Arial" pitchFamily="34" charset="0"/>
+              <a:buChar char="•"/>
+              <a:defRPr sz="4328" kern="1200">
+                <a:solidFill>
+                  <a:schemeClr val="tx1"/>
+                </a:solidFill>
+                <a:latin typeface="+mn-lt"/>
+                <a:ea typeface="+mn-ea"/>
+                <a:cs typeface="+mn-cs"/>
+              </a:defRPr>
+            </a:lvl3pPr>
+            <a:lvl4pPr marL="2895590" indent="-413656" algn="l" defTabSz="1654622" rtl="0" eaLnBrk="1" latinLnBrk="0" hangingPunct="1">
+              <a:spcBef>
+                <a:spcPct val="20000"/>
+              </a:spcBef>
+              <a:buFont typeface="Arial" pitchFamily="34" charset="0"/>
+              <a:buChar char="–"/>
+              <a:defRPr sz="3695" kern="1200">
+                <a:solidFill>
+                  <a:schemeClr val="tx1"/>
+                </a:solidFill>
+                <a:latin typeface="+mn-lt"/>
+                <a:ea typeface="+mn-ea"/>
+                <a:cs typeface="+mn-cs"/>
+              </a:defRPr>
+            </a:lvl4pPr>
+            <a:lvl5pPr marL="3722900" indent="-413656" algn="l" defTabSz="1654622" rtl="0" eaLnBrk="1" latinLnBrk="0" hangingPunct="1">
+              <a:spcBef>
+                <a:spcPct val="20000"/>
+              </a:spcBef>
+              <a:buFont typeface="Arial" pitchFamily="34" charset="0"/>
+              <a:buChar char="»"/>
+              <a:defRPr sz="3695" kern="1200">
+                <a:solidFill>
+                  <a:schemeClr val="tx1"/>
+                </a:solidFill>
+                <a:latin typeface="+mn-lt"/>
+                <a:ea typeface="+mn-ea"/>
+                <a:cs typeface="+mn-cs"/>
+              </a:defRPr>
+            </a:lvl5pPr>
+            <a:lvl6pPr marL="4550212" indent="-413656" algn="l" defTabSz="1654622" rtl="0" eaLnBrk="1" latinLnBrk="0" hangingPunct="1">
+              <a:spcBef>
+                <a:spcPct val="20000"/>
+              </a:spcBef>
+              <a:buFont typeface="Arial" pitchFamily="34" charset="0"/>
+              <a:buChar char="•"/>
+              <a:defRPr sz="3695" kern="1200">
+                <a:solidFill>
+                  <a:schemeClr val="tx1"/>
+                </a:solidFill>
+                <a:latin typeface="+mn-lt"/>
+                <a:ea typeface="+mn-ea"/>
+                <a:cs typeface="+mn-cs"/>
+              </a:defRPr>
+            </a:lvl6pPr>
+            <a:lvl7pPr marL="5377522" indent="-413656" algn="l" defTabSz="1654622" rtl="0" eaLnBrk="1" latinLnBrk="0" hangingPunct="1">
+              <a:spcBef>
+                <a:spcPct val="20000"/>
+              </a:spcBef>
+              <a:buFont typeface="Arial" pitchFamily="34" charset="0"/>
+              <a:buChar char="•"/>
+              <a:defRPr sz="3695" kern="1200">
+                <a:solidFill>
+                  <a:schemeClr val="tx1"/>
+                </a:solidFill>
+                <a:latin typeface="+mn-lt"/>
+                <a:ea typeface="+mn-ea"/>
+                <a:cs typeface="+mn-cs"/>
+              </a:defRPr>
+            </a:lvl7pPr>
+            <a:lvl8pPr marL="6204835" indent="-413656" algn="l" defTabSz="1654622" rtl="0" eaLnBrk="1" latinLnBrk="0" hangingPunct="1">
+              <a:spcBef>
+                <a:spcPct val="20000"/>
+              </a:spcBef>
+              <a:buFont typeface="Arial" pitchFamily="34" charset="0"/>
+              <a:buChar char="•"/>
+              <a:defRPr sz="3695" kern="1200">
+                <a:solidFill>
+                  <a:schemeClr val="tx1"/>
+                </a:solidFill>
+                <a:latin typeface="+mn-lt"/>
+                <a:ea typeface="+mn-ea"/>
+                <a:cs typeface="+mn-cs"/>
+              </a:defRPr>
+            </a:lvl8pPr>
+            <a:lvl9pPr marL="7032146" indent="-413656" algn="l" defTabSz="1654622" rtl="0" eaLnBrk="1" latinLnBrk="0" hangingPunct="1">
+              <a:spcBef>
+                <a:spcPct val="20000"/>
+              </a:spcBef>
+              <a:buFont typeface="Arial" pitchFamily="34" charset="0"/>
+              <a:buChar char="•"/>
+              <a:defRPr sz="3695" kern="1200">
+                <a:solidFill>
+                  <a:schemeClr val="tx1"/>
+                </a:solidFill>
+                <a:latin typeface="+mn-lt"/>
+                <a:ea typeface="+mn-ea"/>
+                <a:cs typeface="+mn-cs"/>
+              </a:defRPr>
+            </a:lvl9pPr>
+          </a:lstStyle>
+          <a:p>
+            <a:r>
+              <a:rPr lang="en-US" sz="3600" b="1" dirty="0">
+                <a:solidFill>
+                  <a:srgbClr val="75BFE2"/>
+                </a:solidFill>
+              </a:rPr>
+              <a:t>Depth</a:t>
+            </a:r>
+            <a:endParaRPr lang="en-US" sz="3600" dirty="0"/>
+          </a:p>
+          <a:p>
+            <a:pPr marL="688975" lvl="1" indent="-457200">
+              <a:buFont typeface="Arial" panose="020B0604020202020204" pitchFamily="34" charset="0"/>
+              <a:buChar char="•"/>
+            </a:pPr>
+            <a:r>
+              <a:rPr lang="en-US" sz="2800" dirty="0">
+                <a:latin typeface="Arial" panose="020B0604020202020204" pitchFamily="34" charset="0"/>
+                <a:cs typeface="Arial" panose="020B0604020202020204" pitchFamily="34" charset="0"/>
+              </a:rPr>
+              <a:t>Porewater was sampled at three depths: 10, 20, and 45 cm</a:t>
+            </a:r>
+          </a:p>
+          <a:p>
+            <a:pPr marL="688975" lvl="1" indent="-457200">
+              <a:buFont typeface="Arial" panose="020B0604020202020204" pitchFamily="34" charset="0"/>
+              <a:buChar char="•"/>
+            </a:pPr>
+            <a:r>
+              <a:rPr lang="en-US" sz="2800" dirty="0">
+                <a:latin typeface="Arial" panose="020B0604020202020204" pitchFamily="34" charset="0"/>
+                <a:cs typeface="Arial" panose="020B0604020202020204" pitchFamily="34" charset="0"/>
+              </a:rPr>
+              <a:t>Sulfate concentration changes by depth, but this effect varies across site and zone. </a:t>
+            </a:r>
+            <a:endParaRPr lang="en-US" sz="2800" dirty="0"/>
           </a:p>
         </p:txBody>
       </p:sp>
@@ -6533,8 +6171,8 @@
         </p:nvCxnSpPr>
         <p:spPr>
           <a:xfrm>
-            <a:off x="863299" y="24744165"/>
-            <a:ext cx="15099634" cy="0"/>
+            <a:off x="884878" y="24703881"/>
+            <a:ext cx="15888785" cy="0"/>
           </a:xfrm>
           <a:prstGeom prst="line">
             <a:avLst/>
@@ -6560,6 +6198,113 @@
           </a:fontRef>
         </p:style>
       </p:cxnSp>
+      <p:pic>
+        <p:nvPicPr>
+          <p:cNvPr id="1085" name="Picture 1084" descr="A graph of different colored lines&#10;&#10;AI-generated content may be incorrect.">
+            <a:extLst>
+              <a:ext uri="{FF2B5EF4-FFF2-40B4-BE49-F238E27FC236}">
+                <a16:creationId xmlns:a16="http://schemas.microsoft.com/office/drawing/2014/main" id="{9E2D53CD-2078-3011-EB8F-F1979C9B3B22}"/>
+              </a:ext>
+            </a:extLst>
+          </p:cNvPr>
+          <p:cNvPicPr>
+            <a:picLocks noChangeAspect="1"/>
+          </p:cNvPicPr>
+          <p:nvPr/>
+        </p:nvPicPr>
+        <p:blipFill>
+          <a:blip r:embed="rId8">
+            <a:extLst>
+              <a:ext uri="{28A0092B-C50C-407E-A947-70E740481C1C}">
+                <a14:useLocalDpi xmlns:a14="http://schemas.microsoft.com/office/drawing/2010/main" val="0"/>
+              </a:ext>
+            </a:extLst>
+          </a:blip>
+          <a:stretch>
+            <a:fillRect/>
+          </a:stretch>
+        </p:blipFill>
+        <p:spPr>
+          <a:xfrm>
+            <a:off x="778559" y="26620977"/>
+            <a:ext cx="16459233" cy="5029210"/>
+          </a:xfrm>
+          <a:prstGeom prst="rect">
+            <a:avLst/>
+          </a:prstGeom>
+        </p:spPr>
+      </p:pic>
+      <p:pic>
+        <p:nvPicPr>
+          <p:cNvPr id="1104" name="Picture 1103" descr="A graph of water level and value&#10;&#10;AI-generated content may be incorrect.">
+            <a:extLst>
+              <a:ext uri="{FF2B5EF4-FFF2-40B4-BE49-F238E27FC236}">
+                <a16:creationId xmlns:a16="http://schemas.microsoft.com/office/drawing/2014/main" id="{BB487FD2-0D02-18A0-8E65-73832FF97000}"/>
+              </a:ext>
+            </a:extLst>
+          </p:cNvPr>
+          <p:cNvPicPr>
+            <a:picLocks noChangeAspect="1"/>
+          </p:cNvPicPr>
+          <p:nvPr/>
+        </p:nvPicPr>
+        <p:blipFill>
+          <a:blip r:embed="rId9">
+            <a:extLst>
+              <a:ext uri="{28A0092B-C50C-407E-A947-70E740481C1C}">
+                <a14:useLocalDpi xmlns:a14="http://schemas.microsoft.com/office/drawing/2010/main" val="0"/>
+              </a:ext>
+            </a:extLst>
+          </a:blip>
+          <a:stretch>
+            <a:fillRect/>
+          </a:stretch>
+        </p:blipFill>
+        <p:spPr>
+          <a:xfrm>
+            <a:off x="17716241" y="7635081"/>
+            <a:ext cx="16459233" cy="7315215"/>
+          </a:xfrm>
+          <a:prstGeom prst="rect">
+            <a:avLst/>
+          </a:prstGeom>
+        </p:spPr>
+      </p:pic>
+      <p:sp>
+        <p:nvSpPr>
+          <p:cNvPr id="1106" name="TextBox 1105">
+            <a:extLst>
+              <a:ext uri="{FF2B5EF4-FFF2-40B4-BE49-F238E27FC236}">
+                <a16:creationId xmlns:a16="http://schemas.microsoft.com/office/drawing/2014/main" id="{990614C8-403D-9EED-A601-7B130D60F6F4}"/>
+              </a:ext>
+            </a:extLst>
+          </p:cNvPr>
+          <p:cNvSpPr txBox="1"/>
+          <p:nvPr/>
+        </p:nvSpPr>
+        <p:spPr>
+          <a:xfrm>
+            <a:off x="17722867" y="14864430"/>
+            <a:ext cx="17443174" cy="954107"/>
+          </a:xfrm>
+          <a:prstGeom prst="rect">
+            <a:avLst/>
+          </a:prstGeom>
+          <a:noFill/>
+        </p:spPr>
+        <p:txBody>
+          <a:bodyPr wrap="square">
+            <a:spAutoFit/>
+          </a:bodyPr>
+          <a:lstStyle/>
+          <a:p>
+            <a:r>
+              <a:rPr lang="en-US" sz="2800" dirty="0"/>
+              <a:t>Groundwater Salinity measured in meters relative to the ground surface, where positive values indicate water levels above the ground surface. </a:t>
+            </a:r>
+          </a:p>
+        </p:txBody>
+      </p:sp>
     </p:spTree>
     <p:extLst>
       <p:ext uri="{BB962C8B-B14F-4D97-AF65-F5344CB8AC3E}">

--- a/ReadZ_GCReW_Symposium_Poster_2026.pptx
+++ b/ReadZ_GCReW_Symposium_Poster_2026.pptx
@@ -135,7 +135,7 @@
 <file path=ppt/revisionInfo.xml><?xml version="1.0" encoding="utf-8"?>
 <p1510:revInfo xmlns:a="http://schemas.openxmlformats.org/drawingml/2006/main" xmlns:r="http://schemas.openxmlformats.org/officeDocument/2006/relationships" xmlns:p1510="http://schemas.microsoft.com/office/powerpoint/2015/10/main">
   <p1510:revLst>
-    <p1510:client id="{B82716F6-75B8-4E39-A6D4-7E66C823071B}" v="66" dt="2026-03-13T15:58:09.715"/>
+    <p1510:client id="{B82716F6-75B8-4E39-A6D4-7E66C823071B}" v="112" dt="2026-03-13T20:00:58.886"/>
   </p1510:revLst>
 </p1510:revInfo>
 </file>
@@ -144,19 +144,19 @@
 <pc:chgInfo xmlns:a="http://schemas.openxmlformats.org/drawingml/2006/main" xmlns:r="http://schemas.openxmlformats.org/officeDocument/2006/relationships" xmlns:ac="http://schemas.microsoft.com/office/drawing/2013/main/command" xmlns:pc="http://schemas.microsoft.com/office/powerpoint/2013/main/command">
   <pc:docChgLst>
     <pc:chgData name="Read, Zoe" userId="b08cd0fd-26d2-470b-8ec0-c6e6cb2a79bd" providerId="ADAL" clId="{5AEB2719-95A5-4ED2-9E0E-ED462BB10526}"/>
-    <pc:docChg chg="undo custSel addSld delSld modSld">
-      <pc:chgData name="Read, Zoe" userId="b08cd0fd-26d2-470b-8ec0-c6e6cb2a79bd" providerId="ADAL" clId="{5AEB2719-95A5-4ED2-9E0E-ED462BB10526}" dt="2026-03-13T16:03:05.847" v="5463" actId="1035"/>
+    <pc:docChg chg="undo custSel addSld delSld modSld modMainMaster">
+      <pc:chgData name="Read, Zoe" userId="b08cd0fd-26d2-470b-8ec0-c6e6cb2a79bd" providerId="ADAL" clId="{5AEB2719-95A5-4ED2-9E0E-ED462BB10526}" dt="2026-03-13T20:01:30.523" v="6420" actId="1036"/>
       <pc:docMkLst>
         <pc:docMk/>
       </pc:docMkLst>
       <pc:sldChg chg="addSp delSp modSp mod modNotesTx">
-        <pc:chgData name="Read, Zoe" userId="b08cd0fd-26d2-470b-8ec0-c6e6cb2a79bd" providerId="ADAL" clId="{5AEB2719-95A5-4ED2-9E0E-ED462BB10526}" dt="2026-03-13T16:03:05.847" v="5463" actId="1035"/>
+        <pc:chgData name="Read, Zoe" userId="b08cd0fd-26d2-470b-8ec0-c6e6cb2a79bd" providerId="ADAL" clId="{5AEB2719-95A5-4ED2-9E0E-ED462BB10526}" dt="2026-03-13T20:01:30.523" v="6420" actId="1036"/>
         <pc:sldMkLst>
           <pc:docMk/>
           <pc:sldMk cId="2005456116" sldId="257"/>
         </pc:sldMkLst>
         <pc:spChg chg="mod">
-          <ac:chgData name="Read, Zoe" userId="b08cd0fd-26d2-470b-8ec0-c6e6cb2a79bd" providerId="ADAL" clId="{5AEB2719-95A5-4ED2-9E0E-ED462BB10526}" dt="2026-03-13T14:12:22.411" v="3683" actId="1035"/>
+          <ac:chgData name="Read, Zoe" userId="b08cd0fd-26d2-470b-8ec0-c6e6cb2a79bd" providerId="ADAL" clId="{5AEB2719-95A5-4ED2-9E0E-ED462BB10526}" dt="2026-03-13T19:32:25.158" v="6195" actId="20577"/>
           <ac:spMkLst>
             <pc:docMk/>
             <pc:sldMk cId="2005456116" sldId="257"/>
@@ -164,7 +164,7 @@
           </ac:spMkLst>
         </pc:spChg>
         <pc:spChg chg="mod">
-          <ac:chgData name="Read, Zoe" userId="b08cd0fd-26d2-470b-8ec0-c6e6cb2a79bd" providerId="ADAL" clId="{5AEB2719-95A5-4ED2-9E0E-ED462BB10526}" dt="2026-03-13T14:13:07.872" v="3705"/>
+          <ac:chgData name="Read, Zoe" userId="b08cd0fd-26d2-470b-8ec0-c6e6cb2a79bd" providerId="ADAL" clId="{5AEB2719-95A5-4ED2-9E0E-ED462BB10526}" dt="2026-03-13T20:00:59.077" v="6414" actId="21"/>
           <ac:spMkLst>
             <pc:docMk/>
             <pc:sldMk cId="2005456116" sldId="257"/>
@@ -172,7 +172,7 @@
           </ac:spMkLst>
         </pc:spChg>
         <pc:spChg chg="add mod">
-          <ac:chgData name="Read, Zoe" userId="b08cd0fd-26d2-470b-8ec0-c6e6cb2a79bd" providerId="ADAL" clId="{5AEB2719-95A5-4ED2-9E0E-ED462BB10526}" dt="2026-03-13T15:50:37.852" v="5095" actId="1036"/>
+          <ac:chgData name="Read, Zoe" userId="b08cd0fd-26d2-470b-8ec0-c6e6cb2a79bd" providerId="ADAL" clId="{5AEB2719-95A5-4ED2-9E0E-ED462BB10526}" dt="2026-03-13T19:22:44.257" v="6146" actId="20577"/>
           <ac:spMkLst>
             <pc:docMk/>
             <pc:sldMk cId="2005456116" sldId="257"/>
@@ -180,7 +180,7 @@
           </ac:spMkLst>
         </pc:spChg>
         <pc:spChg chg="add mod ord">
-          <ac:chgData name="Read, Zoe" userId="b08cd0fd-26d2-470b-8ec0-c6e6cb2a79bd" providerId="ADAL" clId="{5AEB2719-95A5-4ED2-9E0E-ED462BB10526}" dt="2026-03-13T15:23:26.809" v="5040" actId="1036"/>
+          <ac:chgData name="Read, Zoe" userId="b08cd0fd-26d2-470b-8ec0-c6e6cb2a79bd" providerId="ADAL" clId="{5AEB2719-95A5-4ED2-9E0E-ED462BB10526}" dt="2026-03-13T19:33:32.228" v="6207" actId="20577"/>
           <ac:spMkLst>
             <pc:docMk/>
             <pc:sldMk cId="2005456116" sldId="257"/>
@@ -300,7 +300,7 @@
           </ac:spMkLst>
         </pc:spChg>
         <pc:spChg chg="add mod">
-          <ac:chgData name="Read, Zoe" userId="b08cd0fd-26d2-470b-8ec0-c6e6cb2a79bd" providerId="ADAL" clId="{5AEB2719-95A5-4ED2-9E0E-ED462BB10526}" dt="2026-03-13T15:23:06.072" v="5035" actId="255"/>
+          <ac:chgData name="Read, Zoe" userId="b08cd0fd-26d2-470b-8ec0-c6e6cb2a79bd" providerId="ADAL" clId="{5AEB2719-95A5-4ED2-9E0E-ED462BB10526}" dt="2026-03-13T20:01:22.771" v="6419" actId="1035"/>
           <ac:spMkLst>
             <pc:docMk/>
             <pc:sldMk cId="2005456116" sldId="257"/>
@@ -316,7 +316,7 @@
           </ac:spMkLst>
         </pc:spChg>
         <pc:spChg chg="add mod">
-          <ac:chgData name="Read, Zoe" userId="b08cd0fd-26d2-470b-8ec0-c6e6cb2a79bd" providerId="ADAL" clId="{5AEB2719-95A5-4ED2-9E0E-ED462BB10526}" dt="2026-03-13T16:03:03.034" v="5459" actId="14100"/>
+          <ac:chgData name="Read, Zoe" userId="b08cd0fd-26d2-470b-8ec0-c6e6cb2a79bd" providerId="ADAL" clId="{5AEB2719-95A5-4ED2-9E0E-ED462BB10526}" dt="2026-03-13T19:33:53.441" v="6210" actId="20577"/>
           <ac:spMkLst>
             <pc:docMk/>
             <pc:sldMk cId="2005456116" sldId="257"/>
@@ -324,19 +324,27 @@
           </ac:spMkLst>
         </pc:spChg>
         <pc:spChg chg="mod">
-          <ac:chgData name="Read, Zoe" userId="b08cd0fd-26d2-470b-8ec0-c6e6cb2a79bd" providerId="ADAL" clId="{5AEB2719-95A5-4ED2-9E0E-ED462BB10526}" dt="2026-03-13T15:21:03.987" v="5014" actId="255"/>
+          <ac:chgData name="Read, Zoe" userId="b08cd0fd-26d2-470b-8ec0-c6e6cb2a79bd" providerId="ADAL" clId="{5AEB2719-95A5-4ED2-9E0E-ED462BB10526}" dt="2026-03-13T19:37:17.599" v="6382" actId="1076"/>
           <ac:spMkLst>
             <pc:docMk/>
             <pc:sldMk cId="2005456116" sldId="257"/>
             <ac:spMk id="1046" creationId="{3D22E29A-542C-2707-EE87-D32E923FD26A}"/>
           </ac:spMkLst>
         </pc:spChg>
-        <pc:spChg chg="add mod">
-          <ac:chgData name="Read, Zoe" userId="b08cd0fd-26d2-470b-8ec0-c6e6cb2a79bd" providerId="ADAL" clId="{5AEB2719-95A5-4ED2-9E0E-ED462BB10526}" dt="2026-03-13T16:02:51.168" v="5458" actId="5793"/>
+        <pc:spChg chg="add del mod">
+          <ac:chgData name="Read, Zoe" userId="b08cd0fd-26d2-470b-8ec0-c6e6cb2a79bd" providerId="ADAL" clId="{5AEB2719-95A5-4ED2-9E0E-ED462BB10526}" dt="2026-03-13T18:44:23.193" v="6000" actId="478"/>
           <ac:spMkLst>
             <pc:docMk/>
             <pc:sldMk cId="2005456116" sldId="257"/>
             <ac:spMk id="1106" creationId="{990614C8-403D-9EED-A601-7B130D60F6F4}"/>
+          </ac:spMkLst>
+        </pc:spChg>
+        <pc:spChg chg="add del mod">
+          <ac:chgData name="Read, Zoe" userId="b08cd0fd-26d2-470b-8ec0-c6e6cb2a79bd" providerId="ADAL" clId="{5AEB2719-95A5-4ED2-9E0E-ED462BB10526}" dt="2026-03-13T18:39:19.247" v="5999" actId="478"/>
+          <ac:spMkLst>
+            <pc:docMk/>
+            <pc:sldMk cId="2005456116" sldId="257"/>
+            <ac:spMk id="1121" creationId="{E65BED06-F373-80B1-9AE1-C3C5EC044957}"/>
           </ac:spMkLst>
         </pc:spChg>
         <pc:grpChg chg="del">
@@ -348,7 +356,7 @@
           </ac:grpSpMkLst>
         </pc:grpChg>
         <pc:graphicFrameChg chg="mod modGraphic">
-          <ac:chgData name="Read, Zoe" userId="b08cd0fd-26d2-470b-8ec0-c6e6cb2a79bd" providerId="ADAL" clId="{5AEB2719-95A5-4ED2-9E0E-ED462BB10526}" dt="2026-03-12T20:13:57.952" v="3393" actId="403"/>
+          <ac:chgData name="Read, Zoe" userId="b08cd0fd-26d2-470b-8ec0-c6e6cb2a79bd" providerId="ADAL" clId="{5AEB2719-95A5-4ED2-9E0E-ED462BB10526}" dt="2026-03-13T18:11:25.336" v="5465" actId="1076"/>
           <ac:graphicFrameMkLst>
             <pc:docMk/>
             <pc:sldMk cId="2005456116" sldId="257"/>
@@ -379,8 +387,8 @@
             <ac:picMk id="10" creationId="{87488FFA-0267-8CB3-3D6F-2F08271CB032}"/>
           </ac:picMkLst>
         </pc:picChg>
-        <pc:picChg chg="add mod ord modCrop">
-          <ac:chgData name="Read, Zoe" userId="b08cd0fd-26d2-470b-8ec0-c6e6cb2a79bd" providerId="ADAL" clId="{5AEB2719-95A5-4ED2-9E0E-ED462BB10526}" dt="2026-03-13T15:05:28.661" v="4916" actId="1076"/>
+        <pc:picChg chg="add del mod ord modCrop">
+          <ac:chgData name="Read, Zoe" userId="b08cd0fd-26d2-470b-8ec0-c6e6cb2a79bd" providerId="ADAL" clId="{5AEB2719-95A5-4ED2-9E0E-ED462BB10526}" dt="2026-03-13T19:02:40.378" v="6050" actId="478"/>
           <ac:picMkLst>
             <pc:docMk/>
             <pc:sldMk cId="2005456116" sldId="257"/>
@@ -643,12 +651,204 @@
             <ac:picMk id="1102" creationId="{409410D1-8C61-C5F2-2ED0-8AE9EB772068}"/>
           </ac:picMkLst>
         </pc:picChg>
+        <pc:picChg chg="add del mod">
+          <ac:chgData name="Read, Zoe" userId="b08cd0fd-26d2-470b-8ec0-c6e6cb2a79bd" providerId="ADAL" clId="{5AEB2719-95A5-4ED2-9E0E-ED462BB10526}" dt="2026-03-13T18:28:42.166" v="5951" actId="478"/>
+          <ac:picMkLst>
+            <pc:docMk/>
+            <pc:sldMk cId="2005456116" sldId="257"/>
+            <ac:picMk id="1104" creationId="{BB487FD2-0D02-18A0-8E65-73832FF97000}"/>
+          </ac:picMkLst>
+        </pc:picChg>
+        <pc:picChg chg="add del mod">
+          <ac:chgData name="Read, Zoe" userId="b08cd0fd-26d2-470b-8ec0-c6e6cb2a79bd" providerId="ADAL" clId="{5AEB2719-95A5-4ED2-9E0E-ED462BB10526}" dt="2026-03-13T18:29:11.510" v="5953" actId="478"/>
+          <ac:picMkLst>
+            <pc:docMk/>
+            <pc:sldMk cId="2005456116" sldId="257"/>
+            <ac:picMk id="1108" creationId="{C1693025-7B3E-924A-5F00-7BE2F534CE94}"/>
+          </ac:picMkLst>
+        </pc:picChg>
+        <pc:picChg chg="add del mod ord">
+          <ac:chgData name="Read, Zoe" userId="b08cd0fd-26d2-470b-8ec0-c6e6cb2a79bd" providerId="ADAL" clId="{5AEB2719-95A5-4ED2-9E0E-ED462BB10526}" dt="2026-03-13T18:44:39.141" v="6006" actId="478"/>
+          <ac:picMkLst>
+            <pc:docMk/>
+            <pc:sldMk cId="2005456116" sldId="257"/>
+            <ac:picMk id="1110" creationId="{B4368826-C15A-60ED-182C-BDDCB7AE0450}"/>
+          </ac:picMkLst>
+        </pc:picChg>
+        <pc:picChg chg="add del mod">
+          <ac:chgData name="Read, Zoe" userId="b08cd0fd-26d2-470b-8ec0-c6e6cb2a79bd" providerId="ADAL" clId="{5AEB2719-95A5-4ED2-9E0E-ED462BB10526}" dt="2026-03-13T18:30:19.459" v="5961" actId="478"/>
+          <ac:picMkLst>
+            <pc:docMk/>
+            <pc:sldMk cId="2005456116" sldId="257"/>
+            <ac:picMk id="1112" creationId="{1D61C42D-3DE8-6030-77E4-BEF2648FC623}"/>
+          </ac:picMkLst>
+        </pc:picChg>
+        <pc:picChg chg="add del mod">
+          <ac:chgData name="Read, Zoe" userId="b08cd0fd-26d2-470b-8ec0-c6e6cb2a79bd" providerId="ADAL" clId="{5AEB2719-95A5-4ED2-9E0E-ED462BB10526}" dt="2026-03-13T18:31:22.981" v="5964" actId="478"/>
+          <ac:picMkLst>
+            <pc:docMk/>
+            <pc:sldMk cId="2005456116" sldId="257"/>
+            <ac:picMk id="1114" creationId="{EFC001B8-BD61-1505-17D5-BA752A5B2FBC}"/>
+          </ac:picMkLst>
+        </pc:picChg>
+        <pc:picChg chg="add del mod">
+          <ac:chgData name="Read, Zoe" userId="b08cd0fd-26d2-470b-8ec0-c6e6cb2a79bd" providerId="ADAL" clId="{5AEB2719-95A5-4ED2-9E0E-ED462BB10526}" dt="2026-03-13T18:31:58.499" v="5967" actId="478"/>
+          <ac:picMkLst>
+            <pc:docMk/>
+            <pc:sldMk cId="2005456116" sldId="257"/>
+            <ac:picMk id="1116" creationId="{65AF378F-5CD2-D33D-63DD-3174D0B4ABE3}"/>
+          </ac:picMkLst>
+        </pc:picChg>
+        <pc:picChg chg="add del mod">
+          <ac:chgData name="Read, Zoe" userId="b08cd0fd-26d2-470b-8ec0-c6e6cb2a79bd" providerId="ADAL" clId="{5AEB2719-95A5-4ED2-9E0E-ED462BB10526}" dt="2026-03-13T18:32:48.323" v="5972" actId="478"/>
+          <ac:picMkLst>
+            <pc:docMk/>
+            <pc:sldMk cId="2005456116" sldId="257"/>
+            <ac:picMk id="1118" creationId="{FD3EE651-DB72-0E6C-A520-B8763C8AD8B2}"/>
+          </ac:picMkLst>
+        </pc:picChg>
+        <pc:picChg chg="add del mod modCrop">
+          <ac:chgData name="Read, Zoe" userId="b08cd0fd-26d2-470b-8ec0-c6e6cb2a79bd" providerId="ADAL" clId="{5AEB2719-95A5-4ED2-9E0E-ED462BB10526}" dt="2026-03-13T18:44:27.949" v="6001" actId="478"/>
+          <ac:picMkLst>
+            <pc:docMk/>
+            <pc:sldMk cId="2005456116" sldId="257"/>
+            <ac:picMk id="1119" creationId="{6B0255B7-3633-4468-0D88-5578BD3FA01B}"/>
+          </ac:picMkLst>
+        </pc:picChg>
+        <pc:picChg chg="add del mod">
+          <ac:chgData name="Read, Zoe" userId="b08cd0fd-26d2-470b-8ec0-c6e6cb2a79bd" providerId="ADAL" clId="{5AEB2719-95A5-4ED2-9E0E-ED462BB10526}" dt="2026-03-13T18:47:33.690" v="6018" actId="478"/>
+          <ac:picMkLst>
+            <pc:docMk/>
+            <pc:sldMk cId="2005456116" sldId="257"/>
+            <ac:picMk id="1123" creationId="{CE88C600-3733-61AF-6D89-0D2360023238}"/>
+          </ac:picMkLst>
+        </pc:picChg>
+        <pc:picChg chg="add del mod">
+          <ac:chgData name="Read, Zoe" userId="b08cd0fd-26d2-470b-8ec0-c6e6cb2a79bd" providerId="ADAL" clId="{5AEB2719-95A5-4ED2-9E0E-ED462BB10526}" dt="2026-03-13T18:47:31.828" v="6017" actId="478"/>
+          <ac:picMkLst>
+            <pc:docMk/>
+            <pc:sldMk cId="2005456116" sldId="257"/>
+            <ac:picMk id="1125" creationId="{0FCE25EE-4310-CAAC-66A8-C2FEE8321D3F}"/>
+          </ac:picMkLst>
+        </pc:picChg>
+        <pc:picChg chg="add del mod">
+          <ac:chgData name="Read, Zoe" userId="b08cd0fd-26d2-470b-8ec0-c6e6cb2a79bd" providerId="ADAL" clId="{5AEB2719-95A5-4ED2-9E0E-ED462BB10526}" dt="2026-03-13T18:50:50.707" v="6029" actId="478"/>
+          <ac:picMkLst>
+            <pc:docMk/>
+            <pc:sldMk cId="2005456116" sldId="257"/>
+            <ac:picMk id="1127" creationId="{A6BAE1D5-13FF-E627-6DEA-53877405D740}"/>
+          </ac:picMkLst>
+        </pc:picChg>
+        <pc:picChg chg="add del mod">
+          <ac:chgData name="Read, Zoe" userId="b08cd0fd-26d2-470b-8ec0-c6e6cb2a79bd" providerId="ADAL" clId="{5AEB2719-95A5-4ED2-9E0E-ED462BB10526}" dt="2026-03-13T18:50:42.061" v="6025" actId="478"/>
+          <ac:picMkLst>
+            <pc:docMk/>
+            <pc:sldMk cId="2005456116" sldId="257"/>
+            <ac:picMk id="1129" creationId="{8ED4C85E-9940-B3B4-D13C-C579770212D7}"/>
+          </ac:picMkLst>
+        </pc:picChg>
+        <pc:picChg chg="add del mod">
+          <ac:chgData name="Read, Zoe" userId="b08cd0fd-26d2-470b-8ec0-c6e6cb2a79bd" providerId="ADAL" clId="{5AEB2719-95A5-4ED2-9E0E-ED462BB10526}" dt="2026-03-13T18:51:33.492" v="6033" actId="478"/>
+          <ac:picMkLst>
+            <pc:docMk/>
+            <pc:sldMk cId="2005456116" sldId="257"/>
+            <ac:picMk id="1131" creationId="{AD16F9B4-9CB9-F089-774F-0B07610A46B6}"/>
+          </ac:picMkLst>
+        </pc:picChg>
+        <pc:picChg chg="add del mod">
+          <ac:chgData name="Read, Zoe" userId="b08cd0fd-26d2-470b-8ec0-c6e6cb2a79bd" providerId="ADAL" clId="{5AEB2719-95A5-4ED2-9E0E-ED462BB10526}" dt="2026-03-13T18:54:09.040" v="6041" actId="478"/>
+          <ac:picMkLst>
+            <pc:docMk/>
+            <pc:sldMk cId="2005456116" sldId="257"/>
+            <ac:picMk id="1133" creationId="{B3130CC2-25A3-ED65-64F7-35DA082315FF}"/>
+          </ac:picMkLst>
+        </pc:picChg>
+        <pc:picChg chg="add del mod ord">
+          <ac:chgData name="Read, Zoe" userId="b08cd0fd-26d2-470b-8ec0-c6e6cb2a79bd" providerId="ADAL" clId="{5AEB2719-95A5-4ED2-9E0E-ED462BB10526}" dt="2026-03-13T19:59:07.956" v="6396" actId="478"/>
+          <ac:picMkLst>
+            <pc:docMk/>
+            <pc:sldMk cId="2005456116" sldId="257"/>
+            <ac:picMk id="1135" creationId="{3E27048A-DB49-B226-206B-F20819C4D439}"/>
+          </ac:picMkLst>
+        </pc:picChg>
+        <pc:picChg chg="add del mod">
+          <ac:chgData name="Read, Zoe" userId="b08cd0fd-26d2-470b-8ec0-c6e6cb2a79bd" providerId="ADAL" clId="{5AEB2719-95A5-4ED2-9E0E-ED462BB10526}" dt="2026-03-13T19:02:38.664" v="6049" actId="478"/>
+          <ac:picMkLst>
+            <pc:docMk/>
+            <pc:sldMk cId="2005456116" sldId="257"/>
+            <ac:picMk id="1137" creationId="{7DD4138F-3BA3-84BC-A0E4-C1F9CB95CCF7}"/>
+          </ac:picMkLst>
+        </pc:picChg>
+        <pc:picChg chg="add del mod">
+          <ac:chgData name="Read, Zoe" userId="b08cd0fd-26d2-470b-8ec0-c6e6cb2a79bd" providerId="ADAL" clId="{5AEB2719-95A5-4ED2-9E0E-ED462BB10526}" dt="2026-03-13T19:08:54.435" v="6056" actId="478"/>
+          <ac:picMkLst>
+            <pc:docMk/>
+            <pc:sldMk cId="2005456116" sldId="257"/>
+            <ac:picMk id="1139" creationId="{57D43B10-EF66-AE54-8719-FCB4C9F2A313}"/>
+          </ac:picMkLst>
+        </pc:picChg>
+        <pc:picChg chg="add del mod">
+          <ac:chgData name="Read, Zoe" userId="b08cd0fd-26d2-470b-8ec0-c6e6cb2a79bd" providerId="ADAL" clId="{5AEB2719-95A5-4ED2-9E0E-ED462BB10526}" dt="2026-03-13T19:18:55.396" v="6058" actId="478"/>
+          <ac:picMkLst>
+            <pc:docMk/>
+            <pc:sldMk cId="2005456116" sldId="257"/>
+            <ac:picMk id="1141" creationId="{9DDFB753-78A2-CB94-8E7A-789D9194846D}"/>
+          </ac:picMkLst>
+        </pc:picChg>
+        <pc:picChg chg="add del mod">
+          <ac:chgData name="Read, Zoe" userId="b08cd0fd-26d2-470b-8ec0-c6e6cb2a79bd" providerId="ADAL" clId="{5AEB2719-95A5-4ED2-9E0E-ED462BB10526}" dt="2026-03-13T19:19:13.900" v="6063" actId="478"/>
+          <ac:picMkLst>
+            <pc:docMk/>
+            <pc:sldMk cId="2005456116" sldId="257"/>
+            <ac:picMk id="1143" creationId="{741B156B-9832-91C1-0098-489BAF823450}"/>
+          </ac:picMkLst>
+        </pc:picChg>
+        <pc:picChg chg="add del mod">
+          <ac:chgData name="Read, Zoe" userId="b08cd0fd-26d2-470b-8ec0-c6e6cb2a79bd" providerId="ADAL" clId="{5AEB2719-95A5-4ED2-9E0E-ED462BB10526}" dt="2026-03-13T19:19:53.661" v="6068" actId="478"/>
+          <ac:picMkLst>
+            <pc:docMk/>
+            <pc:sldMk cId="2005456116" sldId="257"/>
+            <ac:picMk id="1145" creationId="{7CCB61CC-B337-A6CA-94D4-6F5ECFDB3A51}"/>
+          </ac:picMkLst>
+        </pc:picChg>
+        <pc:picChg chg="add del mod">
+          <ac:chgData name="Read, Zoe" userId="b08cd0fd-26d2-470b-8ec0-c6e6cb2a79bd" providerId="ADAL" clId="{5AEB2719-95A5-4ED2-9E0E-ED462BB10526}" dt="2026-03-13T19:20:41.748" v="6073" actId="478"/>
+          <ac:picMkLst>
+            <pc:docMk/>
+            <pc:sldMk cId="2005456116" sldId="257"/>
+            <ac:picMk id="1147" creationId="{7BE27AB1-F5AB-A571-45D7-F25FA0E5EE9E}"/>
+          </ac:picMkLst>
+        </pc:picChg>
+        <pc:picChg chg="add del mod">
+          <ac:chgData name="Read, Zoe" userId="b08cd0fd-26d2-470b-8ec0-c6e6cb2a79bd" providerId="ADAL" clId="{5AEB2719-95A5-4ED2-9E0E-ED462BB10526}" dt="2026-03-13T19:21:46.771" v="6081" actId="478"/>
+          <ac:picMkLst>
+            <pc:docMk/>
+            <pc:sldMk cId="2005456116" sldId="257"/>
+            <ac:picMk id="1149" creationId="{298943F4-4EB4-071A-5FBC-D17B04303C2C}"/>
+          </ac:picMkLst>
+        </pc:picChg>
+        <pc:picChg chg="add mod ord">
+          <ac:chgData name="Read, Zoe" userId="b08cd0fd-26d2-470b-8ec0-c6e6cb2a79bd" providerId="ADAL" clId="{5AEB2719-95A5-4ED2-9E0E-ED462BB10526}" dt="2026-03-13T19:37:32.640" v="6385" actId="1076"/>
+          <ac:picMkLst>
+            <pc:docMk/>
+            <pc:sldMk cId="2005456116" sldId="257"/>
+            <ac:picMk id="1151" creationId="{9270BAB1-911D-6871-CCA4-EC0A16BAE319}"/>
+          </ac:picMkLst>
+        </pc:picChg>
+        <pc:picChg chg="add del mod">
+          <ac:chgData name="Read, Zoe" userId="b08cd0fd-26d2-470b-8ec0-c6e6cb2a79bd" providerId="ADAL" clId="{5AEB2719-95A5-4ED2-9E0E-ED462BB10526}" dt="2026-03-13T19:59:50.117" v="6403" actId="478"/>
+          <ac:picMkLst>
+            <pc:docMk/>
+            <pc:sldMk cId="2005456116" sldId="257"/>
+            <ac:picMk id="1172" creationId="{39EE0B8F-02B0-BFBB-E24F-71F6667F34A8}"/>
+          </ac:picMkLst>
+        </pc:picChg>
         <pc:picChg chg="add mod">
-          <ac:chgData name="Read, Zoe" userId="b08cd0fd-26d2-470b-8ec0-c6e6cb2a79bd" providerId="ADAL" clId="{5AEB2719-95A5-4ED2-9E0E-ED462BB10526}" dt="2026-03-13T16:03:05.847" v="5463" actId="1035"/>
+          <ac:chgData name="Read, Zoe" userId="b08cd0fd-26d2-470b-8ec0-c6e6cb2a79bd" providerId="ADAL" clId="{5AEB2719-95A5-4ED2-9E0E-ED462BB10526}" dt="2026-03-13T20:01:02.508" v="6417" actId="1036"/>
           <ac:picMkLst>
             <pc:docMk/>
             <pc:sldMk cId="2005456116" sldId="257"/>
-            <ac:picMk id="1104" creationId="{BB487FD2-0D02-18A0-8E65-73832FF97000}"/>
+            <ac:picMk id="1174" creationId="{75BF8206-810D-06F7-F805-252C6EE25DD9}"/>
           </ac:picMkLst>
         </pc:picChg>
         <pc:cxnChg chg="add mod ord">
@@ -668,7 +868,7 @@
           </ac:cxnSpMkLst>
         </pc:cxnChg>
         <pc:cxnChg chg="add mod ord">
-          <ac:chgData name="Read, Zoe" userId="b08cd0fd-26d2-470b-8ec0-c6e6cb2a79bd" providerId="ADAL" clId="{5AEB2719-95A5-4ED2-9E0E-ED462BB10526}" dt="2026-03-13T15:05:21.038" v="4913" actId="1076"/>
+          <ac:chgData name="Read, Zoe" userId="b08cd0fd-26d2-470b-8ec0-c6e6cb2a79bd" providerId="ADAL" clId="{5AEB2719-95A5-4ED2-9E0E-ED462BB10526}" dt="2026-03-13T20:01:30.523" v="6420" actId="1036"/>
           <ac:cxnSpMkLst>
             <pc:docMk/>
             <pc:sldMk cId="2005456116" sldId="257"/>
@@ -676,7 +876,7 @@
           </ac:cxnSpMkLst>
         </pc:cxnChg>
         <pc:cxnChg chg="mod">
-          <ac:chgData name="Read, Zoe" userId="b08cd0fd-26d2-470b-8ec0-c6e6cb2a79bd" providerId="ADAL" clId="{5AEB2719-95A5-4ED2-9E0E-ED462BB10526}" dt="2026-03-13T14:47:43.111" v="4643" actId="1035"/>
+          <ac:chgData name="Read, Zoe" userId="b08cd0fd-26d2-470b-8ec0-c6e6cb2a79bd" providerId="ADAL" clId="{5AEB2719-95A5-4ED2-9E0E-ED462BB10526}" dt="2026-03-13T19:37:13.255" v="6381" actId="1076"/>
           <ac:cxnSpMkLst>
             <pc:docMk/>
             <pc:sldMk cId="2005456116" sldId="257"/>
@@ -785,6 +985,94 @@
             <pc:docMk/>
             <pc:sldMk cId="2005456116" sldId="257"/>
             <ac:cxnSpMk id="1058" creationId="{60C150C5-AE9C-3C24-36BA-5DE7D6481E18}"/>
+          </ac:cxnSpMkLst>
+        </pc:cxnChg>
+        <pc:cxnChg chg="add mod">
+          <ac:chgData name="Read, Zoe" userId="b08cd0fd-26d2-470b-8ec0-c6e6cb2a79bd" providerId="ADAL" clId="{5AEB2719-95A5-4ED2-9E0E-ED462BB10526}" dt="2026-03-13T19:37:32.640" v="6385" actId="1076"/>
+          <ac:cxnSpMkLst>
+            <pc:docMk/>
+            <pc:sldMk cId="2005456116" sldId="257"/>
+            <ac:cxnSpMk id="1153" creationId="{97023737-8601-FC9D-4EB3-9D4BDD82A70B}"/>
+          </ac:cxnSpMkLst>
+        </pc:cxnChg>
+        <pc:cxnChg chg="add mod">
+          <ac:chgData name="Read, Zoe" userId="b08cd0fd-26d2-470b-8ec0-c6e6cb2a79bd" providerId="ADAL" clId="{5AEB2719-95A5-4ED2-9E0E-ED462BB10526}" dt="2026-03-13T19:37:32.640" v="6385" actId="1076"/>
+          <ac:cxnSpMkLst>
+            <pc:docMk/>
+            <pc:sldMk cId="2005456116" sldId="257"/>
+            <ac:cxnSpMk id="1155" creationId="{D22E7658-25E7-875B-2A7C-98181F760FCC}"/>
+          </ac:cxnSpMkLst>
+        </pc:cxnChg>
+        <pc:cxnChg chg="add mod">
+          <ac:chgData name="Read, Zoe" userId="b08cd0fd-26d2-470b-8ec0-c6e6cb2a79bd" providerId="ADAL" clId="{5AEB2719-95A5-4ED2-9E0E-ED462BB10526}" dt="2026-03-13T19:37:32.640" v="6385" actId="1076"/>
+          <ac:cxnSpMkLst>
+            <pc:docMk/>
+            <pc:sldMk cId="2005456116" sldId="257"/>
+            <ac:cxnSpMk id="1156" creationId="{71207B30-912B-A3BF-2792-95A75483F7C4}"/>
+          </ac:cxnSpMkLst>
+        </pc:cxnChg>
+        <pc:cxnChg chg="add mod">
+          <ac:chgData name="Read, Zoe" userId="b08cd0fd-26d2-470b-8ec0-c6e6cb2a79bd" providerId="ADAL" clId="{5AEB2719-95A5-4ED2-9E0E-ED462BB10526}" dt="2026-03-13T19:37:32.640" v="6385" actId="1076"/>
+          <ac:cxnSpMkLst>
+            <pc:docMk/>
+            <pc:sldMk cId="2005456116" sldId="257"/>
+            <ac:cxnSpMk id="1157" creationId="{1B53D83A-DA2A-1A3A-49BA-FD8B43BBF196}"/>
+          </ac:cxnSpMkLst>
+        </pc:cxnChg>
+        <pc:cxnChg chg="add mod">
+          <ac:chgData name="Read, Zoe" userId="b08cd0fd-26d2-470b-8ec0-c6e6cb2a79bd" providerId="ADAL" clId="{5AEB2719-95A5-4ED2-9E0E-ED462BB10526}" dt="2026-03-13T19:36:41.872" v="6375" actId="1076"/>
+          <ac:cxnSpMkLst>
+            <pc:docMk/>
+            <pc:sldMk cId="2005456116" sldId="257"/>
+            <ac:cxnSpMk id="1158" creationId="{B042B901-F7DC-6CC1-DA5E-40DBCE3E1F44}"/>
+          </ac:cxnSpMkLst>
+        </pc:cxnChg>
+        <pc:cxnChg chg="add mod">
+          <ac:chgData name="Read, Zoe" userId="b08cd0fd-26d2-470b-8ec0-c6e6cb2a79bd" providerId="ADAL" clId="{5AEB2719-95A5-4ED2-9E0E-ED462BB10526}" dt="2026-03-13T19:37:32.640" v="6385" actId="1076"/>
+          <ac:cxnSpMkLst>
+            <pc:docMk/>
+            <pc:sldMk cId="2005456116" sldId="257"/>
+            <ac:cxnSpMk id="1159" creationId="{98CCA81A-4AA7-779E-32DB-8D5DD3A28ADA}"/>
+          </ac:cxnSpMkLst>
+        </pc:cxnChg>
+        <pc:cxnChg chg="add mod">
+          <ac:chgData name="Read, Zoe" userId="b08cd0fd-26d2-470b-8ec0-c6e6cb2a79bd" providerId="ADAL" clId="{5AEB2719-95A5-4ED2-9E0E-ED462BB10526}" dt="2026-03-13T19:37:32.640" v="6385" actId="1076"/>
+          <ac:cxnSpMkLst>
+            <pc:docMk/>
+            <pc:sldMk cId="2005456116" sldId="257"/>
+            <ac:cxnSpMk id="1161" creationId="{540DF6D4-A68C-97EB-C8BB-327264741918}"/>
+          </ac:cxnSpMkLst>
+        </pc:cxnChg>
+        <pc:cxnChg chg="add mod">
+          <ac:chgData name="Read, Zoe" userId="b08cd0fd-26d2-470b-8ec0-c6e6cb2a79bd" providerId="ADAL" clId="{5AEB2719-95A5-4ED2-9E0E-ED462BB10526}" dt="2026-03-13T19:37:32.640" v="6385" actId="1076"/>
+          <ac:cxnSpMkLst>
+            <pc:docMk/>
+            <pc:sldMk cId="2005456116" sldId="257"/>
+            <ac:cxnSpMk id="1164" creationId="{C1C2D409-31AA-3975-1A82-0B67F72752C7}"/>
+          </ac:cxnSpMkLst>
+        </pc:cxnChg>
+        <pc:cxnChg chg="add mod">
+          <ac:chgData name="Read, Zoe" userId="b08cd0fd-26d2-470b-8ec0-c6e6cb2a79bd" providerId="ADAL" clId="{5AEB2719-95A5-4ED2-9E0E-ED462BB10526}" dt="2026-03-13T19:37:32.640" v="6385" actId="1076"/>
+          <ac:cxnSpMkLst>
+            <pc:docMk/>
+            <pc:sldMk cId="2005456116" sldId="257"/>
+            <ac:cxnSpMk id="1167" creationId="{C00AC114-218F-BAA8-017C-E4B441A237EC}"/>
+          </ac:cxnSpMkLst>
+        </pc:cxnChg>
+        <pc:cxnChg chg="add mod">
+          <ac:chgData name="Read, Zoe" userId="b08cd0fd-26d2-470b-8ec0-c6e6cb2a79bd" providerId="ADAL" clId="{5AEB2719-95A5-4ED2-9E0E-ED462BB10526}" dt="2026-03-13T19:36:41.872" v="6375" actId="1076"/>
+          <ac:cxnSpMkLst>
+            <pc:docMk/>
+            <pc:sldMk cId="2005456116" sldId="257"/>
+            <ac:cxnSpMk id="1168" creationId="{BA109AE9-65DD-8A29-4B76-51A52C077778}"/>
+          </ac:cxnSpMkLst>
+        </pc:cxnChg>
+        <pc:cxnChg chg="add mod">
+          <ac:chgData name="Read, Zoe" userId="b08cd0fd-26d2-470b-8ec0-c6e6cb2a79bd" providerId="ADAL" clId="{5AEB2719-95A5-4ED2-9E0E-ED462BB10526}" dt="2026-03-13T19:26:15.300" v="6186" actId="1076"/>
+          <ac:cxnSpMkLst>
+            <pc:docMk/>
+            <pc:sldMk cId="2005456116" sldId="257"/>
+            <ac:cxnSpMk id="1169" creationId="{BC6DBC99-57E5-A3C2-FA3D-D7BF95FDBC1C}"/>
           </ac:cxnSpMkLst>
         </pc:cxnChg>
       </pc:sldChg>
@@ -795,6 +1083,30 @@
           <pc:sldMk cId="2004079467" sldId="259"/>
         </pc:sldMkLst>
       </pc:sldChg>
+      <pc:sldMasterChg chg="modSldLayout">
+        <pc:chgData name="Read, Zoe" userId="b08cd0fd-26d2-470b-8ec0-c6e6cb2a79bd" providerId="ADAL" clId="{5AEB2719-95A5-4ED2-9E0E-ED462BB10526}" dt="2026-03-13T19:31:35.609" v="6192" actId="1076"/>
+        <pc:sldMasterMkLst>
+          <pc:docMk/>
+          <pc:sldMasterMk cId="3968463654" sldId="2147483648"/>
+        </pc:sldMasterMkLst>
+        <pc:sldLayoutChg chg="modSp mod">
+          <pc:chgData name="Read, Zoe" userId="b08cd0fd-26d2-470b-8ec0-c6e6cb2a79bd" providerId="ADAL" clId="{5AEB2719-95A5-4ED2-9E0E-ED462BB10526}" dt="2026-03-13T19:31:35.609" v="6192" actId="1076"/>
+          <pc:sldLayoutMkLst>
+            <pc:docMk/>
+            <pc:sldMasterMk cId="3968463654" sldId="2147483648"/>
+            <pc:sldLayoutMk cId="2303059013" sldId="2147483649"/>
+          </pc:sldLayoutMkLst>
+          <pc:picChg chg="mod">
+            <ac:chgData name="Read, Zoe" userId="b08cd0fd-26d2-470b-8ec0-c6e6cb2a79bd" providerId="ADAL" clId="{5AEB2719-95A5-4ED2-9E0E-ED462BB10526}" dt="2026-03-13T19:31:35.609" v="6192" actId="1076"/>
+            <ac:picMkLst>
+              <pc:docMk/>
+              <pc:sldMasterMk cId="3968463654" sldId="2147483648"/>
+              <pc:sldLayoutMk cId="2303059013" sldId="2147483649"/>
+              <ac:picMk id="5" creationId="{32AE247A-04BD-BE4B-92FB-FB837DE1CD20}"/>
+            </ac:picMkLst>
+          </pc:picChg>
+        </pc:sldLayoutChg>
+      </pc:sldMasterChg>
     </pc:docChg>
   </pc:docChgLst>
 </pc:chgInfo>
@@ -1243,26 +1555,6 @@
             </a:pPr>
             <a:r>
               <a:rPr lang="en-US" baseline="0" dirty="0"/>
-              <a:t>Make sure all plots are the same font size</a:t>
-            </a:r>
-          </a:p>
-          <a:p>
-            <a:pPr marL="285750" indent="-285750">
-              <a:buFontTx/>
-              <a:buChar char="-"/>
-            </a:pPr>
-            <a:r>
-              <a:rPr lang="en-US" baseline="0" dirty="0"/>
-              <a:t>-Color env variables plot by depth? Check which depth sensors I used (10 cm ones?) Or color by site? </a:t>
-            </a:r>
-          </a:p>
-          <a:p>
-            <a:pPr marL="285750" indent="-285750">
-              <a:buFontTx/>
-              <a:buChar char="-"/>
-            </a:pPr>
-            <a:r>
-              <a:rPr lang="en-US" baseline="0" dirty="0"/>
               <a:t>- If have time, could try adding stacked x-axis with month and year below it </a:t>
             </a:r>
           </a:p>
@@ -1609,7 +1901,7 @@
         </p:blipFill>
         <p:spPr>
           <a:xfrm>
-            <a:off x="27508199" y="1351585"/>
+            <a:off x="27372469" y="1090483"/>
             <a:ext cx="7374731" cy="2349916"/>
           </a:xfrm>
           <a:prstGeom prst="rect">
@@ -2509,10 +2801,10 @@
       </p:grpSpPr>
       <p:pic>
         <p:nvPicPr>
-          <p:cNvPr id="1081" name="Picture 1080" descr="A chart of different colored boxes&#10;&#10;AI-generated content may be incorrect.">
+          <p:cNvPr id="1151" name="Picture 1150" descr="A graph of a number&#10;&#10;AI-generated content may be incorrect.">
             <a:extLst>
               <a:ext uri="{FF2B5EF4-FFF2-40B4-BE49-F238E27FC236}">
-                <a16:creationId xmlns:a16="http://schemas.microsoft.com/office/drawing/2014/main" id="{E751C4E4-E854-FE7E-1EF9-268DA1A23024}"/>
+                <a16:creationId xmlns:a16="http://schemas.microsoft.com/office/drawing/2014/main" id="{9270BAB1-911D-6871-CCA4-EC0A16BAE319}"/>
               </a:ext>
             </a:extLst>
           </p:cNvPr>
@@ -2535,8 +2827,8 @@
         </p:blipFill>
         <p:spPr>
           <a:xfrm>
-            <a:off x="440597" y="18530902"/>
-            <a:ext cx="16459233" cy="6400813"/>
+            <a:off x="17385664" y="19484222"/>
+            <a:ext cx="16916434" cy="10058420"/>
           </a:xfrm>
           <a:prstGeom prst="rect">
             <a:avLst/>
@@ -2545,10 +2837,10 @@
       </p:pic>
       <p:pic>
         <p:nvPicPr>
-          <p:cNvPr id="11" name="Picture 10" descr="A screenshot of a graph&#10;&#10;AI-generated content may be incorrect.">
+          <p:cNvPr id="1081" name="Picture 1080" descr="A chart of different colored boxes&#10;&#10;AI-generated content may be incorrect.">
             <a:extLst>
               <a:ext uri="{FF2B5EF4-FFF2-40B4-BE49-F238E27FC236}">
-                <a16:creationId xmlns:a16="http://schemas.microsoft.com/office/drawing/2014/main" id="{0144416F-2A82-F7CC-0427-8A36932666F6}"/>
+                <a16:creationId xmlns:a16="http://schemas.microsoft.com/office/drawing/2014/main" id="{E751C4E4-E854-FE7E-1EF9-268DA1A23024}"/>
               </a:ext>
             </a:extLst>
           </p:cNvPr>
@@ -2565,15 +2857,14 @@
               </a:ext>
             </a:extLst>
           </a:blip>
-          <a:srcRect r="4104"/>
           <a:stretch>
             <a:fillRect/>
           </a:stretch>
         </p:blipFill>
         <p:spPr>
           <a:xfrm>
-            <a:off x="17722867" y="18667011"/>
-            <a:ext cx="16135719" cy="10095800"/>
+            <a:off x="440597" y="18530902"/>
+            <a:ext cx="16459233" cy="6400813"/>
           </a:xfrm>
           <a:prstGeom prst="rect">
             <a:avLst/>
@@ -2596,8 +2887,8 @@
         </p:nvCxnSpPr>
         <p:spPr>
           <a:xfrm>
-            <a:off x="18238506" y="29047276"/>
-            <a:ext cx="15099634" cy="0"/>
+            <a:off x="18166504" y="29504481"/>
+            <a:ext cx="15770805" cy="0"/>
           </a:xfrm>
           <a:prstGeom prst="line">
             <a:avLst/>
@@ -2641,8 +2932,8 @@
         </p:nvSpPr>
         <p:spPr>
           <a:xfrm>
-            <a:off x="837036" y="777081"/>
-            <a:ext cx="26832555" cy="2580299"/>
+            <a:off x="837037" y="777081"/>
+            <a:ext cx="26290164" cy="2580299"/>
           </a:xfrm>
         </p:spPr>
         <p:txBody>
@@ -2652,8 +2943,8 @@
           <a:lstStyle/>
           <a:p>
             <a:r>
-              <a:rPr lang="en-US" dirty="0"/>
-              <a:t>Porewater sulfate varies spatially and temporally across the coastal terrestrial-aquatic interface</a:t>
+              <a:rPr lang="en-US" sz="8000" dirty="0"/>
+              <a:t>Porewater sulfate varies spatially and temporally across the coastal terrestrial aquatic interface</a:t>
             </a:r>
           </a:p>
         </p:txBody>
@@ -2690,11 +2981,7 @@
             </a:r>
             <a:r>
               <a:rPr lang="en-US" sz="3600" dirty="0"/>
-              <a:t>Stephanie J. Wilson, Alice Stearns, Evan Phillips, Nathan Chin, Pat Megonigal, Ben Bond-Lamberty, </a:t>
-            </a:r>
-            <a:r>
-              <a:rPr lang="en-US" sz="3600" b="1" dirty="0"/>
-              <a:t>and COMPASS team </a:t>
+              <a:t>Stephanie J. Wilson, Alice Stearns, Evan Phillips, Nathan Chin, Pat Megonigal, Ben Bond-Lamberty, and the COMPASS team </a:t>
             </a:r>
           </a:p>
           <a:p>
@@ -3088,7 +3375,7 @@
         </p:nvCxnSpPr>
         <p:spPr>
           <a:xfrm>
-            <a:off x="18067079" y="16169481"/>
+            <a:off x="18036412" y="16550481"/>
             <a:ext cx="15862150" cy="0"/>
           </a:xfrm>
           <a:prstGeom prst="line">
@@ -3217,7 +3504,7 @@
         </p:nvSpPr>
         <p:spPr>
           <a:xfrm>
-            <a:off x="18450205" y="16504674"/>
+            <a:off x="18156261" y="16660587"/>
             <a:ext cx="15095898" cy="2097650"/>
           </a:xfrm>
           <a:prstGeom prst="rect">
@@ -3387,7 +3674,7 @@
             </a:pPr>
             <a:r>
               <a:rPr lang="en-US" sz="2800" dirty="0"/>
-              <a:t>Sulfate tends to increase throughout the year and decrease at the start of a new year. </a:t>
+              <a:t>Sulfate tends to increase throughout each year, especially in the fall, and decrease at the start of a new year. This could be because sulfate-reducing microbes are less active as temperatures decrease at the end of each year. </a:t>
             </a:r>
           </a:p>
           <a:p>
@@ -3405,7 +3692,7 @@
             </a:r>
             <a:r>
               <a:rPr lang="en-US" sz="2800" dirty="0"/>
-              <a:t> site. </a:t>
+              <a:t> Transition site. </a:t>
             </a:r>
           </a:p>
           <a:p>
@@ -3490,7 +3777,7 @@
                 <a:latin typeface="Arial" panose="020B0604020202020204" pitchFamily="34" charset="0"/>
                 <a:cs typeface="Arial" panose="020B0604020202020204" pitchFamily="34" charset="0"/>
               </a:rPr>
-              <a:t>variation in ecosystem structure and function at the coastal TAI that is set by:</a:t>
+              <a:t>variation in ecosystem structure and function at the coastal terrestrial aquatic interface (TAI) that is set by:</a:t>
             </a:r>
             <a:endParaRPr lang="en-US" sz="2800" b="0" dirty="0">
               <a:effectLst/>
@@ -3600,10 +3887,10 @@
         </p:nvGrpSpPr>
         <p:grpSpPr>
           <a:xfrm>
-            <a:off x="1185837" y="4996902"/>
-            <a:ext cx="14975825" cy="7819779"/>
-            <a:chOff x="-4093975" y="10585278"/>
-            <a:chExt cx="15389819" cy="7038010"/>
+            <a:off x="1182975" y="4996902"/>
+            <a:ext cx="14978687" cy="7819779"/>
+            <a:chOff x="-4096916" y="10585278"/>
+            <a:chExt cx="15392760" cy="7038010"/>
           </a:xfrm>
         </p:grpSpPr>
         <p:sp>
@@ -3794,10 +4081,10 @@
           </p:nvGrpSpPr>
           <p:grpSpPr>
             <a:xfrm>
-              <a:off x="-4093975" y="13332543"/>
-              <a:ext cx="15389819" cy="4290745"/>
-              <a:chOff x="-4114879" y="9198158"/>
-              <a:chExt cx="15389819" cy="4290745"/>
+              <a:off x="-4096916" y="13332543"/>
+              <a:ext cx="15392760" cy="4290745"/>
+              <a:chOff x="-4117820" y="9198158"/>
+              <a:chExt cx="15392760" cy="4290745"/>
             </a:xfrm>
           </p:grpSpPr>
           <p:graphicFrame>
@@ -3813,13 +4100,13 @@
               <p:nvPr>
                 <p:extLst>
                   <p:ext uri="{D42A27DB-BD31-4B8C-83A1-F6EECF244321}">
-                    <p14:modId xmlns:p14="http://schemas.microsoft.com/office/powerpoint/2010/main" val="3241652528"/>
+                    <p14:modId xmlns:p14="http://schemas.microsoft.com/office/powerpoint/2010/main" val="4074627904"/>
                   </p:ext>
                 </p:extLst>
               </p:nvPr>
             </p:nvGraphicFramePr>
             <p:xfrm>
-              <a:off x="-4114879" y="9683969"/>
+              <a:off x="-4117820" y="9959925"/>
               <a:ext cx="3682599" cy="2585472"/>
             </p:xfrm>
             <a:graphic>
@@ -5311,8 +5598,8 @@
         </p:nvSpPr>
         <p:spPr>
           <a:xfrm>
-            <a:off x="18166504" y="29396420"/>
-            <a:ext cx="14861984" cy="2752090"/>
+            <a:off x="18166504" y="29641484"/>
+            <a:ext cx="15894896" cy="3358873"/>
           </a:xfrm>
           <a:prstGeom prst="rect">
             <a:avLst/>
@@ -5478,7 +5765,29 @@
             </a:pPr>
             <a:r>
               <a:rPr lang="en-US" sz="2800" dirty="0"/>
-              <a:t>Sulfate, a redox-sensitive element, was affected by soil saturation and depth, although this effect varies across the TAI. </a:t>
+              <a:t>Sulfate, a redox-sensitive element, varies across depth and seasonally, although this effect differs across the </a:t>
+            </a:r>
+            <a:r>
+              <a:rPr lang="en-US" sz="2800" dirty="0">
+                <a:solidFill>
+                  <a:srgbClr val="000000"/>
+                </a:solidFill>
+              </a:rPr>
+              <a:t>coastal terrestrial aquatic interface</a:t>
+            </a:r>
+            <a:r>
+              <a:rPr lang="en-US" sz="2800" dirty="0"/>
+              <a:t>. </a:t>
+            </a:r>
+          </a:p>
+          <a:p>
+            <a:pPr marL="457200" indent="-457200">
+              <a:buFont typeface="Arial" pitchFamily="34" charset="0"/>
+              <a:buChar char="•"/>
+            </a:pPr>
+            <a:r>
+              <a:rPr lang="en-US" sz="2800" dirty="0"/>
+              <a:t>Sulfate was positively correlated with indicators of soil saturation. </a:t>
             </a:r>
           </a:p>
           <a:p>
@@ -5768,8 +6077,8 @@
         </p:nvSpPr>
         <p:spPr>
           <a:xfrm>
-            <a:off x="18029138" y="4968081"/>
-            <a:ext cx="15939643" cy="2996291"/>
+            <a:off x="17997666" y="5021924"/>
+            <a:ext cx="15939643" cy="3198984"/>
           </a:xfrm>
           <a:prstGeom prst="rect">
             <a:avLst/>
@@ -5945,7 +6254,7 @@
             </a:pPr>
             <a:r>
               <a:rPr lang="en-US" sz="2800" dirty="0"/>
-              <a:t>Sulfate at all depths increase with soil electrical conductivity and soil volumetric water content, which were measured at 10 cm, indicating that similar processes may be occurring at all depths. </a:t>
+              <a:t>Soil electrical conductivity and soil volumetric water content were measured at 10 cm, but are positively correlated with sulfate at all depths, indicating the 10 cm profile may be influencing or indicative of processes occurring deeper in the soil. </a:t>
             </a:r>
           </a:p>
         </p:txBody>
@@ -6136,7 +6445,7 @@
                 <a:latin typeface="Arial" panose="020B0604020202020204" pitchFamily="34" charset="0"/>
                 <a:cs typeface="Arial" panose="020B0604020202020204" pitchFamily="34" charset="0"/>
               </a:rPr>
-              <a:t>Porewater was sampled at three depths: 10, 20, and 45 cm</a:t>
+              <a:t>Porewater was sampled at three soil depths: 10, 20, and 45 cm</a:t>
             </a:r>
           </a:p>
           <a:p>
@@ -6149,7 +6458,7 @@
                 <a:latin typeface="Arial" panose="020B0604020202020204" pitchFamily="34" charset="0"/>
                 <a:cs typeface="Arial" panose="020B0604020202020204" pitchFamily="34" charset="0"/>
               </a:rPr>
-              <a:t>Sulfate concentration changes by depth, but this effect varies across site and zone. </a:t>
+              <a:t>Sulfate concentration changes by depth, but this effect differs across site and zone. </a:t>
             </a:r>
             <a:endParaRPr lang="en-US" sz="2800" dirty="0"/>
           </a:p>
@@ -6234,12 +6543,496 @@
           </a:prstGeom>
         </p:spPr>
       </p:pic>
+      <p:cxnSp>
+        <p:nvCxnSpPr>
+          <p:cNvPr id="1153" name="Straight Connector 1152">
+            <a:extLst>
+              <a:ext uri="{FF2B5EF4-FFF2-40B4-BE49-F238E27FC236}">
+                <a16:creationId xmlns:a16="http://schemas.microsoft.com/office/drawing/2014/main" id="{97023737-8601-FC9D-4EB3-9D4BDD82A70B}"/>
+              </a:ext>
+            </a:extLst>
+          </p:cNvPr>
+          <p:cNvCxnSpPr>
+            <a:cxnSpLocks/>
+          </p:cNvCxnSpPr>
+          <p:nvPr/>
+        </p:nvCxnSpPr>
+        <p:spPr>
+          <a:xfrm>
+            <a:off x="21259800" y="20296787"/>
+            <a:ext cx="0" cy="3161485"/>
+          </a:xfrm>
+          <a:prstGeom prst="line">
+            <a:avLst/>
+          </a:prstGeom>
+          <a:ln w="19050">
+            <a:solidFill>
+              <a:schemeClr val="tx1"/>
+            </a:solidFill>
+            <a:prstDash val="dash"/>
+          </a:ln>
+        </p:spPr>
+        <p:style>
+          <a:lnRef idx="1">
+            <a:schemeClr val="accent1"/>
+          </a:lnRef>
+          <a:fillRef idx="0">
+            <a:schemeClr val="accent1"/>
+          </a:fillRef>
+          <a:effectRef idx="0">
+            <a:schemeClr val="accent1"/>
+          </a:effectRef>
+          <a:fontRef idx="minor">
+            <a:schemeClr val="tx1"/>
+          </a:fontRef>
+        </p:style>
+      </p:cxnSp>
+      <p:cxnSp>
+        <p:nvCxnSpPr>
+          <p:cNvPr id="1155" name="Straight Connector 1154">
+            <a:extLst>
+              <a:ext uri="{FF2B5EF4-FFF2-40B4-BE49-F238E27FC236}">
+                <a16:creationId xmlns:a16="http://schemas.microsoft.com/office/drawing/2014/main" id="{D22E7658-25E7-875B-2A7C-98181F760FCC}"/>
+              </a:ext>
+            </a:extLst>
+          </p:cNvPr>
+          <p:cNvCxnSpPr>
+            <a:cxnSpLocks/>
+          </p:cNvCxnSpPr>
+          <p:nvPr/>
+        </p:nvCxnSpPr>
+        <p:spPr>
+          <a:xfrm>
+            <a:off x="24460200" y="20337022"/>
+            <a:ext cx="0" cy="3161485"/>
+          </a:xfrm>
+          <a:prstGeom prst="line">
+            <a:avLst/>
+          </a:prstGeom>
+          <a:ln w="19050">
+            <a:solidFill>
+              <a:schemeClr val="tx1"/>
+            </a:solidFill>
+            <a:prstDash val="dash"/>
+          </a:ln>
+        </p:spPr>
+        <p:style>
+          <a:lnRef idx="1">
+            <a:schemeClr val="accent1"/>
+          </a:lnRef>
+          <a:fillRef idx="0">
+            <a:schemeClr val="accent1"/>
+          </a:fillRef>
+          <a:effectRef idx="0">
+            <a:schemeClr val="accent1"/>
+          </a:effectRef>
+          <a:fontRef idx="minor">
+            <a:schemeClr val="tx1"/>
+          </a:fontRef>
+        </p:style>
+      </p:cxnSp>
+      <p:cxnSp>
+        <p:nvCxnSpPr>
+          <p:cNvPr id="1156" name="Straight Connector 1155">
+            <a:extLst>
+              <a:ext uri="{FF2B5EF4-FFF2-40B4-BE49-F238E27FC236}">
+                <a16:creationId xmlns:a16="http://schemas.microsoft.com/office/drawing/2014/main" id="{71207B30-912B-A3BF-2792-95A75483F7C4}"/>
+              </a:ext>
+            </a:extLst>
+          </p:cNvPr>
+          <p:cNvCxnSpPr>
+            <a:cxnSpLocks/>
+          </p:cNvCxnSpPr>
+          <p:nvPr/>
+        </p:nvCxnSpPr>
+        <p:spPr>
+          <a:xfrm>
+            <a:off x="28575000" y="20337021"/>
+            <a:ext cx="0" cy="3161485"/>
+          </a:xfrm>
+          <a:prstGeom prst="line">
+            <a:avLst/>
+          </a:prstGeom>
+          <a:ln w="19050">
+            <a:solidFill>
+              <a:schemeClr val="tx1"/>
+            </a:solidFill>
+            <a:prstDash val="dash"/>
+          </a:ln>
+        </p:spPr>
+        <p:style>
+          <a:lnRef idx="1">
+            <a:schemeClr val="accent1"/>
+          </a:lnRef>
+          <a:fillRef idx="0">
+            <a:schemeClr val="accent1"/>
+          </a:fillRef>
+          <a:effectRef idx="0">
+            <a:schemeClr val="accent1"/>
+          </a:effectRef>
+          <a:fontRef idx="minor">
+            <a:schemeClr val="tx1"/>
+          </a:fontRef>
+        </p:style>
+      </p:cxnSp>
+      <p:cxnSp>
+        <p:nvCxnSpPr>
+          <p:cNvPr id="1157" name="Straight Connector 1156">
+            <a:extLst>
+              <a:ext uri="{FF2B5EF4-FFF2-40B4-BE49-F238E27FC236}">
+                <a16:creationId xmlns:a16="http://schemas.microsoft.com/office/drawing/2014/main" id="{1B53D83A-DA2A-1A3A-49BA-FD8B43BBF196}"/>
+              </a:ext>
+            </a:extLst>
+          </p:cNvPr>
+          <p:cNvCxnSpPr>
+            <a:cxnSpLocks/>
+          </p:cNvCxnSpPr>
+          <p:nvPr/>
+        </p:nvCxnSpPr>
+        <p:spPr>
+          <a:xfrm>
+            <a:off x="31165800" y="20337020"/>
+            <a:ext cx="0" cy="3161485"/>
+          </a:xfrm>
+          <a:prstGeom prst="line">
+            <a:avLst/>
+          </a:prstGeom>
+          <a:ln w="19050">
+            <a:solidFill>
+              <a:schemeClr val="tx1"/>
+            </a:solidFill>
+            <a:prstDash val="dash"/>
+          </a:ln>
+        </p:spPr>
+        <p:style>
+          <a:lnRef idx="1">
+            <a:schemeClr val="accent1"/>
+          </a:lnRef>
+          <a:fillRef idx="0">
+            <a:schemeClr val="accent1"/>
+          </a:fillRef>
+          <a:effectRef idx="0">
+            <a:schemeClr val="accent1"/>
+          </a:effectRef>
+          <a:fontRef idx="minor">
+            <a:schemeClr val="tx1"/>
+          </a:fontRef>
+        </p:style>
+      </p:cxnSp>
+      <p:cxnSp>
+        <p:nvCxnSpPr>
+          <p:cNvPr id="1158" name="Straight Connector 1157">
+            <a:extLst>
+              <a:ext uri="{FF2B5EF4-FFF2-40B4-BE49-F238E27FC236}">
+                <a16:creationId xmlns:a16="http://schemas.microsoft.com/office/drawing/2014/main" id="{B042B901-F7DC-6CC1-DA5E-40DBCE3E1F44}"/>
+              </a:ext>
+            </a:extLst>
+          </p:cNvPr>
+          <p:cNvCxnSpPr>
+            <a:cxnSpLocks/>
+          </p:cNvCxnSpPr>
+          <p:nvPr/>
+        </p:nvCxnSpPr>
+        <p:spPr>
+          <a:xfrm>
+            <a:off x="32842200" y="20337020"/>
+            <a:ext cx="0" cy="3161485"/>
+          </a:xfrm>
+          <a:prstGeom prst="line">
+            <a:avLst/>
+          </a:prstGeom>
+          <a:ln w="19050">
+            <a:solidFill>
+              <a:schemeClr val="tx1"/>
+            </a:solidFill>
+            <a:prstDash val="dash"/>
+          </a:ln>
+        </p:spPr>
+        <p:style>
+          <a:lnRef idx="1">
+            <a:schemeClr val="accent1"/>
+          </a:lnRef>
+          <a:fillRef idx="0">
+            <a:schemeClr val="accent1"/>
+          </a:fillRef>
+          <a:effectRef idx="0">
+            <a:schemeClr val="accent1"/>
+          </a:effectRef>
+          <a:fontRef idx="minor">
+            <a:schemeClr val="tx1"/>
+          </a:fontRef>
+        </p:style>
+      </p:cxnSp>
+      <p:cxnSp>
+        <p:nvCxnSpPr>
+          <p:cNvPr id="1159" name="Straight Connector 1158">
+            <a:extLst>
+              <a:ext uri="{FF2B5EF4-FFF2-40B4-BE49-F238E27FC236}">
+                <a16:creationId xmlns:a16="http://schemas.microsoft.com/office/drawing/2014/main" id="{98CCA81A-4AA7-779E-32DB-8D5DD3A28ADA}"/>
+              </a:ext>
+            </a:extLst>
+          </p:cNvPr>
+          <p:cNvCxnSpPr>
+            <a:cxnSpLocks/>
+          </p:cNvCxnSpPr>
+          <p:nvPr/>
+        </p:nvCxnSpPr>
+        <p:spPr>
+          <a:xfrm>
+            <a:off x="20574000" y="24906072"/>
+            <a:ext cx="0" cy="3200400"/>
+          </a:xfrm>
+          <a:prstGeom prst="line">
+            <a:avLst/>
+          </a:prstGeom>
+          <a:ln w="19050">
+            <a:solidFill>
+              <a:schemeClr val="tx1"/>
+            </a:solidFill>
+            <a:prstDash val="dash"/>
+          </a:ln>
+        </p:spPr>
+        <p:style>
+          <a:lnRef idx="1">
+            <a:schemeClr val="accent1"/>
+          </a:lnRef>
+          <a:fillRef idx="0">
+            <a:schemeClr val="accent1"/>
+          </a:fillRef>
+          <a:effectRef idx="0">
+            <a:schemeClr val="accent1"/>
+          </a:effectRef>
+          <a:fontRef idx="minor">
+            <a:schemeClr val="tx1"/>
+          </a:fontRef>
+        </p:style>
+      </p:cxnSp>
+      <p:cxnSp>
+        <p:nvCxnSpPr>
+          <p:cNvPr id="1161" name="Straight Connector 1160">
+            <a:extLst>
+              <a:ext uri="{FF2B5EF4-FFF2-40B4-BE49-F238E27FC236}">
+                <a16:creationId xmlns:a16="http://schemas.microsoft.com/office/drawing/2014/main" id="{540DF6D4-A68C-97EB-C8BB-327264741918}"/>
+              </a:ext>
+            </a:extLst>
+          </p:cNvPr>
+          <p:cNvCxnSpPr>
+            <a:cxnSpLocks/>
+          </p:cNvCxnSpPr>
+          <p:nvPr/>
+        </p:nvCxnSpPr>
+        <p:spPr>
+          <a:xfrm>
+            <a:off x="23317200" y="24906071"/>
+            <a:ext cx="0" cy="3200401"/>
+          </a:xfrm>
+          <a:prstGeom prst="line">
+            <a:avLst/>
+          </a:prstGeom>
+          <a:ln w="19050">
+            <a:solidFill>
+              <a:schemeClr val="tx1"/>
+            </a:solidFill>
+            <a:prstDash val="dash"/>
+          </a:ln>
+        </p:spPr>
+        <p:style>
+          <a:lnRef idx="1">
+            <a:schemeClr val="accent1"/>
+          </a:lnRef>
+          <a:fillRef idx="0">
+            <a:schemeClr val="accent1"/>
+          </a:fillRef>
+          <a:effectRef idx="0">
+            <a:schemeClr val="accent1"/>
+          </a:effectRef>
+          <a:fontRef idx="minor">
+            <a:schemeClr val="tx1"/>
+          </a:fontRef>
+        </p:style>
+      </p:cxnSp>
+      <p:cxnSp>
+        <p:nvCxnSpPr>
+          <p:cNvPr id="1164" name="Straight Connector 1163">
+            <a:extLst>
+              <a:ext uri="{FF2B5EF4-FFF2-40B4-BE49-F238E27FC236}">
+                <a16:creationId xmlns:a16="http://schemas.microsoft.com/office/drawing/2014/main" id="{C1C2D409-31AA-3975-1A82-0B67F72752C7}"/>
+              </a:ext>
+            </a:extLst>
+          </p:cNvPr>
+          <p:cNvCxnSpPr>
+            <a:cxnSpLocks/>
+          </p:cNvCxnSpPr>
+          <p:nvPr/>
+        </p:nvCxnSpPr>
+        <p:spPr>
+          <a:xfrm>
+            <a:off x="24688800" y="24906071"/>
+            <a:ext cx="0" cy="3200401"/>
+          </a:xfrm>
+          <a:prstGeom prst="line">
+            <a:avLst/>
+          </a:prstGeom>
+          <a:ln w="19050">
+            <a:solidFill>
+              <a:schemeClr val="tx1"/>
+            </a:solidFill>
+            <a:prstDash val="dash"/>
+          </a:ln>
+        </p:spPr>
+        <p:style>
+          <a:lnRef idx="1">
+            <a:schemeClr val="accent1"/>
+          </a:lnRef>
+          <a:fillRef idx="0">
+            <a:schemeClr val="accent1"/>
+          </a:fillRef>
+          <a:effectRef idx="0">
+            <a:schemeClr val="accent1"/>
+          </a:effectRef>
+          <a:fontRef idx="minor">
+            <a:schemeClr val="tx1"/>
+          </a:fontRef>
+        </p:style>
+      </p:cxnSp>
+      <p:cxnSp>
+        <p:nvCxnSpPr>
+          <p:cNvPr id="1167" name="Straight Connector 1166">
+            <a:extLst>
+              <a:ext uri="{FF2B5EF4-FFF2-40B4-BE49-F238E27FC236}">
+                <a16:creationId xmlns:a16="http://schemas.microsoft.com/office/drawing/2014/main" id="{C00AC114-218F-BAA8-017C-E4B441A237EC}"/>
+              </a:ext>
+            </a:extLst>
+          </p:cNvPr>
+          <p:cNvCxnSpPr>
+            <a:cxnSpLocks/>
+          </p:cNvCxnSpPr>
+          <p:nvPr/>
+        </p:nvCxnSpPr>
+        <p:spPr>
+          <a:xfrm>
+            <a:off x="28651200" y="24906071"/>
+            <a:ext cx="0" cy="3200401"/>
+          </a:xfrm>
+          <a:prstGeom prst="line">
+            <a:avLst/>
+          </a:prstGeom>
+          <a:ln w="19050">
+            <a:solidFill>
+              <a:schemeClr val="tx1"/>
+            </a:solidFill>
+            <a:prstDash val="dash"/>
+          </a:ln>
+        </p:spPr>
+        <p:style>
+          <a:lnRef idx="1">
+            <a:schemeClr val="accent1"/>
+          </a:lnRef>
+          <a:fillRef idx="0">
+            <a:schemeClr val="accent1"/>
+          </a:fillRef>
+          <a:effectRef idx="0">
+            <a:schemeClr val="accent1"/>
+          </a:effectRef>
+          <a:fontRef idx="minor">
+            <a:schemeClr val="tx1"/>
+          </a:fontRef>
+        </p:style>
+      </p:cxnSp>
+      <p:cxnSp>
+        <p:nvCxnSpPr>
+          <p:cNvPr id="1168" name="Straight Connector 1167">
+            <a:extLst>
+              <a:ext uri="{FF2B5EF4-FFF2-40B4-BE49-F238E27FC236}">
+                <a16:creationId xmlns:a16="http://schemas.microsoft.com/office/drawing/2014/main" id="{BA109AE9-65DD-8A29-4B76-51A52C077778}"/>
+              </a:ext>
+            </a:extLst>
+          </p:cNvPr>
+          <p:cNvCxnSpPr>
+            <a:cxnSpLocks/>
+          </p:cNvCxnSpPr>
+          <p:nvPr/>
+        </p:nvCxnSpPr>
+        <p:spPr>
+          <a:xfrm>
+            <a:off x="31394400" y="24906071"/>
+            <a:ext cx="0" cy="3200401"/>
+          </a:xfrm>
+          <a:prstGeom prst="line">
+            <a:avLst/>
+          </a:prstGeom>
+          <a:ln w="19050">
+            <a:solidFill>
+              <a:schemeClr val="tx1"/>
+            </a:solidFill>
+            <a:prstDash val="dash"/>
+          </a:ln>
+        </p:spPr>
+        <p:style>
+          <a:lnRef idx="1">
+            <a:schemeClr val="accent1"/>
+          </a:lnRef>
+          <a:fillRef idx="0">
+            <a:schemeClr val="accent1"/>
+          </a:fillRef>
+          <a:effectRef idx="0">
+            <a:schemeClr val="accent1"/>
+          </a:effectRef>
+          <a:fontRef idx="minor">
+            <a:schemeClr val="tx1"/>
+          </a:fontRef>
+        </p:style>
+      </p:cxnSp>
+      <p:cxnSp>
+        <p:nvCxnSpPr>
+          <p:cNvPr id="1169" name="Straight Connector 1168">
+            <a:extLst>
+              <a:ext uri="{FF2B5EF4-FFF2-40B4-BE49-F238E27FC236}">
+                <a16:creationId xmlns:a16="http://schemas.microsoft.com/office/drawing/2014/main" id="{BC6DBC99-57E5-A3C2-FA3D-D7BF95FDBC1C}"/>
+              </a:ext>
+            </a:extLst>
+          </p:cNvPr>
+          <p:cNvCxnSpPr>
+            <a:cxnSpLocks/>
+          </p:cNvCxnSpPr>
+          <p:nvPr/>
+        </p:nvCxnSpPr>
+        <p:spPr>
+          <a:xfrm>
+            <a:off x="32766000" y="24906071"/>
+            <a:ext cx="0" cy="3200401"/>
+          </a:xfrm>
+          <a:prstGeom prst="line">
+            <a:avLst/>
+          </a:prstGeom>
+          <a:ln w="19050">
+            <a:solidFill>
+              <a:schemeClr val="tx1"/>
+            </a:solidFill>
+            <a:prstDash val="dash"/>
+          </a:ln>
+        </p:spPr>
+        <p:style>
+          <a:lnRef idx="1">
+            <a:schemeClr val="accent1"/>
+          </a:lnRef>
+          <a:fillRef idx="0">
+            <a:schemeClr val="accent1"/>
+          </a:fillRef>
+          <a:effectRef idx="0">
+            <a:schemeClr val="accent1"/>
+          </a:effectRef>
+          <a:fontRef idx="minor">
+            <a:schemeClr val="tx1"/>
+          </a:fontRef>
+        </p:style>
+      </p:cxnSp>
       <p:pic>
         <p:nvPicPr>
-          <p:cNvPr id="1104" name="Picture 1103" descr="A graph of water level and value&#10;&#10;AI-generated content may be incorrect.">
+          <p:cNvPr id="1174" name="Picture 1173" descr="A graph of different types of water levels&#10;&#10;AI-generated content may be incorrect.">
             <a:extLst>
               <a:ext uri="{FF2B5EF4-FFF2-40B4-BE49-F238E27FC236}">
-                <a16:creationId xmlns:a16="http://schemas.microsoft.com/office/drawing/2014/main" id="{BB487FD2-0D02-18A0-8E65-73832FF97000}"/>
+                <a16:creationId xmlns:a16="http://schemas.microsoft.com/office/drawing/2014/main" id="{75BF8206-810D-06F7-F805-252C6EE25DD9}"/>
               </a:ext>
             </a:extLst>
           </p:cNvPr>
@@ -6262,49 +7055,14 @@
         </p:blipFill>
         <p:spPr>
           <a:xfrm>
-            <a:off x="17716241" y="7635081"/>
-            <a:ext cx="16459233" cy="7315215"/>
+            <a:off x="17737870" y="8107663"/>
+            <a:ext cx="16459233" cy="8229616"/>
           </a:xfrm>
           <a:prstGeom prst="rect">
             <a:avLst/>
           </a:prstGeom>
         </p:spPr>
       </p:pic>
-      <p:sp>
-        <p:nvSpPr>
-          <p:cNvPr id="1106" name="TextBox 1105">
-            <a:extLst>
-              <a:ext uri="{FF2B5EF4-FFF2-40B4-BE49-F238E27FC236}">
-                <a16:creationId xmlns:a16="http://schemas.microsoft.com/office/drawing/2014/main" id="{990614C8-403D-9EED-A601-7B130D60F6F4}"/>
-              </a:ext>
-            </a:extLst>
-          </p:cNvPr>
-          <p:cNvSpPr txBox="1"/>
-          <p:nvPr/>
-        </p:nvSpPr>
-        <p:spPr>
-          <a:xfrm>
-            <a:off x="17722867" y="14864430"/>
-            <a:ext cx="17443174" cy="954107"/>
-          </a:xfrm>
-          <a:prstGeom prst="rect">
-            <a:avLst/>
-          </a:prstGeom>
-          <a:noFill/>
-        </p:spPr>
-        <p:txBody>
-          <a:bodyPr wrap="square">
-            <a:spAutoFit/>
-          </a:bodyPr>
-          <a:lstStyle/>
-          <a:p>
-            <a:r>
-              <a:rPr lang="en-US" sz="2800" dirty="0"/>
-              <a:t>Groundwater Salinity measured in meters relative to the ground surface, where positive values indicate water levels above the ground surface. </a:t>
-            </a:r>
-          </a:p>
-        </p:txBody>
-      </p:sp>
     </p:spTree>
     <p:extLst>
       <p:ext uri="{BB962C8B-B14F-4D97-AF65-F5344CB8AC3E}">

--- a/ReadZ_GCReW_Symposium_Poster_2026.pptx
+++ b/ReadZ_GCReW_Symposium_Poster_2026.pptx
@@ -135,7 +135,7 @@
 <file path=ppt/revisionInfo.xml><?xml version="1.0" encoding="utf-8"?>
 <p1510:revInfo xmlns:a="http://schemas.openxmlformats.org/drawingml/2006/main" xmlns:r="http://schemas.openxmlformats.org/officeDocument/2006/relationships" xmlns:p1510="http://schemas.microsoft.com/office/powerpoint/2015/10/main">
   <p1510:revLst>
-    <p1510:client id="{B82716F6-75B8-4E39-A6D4-7E66C823071B}" v="112" dt="2026-03-13T20:00:58.886"/>
+    <p1510:client id="{B82716F6-75B8-4E39-A6D4-7E66C823071B}" v="114" dt="2026-03-13T20:07:03.353"/>
   </p1510:revLst>
 </p1510:revInfo>
 </file>
@@ -145,12 +145,12 @@
   <pc:docChgLst>
     <pc:chgData name="Read, Zoe" userId="b08cd0fd-26d2-470b-8ec0-c6e6cb2a79bd" providerId="ADAL" clId="{5AEB2719-95A5-4ED2-9E0E-ED462BB10526}"/>
     <pc:docChg chg="undo custSel addSld delSld modSld modMainMaster">
-      <pc:chgData name="Read, Zoe" userId="b08cd0fd-26d2-470b-8ec0-c6e6cb2a79bd" providerId="ADAL" clId="{5AEB2719-95A5-4ED2-9E0E-ED462BB10526}" dt="2026-03-13T20:01:30.523" v="6420" actId="1036"/>
+      <pc:chgData name="Read, Zoe" userId="b08cd0fd-26d2-470b-8ec0-c6e6cb2a79bd" providerId="ADAL" clId="{5AEB2719-95A5-4ED2-9E0E-ED462BB10526}" dt="2026-03-13T20:07:33.645" v="6439" actId="1038"/>
       <pc:docMkLst>
         <pc:docMk/>
       </pc:docMkLst>
       <pc:sldChg chg="addSp delSp modSp mod modNotesTx">
-        <pc:chgData name="Read, Zoe" userId="b08cd0fd-26d2-470b-8ec0-c6e6cb2a79bd" providerId="ADAL" clId="{5AEB2719-95A5-4ED2-9E0E-ED462BB10526}" dt="2026-03-13T20:01:30.523" v="6420" actId="1036"/>
+        <pc:chgData name="Read, Zoe" userId="b08cd0fd-26d2-470b-8ec0-c6e6cb2a79bd" providerId="ADAL" clId="{5AEB2719-95A5-4ED2-9E0E-ED462BB10526}" dt="2026-03-13T20:07:33.645" v="6439" actId="1038"/>
         <pc:sldMkLst>
           <pc:docMk/>
           <pc:sldMk cId="2005456116" sldId="257"/>
@@ -363,6 +363,14 @@
             <ac:graphicFrameMk id="20" creationId="{6EE1AE5B-A26D-71DD-8EF3-D283BC117F1C}"/>
           </ac:graphicFrameMkLst>
         </pc:graphicFrameChg>
+        <pc:picChg chg="add mod ord">
+          <ac:chgData name="Read, Zoe" userId="b08cd0fd-26d2-470b-8ec0-c6e6cb2a79bd" providerId="ADAL" clId="{5AEB2719-95A5-4ED2-9E0E-ED462BB10526}" dt="2026-03-13T20:06:48.937" v="6428" actId="1035"/>
+          <ac:picMkLst>
+            <pc:docMk/>
+            <pc:sldMk cId="2005456116" sldId="257"/>
+            <ac:picMk id="6" creationId="{65D6C5CC-18B1-CDA4-E731-06FAAFE46261}"/>
+          </ac:picMkLst>
+        </pc:picChg>
         <pc:picChg chg="add del mod">
           <ac:chgData name="Read, Zoe" userId="b08cd0fd-26d2-470b-8ec0-c6e6cb2a79bd" providerId="ADAL" clId="{5AEB2719-95A5-4ED2-9E0E-ED462BB10526}" dt="2026-03-13T14:36:32.963" v="3889" actId="478"/>
           <ac:picMkLst>
@@ -379,6 +387,14 @@
             <ac:picMk id="9" creationId="{09EDF015-AC84-7DA3-BD5A-225267C491D7}"/>
           </ac:picMkLst>
         </pc:picChg>
+        <pc:picChg chg="add mod">
+          <ac:chgData name="Read, Zoe" userId="b08cd0fd-26d2-470b-8ec0-c6e6cb2a79bd" providerId="ADAL" clId="{5AEB2719-95A5-4ED2-9E0E-ED462BB10526}" dt="2026-03-13T20:07:06.893" v="6433" actId="1076"/>
+          <ac:picMkLst>
+            <pc:docMk/>
+            <pc:sldMk cId="2005456116" sldId="257"/>
+            <ac:picMk id="9" creationId="{85DA710A-FE9C-9F98-B2EB-359901B6FE67}"/>
+          </ac:picMkLst>
+        </pc:picChg>
         <pc:picChg chg="add del mod">
           <ac:chgData name="Read, Zoe" userId="b08cd0fd-26d2-470b-8ec0-c6e6cb2a79bd" providerId="ADAL" clId="{5AEB2719-95A5-4ED2-9E0E-ED462BB10526}" dt="2026-03-13T14:37:42.624" v="3894" actId="478"/>
           <ac:picMkLst>
@@ -563,8 +579,8 @@
             <ac:picMk id="1079" creationId="{E89868C9-5DDE-C444-4252-B8FA393EF2CE}"/>
           </ac:picMkLst>
         </pc:picChg>
-        <pc:picChg chg="add mod ord">
-          <ac:chgData name="Read, Zoe" userId="b08cd0fd-26d2-470b-8ec0-c6e6cb2a79bd" providerId="ADAL" clId="{5AEB2719-95A5-4ED2-9E0E-ED462BB10526}" dt="2026-03-13T15:23:17.079" v="5036" actId="1076"/>
+        <pc:picChg chg="add del mod ord">
+          <ac:chgData name="Read, Zoe" userId="b08cd0fd-26d2-470b-8ec0-c6e6cb2a79bd" providerId="ADAL" clId="{5AEB2719-95A5-4ED2-9E0E-ED462BB10526}" dt="2026-03-13T20:06:24.207" v="6421" actId="478"/>
           <ac:picMkLst>
             <pc:docMk/>
             <pc:sldMk cId="2005456116" sldId="257"/>
@@ -828,7 +844,7 @@
           </ac:picMkLst>
         </pc:picChg>
         <pc:picChg chg="add mod ord">
-          <ac:chgData name="Read, Zoe" userId="b08cd0fd-26d2-470b-8ec0-c6e6cb2a79bd" providerId="ADAL" clId="{5AEB2719-95A5-4ED2-9E0E-ED462BB10526}" dt="2026-03-13T19:37:32.640" v="6385" actId="1076"/>
+          <ac:chgData name="Read, Zoe" userId="b08cd0fd-26d2-470b-8ec0-c6e6cb2a79bd" providerId="ADAL" clId="{5AEB2719-95A5-4ED2-9E0E-ED462BB10526}" dt="2026-03-13T20:07:33.645" v="6439" actId="1038"/>
           <ac:picMkLst>
             <pc:docMk/>
             <pc:sldMk cId="2005456116" sldId="257"/>
@@ -843,8 +859,8 @@
             <ac:picMk id="1172" creationId="{39EE0B8F-02B0-BFBB-E24F-71F6667F34A8}"/>
           </ac:picMkLst>
         </pc:picChg>
-        <pc:picChg chg="add mod">
-          <ac:chgData name="Read, Zoe" userId="b08cd0fd-26d2-470b-8ec0-c6e6cb2a79bd" providerId="ADAL" clId="{5AEB2719-95A5-4ED2-9E0E-ED462BB10526}" dt="2026-03-13T20:01:02.508" v="6417" actId="1036"/>
+        <pc:picChg chg="add del mod">
+          <ac:chgData name="Read, Zoe" userId="b08cd0fd-26d2-470b-8ec0-c6e6cb2a79bd" providerId="ADAL" clId="{5AEB2719-95A5-4ED2-9E0E-ED462BB10526}" dt="2026-03-13T20:06:59.447" v="6429" actId="478"/>
           <ac:picMkLst>
             <pc:docMk/>
             <pc:sldMk cId="2005456116" sldId="257"/>
@@ -988,7 +1004,7 @@
           </ac:cxnSpMkLst>
         </pc:cxnChg>
         <pc:cxnChg chg="add mod">
-          <ac:chgData name="Read, Zoe" userId="b08cd0fd-26d2-470b-8ec0-c6e6cb2a79bd" providerId="ADAL" clId="{5AEB2719-95A5-4ED2-9E0E-ED462BB10526}" dt="2026-03-13T19:37:32.640" v="6385" actId="1076"/>
+          <ac:chgData name="Read, Zoe" userId="b08cd0fd-26d2-470b-8ec0-c6e6cb2a79bd" providerId="ADAL" clId="{5AEB2719-95A5-4ED2-9E0E-ED462BB10526}" dt="2026-03-13T20:07:33.645" v="6439" actId="1038"/>
           <ac:cxnSpMkLst>
             <pc:docMk/>
             <pc:sldMk cId="2005456116" sldId="257"/>
@@ -996,7 +1012,7 @@
           </ac:cxnSpMkLst>
         </pc:cxnChg>
         <pc:cxnChg chg="add mod">
-          <ac:chgData name="Read, Zoe" userId="b08cd0fd-26d2-470b-8ec0-c6e6cb2a79bd" providerId="ADAL" clId="{5AEB2719-95A5-4ED2-9E0E-ED462BB10526}" dt="2026-03-13T19:37:32.640" v="6385" actId="1076"/>
+          <ac:chgData name="Read, Zoe" userId="b08cd0fd-26d2-470b-8ec0-c6e6cb2a79bd" providerId="ADAL" clId="{5AEB2719-95A5-4ED2-9E0E-ED462BB10526}" dt="2026-03-13T20:07:33.645" v="6439" actId="1038"/>
           <ac:cxnSpMkLst>
             <pc:docMk/>
             <pc:sldMk cId="2005456116" sldId="257"/>
@@ -1004,7 +1020,7 @@
           </ac:cxnSpMkLst>
         </pc:cxnChg>
         <pc:cxnChg chg="add mod">
-          <ac:chgData name="Read, Zoe" userId="b08cd0fd-26d2-470b-8ec0-c6e6cb2a79bd" providerId="ADAL" clId="{5AEB2719-95A5-4ED2-9E0E-ED462BB10526}" dt="2026-03-13T19:37:32.640" v="6385" actId="1076"/>
+          <ac:chgData name="Read, Zoe" userId="b08cd0fd-26d2-470b-8ec0-c6e6cb2a79bd" providerId="ADAL" clId="{5AEB2719-95A5-4ED2-9E0E-ED462BB10526}" dt="2026-03-13T20:07:33.645" v="6439" actId="1038"/>
           <ac:cxnSpMkLst>
             <pc:docMk/>
             <pc:sldMk cId="2005456116" sldId="257"/>
@@ -1012,7 +1028,7 @@
           </ac:cxnSpMkLst>
         </pc:cxnChg>
         <pc:cxnChg chg="add mod">
-          <ac:chgData name="Read, Zoe" userId="b08cd0fd-26d2-470b-8ec0-c6e6cb2a79bd" providerId="ADAL" clId="{5AEB2719-95A5-4ED2-9E0E-ED462BB10526}" dt="2026-03-13T19:37:32.640" v="6385" actId="1076"/>
+          <ac:chgData name="Read, Zoe" userId="b08cd0fd-26d2-470b-8ec0-c6e6cb2a79bd" providerId="ADAL" clId="{5AEB2719-95A5-4ED2-9E0E-ED462BB10526}" dt="2026-03-13T20:07:33.645" v="6439" actId="1038"/>
           <ac:cxnSpMkLst>
             <pc:docMk/>
             <pc:sldMk cId="2005456116" sldId="257"/>
@@ -1028,7 +1044,7 @@
           </ac:cxnSpMkLst>
         </pc:cxnChg>
         <pc:cxnChg chg="add mod">
-          <ac:chgData name="Read, Zoe" userId="b08cd0fd-26d2-470b-8ec0-c6e6cb2a79bd" providerId="ADAL" clId="{5AEB2719-95A5-4ED2-9E0E-ED462BB10526}" dt="2026-03-13T19:37:32.640" v="6385" actId="1076"/>
+          <ac:chgData name="Read, Zoe" userId="b08cd0fd-26d2-470b-8ec0-c6e6cb2a79bd" providerId="ADAL" clId="{5AEB2719-95A5-4ED2-9E0E-ED462BB10526}" dt="2026-03-13T20:07:33.645" v="6439" actId="1038"/>
           <ac:cxnSpMkLst>
             <pc:docMk/>
             <pc:sldMk cId="2005456116" sldId="257"/>
@@ -1036,7 +1052,7 @@
           </ac:cxnSpMkLst>
         </pc:cxnChg>
         <pc:cxnChg chg="add mod">
-          <ac:chgData name="Read, Zoe" userId="b08cd0fd-26d2-470b-8ec0-c6e6cb2a79bd" providerId="ADAL" clId="{5AEB2719-95A5-4ED2-9E0E-ED462BB10526}" dt="2026-03-13T19:37:32.640" v="6385" actId="1076"/>
+          <ac:chgData name="Read, Zoe" userId="b08cd0fd-26d2-470b-8ec0-c6e6cb2a79bd" providerId="ADAL" clId="{5AEB2719-95A5-4ED2-9E0E-ED462BB10526}" dt="2026-03-13T20:07:33.645" v="6439" actId="1038"/>
           <ac:cxnSpMkLst>
             <pc:docMk/>
             <pc:sldMk cId="2005456116" sldId="257"/>
@@ -1044,7 +1060,7 @@
           </ac:cxnSpMkLst>
         </pc:cxnChg>
         <pc:cxnChg chg="add mod">
-          <ac:chgData name="Read, Zoe" userId="b08cd0fd-26d2-470b-8ec0-c6e6cb2a79bd" providerId="ADAL" clId="{5AEB2719-95A5-4ED2-9E0E-ED462BB10526}" dt="2026-03-13T19:37:32.640" v="6385" actId="1076"/>
+          <ac:chgData name="Read, Zoe" userId="b08cd0fd-26d2-470b-8ec0-c6e6cb2a79bd" providerId="ADAL" clId="{5AEB2719-95A5-4ED2-9E0E-ED462BB10526}" dt="2026-03-13T20:07:33.645" v="6439" actId="1038"/>
           <ac:cxnSpMkLst>
             <pc:docMk/>
             <pc:sldMk cId="2005456116" sldId="257"/>
@@ -1052,7 +1068,7 @@
           </ac:cxnSpMkLst>
         </pc:cxnChg>
         <pc:cxnChg chg="add mod">
-          <ac:chgData name="Read, Zoe" userId="b08cd0fd-26d2-470b-8ec0-c6e6cb2a79bd" providerId="ADAL" clId="{5AEB2719-95A5-4ED2-9E0E-ED462BB10526}" dt="2026-03-13T19:37:32.640" v="6385" actId="1076"/>
+          <ac:chgData name="Read, Zoe" userId="b08cd0fd-26d2-470b-8ec0-c6e6cb2a79bd" providerId="ADAL" clId="{5AEB2719-95A5-4ED2-9E0E-ED462BB10526}" dt="2026-03-13T20:07:33.645" v="6439" actId="1038"/>
           <ac:cxnSpMkLst>
             <pc:docMk/>
             <pc:sldMk cId="2005456116" sldId="257"/>
@@ -1068,7 +1084,7 @@
           </ac:cxnSpMkLst>
         </pc:cxnChg>
         <pc:cxnChg chg="add mod">
-          <ac:chgData name="Read, Zoe" userId="b08cd0fd-26d2-470b-8ec0-c6e6cb2a79bd" providerId="ADAL" clId="{5AEB2719-95A5-4ED2-9E0E-ED462BB10526}" dt="2026-03-13T19:26:15.300" v="6186" actId="1076"/>
+          <ac:chgData name="Read, Zoe" userId="b08cd0fd-26d2-470b-8ec0-c6e6cb2a79bd" providerId="ADAL" clId="{5AEB2719-95A5-4ED2-9E0E-ED462BB10526}" dt="2026-03-13T20:07:33.645" v="6439" actId="1038"/>
           <ac:cxnSpMkLst>
             <pc:docMk/>
             <pc:sldMk cId="2005456116" sldId="257"/>
@@ -2801,10 +2817,10 @@
       </p:grpSpPr>
       <p:pic>
         <p:nvPicPr>
-          <p:cNvPr id="1151" name="Picture 1150" descr="A graph of a number&#10;&#10;AI-generated content may be incorrect.">
+          <p:cNvPr id="6" name="Picture 5" descr="A chart of different colored boxes&#10;&#10;AI-generated content may be incorrect.">
             <a:extLst>
               <a:ext uri="{FF2B5EF4-FFF2-40B4-BE49-F238E27FC236}">
-                <a16:creationId xmlns:a16="http://schemas.microsoft.com/office/drawing/2014/main" id="{9270BAB1-911D-6871-CCA4-EC0A16BAE319}"/>
+                <a16:creationId xmlns:a16="http://schemas.microsoft.com/office/drawing/2014/main" id="{65D6C5CC-18B1-CDA4-E731-06FAAFE46261}"/>
               </a:ext>
             </a:extLst>
           </p:cNvPr>
@@ -2827,8 +2843,8 @@
         </p:blipFill>
         <p:spPr>
           <a:xfrm>
-            <a:off x="17385664" y="19484222"/>
-            <a:ext cx="16916434" cy="10058420"/>
+            <a:off x="501300" y="18455481"/>
+            <a:ext cx="16459233" cy="6400813"/>
           </a:xfrm>
           <a:prstGeom prst="rect">
             <a:avLst/>
@@ -2837,10 +2853,10 @@
       </p:pic>
       <p:pic>
         <p:nvPicPr>
-          <p:cNvPr id="1081" name="Picture 1080" descr="A chart of different colored boxes&#10;&#10;AI-generated content may be incorrect.">
+          <p:cNvPr id="1151" name="Picture 1150" descr="A graph of a number&#10;&#10;AI-generated content may be incorrect.">
             <a:extLst>
               <a:ext uri="{FF2B5EF4-FFF2-40B4-BE49-F238E27FC236}">
-                <a16:creationId xmlns:a16="http://schemas.microsoft.com/office/drawing/2014/main" id="{E751C4E4-E854-FE7E-1EF9-268DA1A23024}"/>
+                <a16:creationId xmlns:a16="http://schemas.microsoft.com/office/drawing/2014/main" id="{9270BAB1-911D-6871-CCA4-EC0A16BAE319}"/>
               </a:ext>
             </a:extLst>
           </p:cNvPr>
@@ -2863,8 +2879,8 @@
         </p:blipFill>
         <p:spPr>
           <a:xfrm>
-            <a:off x="440597" y="18530902"/>
-            <a:ext cx="16459233" cy="6400813"/>
+            <a:off x="17525966" y="19484222"/>
+            <a:ext cx="16916434" cy="10058420"/>
           </a:xfrm>
           <a:prstGeom prst="rect">
             <a:avLst/>
@@ -6559,7 +6575,7 @@
         </p:nvCxnSpPr>
         <p:spPr>
           <a:xfrm>
-            <a:off x="21259800" y="20296787"/>
+            <a:off x="21400102" y="20296787"/>
             <a:ext cx="0" cy="3161485"/>
           </a:xfrm>
           <a:prstGeom prst="line">
@@ -6603,7 +6619,7 @@
         </p:nvCxnSpPr>
         <p:spPr>
           <a:xfrm>
-            <a:off x="24460200" y="20337022"/>
+            <a:off x="24600502" y="20337022"/>
             <a:ext cx="0" cy="3161485"/>
           </a:xfrm>
           <a:prstGeom prst="line">
@@ -6647,7 +6663,7 @@
         </p:nvCxnSpPr>
         <p:spPr>
           <a:xfrm>
-            <a:off x="28575000" y="20337021"/>
+            <a:off x="28715302" y="20337021"/>
             <a:ext cx="0" cy="3161485"/>
           </a:xfrm>
           <a:prstGeom prst="line">
@@ -6691,7 +6707,7 @@
         </p:nvCxnSpPr>
         <p:spPr>
           <a:xfrm>
-            <a:off x="31165800" y="20337020"/>
+            <a:off x="31306102" y="20337020"/>
             <a:ext cx="0" cy="3161485"/>
           </a:xfrm>
           <a:prstGeom prst="line">
@@ -6735,7 +6751,7 @@
         </p:nvCxnSpPr>
         <p:spPr>
           <a:xfrm>
-            <a:off x="32842200" y="20337020"/>
+            <a:off x="32982502" y="20337020"/>
             <a:ext cx="0" cy="3161485"/>
           </a:xfrm>
           <a:prstGeom prst="line">
@@ -6779,7 +6795,7 @@
         </p:nvCxnSpPr>
         <p:spPr>
           <a:xfrm>
-            <a:off x="20574000" y="24906072"/>
+            <a:off x="20714302" y="24906072"/>
             <a:ext cx="0" cy="3200400"/>
           </a:xfrm>
           <a:prstGeom prst="line">
@@ -6823,7 +6839,7 @@
         </p:nvCxnSpPr>
         <p:spPr>
           <a:xfrm>
-            <a:off x="23317200" y="24906071"/>
+            <a:off x="23457502" y="24906071"/>
             <a:ext cx="0" cy="3200401"/>
           </a:xfrm>
           <a:prstGeom prst="line">
@@ -6867,7 +6883,7 @@
         </p:nvCxnSpPr>
         <p:spPr>
           <a:xfrm>
-            <a:off x="24688800" y="24906071"/>
+            <a:off x="24829102" y="24906071"/>
             <a:ext cx="0" cy="3200401"/>
           </a:xfrm>
           <a:prstGeom prst="line">
@@ -6911,7 +6927,7 @@
         </p:nvCxnSpPr>
         <p:spPr>
           <a:xfrm>
-            <a:off x="28651200" y="24906071"/>
+            <a:off x="28791502" y="24906071"/>
             <a:ext cx="0" cy="3200401"/>
           </a:xfrm>
           <a:prstGeom prst="line">
@@ -6955,7 +6971,7 @@
         </p:nvCxnSpPr>
         <p:spPr>
           <a:xfrm>
-            <a:off x="31394400" y="24906071"/>
+            <a:off x="31534702" y="24906071"/>
             <a:ext cx="0" cy="3200401"/>
           </a:xfrm>
           <a:prstGeom prst="line">
@@ -6999,7 +7015,7 @@
         </p:nvCxnSpPr>
         <p:spPr>
           <a:xfrm>
-            <a:off x="32766000" y="24906071"/>
+            <a:off x="32906302" y="24906071"/>
             <a:ext cx="0" cy="3200401"/>
           </a:xfrm>
           <a:prstGeom prst="line">
@@ -7029,10 +7045,10 @@
       </p:cxnSp>
       <p:pic>
         <p:nvPicPr>
-          <p:cNvPr id="1174" name="Picture 1173" descr="A graph of different types of water levels&#10;&#10;AI-generated content may be incorrect.">
+          <p:cNvPr id="9" name="Picture 8" descr="A graph of different types of water levels&#10;&#10;AI-generated content may be incorrect.">
             <a:extLst>
               <a:ext uri="{FF2B5EF4-FFF2-40B4-BE49-F238E27FC236}">
-                <a16:creationId xmlns:a16="http://schemas.microsoft.com/office/drawing/2014/main" id="{75BF8206-810D-06F7-F805-252C6EE25DD9}"/>
+                <a16:creationId xmlns:a16="http://schemas.microsoft.com/office/drawing/2014/main" id="{85DA710A-FE9C-9F98-B2EB-359901B6FE67}"/>
               </a:ext>
             </a:extLst>
           </p:cNvPr>
@@ -7055,7 +7071,7 @@
         </p:blipFill>
         <p:spPr>
           <a:xfrm>
-            <a:off x="17737870" y="8107663"/>
+            <a:off x="17737870" y="8163823"/>
             <a:ext cx="16459233" cy="8229616"/>
           </a:xfrm>
           <a:prstGeom prst="rect">

--- a/ReadZ_GCReW_Symposium_Poster_2026.pptx
+++ b/ReadZ_GCReW_Symposium_Poster_2026.pptx
@@ -129,13 +129,14 @@
 <file path=ppt/authors.xml><?xml version="1.0" encoding="utf-8"?>
 <p188:authorLst xmlns:a="http://schemas.openxmlformats.org/drawingml/2006/main" xmlns:r="http://schemas.openxmlformats.org/officeDocument/2006/relationships" xmlns:p188="http://schemas.microsoft.com/office/powerpoint/2018/8/main">
   <p188:author id="{50137B73-C207-1407-898B-797CE70D2312}" name="Read, Zoe" initials="ZR" userId="S::ReadZ@SI.EDU::b08cd0fd-26d2-470b-8ec0-c6e6cb2a79bd" providerId="AD"/>
+  <p188:author id="{231D7B86-FC17-2341-A59E-74856DBD8393}" name="Wilson, Stephanie" initials="SW" userId="S::WilsonSJ@SI.EDU::33b13f56-c44d-4ad2-b9ae-7375eaa74b12" providerId="AD"/>
 </p188:authorLst>
 </file>
 
 <file path=ppt/revisionInfo.xml><?xml version="1.0" encoding="utf-8"?>
 <p1510:revInfo xmlns:a="http://schemas.openxmlformats.org/drawingml/2006/main" xmlns:r="http://schemas.openxmlformats.org/officeDocument/2006/relationships" xmlns:p1510="http://schemas.microsoft.com/office/powerpoint/2015/10/main">
   <p1510:revLst>
-    <p1510:client id="{B82716F6-75B8-4E39-A6D4-7E66C823071B}" v="114" dt="2026-03-13T20:07:03.353"/>
+    <p1510:client id="{43AB8F2F-7ED7-4FE6-9983-ECD9988C75B8}" v="6" dt="2026-03-16T11:35:47.524"/>
   </p1510:revLst>
 </p1510:revInfo>
 </file>
@@ -145,12 +146,12 @@
   <pc:docChgLst>
     <pc:chgData name="Read, Zoe" userId="b08cd0fd-26d2-470b-8ec0-c6e6cb2a79bd" providerId="ADAL" clId="{5AEB2719-95A5-4ED2-9E0E-ED462BB10526}"/>
     <pc:docChg chg="undo custSel addSld delSld modSld modMainMaster">
-      <pc:chgData name="Read, Zoe" userId="b08cd0fd-26d2-470b-8ec0-c6e6cb2a79bd" providerId="ADAL" clId="{5AEB2719-95A5-4ED2-9E0E-ED462BB10526}" dt="2026-03-13T20:07:33.645" v="6439" actId="1038"/>
+      <pc:chgData name="Read, Zoe" userId="b08cd0fd-26d2-470b-8ec0-c6e6cb2a79bd" providerId="ADAL" clId="{5AEB2719-95A5-4ED2-9E0E-ED462BB10526}" dt="2026-03-16T11:36:02.334" v="6657" actId="1035"/>
       <pc:docMkLst>
         <pc:docMk/>
       </pc:docMkLst>
-      <pc:sldChg chg="addSp delSp modSp mod modNotesTx">
-        <pc:chgData name="Read, Zoe" userId="b08cd0fd-26d2-470b-8ec0-c6e6cb2a79bd" providerId="ADAL" clId="{5AEB2719-95A5-4ED2-9E0E-ED462BB10526}" dt="2026-03-13T20:07:33.645" v="6439" actId="1038"/>
+      <pc:sldChg chg="addSp delSp modSp mod modCm modNotesTx">
+        <pc:chgData name="Read, Zoe" userId="b08cd0fd-26d2-470b-8ec0-c6e6cb2a79bd" providerId="ADAL" clId="{5AEB2719-95A5-4ED2-9E0E-ED462BB10526}" dt="2026-03-16T11:36:02.334" v="6657" actId="1035"/>
         <pc:sldMkLst>
           <pc:docMk/>
           <pc:sldMk cId="2005456116" sldId="257"/>
@@ -164,7 +165,7 @@
           </ac:spMkLst>
         </pc:spChg>
         <pc:spChg chg="mod">
-          <ac:chgData name="Read, Zoe" userId="b08cd0fd-26d2-470b-8ec0-c6e6cb2a79bd" providerId="ADAL" clId="{5AEB2719-95A5-4ED2-9E0E-ED462BB10526}" dt="2026-03-13T20:00:59.077" v="6414" actId="21"/>
+          <ac:chgData name="Read, Zoe" userId="b08cd0fd-26d2-470b-8ec0-c6e6cb2a79bd" providerId="ADAL" clId="{5AEB2719-95A5-4ED2-9E0E-ED462BB10526}" dt="2026-03-16T11:22:42.938" v="6443" actId="20577"/>
           <ac:spMkLst>
             <pc:docMk/>
             <pc:sldMk cId="2005456116" sldId="257"/>
@@ -180,19 +181,11 @@
           </ac:spMkLst>
         </pc:spChg>
         <pc:spChg chg="add mod ord">
-          <ac:chgData name="Read, Zoe" userId="b08cd0fd-26d2-470b-8ec0-c6e6cb2a79bd" providerId="ADAL" clId="{5AEB2719-95A5-4ED2-9E0E-ED462BB10526}" dt="2026-03-13T19:33:32.228" v="6207" actId="20577"/>
+          <ac:chgData name="Read, Zoe" userId="b08cd0fd-26d2-470b-8ec0-c6e6cb2a79bd" providerId="ADAL" clId="{5AEB2719-95A5-4ED2-9E0E-ED462BB10526}" dt="2026-03-16T11:23:15.018" v="6445" actId="207"/>
           <ac:spMkLst>
             <pc:docMk/>
             <pc:sldMk cId="2005456116" sldId="257"/>
             <ac:spMk id="7" creationId="{B580F8D7-E067-282C-0BEF-1FA899DCFD3B}"/>
-          </ac:spMkLst>
-        </pc:spChg>
-        <pc:spChg chg="del mod">
-          <ac:chgData name="Read, Zoe" userId="b08cd0fd-26d2-470b-8ec0-c6e6cb2a79bd" providerId="ADAL" clId="{5AEB2719-95A5-4ED2-9E0E-ED462BB10526}" dt="2026-03-12T20:26:30.998" v="3594" actId="478"/>
-          <ac:spMkLst>
-            <pc:docMk/>
-            <pc:sldMk cId="2005456116" sldId="257"/>
-            <ac:spMk id="8" creationId="{C27ACF02-AE38-EED1-52AD-AE57386B0269}"/>
           </ac:spMkLst>
         </pc:spChg>
         <pc:spChg chg="mod">
@@ -300,7 +293,7 @@
           </ac:spMkLst>
         </pc:spChg>
         <pc:spChg chg="add mod">
-          <ac:chgData name="Read, Zoe" userId="b08cd0fd-26d2-470b-8ec0-c6e6cb2a79bd" providerId="ADAL" clId="{5AEB2719-95A5-4ED2-9E0E-ED462BB10526}" dt="2026-03-13T20:01:22.771" v="6419" actId="1035"/>
+          <ac:chgData name="Read, Zoe" userId="b08cd0fd-26d2-470b-8ec0-c6e6cb2a79bd" providerId="ADAL" clId="{5AEB2719-95A5-4ED2-9E0E-ED462BB10526}" dt="2026-03-16T11:34:59.565" v="6645" actId="1035"/>
           <ac:spMkLst>
             <pc:docMk/>
             <pc:sldMk cId="2005456116" sldId="257"/>
@@ -308,7 +301,7 @@
           </ac:spMkLst>
         </pc:spChg>
         <pc:spChg chg="add mod">
-          <ac:chgData name="Read, Zoe" userId="b08cd0fd-26d2-470b-8ec0-c6e6cb2a79bd" providerId="ADAL" clId="{5AEB2719-95A5-4ED2-9E0E-ED462BB10526}" dt="2026-03-13T15:20:46.824" v="5011" actId="113"/>
+          <ac:chgData name="Read, Zoe" userId="b08cd0fd-26d2-470b-8ec0-c6e6cb2a79bd" providerId="ADAL" clId="{5AEB2719-95A5-4ED2-9E0E-ED462BB10526}" dt="2026-03-16T11:23:07.849" v="6444" actId="207"/>
           <ac:spMkLst>
             <pc:docMk/>
             <pc:sldMk cId="2005456116" sldId="257"/>
@@ -316,7 +309,7 @@
           </ac:spMkLst>
         </pc:spChg>
         <pc:spChg chg="add mod">
-          <ac:chgData name="Read, Zoe" userId="b08cd0fd-26d2-470b-8ec0-c6e6cb2a79bd" providerId="ADAL" clId="{5AEB2719-95A5-4ED2-9E0E-ED462BB10526}" dt="2026-03-13T19:33:53.441" v="6210" actId="20577"/>
+          <ac:chgData name="Read, Zoe" userId="b08cd0fd-26d2-470b-8ec0-c6e6cb2a79bd" providerId="ADAL" clId="{5AEB2719-95A5-4ED2-9E0E-ED462BB10526}" dt="2026-03-16T11:23:25.664" v="6446" actId="207"/>
           <ac:spMkLst>
             <pc:docMk/>
             <pc:sldMk cId="2005456116" sldId="257"/>
@@ -324,37 +317,13 @@
           </ac:spMkLst>
         </pc:spChg>
         <pc:spChg chg="mod">
-          <ac:chgData name="Read, Zoe" userId="b08cd0fd-26d2-470b-8ec0-c6e6cb2a79bd" providerId="ADAL" clId="{5AEB2719-95A5-4ED2-9E0E-ED462BB10526}" dt="2026-03-13T19:37:17.599" v="6382" actId="1076"/>
+          <ac:chgData name="Read, Zoe" userId="b08cd0fd-26d2-470b-8ec0-c6e6cb2a79bd" providerId="ADAL" clId="{5AEB2719-95A5-4ED2-9E0E-ED462BB10526}" dt="2026-03-16T11:36:02.334" v="6657" actId="1035"/>
           <ac:spMkLst>
             <pc:docMk/>
             <pc:sldMk cId="2005456116" sldId="257"/>
             <ac:spMk id="1046" creationId="{3D22E29A-542C-2707-EE87-D32E923FD26A}"/>
           </ac:spMkLst>
         </pc:spChg>
-        <pc:spChg chg="add del mod">
-          <ac:chgData name="Read, Zoe" userId="b08cd0fd-26d2-470b-8ec0-c6e6cb2a79bd" providerId="ADAL" clId="{5AEB2719-95A5-4ED2-9E0E-ED462BB10526}" dt="2026-03-13T18:44:23.193" v="6000" actId="478"/>
-          <ac:spMkLst>
-            <pc:docMk/>
-            <pc:sldMk cId="2005456116" sldId="257"/>
-            <ac:spMk id="1106" creationId="{990614C8-403D-9EED-A601-7B130D60F6F4}"/>
-          </ac:spMkLst>
-        </pc:spChg>
-        <pc:spChg chg="add del mod">
-          <ac:chgData name="Read, Zoe" userId="b08cd0fd-26d2-470b-8ec0-c6e6cb2a79bd" providerId="ADAL" clId="{5AEB2719-95A5-4ED2-9E0E-ED462BB10526}" dt="2026-03-13T18:39:19.247" v="5999" actId="478"/>
-          <ac:spMkLst>
-            <pc:docMk/>
-            <pc:sldMk cId="2005456116" sldId="257"/>
-            <ac:spMk id="1121" creationId="{E65BED06-F373-80B1-9AE1-C3C5EC044957}"/>
-          </ac:spMkLst>
-        </pc:spChg>
-        <pc:grpChg chg="del">
-          <ac:chgData name="Read, Zoe" userId="b08cd0fd-26d2-470b-8ec0-c6e6cb2a79bd" providerId="ADAL" clId="{5AEB2719-95A5-4ED2-9E0E-ED462BB10526}" dt="2026-03-12T20:13:15.849" v="3367" actId="478"/>
-          <ac:grpSpMkLst>
-            <pc:docMk/>
-            <pc:sldMk cId="2005456116" sldId="257"/>
-            <ac:grpSpMk id="22" creationId="{2BFE48BE-D2C5-8243-5332-F748C7FB4EAC}"/>
-          </ac:grpSpMkLst>
-        </pc:grpChg>
         <pc:graphicFrameChg chg="mod modGraphic">
           <ac:chgData name="Read, Zoe" userId="b08cd0fd-26d2-470b-8ec0-c6e6cb2a79bd" providerId="ADAL" clId="{5AEB2719-95A5-4ED2-9E0E-ED462BB10526}" dt="2026-03-13T18:11:25.336" v="5465" actId="1076"/>
           <ac:graphicFrameMkLst>
@@ -363,8 +332,8 @@
             <ac:graphicFrameMk id="20" creationId="{6EE1AE5B-A26D-71DD-8EF3-D283BC117F1C}"/>
           </ac:graphicFrameMkLst>
         </pc:graphicFrameChg>
-        <pc:picChg chg="add mod ord">
-          <ac:chgData name="Read, Zoe" userId="b08cd0fd-26d2-470b-8ec0-c6e6cb2a79bd" providerId="ADAL" clId="{5AEB2719-95A5-4ED2-9E0E-ED462BB10526}" dt="2026-03-13T20:06:48.937" v="6428" actId="1035"/>
+        <pc:picChg chg="add del mod ord">
+          <ac:chgData name="Read, Zoe" userId="b08cd0fd-26d2-470b-8ec0-c6e6cb2a79bd" providerId="ADAL" clId="{5AEB2719-95A5-4ED2-9E0E-ED462BB10526}" dt="2026-03-16T11:28:05.199" v="6542" actId="478"/>
           <ac:picMkLst>
             <pc:docMk/>
             <pc:sldMk cId="2005456116" sldId="257"/>
@@ -372,499 +341,67 @@
           </ac:picMkLst>
         </pc:picChg>
         <pc:picChg chg="add del mod">
-          <ac:chgData name="Read, Zoe" userId="b08cd0fd-26d2-470b-8ec0-c6e6cb2a79bd" providerId="ADAL" clId="{5AEB2719-95A5-4ED2-9E0E-ED462BB10526}" dt="2026-03-13T14:36:32.963" v="3889" actId="478"/>
+          <ac:chgData name="Read, Zoe" userId="b08cd0fd-26d2-470b-8ec0-c6e6cb2a79bd" providerId="ADAL" clId="{5AEB2719-95A5-4ED2-9E0E-ED462BB10526}" dt="2026-03-16T11:28:46.704" v="6548" actId="478"/>
           <ac:picMkLst>
             <pc:docMk/>
             <pc:sldMk cId="2005456116" sldId="257"/>
-            <ac:picMk id="6" creationId="{E193A4F9-DEAF-C6DE-2623-1C1E36DBB696}"/>
+            <ac:picMk id="8" creationId="{5CF41111-8529-1268-9415-CABE9AC20ADC}"/>
           </ac:picMkLst>
         </pc:picChg>
-        <pc:picChg chg="add del mod modCrop">
-          <ac:chgData name="Read, Zoe" userId="b08cd0fd-26d2-470b-8ec0-c6e6cb2a79bd" providerId="ADAL" clId="{5AEB2719-95A5-4ED2-9E0E-ED462BB10526}" dt="2026-03-13T14:35:54.830" v="3882" actId="478"/>
-          <ac:picMkLst>
-            <pc:docMk/>
-            <pc:sldMk cId="2005456116" sldId="257"/>
-            <ac:picMk id="9" creationId="{09EDF015-AC84-7DA3-BD5A-225267C491D7}"/>
-          </ac:picMkLst>
-        </pc:picChg>
-        <pc:picChg chg="add mod">
-          <ac:chgData name="Read, Zoe" userId="b08cd0fd-26d2-470b-8ec0-c6e6cb2a79bd" providerId="ADAL" clId="{5AEB2719-95A5-4ED2-9E0E-ED462BB10526}" dt="2026-03-13T20:07:06.893" v="6433" actId="1076"/>
+        <pc:picChg chg="add del mod">
+          <ac:chgData name="Read, Zoe" userId="b08cd0fd-26d2-470b-8ec0-c6e6cb2a79bd" providerId="ADAL" clId="{5AEB2719-95A5-4ED2-9E0E-ED462BB10526}" dt="2026-03-16T11:32:18.188" v="6634" actId="478"/>
           <ac:picMkLst>
             <pc:docMk/>
             <pc:sldMk cId="2005456116" sldId="257"/>
             <ac:picMk id="9" creationId="{85DA710A-FE9C-9F98-B2EB-359901B6FE67}"/>
           </ac:picMkLst>
         </pc:picChg>
-        <pc:picChg chg="add del mod">
-          <ac:chgData name="Read, Zoe" userId="b08cd0fd-26d2-470b-8ec0-c6e6cb2a79bd" providerId="ADAL" clId="{5AEB2719-95A5-4ED2-9E0E-ED462BB10526}" dt="2026-03-13T14:37:42.624" v="3894" actId="478"/>
+        <pc:picChg chg="add mod ord">
+          <ac:chgData name="Read, Zoe" userId="b08cd0fd-26d2-470b-8ec0-c6e6cb2a79bd" providerId="ADAL" clId="{5AEB2719-95A5-4ED2-9E0E-ED462BB10526}" dt="2026-03-16T11:28:57.449" v="6551" actId="1076"/>
           <ac:picMkLst>
             <pc:docMk/>
             <pc:sldMk cId="2005456116" sldId="257"/>
-            <ac:picMk id="10" creationId="{87488FFA-0267-8CB3-3D6F-2F08271CB032}"/>
+            <ac:picMk id="11" creationId="{DA28F95C-2111-E10A-4CC1-C069E3C51045}"/>
           </ac:picMkLst>
         </pc:picChg>
-        <pc:picChg chg="add del mod ord modCrop">
-          <ac:chgData name="Read, Zoe" userId="b08cd0fd-26d2-470b-8ec0-c6e6cb2a79bd" providerId="ADAL" clId="{5AEB2719-95A5-4ED2-9E0E-ED462BB10526}" dt="2026-03-13T19:02:40.378" v="6050" actId="478"/>
+        <pc:picChg chg="add del mod">
+          <ac:chgData name="Read, Zoe" userId="b08cd0fd-26d2-470b-8ec0-c6e6cb2a79bd" providerId="ADAL" clId="{5AEB2719-95A5-4ED2-9E0E-ED462BB10526}" dt="2026-03-16T11:35:39.896" v="6650" actId="478"/>
           <ac:picMkLst>
             <pc:docMk/>
             <pc:sldMk cId="2005456116" sldId="257"/>
-            <ac:picMk id="11" creationId="{0144416F-2A82-F7CC-0427-8A36932666F6}"/>
+            <ac:picMk id="15" creationId="{D5EFE006-592F-3411-CBFD-F9BC7ECA928A}"/>
+          </ac:picMkLst>
+        </pc:picChg>
+        <pc:picChg chg="add mod">
+          <ac:chgData name="Read, Zoe" userId="b08cd0fd-26d2-470b-8ec0-c6e6cb2a79bd" providerId="ADAL" clId="{5AEB2719-95A5-4ED2-9E0E-ED462BB10526}" dt="2026-03-16T11:34:11.066" v="6642" actId="1076"/>
+          <ac:picMkLst>
+            <pc:docMk/>
+            <pc:sldMk cId="2005456116" sldId="257"/>
+            <ac:picMk id="22" creationId="{00462A3D-D24C-025E-9B9B-C8F9481AB05B}"/>
           </ac:picMkLst>
         </pc:picChg>
         <pc:picChg chg="add del mod">
-          <ac:chgData name="Read, Zoe" userId="b08cd0fd-26d2-470b-8ec0-c6e6cb2a79bd" providerId="ADAL" clId="{5AEB2719-95A5-4ED2-9E0E-ED462BB10526}" dt="2026-03-13T15:26:55.493" v="5045" actId="478"/>
-          <ac:picMkLst>
-            <pc:docMk/>
-            <pc:sldMk cId="2005456116" sldId="257"/>
-            <ac:picMk id="14" creationId="{37395166-1C97-2974-4774-B9647BFFD3B0}"/>
-          </ac:picMkLst>
-        </pc:picChg>
-        <pc:picChg chg="add del mod ord modCrop">
-          <ac:chgData name="Read, Zoe" userId="b08cd0fd-26d2-470b-8ec0-c6e6cb2a79bd" providerId="ADAL" clId="{5AEB2719-95A5-4ED2-9E0E-ED462BB10526}" dt="2026-03-13T15:13:14.944" v="4945" actId="478"/>
-          <ac:picMkLst>
-            <pc:docMk/>
-            <pc:sldMk cId="2005456116" sldId="257"/>
-            <ac:picMk id="15" creationId="{6F1E99EB-549B-E9F4-C4C6-CCFBCE759AD8}"/>
-          </ac:picMkLst>
-        </pc:picChg>
-        <pc:picChg chg="add del mod">
-          <ac:chgData name="Read, Zoe" userId="b08cd0fd-26d2-470b-8ec0-c6e6cb2a79bd" providerId="ADAL" clId="{5AEB2719-95A5-4ED2-9E0E-ED462BB10526}" dt="2026-03-13T14:58:09.041" v="4859" actId="478"/>
-          <ac:picMkLst>
-            <pc:docMk/>
-            <pc:sldMk cId="2005456116" sldId="257"/>
-            <ac:picMk id="19" creationId="{4A548E57-4FEC-FC9E-37C8-9C6818770C12}"/>
-          </ac:picMkLst>
-        </pc:picChg>
-        <pc:picChg chg="del mod">
-          <ac:chgData name="Read, Zoe" userId="b08cd0fd-26d2-470b-8ec0-c6e6cb2a79bd" providerId="ADAL" clId="{5AEB2719-95A5-4ED2-9E0E-ED462BB10526}" dt="2026-03-12T20:13:02.055" v="3365" actId="478"/>
-          <ac:picMkLst>
-            <pc:docMk/>
-            <pc:sldMk cId="2005456116" sldId="257"/>
-            <ac:picMk id="19" creationId="{6F6CCBC1-FB78-D641-2558-44EE723465AE}"/>
-          </ac:picMkLst>
-        </pc:picChg>
-        <pc:picChg chg="del">
-          <ac:chgData name="Read, Zoe" userId="b08cd0fd-26d2-470b-8ec0-c6e6cb2a79bd" providerId="ADAL" clId="{5AEB2719-95A5-4ED2-9E0E-ED462BB10526}" dt="2026-03-12T20:13:15.849" v="3367" actId="478"/>
-          <ac:picMkLst>
-            <pc:docMk/>
-            <pc:sldMk cId="2005456116" sldId="257"/>
-            <ac:picMk id="24" creationId="{04440FAB-EE3F-FD41-C5C0-9224F3ADC6B1}"/>
-          </ac:picMkLst>
-        </pc:picChg>
-        <pc:picChg chg="add del mod">
-          <ac:chgData name="Read, Zoe" userId="b08cd0fd-26d2-470b-8ec0-c6e6cb2a79bd" providerId="ADAL" clId="{5AEB2719-95A5-4ED2-9E0E-ED462BB10526}" dt="2026-03-13T15:01:01.939" v="4868" actId="478"/>
-          <ac:picMkLst>
-            <pc:docMk/>
-            <pc:sldMk cId="2005456116" sldId="257"/>
-            <ac:picMk id="24" creationId="{3F0569DE-707F-D9F1-1D75-6E1DDB13B5E4}"/>
-          </ac:picMkLst>
-        </pc:picChg>
-        <pc:picChg chg="add del mod ord">
-          <ac:chgData name="Read, Zoe" userId="b08cd0fd-26d2-470b-8ec0-c6e6cb2a79bd" providerId="ADAL" clId="{5AEB2719-95A5-4ED2-9E0E-ED462BB10526}" dt="2026-03-13T15:01:53.310" v="4884" actId="478"/>
-          <ac:picMkLst>
-            <pc:docMk/>
-            <pc:sldMk cId="2005456116" sldId="257"/>
-            <ac:picMk id="1038" creationId="{79B545FE-4759-2D41-AC8C-49367F5FD302}"/>
-          </ac:picMkLst>
-        </pc:picChg>
-        <pc:picChg chg="add del mod">
-          <ac:chgData name="Read, Zoe" userId="b08cd0fd-26d2-470b-8ec0-c6e6cb2a79bd" providerId="ADAL" clId="{5AEB2719-95A5-4ED2-9E0E-ED462BB10526}" dt="2026-03-13T15:02:36.270" v="4894" actId="478"/>
-          <ac:picMkLst>
-            <pc:docMk/>
-            <pc:sldMk cId="2005456116" sldId="257"/>
-            <ac:picMk id="1041" creationId="{C6F1CF14-BF24-F636-555B-EE0412FF8575}"/>
-          </ac:picMkLst>
-        </pc:picChg>
-        <pc:picChg chg="add del mod modCrop">
-          <ac:chgData name="Read, Zoe" userId="b08cd0fd-26d2-470b-8ec0-c6e6cb2a79bd" providerId="ADAL" clId="{5AEB2719-95A5-4ED2-9E0E-ED462BB10526}" dt="2026-03-13T15:13:14.944" v="4945" actId="478"/>
-          <ac:picMkLst>
-            <pc:docMk/>
-            <pc:sldMk cId="2005456116" sldId="257"/>
-            <ac:picMk id="1042" creationId="{04363E67-54FD-37B3-65BB-A8173A952E9D}"/>
-          </ac:picMkLst>
-        </pc:picChg>
-        <pc:picChg chg="add del mod">
-          <ac:chgData name="Read, Zoe" userId="b08cd0fd-26d2-470b-8ec0-c6e6cb2a79bd" providerId="ADAL" clId="{5AEB2719-95A5-4ED2-9E0E-ED462BB10526}" dt="2026-03-13T15:06:17.977" v="4922" actId="478"/>
-          <ac:picMkLst>
-            <pc:docMk/>
-            <pc:sldMk cId="2005456116" sldId="257"/>
-            <ac:picMk id="1048" creationId="{3A2666A1-2DC7-950A-723E-6840B5BC5392}"/>
-          </ac:picMkLst>
-        </pc:picChg>
-        <pc:picChg chg="add del mod">
-          <ac:chgData name="Read, Zoe" userId="b08cd0fd-26d2-470b-8ec0-c6e6cb2a79bd" providerId="ADAL" clId="{5AEB2719-95A5-4ED2-9E0E-ED462BB10526}" dt="2026-03-13T15:06:58.060" v="4929" actId="478"/>
-          <ac:picMkLst>
-            <pc:docMk/>
-            <pc:sldMk cId="2005456116" sldId="257"/>
-            <ac:picMk id="1059" creationId="{EB3694CB-2E69-2599-592D-A9902BAD3ADD}"/>
-          </ac:picMkLst>
-        </pc:picChg>
-        <pc:picChg chg="add del mod">
-          <ac:chgData name="Read, Zoe" userId="b08cd0fd-26d2-470b-8ec0-c6e6cb2a79bd" providerId="ADAL" clId="{5AEB2719-95A5-4ED2-9E0E-ED462BB10526}" dt="2026-03-13T15:07:38.327" v="4937" actId="478"/>
-          <ac:picMkLst>
-            <pc:docMk/>
-            <pc:sldMk cId="2005456116" sldId="257"/>
-            <ac:picMk id="1061" creationId="{5C64DEE6-3355-98B2-AC38-10A3DD327236}"/>
-          </ac:picMkLst>
-        </pc:picChg>
-        <pc:picChg chg="add del mod">
-          <ac:chgData name="Read, Zoe" userId="b08cd0fd-26d2-470b-8ec0-c6e6cb2a79bd" providerId="ADAL" clId="{5AEB2719-95A5-4ED2-9E0E-ED462BB10526}" dt="2026-03-13T15:08:12.270" v="4943" actId="478"/>
-          <ac:picMkLst>
-            <pc:docMk/>
-            <pc:sldMk cId="2005456116" sldId="257"/>
-            <ac:picMk id="1063" creationId="{AC1EC631-C193-3A00-6730-F1F2DABABD96}"/>
-          </ac:picMkLst>
-        </pc:picChg>
-        <pc:picChg chg="add del mod">
-          <ac:chgData name="Read, Zoe" userId="b08cd0fd-26d2-470b-8ec0-c6e6cb2a79bd" providerId="ADAL" clId="{5AEB2719-95A5-4ED2-9E0E-ED462BB10526}" dt="2026-03-13T15:22:30.164" v="5023" actId="478"/>
-          <ac:picMkLst>
-            <pc:docMk/>
-            <pc:sldMk cId="2005456116" sldId="257"/>
-            <ac:picMk id="1065" creationId="{D9220666-D88E-9558-B956-D1D5B159C76E}"/>
-          </ac:picMkLst>
-        </pc:picChg>
-        <pc:picChg chg="add del mod">
-          <ac:chgData name="Read, Zoe" userId="b08cd0fd-26d2-470b-8ec0-c6e6cb2a79bd" providerId="ADAL" clId="{5AEB2719-95A5-4ED2-9E0E-ED462BB10526}" dt="2026-03-13T15:14:14.848" v="4949" actId="478"/>
-          <ac:picMkLst>
-            <pc:docMk/>
-            <pc:sldMk cId="2005456116" sldId="257"/>
-            <ac:picMk id="1067" creationId="{2E554507-40AB-39F1-06F7-5ACA98D452FD}"/>
-          </ac:picMkLst>
-        </pc:picChg>
-        <pc:picChg chg="add del mod">
-          <ac:chgData name="Read, Zoe" userId="b08cd0fd-26d2-470b-8ec0-c6e6cb2a79bd" providerId="ADAL" clId="{5AEB2719-95A5-4ED2-9E0E-ED462BB10526}" dt="2026-03-13T15:14:29.167" v="4954" actId="478"/>
-          <ac:picMkLst>
-            <pc:docMk/>
-            <pc:sldMk cId="2005456116" sldId="257"/>
-            <ac:picMk id="1069" creationId="{8D91DBDB-9E9E-52CB-55AD-9A637EFC0709}"/>
-          </ac:picMkLst>
-        </pc:picChg>
-        <pc:picChg chg="add del mod">
-          <ac:chgData name="Read, Zoe" userId="b08cd0fd-26d2-470b-8ec0-c6e6cb2a79bd" providerId="ADAL" clId="{5AEB2719-95A5-4ED2-9E0E-ED462BB10526}" dt="2026-03-13T15:15:01.560" v="4958" actId="478"/>
-          <ac:picMkLst>
-            <pc:docMk/>
-            <pc:sldMk cId="2005456116" sldId="257"/>
-            <ac:picMk id="1071" creationId="{FEABA2EA-EFA6-54BC-2013-B77804E53F02}"/>
-          </ac:picMkLst>
-        </pc:picChg>
-        <pc:picChg chg="add del mod">
-          <ac:chgData name="Read, Zoe" userId="b08cd0fd-26d2-470b-8ec0-c6e6cb2a79bd" providerId="ADAL" clId="{5AEB2719-95A5-4ED2-9E0E-ED462BB10526}" dt="2026-03-13T15:15:41.221" v="4963" actId="478"/>
-          <ac:picMkLst>
-            <pc:docMk/>
-            <pc:sldMk cId="2005456116" sldId="257"/>
-            <ac:picMk id="1073" creationId="{5466ADED-34D8-BA58-93D9-9F5AE1DBBC21}"/>
-          </ac:picMkLst>
-        </pc:picChg>
-        <pc:picChg chg="add del mod">
-          <ac:chgData name="Read, Zoe" userId="b08cd0fd-26d2-470b-8ec0-c6e6cb2a79bd" providerId="ADAL" clId="{5AEB2719-95A5-4ED2-9E0E-ED462BB10526}" dt="2026-03-13T15:16:18.449" v="4968" actId="478"/>
-          <ac:picMkLst>
-            <pc:docMk/>
-            <pc:sldMk cId="2005456116" sldId="257"/>
-            <ac:picMk id="1075" creationId="{AAEC5A0E-A8A7-5F3D-FF7E-D5A1310DC25F}"/>
-          </ac:picMkLst>
-        </pc:picChg>
-        <pc:picChg chg="add del mod">
-          <ac:chgData name="Read, Zoe" userId="b08cd0fd-26d2-470b-8ec0-c6e6cb2a79bd" providerId="ADAL" clId="{5AEB2719-95A5-4ED2-9E0E-ED462BB10526}" dt="2026-03-13T15:16:58.206" v="4975" actId="478"/>
-          <ac:picMkLst>
-            <pc:docMk/>
-            <pc:sldMk cId="2005456116" sldId="257"/>
-            <ac:picMk id="1077" creationId="{FFBEF150-4996-ACCF-2FF8-42C26451A7FE}"/>
-          </ac:picMkLst>
-        </pc:picChg>
-        <pc:picChg chg="add del mod ord">
-          <ac:chgData name="Read, Zoe" userId="b08cd0fd-26d2-470b-8ec0-c6e6cb2a79bd" providerId="ADAL" clId="{5AEB2719-95A5-4ED2-9E0E-ED462BB10526}" dt="2026-03-13T15:20:09.550" v="4992" actId="478"/>
-          <ac:picMkLst>
-            <pc:docMk/>
-            <pc:sldMk cId="2005456116" sldId="257"/>
-            <ac:picMk id="1079" creationId="{E89868C9-5DDE-C444-4252-B8FA393EF2CE}"/>
-          </ac:picMkLst>
-        </pc:picChg>
-        <pc:picChg chg="add del mod ord">
-          <ac:chgData name="Read, Zoe" userId="b08cd0fd-26d2-470b-8ec0-c6e6cb2a79bd" providerId="ADAL" clId="{5AEB2719-95A5-4ED2-9E0E-ED462BB10526}" dt="2026-03-13T20:06:24.207" v="6421" actId="478"/>
-          <ac:picMkLst>
-            <pc:docMk/>
-            <pc:sldMk cId="2005456116" sldId="257"/>
-            <ac:picMk id="1081" creationId="{E751C4E4-E854-FE7E-1EF9-268DA1A23024}"/>
-          </ac:picMkLst>
-        </pc:picChg>
-        <pc:picChg chg="add del mod">
-          <ac:chgData name="Read, Zoe" userId="b08cd0fd-26d2-470b-8ec0-c6e6cb2a79bd" providerId="ADAL" clId="{5AEB2719-95A5-4ED2-9E0E-ED462BB10526}" dt="2026-03-13T15:22:37.877" v="5027" actId="478"/>
-          <ac:picMkLst>
-            <pc:docMk/>
-            <pc:sldMk cId="2005456116" sldId="257"/>
-            <ac:picMk id="1083" creationId="{79DA7F69-4E83-B1E5-DFEA-930123DA7F46}"/>
-          </ac:picMkLst>
-        </pc:picChg>
-        <pc:picChg chg="add mod">
-          <ac:chgData name="Read, Zoe" userId="b08cd0fd-26d2-470b-8ec0-c6e6cb2a79bd" providerId="ADAL" clId="{5AEB2719-95A5-4ED2-9E0E-ED462BB10526}" dt="2026-03-13T15:23:32.914" v="5041" actId="1076"/>
+          <ac:chgData name="Read, Zoe" userId="b08cd0fd-26d2-470b-8ec0-c6e6cb2a79bd" providerId="ADAL" clId="{5AEB2719-95A5-4ED2-9E0E-ED462BB10526}" dt="2026-03-16T11:34:01.951" v="6640" actId="478"/>
           <ac:picMkLst>
             <pc:docMk/>
             <pc:sldMk cId="2005456116" sldId="257"/>
             <ac:picMk id="1085" creationId="{9E2D53CD-2078-3011-EB8F-F1979C9B3B22}"/>
           </ac:picMkLst>
         </pc:picChg>
-        <pc:picChg chg="add del mod">
-          <ac:chgData name="Read, Zoe" userId="b08cd0fd-26d2-470b-8ec0-c6e6cb2a79bd" providerId="ADAL" clId="{5AEB2719-95A5-4ED2-9E0E-ED462BB10526}" dt="2026-03-13T15:27:09.698" v="5050" actId="478"/>
+        <pc:picChg chg="add mod">
+          <ac:chgData name="Read, Zoe" userId="b08cd0fd-26d2-470b-8ec0-c6e6cb2a79bd" providerId="ADAL" clId="{5AEB2719-95A5-4ED2-9E0E-ED462BB10526}" dt="2026-03-16T11:35:52.227" v="6654" actId="1076"/>
           <ac:picMkLst>
             <pc:docMk/>
             <pc:sldMk cId="2005456116" sldId="257"/>
-            <ac:picMk id="1088" creationId="{6780A67C-EA16-F57D-656A-1D4EE2D0B56B}"/>
-          </ac:picMkLst>
-        </pc:picChg>
-        <pc:picChg chg="add del mod">
-          <ac:chgData name="Read, Zoe" userId="b08cd0fd-26d2-470b-8ec0-c6e6cb2a79bd" providerId="ADAL" clId="{5AEB2719-95A5-4ED2-9E0E-ED462BB10526}" dt="2026-03-13T15:27:37.034" v="5056" actId="478"/>
-          <ac:picMkLst>
-            <pc:docMk/>
-            <pc:sldMk cId="2005456116" sldId="257"/>
-            <ac:picMk id="1090" creationId="{22F59BC5-2C35-DDF1-6E10-AC204BAEB7DC}"/>
-          </ac:picMkLst>
-        </pc:picChg>
-        <pc:picChg chg="add del mod">
-          <ac:chgData name="Read, Zoe" userId="b08cd0fd-26d2-470b-8ec0-c6e6cb2a79bd" providerId="ADAL" clId="{5AEB2719-95A5-4ED2-9E0E-ED462BB10526}" dt="2026-03-13T15:28:10.572" v="5061" actId="478"/>
-          <ac:picMkLst>
-            <pc:docMk/>
-            <pc:sldMk cId="2005456116" sldId="257"/>
-            <ac:picMk id="1092" creationId="{B289EE1B-058F-1CF1-4DE6-B6EEE7938A9B}"/>
-          </ac:picMkLst>
-        </pc:picChg>
-        <pc:picChg chg="add del mod">
-          <ac:chgData name="Read, Zoe" userId="b08cd0fd-26d2-470b-8ec0-c6e6cb2a79bd" providerId="ADAL" clId="{5AEB2719-95A5-4ED2-9E0E-ED462BB10526}" dt="2026-03-13T15:29:43.633" v="5069" actId="478"/>
-          <ac:picMkLst>
-            <pc:docMk/>
-            <pc:sldMk cId="2005456116" sldId="257"/>
-            <ac:picMk id="1094" creationId="{F50E4DC2-8AE0-9280-8B55-572851BC47EC}"/>
-          </ac:picMkLst>
-        </pc:picChg>
-        <pc:picChg chg="add del mod">
-          <ac:chgData name="Read, Zoe" userId="b08cd0fd-26d2-470b-8ec0-c6e6cb2a79bd" providerId="ADAL" clId="{5AEB2719-95A5-4ED2-9E0E-ED462BB10526}" dt="2026-03-13T15:30:15.570" v="5071" actId="478"/>
-          <ac:picMkLst>
-            <pc:docMk/>
-            <pc:sldMk cId="2005456116" sldId="257"/>
-            <ac:picMk id="1096" creationId="{19A9F59A-6905-0461-921F-53D44D6FE9B4}"/>
-          </ac:picMkLst>
-        </pc:picChg>
-        <pc:picChg chg="add del mod">
-          <ac:chgData name="Read, Zoe" userId="b08cd0fd-26d2-470b-8ec0-c6e6cb2a79bd" providerId="ADAL" clId="{5AEB2719-95A5-4ED2-9E0E-ED462BB10526}" dt="2026-03-13T15:31:42.114" v="5079" actId="478"/>
-          <ac:picMkLst>
-            <pc:docMk/>
-            <pc:sldMk cId="2005456116" sldId="257"/>
-            <ac:picMk id="1098" creationId="{371F0427-7C9D-A089-1550-355CC41A1B47}"/>
-          </ac:picMkLst>
-        </pc:picChg>
-        <pc:picChg chg="add del mod">
-          <ac:chgData name="Read, Zoe" userId="b08cd0fd-26d2-470b-8ec0-c6e6cb2a79bd" providerId="ADAL" clId="{5AEB2719-95A5-4ED2-9E0E-ED462BB10526}" dt="2026-03-13T15:54:01.795" v="5096" actId="478"/>
-          <ac:picMkLst>
-            <pc:docMk/>
-            <pc:sldMk cId="2005456116" sldId="257"/>
-            <ac:picMk id="1100" creationId="{A43F5C94-F21D-A325-C5D6-3A47C4C3B61F}"/>
-          </ac:picMkLst>
-        </pc:picChg>
-        <pc:picChg chg="add del mod">
-          <ac:chgData name="Read, Zoe" userId="b08cd0fd-26d2-470b-8ec0-c6e6cb2a79bd" providerId="ADAL" clId="{5AEB2719-95A5-4ED2-9E0E-ED462BB10526}" dt="2026-03-13T15:57:59.527" v="5369" actId="478"/>
-          <ac:picMkLst>
-            <pc:docMk/>
-            <pc:sldMk cId="2005456116" sldId="257"/>
-            <ac:picMk id="1102" creationId="{409410D1-8C61-C5F2-2ED0-8AE9EB772068}"/>
-          </ac:picMkLst>
-        </pc:picChg>
-        <pc:picChg chg="add del mod">
-          <ac:chgData name="Read, Zoe" userId="b08cd0fd-26d2-470b-8ec0-c6e6cb2a79bd" providerId="ADAL" clId="{5AEB2719-95A5-4ED2-9E0E-ED462BB10526}" dt="2026-03-13T18:28:42.166" v="5951" actId="478"/>
-          <ac:picMkLst>
-            <pc:docMk/>
-            <pc:sldMk cId="2005456116" sldId="257"/>
-            <ac:picMk id="1104" creationId="{BB487FD2-0D02-18A0-8E65-73832FF97000}"/>
-          </ac:picMkLst>
-        </pc:picChg>
-        <pc:picChg chg="add del mod">
-          <ac:chgData name="Read, Zoe" userId="b08cd0fd-26d2-470b-8ec0-c6e6cb2a79bd" providerId="ADAL" clId="{5AEB2719-95A5-4ED2-9E0E-ED462BB10526}" dt="2026-03-13T18:29:11.510" v="5953" actId="478"/>
-          <ac:picMkLst>
-            <pc:docMk/>
-            <pc:sldMk cId="2005456116" sldId="257"/>
-            <ac:picMk id="1108" creationId="{C1693025-7B3E-924A-5F00-7BE2F534CE94}"/>
-          </ac:picMkLst>
-        </pc:picChg>
-        <pc:picChg chg="add del mod ord">
-          <ac:chgData name="Read, Zoe" userId="b08cd0fd-26d2-470b-8ec0-c6e6cb2a79bd" providerId="ADAL" clId="{5AEB2719-95A5-4ED2-9E0E-ED462BB10526}" dt="2026-03-13T18:44:39.141" v="6006" actId="478"/>
-          <ac:picMkLst>
-            <pc:docMk/>
-            <pc:sldMk cId="2005456116" sldId="257"/>
-            <ac:picMk id="1110" creationId="{B4368826-C15A-60ED-182C-BDDCB7AE0450}"/>
-          </ac:picMkLst>
-        </pc:picChg>
-        <pc:picChg chg="add del mod">
-          <ac:chgData name="Read, Zoe" userId="b08cd0fd-26d2-470b-8ec0-c6e6cb2a79bd" providerId="ADAL" clId="{5AEB2719-95A5-4ED2-9E0E-ED462BB10526}" dt="2026-03-13T18:30:19.459" v="5961" actId="478"/>
-          <ac:picMkLst>
-            <pc:docMk/>
-            <pc:sldMk cId="2005456116" sldId="257"/>
-            <ac:picMk id="1112" creationId="{1D61C42D-3DE8-6030-77E4-BEF2648FC623}"/>
-          </ac:picMkLst>
-        </pc:picChg>
-        <pc:picChg chg="add del mod">
-          <ac:chgData name="Read, Zoe" userId="b08cd0fd-26d2-470b-8ec0-c6e6cb2a79bd" providerId="ADAL" clId="{5AEB2719-95A5-4ED2-9E0E-ED462BB10526}" dt="2026-03-13T18:31:22.981" v="5964" actId="478"/>
-          <ac:picMkLst>
-            <pc:docMk/>
-            <pc:sldMk cId="2005456116" sldId="257"/>
-            <ac:picMk id="1114" creationId="{EFC001B8-BD61-1505-17D5-BA752A5B2FBC}"/>
-          </ac:picMkLst>
-        </pc:picChg>
-        <pc:picChg chg="add del mod">
-          <ac:chgData name="Read, Zoe" userId="b08cd0fd-26d2-470b-8ec0-c6e6cb2a79bd" providerId="ADAL" clId="{5AEB2719-95A5-4ED2-9E0E-ED462BB10526}" dt="2026-03-13T18:31:58.499" v="5967" actId="478"/>
-          <ac:picMkLst>
-            <pc:docMk/>
-            <pc:sldMk cId="2005456116" sldId="257"/>
-            <ac:picMk id="1116" creationId="{65AF378F-5CD2-D33D-63DD-3174D0B4ABE3}"/>
-          </ac:picMkLst>
-        </pc:picChg>
-        <pc:picChg chg="add del mod">
-          <ac:chgData name="Read, Zoe" userId="b08cd0fd-26d2-470b-8ec0-c6e6cb2a79bd" providerId="ADAL" clId="{5AEB2719-95A5-4ED2-9E0E-ED462BB10526}" dt="2026-03-13T18:32:48.323" v="5972" actId="478"/>
-          <ac:picMkLst>
-            <pc:docMk/>
-            <pc:sldMk cId="2005456116" sldId="257"/>
-            <ac:picMk id="1118" creationId="{FD3EE651-DB72-0E6C-A520-B8763C8AD8B2}"/>
-          </ac:picMkLst>
-        </pc:picChg>
-        <pc:picChg chg="add del mod modCrop">
-          <ac:chgData name="Read, Zoe" userId="b08cd0fd-26d2-470b-8ec0-c6e6cb2a79bd" providerId="ADAL" clId="{5AEB2719-95A5-4ED2-9E0E-ED462BB10526}" dt="2026-03-13T18:44:27.949" v="6001" actId="478"/>
-          <ac:picMkLst>
-            <pc:docMk/>
-            <pc:sldMk cId="2005456116" sldId="257"/>
-            <ac:picMk id="1119" creationId="{6B0255B7-3633-4468-0D88-5578BD3FA01B}"/>
-          </ac:picMkLst>
-        </pc:picChg>
-        <pc:picChg chg="add del mod">
-          <ac:chgData name="Read, Zoe" userId="b08cd0fd-26d2-470b-8ec0-c6e6cb2a79bd" providerId="ADAL" clId="{5AEB2719-95A5-4ED2-9E0E-ED462BB10526}" dt="2026-03-13T18:47:33.690" v="6018" actId="478"/>
-          <ac:picMkLst>
-            <pc:docMk/>
-            <pc:sldMk cId="2005456116" sldId="257"/>
-            <ac:picMk id="1123" creationId="{CE88C600-3733-61AF-6D89-0D2360023238}"/>
-          </ac:picMkLst>
-        </pc:picChg>
-        <pc:picChg chg="add del mod">
-          <ac:chgData name="Read, Zoe" userId="b08cd0fd-26d2-470b-8ec0-c6e6cb2a79bd" providerId="ADAL" clId="{5AEB2719-95A5-4ED2-9E0E-ED462BB10526}" dt="2026-03-13T18:47:31.828" v="6017" actId="478"/>
-          <ac:picMkLst>
-            <pc:docMk/>
-            <pc:sldMk cId="2005456116" sldId="257"/>
-            <ac:picMk id="1125" creationId="{0FCE25EE-4310-CAAC-66A8-C2FEE8321D3F}"/>
-          </ac:picMkLst>
-        </pc:picChg>
-        <pc:picChg chg="add del mod">
-          <ac:chgData name="Read, Zoe" userId="b08cd0fd-26d2-470b-8ec0-c6e6cb2a79bd" providerId="ADAL" clId="{5AEB2719-95A5-4ED2-9E0E-ED462BB10526}" dt="2026-03-13T18:50:50.707" v="6029" actId="478"/>
-          <ac:picMkLst>
-            <pc:docMk/>
-            <pc:sldMk cId="2005456116" sldId="257"/>
-            <ac:picMk id="1127" creationId="{A6BAE1D5-13FF-E627-6DEA-53877405D740}"/>
-          </ac:picMkLst>
-        </pc:picChg>
-        <pc:picChg chg="add del mod">
-          <ac:chgData name="Read, Zoe" userId="b08cd0fd-26d2-470b-8ec0-c6e6cb2a79bd" providerId="ADAL" clId="{5AEB2719-95A5-4ED2-9E0E-ED462BB10526}" dt="2026-03-13T18:50:42.061" v="6025" actId="478"/>
-          <ac:picMkLst>
-            <pc:docMk/>
-            <pc:sldMk cId="2005456116" sldId="257"/>
-            <ac:picMk id="1129" creationId="{8ED4C85E-9940-B3B4-D13C-C579770212D7}"/>
-          </ac:picMkLst>
-        </pc:picChg>
-        <pc:picChg chg="add del mod">
-          <ac:chgData name="Read, Zoe" userId="b08cd0fd-26d2-470b-8ec0-c6e6cb2a79bd" providerId="ADAL" clId="{5AEB2719-95A5-4ED2-9E0E-ED462BB10526}" dt="2026-03-13T18:51:33.492" v="6033" actId="478"/>
-          <ac:picMkLst>
-            <pc:docMk/>
-            <pc:sldMk cId="2005456116" sldId="257"/>
-            <ac:picMk id="1131" creationId="{AD16F9B4-9CB9-F089-774F-0B07610A46B6}"/>
-          </ac:picMkLst>
-        </pc:picChg>
-        <pc:picChg chg="add del mod">
-          <ac:chgData name="Read, Zoe" userId="b08cd0fd-26d2-470b-8ec0-c6e6cb2a79bd" providerId="ADAL" clId="{5AEB2719-95A5-4ED2-9E0E-ED462BB10526}" dt="2026-03-13T18:54:09.040" v="6041" actId="478"/>
-          <ac:picMkLst>
-            <pc:docMk/>
-            <pc:sldMk cId="2005456116" sldId="257"/>
-            <ac:picMk id="1133" creationId="{B3130CC2-25A3-ED65-64F7-35DA082315FF}"/>
-          </ac:picMkLst>
-        </pc:picChg>
-        <pc:picChg chg="add del mod ord">
-          <ac:chgData name="Read, Zoe" userId="b08cd0fd-26d2-470b-8ec0-c6e6cb2a79bd" providerId="ADAL" clId="{5AEB2719-95A5-4ED2-9E0E-ED462BB10526}" dt="2026-03-13T19:59:07.956" v="6396" actId="478"/>
-          <ac:picMkLst>
-            <pc:docMk/>
-            <pc:sldMk cId="2005456116" sldId="257"/>
-            <ac:picMk id="1135" creationId="{3E27048A-DB49-B226-206B-F20819C4D439}"/>
-          </ac:picMkLst>
-        </pc:picChg>
-        <pc:picChg chg="add del mod">
-          <ac:chgData name="Read, Zoe" userId="b08cd0fd-26d2-470b-8ec0-c6e6cb2a79bd" providerId="ADAL" clId="{5AEB2719-95A5-4ED2-9E0E-ED462BB10526}" dt="2026-03-13T19:02:38.664" v="6049" actId="478"/>
-          <ac:picMkLst>
-            <pc:docMk/>
-            <pc:sldMk cId="2005456116" sldId="257"/>
-            <ac:picMk id="1137" creationId="{7DD4138F-3BA3-84BC-A0E4-C1F9CB95CCF7}"/>
-          </ac:picMkLst>
-        </pc:picChg>
-        <pc:picChg chg="add del mod">
-          <ac:chgData name="Read, Zoe" userId="b08cd0fd-26d2-470b-8ec0-c6e6cb2a79bd" providerId="ADAL" clId="{5AEB2719-95A5-4ED2-9E0E-ED462BB10526}" dt="2026-03-13T19:08:54.435" v="6056" actId="478"/>
-          <ac:picMkLst>
-            <pc:docMk/>
-            <pc:sldMk cId="2005456116" sldId="257"/>
-            <ac:picMk id="1139" creationId="{57D43B10-EF66-AE54-8719-FCB4C9F2A313}"/>
-          </ac:picMkLst>
-        </pc:picChg>
-        <pc:picChg chg="add del mod">
-          <ac:chgData name="Read, Zoe" userId="b08cd0fd-26d2-470b-8ec0-c6e6cb2a79bd" providerId="ADAL" clId="{5AEB2719-95A5-4ED2-9E0E-ED462BB10526}" dt="2026-03-13T19:18:55.396" v="6058" actId="478"/>
-          <ac:picMkLst>
-            <pc:docMk/>
-            <pc:sldMk cId="2005456116" sldId="257"/>
-            <ac:picMk id="1141" creationId="{9DDFB753-78A2-CB94-8E7A-789D9194846D}"/>
-          </ac:picMkLst>
-        </pc:picChg>
-        <pc:picChg chg="add del mod">
-          <ac:chgData name="Read, Zoe" userId="b08cd0fd-26d2-470b-8ec0-c6e6cb2a79bd" providerId="ADAL" clId="{5AEB2719-95A5-4ED2-9E0E-ED462BB10526}" dt="2026-03-13T19:19:13.900" v="6063" actId="478"/>
-          <ac:picMkLst>
-            <pc:docMk/>
-            <pc:sldMk cId="2005456116" sldId="257"/>
-            <ac:picMk id="1143" creationId="{741B156B-9832-91C1-0098-489BAF823450}"/>
-          </ac:picMkLst>
-        </pc:picChg>
-        <pc:picChg chg="add del mod">
-          <ac:chgData name="Read, Zoe" userId="b08cd0fd-26d2-470b-8ec0-c6e6cb2a79bd" providerId="ADAL" clId="{5AEB2719-95A5-4ED2-9E0E-ED462BB10526}" dt="2026-03-13T19:19:53.661" v="6068" actId="478"/>
-          <ac:picMkLst>
-            <pc:docMk/>
-            <pc:sldMk cId="2005456116" sldId="257"/>
-            <ac:picMk id="1145" creationId="{7CCB61CC-B337-A6CA-94D4-6F5ECFDB3A51}"/>
-          </ac:picMkLst>
-        </pc:picChg>
-        <pc:picChg chg="add del mod">
-          <ac:chgData name="Read, Zoe" userId="b08cd0fd-26d2-470b-8ec0-c6e6cb2a79bd" providerId="ADAL" clId="{5AEB2719-95A5-4ED2-9E0E-ED462BB10526}" dt="2026-03-13T19:20:41.748" v="6073" actId="478"/>
-          <ac:picMkLst>
-            <pc:docMk/>
-            <pc:sldMk cId="2005456116" sldId="257"/>
-            <ac:picMk id="1147" creationId="{7BE27AB1-F5AB-A571-45D7-F25FA0E5EE9E}"/>
-          </ac:picMkLst>
-        </pc:picChg>
-        <pc:picChg chg="add del mod">
-          <ac:chgData name="Read, Zoe" userId="b08cd0fd-26d2-470b-8ec0-c6e6cb2a79bd" providerId="ADAL" clId="{5AEB2719-95A5-4ED2-9E0E-ED462BB10526}" dt="2026-03-13T19:21:46.771" v="6081" actId="478"/>
-          <ac:picMkLst>
-            <pc:docMk/>
-            <pc:sldMk cId="2005456116" sldId="257"/>
-            <ac:picMk id="1149" creationId="{298943F4-4EB4-071A-5FBC-D17B04303C2C}"/>
+            <ac:picMk id="1120" creationId="{B0C5102B-10F2-E0CF-866D-ECB35E6B9A2F}"/>
           </ac:picMkLst>
         </pc:picChg>
         <pc:picChg chg="add mod ord">
-          <ac:chgData name="Read, Zoe" userId="b08cd0fd-26d2-470b-8ec0-c6e6cb2a79bd" providerId="ADAL" clId="{5AEB2719-95A5-4ED2-9E0E-ED462BB10526}" dt="2026-03-13T20:07:33.645" v="6439" actId="1038"/>
+          <ac:chgData name="Read, Zoe" userId="b08cd0fd-26d2-470b-8ec0-c6e6cb2a79bd" providerId="ADAL" clId="{5AEB2719-95A5-4ED2-9E0E-ED462BB10526}" dt="2026-03-16T11:34:52.611" v="6643" actId="1076"/>
           <ac:picMkLst>
             <pc:docMk/>
             <pc:sldMk cId="2005456116" sldId="257"/>
             <ac:picMk id="1151" creationId="{9270BAB1-911D-6871-CCA4-EC0A16BAE319}"/>
-          </ac:picMkLst>
-        </pc:picChg>
-        <pc:picChg chg="add del mod">
-          <ac:chgData name="Read, Zoe" userId="b08cd0fd-26d2-470b-8ec0-c6e6cb2a79bd" providerId="ADAL" clId="{5AEB2719-95A5-4ED2-9E0E-ED462BB10526}" dt="2026-03-13T19:59:50.117" v="6403" actId="478"/>
-          <ac:picMkLst>
-            <pc:docMk/>
-            <pc:sldMk cId="2005456116" sldId="257"/>
-            <ac:picMk id="1172" creationId="{39EE0B8F-02B0-BFBB-E24F-71F6667F34A8}"/>
-          </ac:picMkLst>
-        </pc:picChg>
-        <pc:picChg chg="add del mod">
-          <ac:chgData name="Read, Zoe" userId="b08cd0fd-26d2-470b-8ec0-c6e6cb2a79bd" providerId="ADAL" clId="{5AEB2719-95A5-4ED2-9E0E-ED462BB10526}" dt="2026-03-13T20:06:59.447" v="6429" actId="478"/>
-          <ac:picMkLst>
-            <pc:docMk/>
-            <pc:sldMk cId="2005456116" sldId="257"/>
-            <ac:picMk id="1174" creationId="{75BF8206-810D-06F7-F805-252C6EE25DD9}"/>
           </ac:picMkLst>
         </pc:picChg>
         <pc:cxnChg chg="add mod ord">
@@ -884,7 +421,7 @@
           </ac:cxnSpMkLst>
         </pc:cxnChg>
         <pc:cxnChg chg="add mod ord">
-          <ac:chgData name="Read, Zoe" userId="b08cd0fd-26d2-470b-8ec0-c6e6cb2a79bd" providerId="ADAL" clId="{5AEB2719-95A5-4ED2-9E0E-ED462BB10526}" dt="2026-03-13T20:01:30.523" v="6420" actId="1036"/>
+          <ac:chgData name="Read, Zoe" userId="b08cd0fd-26d2-470b-8ec0-c6e6cb2a79bd" providerId="ADAL" clId="{5AEB2719-95A5-4ED2-9E0E-ED462BB10526}" dt="2026-03-16T11:34:59.565" v="6645" actId="1035"/>
           <ac:cxnSpMkLst>
             <pc:docMk/>
             <pc:sldMk cId="2005456116" sldId="257"/>
@@ -892,7 +429,7 @@
           </ac:cxnSpMkLst>
         </pc:cxnChg>
         <pc:cxnChg chg="mod">
-          <ac:chgData name="Read, Zoe" userId="b08cd0fd-26d2-470b-8ec0-c6e6cb2a79bd" providerId="ADAL" clId="{5AEB2719-95A5-4ED2-9E0E-ED462BB10526}" dt="2026-03-13T19:37:13.255" v="6381" actId="1076"/>
+          <ac:chgData name="Read, Zoe" userId="b08cd0fd-26d2-470b-8ec0-c6e6cb2a79bd" providerId="ADAL" clId="{5AEB2719-95A5-4ED2-9E0E-ED462BB10526}" dt="2026-03-16T11:36:02.334" v="6657" actId="1035"/>
           <ac:cxnSpMkLst>
             <pc:docMk/>
             <pc:sldMk cId="2005456116" sldId="257"/>
@@ -900,7 +437,7 @@
           </ac:cxnSpMkLst>
         </pc:cxnChg>
         <pc:cxnChg chg="mod">
-          <ac:chgData name="Read, Zoe" userId="b08cd0fd-26d2-470b-8ec0-c6e6cb2a79bd" providerId="ADAL" clId="{5AEB2719-95A5-4ED2-9E0E-ED462BB10526}" dt="2026-03-13T15:03:37.399" v="4902" actId="1036"/>
+          <ac:chgData name="Read, Zoe" userId="b08cd0fd-26d2-470b-8ec0-c6e6cb2a79bd" providerId="ADAL" clId="{5AEB2719-95A5-4ED2-9E0E-ED462BB10526}" dt="2026-03-16T11:32:05.348" v="6629" actId="14100"/>
           <ac:cxnSpMkLst>
             <pc:docMk/>
             <pc:sldMk cId="2005456116" sldId="257"/>
@@ -913,94 +450,6 @@
             <pc:docMk/>
             <pc:sldMk cId="2005456116" sldId="257"/>
             <ac:cxnSpMk id="1044" creationId="{8463A8F4-CE87-F09A-8258-6D6979B36D80}"/>
-          </ac:cxnSpMkLst>
-        </pc:cxnChg>
-        <pc:cxnChg chg="add del mod ord">
-          <ac:chgData name="Read, Zoe" userId="b08cd0fd-26d2-470b-8ec0-c6e6cb2a79bd" providerId="ADAL" clId="{5AEB2719-95A5-4ED2-9E0E-ED462BB10526}" dt="2026-03-13T14:43:58.200" v="4435" actId="478"/>
-          <ac:cxnSpMkLst>
-            <pc:docMk/>
-            <pc:sldMk cId="2005456116" sldId="257"/>
-            <ac:cxnSpMk id="1045" creationId="{BB33F361-7DB9-04C2-C03A-778C0DF80E8F}"/>
-          </ac:cxnSpMkLst>
-        </pc:cxnChg>
-        <pc:cxnChg chg="add del mod">
-          <ac:chgData name="Read, Zoe" userId="b08cd0fd-26d2-470b-8ec0-c6e6cb2a79bd" providerId="ADAL" clId="{5AEB2719-95A5-4ED2-9E0E-ED462BB10526}" dt="2026-03-13T14:43:58.200" v="4435" actId="478"/>
-          <ac:cxnSpMkLst>
-            <pc:docMk/>
-            <pc:sldMk cId="2005456116" sldId="257"/>
-            <ac:cxnSpMk id="1047" creationId="{375CA06C-A251-4ED8-A38F-281C7D414E0B}"/>
-          </ac:cxnSpMkLst>
-        </pc:cxnChg>
-        <pc:cxnChg chg="add del mod ord">
-          <ac:chgData name="Read, Zoe" userId="b08cd0fd-26d2-470b-8ec0-c6e6cb2a79bd" providerId="ADAL" clId="{5AEB2719-95A5-4ED2-9E0E-ED462BB10526}" dt="2026-03-13T14:43:58.200" v="4435" actId="478"/>
-          <ac:cxnSpMkLst>
-            <pc:docMk/>
-            <pc:sldMk cId="2005456116" sldId="257"/>
-            <ac:cxnSpMk id="1050" creationId="{D3DAFDEE-D9E5-1D68-8EB9-E51F04AB1645}"/>
-          </ac:cxnSpMkLst>
-        </pc:cxnChg>
-        <pc:cxnChg chg="add del mod ord">
-          <ac:chgData name="Read, Zoe" userId="b08cd0fd-26d2-470b-8ec0-c6e6cb2a79bd" providerId="ADAL" clId="{5AEB2719-95A5-4ED2-9E0E-ED462BB10526}" dt="2026-03-13T14:43:58.200" v="4435" actId="478"/>
-          <ac:cxnSpMkLst>
-            <pc:docMk/>
-            <pc:sldMk cId="2005456116" sldId="257"/>
-            <ac:cxnSpMk id="1051" creationId="{F2AFA6AA-F2FA-7B6D-89B6-C18FBAE3FB74}"/>
-          </ac:cxnSpMkLst>
-        </pc:cxnChg>
-        <pc:cxnChg chg="add del mod ord">
-          <ac:chgData name="Read, Zoe" userId="b08cd0fd-26d2-470b-8ec0-c6e6cb2a79bd" providerId="ADAL" clId="{5AEB2719-95A5-4ED2-9E0E-ED462BB10526}" dt="2026-03-13T14:43:58.200" v="4435" actId="478"/>
-          <ac:cxnSpMkLst>
-            <pc:docMk/>
-            <pc:sldMk cId="2005456116" sldId="257"/>
-            <ac:cxnSpMk id="1052" creationId="{9F2A7656-0EEE-7013-0DB8-ADC5FDA2A8B2}"/>
-          </ac:cxnSpMkLst>
-        </pc:cxnChg>
-        <pc:cxnChg chg="add del mod ord">
-          <ac:chgData name="Read, Zoe" userId="b08cd0fd-26d2-470b-8ec0-c6e6cb2a79bd" providerId="ADAL" clId="{5AEB2719-95A5-4ED2-9E0E-ED462BB10526}" dt="2026-03-13T14:43:58.200" v="4435" actId="478"/>
-          <ac:cxnSpMkLst>
-            <pc:docMk/>
-            <pc:sldMk cId="2005456116" sldId="257"/>
-            <ac:cxnSpMk id="1053" creationId="{45B61E4A-833A-BA3F-9B21-F25237F7E669}"/>
-          </ac:cxnSpMkLst>
-        </pc:cxnChg>
-        <pc:cxnChg chg="add mod ord">
-          <ac:chgData name="Read, Zoe" userId="b08cd0fd-26d2-470b-8ec0-c6e6cb2a79bd" providerId="ADAL" clId="{5AEB2719-95A5-4ED2-9E0E-ED462BB10526}" dt="2026-03-12T20:12:17.256" v="3359" actId="167"/>
-          <ac:cxnSpMkLst>
-            <pc:docMk/>
-            <pc:sldMk cId="2005456116" sldId="257"/>
-            <ac:cxnSpMk id="1054" creationId="{B4545213-9D78-5A7D-F0ED-7247C7E86F0A}"/>
-          </ac:cxnSpMkLst>
-        </pc:cxnChg>
-        <pc:cxnChg chg="add del mod ord">
-          <ac:chgData name="Read, Zoe" userId="b08cd0fd-26d2-470b-8ec0-c6e6cb2a79bd" providerId="ADAL" clId="{5AEB2719-95A5-4ED2-9E0E-ED462BB10526}" dt="2026-03-13T14:43:58.200" v="4435" actId="478"/>
-          <ac:cxnSpMkLst>
-            <pc:docMk/>
-            <pc:sldMk cId="2005456116" sldId="257"/>
-            <ac:cxnSpMk id="1055" creationId="{EAF13472-2A54-A942-9989-189633D8FC45}"/>
-          </ac:cxnSpMkLst>
-        </pc:cxnChg>
-        <pc:cxnChg chg="add del mod">
-          <ac:chgData name="Read, Zoe" userId="b08cd0fd-26d2-470b-8ec0-c6e6cb2a79bd" providerId="ADAL" clId="{5AEB2719-95A5-4ED2-9E0E-ED462BB10526}" dt="2026-03-13T14:43:58.200" v="4435" actId="478"/>
-          <ac:cxnSpMkLst>
-            <pc:docMk/>
-            <pc:sldMk cId="2005456116" sldId="257"/>
-            <ac:cxnSpMk id="1056" creationId="{97023478-EBF1-C0B2-4640-43B6062C44A4}"/>
-          </ac:cxnSpMkLst>
-        </pc:cxnChg>
-        <pc:cxnChg chg="add del mod">
-          <ac:chgData name="Read, Zoe" userId="b08cd0fd-26d2-470b-8ec0-c6e6cb2a79bd" providerId="ADAL" clId="{5AEB2719-95A5-4ED2-9E0E-ED462BB10526}" dt="2026-03-13T14:43:58.200" v="4435" actId="478"/>
-          <ac:cxnSpMkLst>
-            <pc:docMk/>
-            <pc:sldMk cId="2005456116" sldId="257"/>
-            <ac:cxnSpMk id="1057" creationId="{EABAA8CD-3573-D737-5C52-07AF46DD77DB}"/>
-          </ac:cxnSpMkLst>
-        </pc:cxnChg>
-        <pc:cxnChg chg="add del mod">
-          <ac:chgData name="Read, Zoe" userId="b08cd0fd-26d2-470b-8ec0-c6e6cb2a79bd" providerId="ADAL" clId="{5AEB2719-95A5-4ED2-9E0E-ED462BB10526}" dt="2026-03-13T14:43:58.200" v="4435" actId="478"/>
-          <ac:cxnSpMkLst>
-            <pc:docMk/>
-            <pc:sldMk cId="2005456116" sldId="257"/>
-            <ac:cxnSpMk id="1058" creationId="{60C150C5-AE9C-3C24-36BA-5DE7D6481E18}"/>
           </ac:cxnSpMkLst>
         </pc:cxnChg>
         <pc:cxnChg chg="add mod">
@@ -1060,7 +509,7 @@
           </ac:cxnSpMkLst>
         </pc:cxnChg>
         <pc:cxnChg chg="add mod">
-          <ac:chgData name="Read, Zoe" userId="b08cd0fd-26d2-470b-8ec0-c6e6cb2a79bd" providerId="ADAL" clId="{5AEB2719-95A5-4ED2-9E0E-ED462BB10526}" dt="2026-03-13T20:07:33.645" v="6439" actId="1038"/>
+          <ac:chgData name="Read, Zoe" userId="b08cd0fd-26d2-470b-8ec0-c6e6cb2a79bd" providerId="ADAL" clId="{5AEB2719-95A5-4ED2-9E0E-ED462BB10526}" dt="2026-03-16T11:24:24.947" v="6504" actId="1076"/>
           <ac:cxnSpMkLst>
             <pc:docMk/>
             <pc:sldMk cId="2005456116" sldId="257"/>
@@ -1091,6 +540,26 @@
             <ac:cxnSpMk id="1169" creationId="{BC6DBC99-57E5-A3C2-FA3D-D7BF95FDBC1C}"/>
           </ac:cxnSpMkLst>
         </pc:cxnChg>
+        <pc:extLst>
+          <p:ext xmlns:p="http://schemas.openxmlformats.org/presentationml/2006/main" uri="{D6D511B9-2390-475A-947B-AFAB55BFBCF1}">
+            <pc226:cmChg xmlns:pc226="http://schemas.microsoft.com/office/powerpoint/2022/06/main/command" chg="mod">
+              <pc226:chgData name="Read, Zoe" userId="b08cd0fd-26d2-470b-8ec0-c6e6cb2a79bd" providerId="ADAL" clId="{5AEB2719-95A5-4ED2-9E0E-ED462BB10526}" dt="2026-03-16T11:31:50.114" v="6626" actId="20577"/>
+              <pc2:cmMkLst xmlns:pc2="http://schemas.microsoft.com/office/powerpoint/2019/9/main/command">
+                <pc:docMk/>
+                <pc:sldMk cId="2005456116" sldId="257"/>
+                <pc2:cmMk id="{C2D71113-D824-4EA1-8346-E7FF9B9C44E2}"/>
+              </pc2:cmMkLst>
+            </pc226:cmChg>
+            <pc226:cmChg xmlns:pc226="http://schemas.microsoft.com/office/powerpoint/2022/06/main/command" chg="mod">
+              <pc226:chgData name="Read, Zoe" userId="b08cd0fd-26d2-470b-8ec0-c6e6cb2a79bd" providerId="ADAL" clId="{5AEB2719-95A5-4ED2-9E0E-ED462BB10526}" dt="2026-03-16T11:24:14.970" v="6501" actId="20577"/>
+              <pc2:cmMkLst xmlns:pc2="http://schemas.microsoft.com/office/powerpoint/2019/9/main/command">
+                <pc:docMk/>
+                <pc:sldMk cId="2005456116" sldId="257"/>
+                <pc2:cmMk id="{597E5C60-A8AD-485E-8A84-796A7E2CF6A3}"/>
+              </pc2:cmMkLst>
+            </pc226:cmChg>
+          </p:ext>
+        </pc:extLst>
       </pc:sldChg>
       <pc:sldChg chg="add del">
         <pc:chgData name="Read, Zoe" userId="b08cd0fd-26d2-470b-8ec0-c6e6cb2a79bd" providerId="ADAL" clId="{5AEB2719-95A5-4ED2-9E0E-ED462BB10526}" dt="2026-03-12T20:18:17.564" v="3533"/>
@@ -1130,36 +599,23 @@
 
 <file path=ppt/comments/modernComment_101_7788D4F4.xml><?xml version="1.0" encoding="utf-8"?>
 <p188:cmLst xmlns:a="http://schemas.openxmlformats.org/drawingml/2006/main" xmlns:r="http://schemas.openxmlformats.org/officeDocument/2006/relationships" xmlns:p188="http://schemas.microsoft.com/office/powerpoint/2018/8/main">
-  <p188:cm id="{B8A07343-8EBD-4063-9515-C0EDE7CA19F0}" authorId="{50137B73-C207-1407-898B-797CE70D2312}" created="2026-03-13T14:20:44.092">
-    <ac:deMkLst xmlns:ac="http://schemas.microsoft.com/office/drawing/2013/main/command">
+  <p188:cm id="{597E5C60-A8AD-485E-8A84-796A7E2CF6A3}" authorId="{231D7B86-FC17-2341-A59E-74856DBD8393}" status="resolved" created="2026-03-13T21:58:16.626" complete="100000">
+    <ac:txMkLst xmlns:ac="http://schemas.microsoft.com/office/drawing/2013/main/command">
       <pc:docMk xmlns:pc="http://schemas.microsoft.com/office/powerpoint/2013/main/command"/>
       <pc:sldMk xmlns:pc="http://schemas.microsoft.com/office/powerpoint/2013/main/command" cId="2005456116" sldId="257"/>
-      <ac:picMk id="9" creationId="{09EDF015-AC84-7DA3-BD5A-225267C491D7}"/>
-    </ac:deMkLst>
+      <ac:spMk id="1046" creationId="{3D22E29A-542C-2707-EE87-D32E923FD26A}"/>
+      <ac:txMk cp="339" len="10">
+        <ac:context len="445" hash="2235153434"/>
+      </ac:txMk>
+    </ac:txMkLst>
+    <p188:pos x="13446686" y="1916171"/>
     <p188:txBody>
       <a:bodyPr/>
       <a:lstStyle/>
       <a:p>
         <a:r>
           <a:rPr lang="en-US"/>
-          <a:t>Print the anova table into a csv for Steph to look at</a:t>
-        </a:r>
-      </a:p>
-    </p188:txBody>
-  </p188:cm>
-  <p188:cm id="{F7D370C0-1A77-42D9-8499-1F9C74E5F229}" authorId="{50137B73-C207-1407-898B-797CE70D2312}" created="2026-03-13T16:00:05.398">
-    <ac:deMkLst xmlns:ac="http://schemas.microsoft.com/office/drawing/2013/main/command">
-      <pc:docMk xmlns:pc="http://schemas.microsoft.com/office/powerpoint/2013/main/command"/>
-      <pc:sldMk xmlns:pc="http://schemas.microsoft.com/office/powerpoint/2013/main/command" cId="2005456116" sldId="257"/>
-      <ac:picMk id="1104" creationId="{BB487FD2-0D02-18A0-8E65-73832FF97000}"/>
-    </ac:deMkLst>
-    <p188:txBody>
-      <a:bodyPr/>
-      <a:lstStyle/>
-      <a:p>
-        <a:r>
-          <a:rPr lang="en-US"/>
-          <a:t>I should try to add the values and units to the x-axes of these graphs</a:t>
+          <a:t>Not necessary for now, but we might plot this same graph of the 0cm  /SW samples and see if they follow the same pattern - it might be that the surface water salinity drives the sulfate concentrations? </a:t>
         </a:r>
       </a:p>
     </p188:txBody>
@@ -1249,7 +705,7 @@
           <a:p>
             <a:fld id="{0407BD97-90D8-3541-9414-B17D17D02539}" type="datetimeFigureOut">
               <a:rPr lang="en-US" smtClean="0"/>
-              <a:t>3/13/2026</a:t>
+              <a:t>3/16/2026</a:t>
             </a:fld>
             <a:endParaRPr lang="en-US"/>
           </a:p>
@@ -2817,10 +2273,10 @@
       </p:grpSpPr>
       <p:pic>
         <p:nvPicPr>
-          <p:cNvPr id="6" name="Picture 5" descr="A chart of different colored boxes&#10;&#10;AI-generated content may be incorrect.">
+          <p:cNvPr id="11" name="Picture 10" descr="A chart of different colored boxes&#10;&#10;AI-generated content may be incorrect.">
             <a:extLst>
               <a:ext uri="{FF2B5EF4-FFF2-40B4-BE49-F238E27FC236}">
-                <a16:creationId xmlns:a16="http://schemas.microsoft.com/office/drawing/2014/main" id="{65D6C5CC-18B1-CDA4-E731-06FAAFE46261}"/>
+                <a16:creationId xmlns:a16="http://schemas.microsoft.com/office/drawing/2014/main" id="{DA28F95C-2111-E10A-4CC1-C069E3C51045}"/>
               </a:ext>
             </a:extLst>
           </p:cNvPr>
@@ -2843,7 +2299,7 @@
         </p:blipFill>
         <p:spPr>
           <a:xfrm>
-            <a:off x="501300" y="18455481"/>
+            <a:off x="674775" y="18453596"/>
             <a:ext cx="16459233" cy="6400813"/>
           </a:xfrm>
           <a:prstGeom prst="rect">
@@ -2879,7 +2335,7 @@
         </p:blipFill>
         <p:spPr>
           <a:xfrm>
-            <a:off x="17525966" y="19484222"/>
+            <a:off x="17579959" y="19446061"/>
             <a:ext cx="16916434" cy="10058420"/>
           </a:xfrm>
           <a:prstGeom prst="rect">
@@ -2903,7 +2359,7 @@
         </p:nvCxnSpPr>
         <p:spPr>
           <a:xfrm>
-            <a:off x="18166504" y="29504481"/>
+            <a:off x="18166504" y="29352081"/>
             <a:ext cx="15770805" cy="0"/>
           </a:xfrm>
           <a:prstGeom prst="line">
@@ -3015,7 +2471,7 @@
             </a:r>
             <a:r>
               <a:rPr lang="en-US" sz="3600" dirty="0"/>
-              <a:t>Pacific Northwest National Laboratory</a:t>
+              <a:t>Joint Global Change Research Institute, PNNL, Maryland, USA</a:t>
             </a:r>
           </a:p>
         </p:txBody>
@@ -3221,21 +2677,7 @@
                 <a:latin typeface="Arial" panose="020B0604020202020204" pitchFamily="34" charset="0"/>
                 <a:cs typeface="Arial" panose="020B0604020202020204" pitchFamily="34" charset="0"/>
               </a:rPr>
-              <a:t>that are oligohaline, mesohaline, and </a:t>
-            </a:r>
-            <a:r>
-              <a:rPr lang="en-US" sz="2800" dirty="0" err="1">
-                <a:latin typeface="Arial" panose="020B0604020202020204" pitchFamily="34" charset="0"/>
-                <a:cs typeface="Arial" panose="020B0604020202020204" pitchFamily="34" charset="0"/>
-              </a:rPr>
-              <a:t>polyhaline</a:t>
-            </a:r>
-            <a:r>
-              <a:rPr lang="en-US" sz="2800" dirty="0">
-                <a:latin typeface="Arial" panose="020B0604020202020204" pitchFamily="34" charset="0"/>
-                <a:cs typeface="Arial" panose="020B0604020202020204" pitchFamily="34" charset="0"/>
-              </a:rPr>
-              <a:t> </a:t>
+              <a:t>that are oligohaline, mesohaline, and polyhaline </a:t>
             </a:r>
           </a:p>
           <a:p>
@@ -3391,7 +2833,7 @@
         </p:nvCxnSpPr>
         <p:spPr>
           <a:xfrm>
-            <a:off x="18036412" y="16550481"/>
+            <a:off x="18036412" y="16093281"/>
             <a:ext cx="15862150" cy="0"/>
           </a:xfrm>
           <a:prstGeom prst="line">
@@ -3435,7 +2877,7 @@
         <p:spPr>
           <a:xfrm>
             <a:off x="17385664" y="5073039"/>
-            <a:ext cx="0" cy="26641242"/>
+            <a:ext cx="0" cy="27479442"/>
           </a:xfrm>
           <a:prstGeom prst="line">
             <a:avLst/>
@@ -3520,8 +2962,8 @@
         </p:nvSpPr>
         <p:spPr>
           <a:xfrm>
-            <a:off x="18156261" y="16660587"/>
-            <a:ext cx="15095898" cy="2097650"/>
+            <a:off x="18156261" y="16203386"/>
+            <a:ext cx="15862150" cy="3157193"/>
           </a:xfrm>
           <a:prstGeom prst="rect">
             <a:avLst/>
@@ -3676,7 +3118,7 @@
                   <a:srgbClr val="75BFE2"/>
                 </a:solidFill>
               </a:rPr>
-              <a:t>Seasonal variation</a:t>
+              <a:t>Seasonal variation in transitioning forests</a:t>
             </a:r>
             <a:r>
               <a:rPr lang="en-US" sz="3600" b="1" dirty="0"/>
@@ -3690,7 +3132,27 @@
             </a:pPr>
             <a:r>
               <a:rPr lang="en-US" sz="2800" dirty="0"/>
-              <a:t>Sulfate tends to increase throughout each year, especially in the fall, and decrease at the start of a new year. This could be because sulfate-reducing microbes are less active as temperatures decrease at the end of each year. </a:t>
+              <a:t>SO</a:t>
+            </a:r>
+            <a:r>
+              <a:rPr lang="en-US" sz="2800" baseline="-25000" dirty="0"/>
+              <a:t>4</a:t>
+            </a:r>
+            <a:r>
+              <a:rPr lang="en-US" sz="2800" baseline="30000" dirty="0"/>
+              <a:t>2-</a:t>
+            </a:r>
+            <a:r>
+              <a:rPr lang="en-US" sz="2800" dirty="0"/>
+              <a:t> tends to increase throughout each year, especially in the fall, and decrease at the start of a new year. This could be because sulfate-reducing microbes are less active as temperatures decrease at the end of each year, or this could be related to changes in precipitation or </a:t>
+            </a:r>
+            <a:r>
+              <a:rPr lang="en-US" sz="2800" dirty="0" err="1"/>
+              <a:t>surfacewater</a:t>
+            </a:r>
+            <a:r>
+              <a:rPr lang="en-US" sz="2800" dirty="0"/>
+              <a:t> salinities throughout the year. </a:t>
             </a:r>
           </a:p>
           <a:p>
@@ -3700,7 +3162,19 @@
             </a:pPr>
             <a:r>
               <a:rPr lang="en-US" sz="2800" dirty="0"/>
-              <a:t>Sulfate appears to be increasing over time at the </a:t>
+              <a:t>SO</a:t>
+            </a:r>
+            <a:r>
+              <a:rPr lang="en-US" sz="2800" baseline="-25000" dirty="0"/>
+              <a:t>4</a:t>
+            </a:r>
+            <a:r>
+              <a:rPr lang="en-US" sz="2800" baseline="30000" dirty="0"/>
+              <a:t>2-</a:t>
+            </a:r>
+            <a:r>
+              <a:rPr lang="en-US" sz="2800" dirty="0"/>
+              <a:t> appears to be increasing over time at the </a:t>
             </a:r>
             <a:r>
               <a:rPr lang="en-US" sz="2800" dirty="0" err="1"/>
@@ -5614,8 +5088,8 @@
         </p:nvSpPr>
         <p:spPr>
           <a:xfrm>
-            <a:off x="18166504" y="29641484"/>
-            <a:ext cx="15894896" cy="3358873"/>
+            <a:off x="18166503" y="29489084"/>
+            <a:ext cx="16275887" cy="3358873"/>
           </a:xfrm>
           <a:prstGeom prst="rect">
             <a:avLst/>
@@ -5781,19 +5255,19 @@
             </a:pPr>
             <a:r>
               <a:rPr lang="en-US" sz="2800" dirty="0"/>
-              <a:t>Sulfate, a redox-sensitive element, varies across depth and seasonally, although this effect differs across the </a:t>
-            </a:r>
-            <a:r>
-              <a:rPr lang="en-US" sz="2800" dirty="0">
-                <a:solidFill>
-                  <a:srgbClr val="000000"/>
-                </a:solidFill>
-              </a:rPr>
-              <a:t>coastal terrestrial aquatic interface</a:t>
+              <a:t>SO</a:t>
+            </a:r>
+            <a:r>
+              <a:rPr lang="en-US" sz="2800" baseline="-25000" dirty="0"/>
+              <a:t>4</a:t>
+            </a:r>
+            <a:r>
+              <a:rPr lang="en-US" sz="2800" baseline="30000" dirty="0"/>
+              <a:t>2-</a:t>
             </a:r>
             <a:r>
               <a:rPr lang="en-US" sz="2800" dirty="0"/>
-              <a:t>. </a:t>
+              <a:t>, a redox-sensitive element, varies across depth and season, although this effect differs across different sites in the Chesapeake Bay as well as across zones in the coastal terrestrial aquatic interface. </a:t>
             </a:r>
           </a:p>
           <a:p>
@@ -5803,7 +5277,19 @@
             </a:pPr>
             <a:r>
               <a:rPr lang="en-US" sz="2800" dirty="0"/>
-              <a:t>Sulfate was positively correlated with indicators of soil saturation. </a:t>
+              <a:t>SO</a:t>
+            </a:r>
+            <a:r>
+              <a:rPr lang="en-US" sz="2800" baseline="-25000" dirty="0"/>
+              <a:t>4</a:t>
+            </a:r>
+            <a:r>
+              <a:rPr lang="en-US" sz="2800" baseline="30000" dirty="0"/>
+              <a:t>2-</a:t>
+            </a:r>
+            <a:r>
+              <a:rPr lang="en-US" sz="2800" dirty="0"/>
+              <a:t> was positively correlated with indicators of soil saturation. </a:t>
             </a:r>
           </a:p>
           <a:p>
@@ -5813,7 +5299,31 @@
             </a:pPr>
             <a:r>
               <a:rPr lang="en-US" sz="2800" dirty="0"/>
-              <a:t>In the future, we can examine the sulfate-depth relationship to determine if there are patterns that explain its variability across sites and zones. </a:t>
+              <a:t>In the future, we can examine the SO</a:t>
+            </a:r>
+            <a:r>
+              <a:rPr lang="en-US" sz="2800" baseline="-25000" dirty="0"/>
+              <a:t>4</a:t>
+            </a:r>
+            <a:r>
+              <a:rPr lang="en-US" sz="2800" baseline="30000" dirty="0"/>
+              <a:t>2-</a:t>
+            </a:r>
+            <a:r>
+              <a:rPr lang="en-US" sz="2800" dirty="0"/>
+              <a:t> – depth relationship and surface water SO</a:t>
+            </a:r>
+            <a:r>
+              <a:rPr lang="en-US" sz="2800" baseline="-25000" dirty="0"/>
+              <a:t>4</a:t>
+            </a:r>
+            <a:r>
+              <a:rPr lang="en-US" sz="2800" baseline="30000" dirty="0"/>
+              <a:t>2-</a:t>
+            </a:r>
+            <a:r>
+              <a:rPr lang="en-US" sz="2800" dirty="0"/>
+              <a:t> patterns to determine if there are patterns that explain its variability across sites and zones. </a:t>
             </a:r>
           </a:p>
         </p:txBody>
@@ -6012,7 +5522,11 @@
             </a:r>
             <a:r>
               <a:rPr lang="en-US" sz="2800" dirty="0"/>
-              <a:t>) in 2,293 samples</a:t>
+              <a:t>, n=2,293) </a:t>
+            </a:r>
+            <a:r>
+              <a:rPr lang="en-US" sz="2800" strike="sngStrike" dirty="0"/>
+              <a:t>in 2,293 samples</a:t>
             </a:r>
           </a:p>
           <a:p>
@@ -6022,7 +5536,19 @@
             </a:pPr>
             <a:r>
               <a:rPr lang="en-US" sz="2800" dirty="0"/>
-              <a:t>Sulfate increased from upland forest through transition zones to the wetland</a:t>
+              <a:t>Across sites SO</a:t>
+            </a:r>
+            <a:r>
+              <a:rPr lang="en-US" sz="2800" baseline="-25000" dirty="0"/>
+              <a:t>4</a:t>
+            </a:r>
+            <a:r>
+              <a:rPr lang="en-US" sz="2800" baseline="30000" dirty="0"/>
+              <a:t>2-</a:t>
+            </a:r>
+            <a:r>
+              <a:rPr lang="en-US" sz="2800" dirty="0"/>
+              <a:t> increased from upland forest through transition zones to the wetland </a:t>
             </a:r>
           </a:p>
           <a:p>
@@ -6032,23 +5558,19 @@
             </a:pPr>
             <a:r>
               <a:rPr lang="en-US" sz="2800" dirty="0"/>
-              <a:t>Sulfate also increased from </a:t>
-            </a:r>
-            <a:r>
-              <a:rPr lang="en-US" sz="2800" dirty="0" err="1"/>
-              <a:t>Sweethall</a:t>
+              <a:t>SO</a:t>
+            </a:r>
+            <a:r>
+              <a:rPr lang="en-US" sz="2800" baseline="-25000" dirty="0"/>
+              <a:t>4</a:t>
+            </a:r>
+            <a:r>
+              <a:rPr lang="en-US" sz="2800" baseline="30000" dirty="0"/>
+              <a:t>2-</a:t>
             </a:r>
             <a:r>
               <a:rPr lang="en-US" sz="2800" dirty="0"/>
-              <a:t> site (oligohaline) to Goodwin Islands site (</a:t>
-            </a:r>
-            <a:r>
-              <a:rPr lang="en-US" sz="2800" dirty="0" err="1"/>
-              <a:t>polyhaline</a:t>
-            </a:r>
-            <a:r>
-              <a:rPr lang="en-US" sz="2800" dirty="0"/>
-              <a:t>). </a:t>
+              <a:t> also increased from Sweet Hall site (oligohaline) to Goodwin Islands site (polyhaline). </a:t>
             </a:r>
           </a:p>
           <a:p>
@@ -6058,7 +5580,19 @@
             </a:pPr>
             <a:r>
               <a:rPr lang="en-US" sz="2800" dirty="0"/>
-              <a:t>Surface water was a source of sulfate into these ecosystems. </a:t>
+              <a:t>Surface water serves as a source of SO</a:t>
+            </a:r>
+            <a:r>
+              <a:rPr lang="en-US" sz="2800" baseline="-25000" dirty="0"/>
+              <a:t>4</a:t>
+            </a:r>
+            <a:r>
+              <a:rPr lang="en-US" sz="2800" baseline="30000" dirty="0"/>
+              <a:t>2-</a:t>
+            </a:r>
+            <a:r>
+              <a:rPr lang="en-US" sz="2800" dirty="0"/>
+              <a:t> into these ecosystems. </a:t>
             </a:r>
           </a:p>
           <a:p>
@@ -6260,7 +5794,19 @@
             </a:pPr>
             <a:r>
               <a:rPr lang="en-US" sz="2800" dirty="0"/>
-              <a:t>Sulfate increases with increasing groundwater salinity, groundwater water level, soil electrical conductivity, and soil volumetric water content. </a:t>
+              <a:t>SO</a:t>
+            </a:r>
+            <a:r>
+              <a:rPr lang="en-US" sz="2800" baseline="-25000" dirty="0"/>
+              <a:t>4</a:t>
+            </a:r>
+            <a:r>
+              <a:rPr lang="en-US" sz="2800" baseline="30000" dirty="0"/>
+              <a:t>2-</a:t>
+            </a:r>
+            <a:r>
+              <a:rPr lang="en-US" sz="2800" dirty="0"/>
+              <a:t> increases with increasing groundwater salinity, groundwater water level, soil electrical conductivity, and soil volumetric water content. </a:t>
             </a:r>
           </a:p>
           <a:p>
@@ -6291,8 +5837,8 @@
         </p:nvSpPr>
         <p:spPr>
           <a:xfrm>
-            <a:off x="888614" y="24794643"/>
-            <a:ext cx="15095898" cy="2423838"/>
+            <a:off x="888613" y="24794643"/>
+            <a:ext cx="15418179" cy="2423838"/>
           </a:xfrm>
           <a:prstGeom prst="rect">
             <a:avLst/>
@@ -6470,11 +6016,23 @@
               <a:buChar char="•"/>
             </a:pPr>
             <a:r>
+              <a:rPr lang="en-US" sz="2800" dirty="0"/>
+              <a:t>SO</a:t>
+            </a:r>
+            <a:r>
+              <a:rPr lang="en-US" sz="2800" baseline="-25000" dirty="0"/>
+              <a:t>4</a:t>
+            </a:r>
+            <a:r>
+              <a:rPr lang="en-US" sz="2800" baseline="30000" dirty="0"/>
+              <a:t>2-</a:t>
+            </a:r>
+            <a:r>
               <a:rPr lang="en-US" sz="2800" dirty="0">
                 <a:latin typeface="Arial" panose="020B0604020202020204" pitchFamily="34" charset="0"/>
                 <a:cs typeface="Arial" panose="020B0604020202020204" pitchFamily="34" charset="0"/>
               </a:rPr>
-              <a:t>Sulfate concentration changes by depth, but this effect differs across site and zone. </a:t>
+              <a:t> concentration changes by depth, but the depth pattern differs across site and zone. </a:t>
             </a:r>
             <a:endParaRPr lang="en-US" sz="2800" dirty="0"/>
           </a:p>
@@ -6523,42 +6081,6 @@
           </a:fontRef>
         </p:style>
       </p:cxnSp>
-      <p:pic>
-        <p:nvPicPr>
-          <p:cNvPr id="1085" name="Picture 1084" descr="A graph of different colored lines&#10;&#10;AI-generated content may be incorrect.">
-            <a:extLst>
-              <a:ext uri="{FF2B5EF4-FFF2-40B4-BE49-F238E27FC236}">
-                <a16:creationId xmlns:a16="http://schemas.microsoft.com/office/drawing/2014/main" id="{9E2D53CD-2078-3011-EB8F-F1979C9B3B22}"/>
-              </a:ext>
-            </a:extLst>
-          </p:cNvPr>
-          <p:cNvPicPr>
-            <a:picLocks noChangeAspect="1"/>
-          </p:cNvPicPr>
-          <p:nvPr/>
-        </p:nvPicPr>
-        <p:blipFill>
-          <a:blip r:embed="rId8">
-            <a:extLst>
-              <a:ext uri="{28A0092B-C50C-407E-A947-70E740481C1C}">
-                <a14:useLocalDpi xmlns:a14="http://schemas.microsoft.com/office/drawing/2010/main" val="0"/>
-              </a:ext>
-            </a:extLst>
-          </a:blip>
-          <a:stretch>
-            <a:fillRect/>
-          </a:stretch>
-        </p:blipFill>
-        <p:spPr>
-          <a:xfrm>
-            <a:off x="778559" y="26620977"/>
-            <a:ext cx="16459233" cy="5029210"/>
-          </a:xfrm>
-          <a:prstGeom prst="rect">
-            <a:avLst/>
-          </a:prstGeom>
-        </p:spPr>
-      </p:pic>
       <p:cxnSp>
         <p:nvCxnSpPr>
           <p:cNvPr id="1153" name="Straight Connector 1152">
@@ -7045,10 +6567,46 @@
       </p:cxnSp>
       <p:pic>
         <p:nvPicPr>
-          <p:cNvPr id="9" name="Picture 8" descr="A graph of different types of water levels&#10;&#10;AI-generated content may be incorrect.">
+          <p:cNvPr id="22" name="Picture 21" descr="A graph of different colored lines&#10;&#10;AI-generated content may be incorrect.">
             <a:extLst>
               <a:ext uri="{FF2B5EF4-FFF2-40B4-BE49-F238E27FC236}">
-                <a16:creationId xmlns:a16="http://schemas.microsoft.com/office/drawing/2014/main" id="{85DA710A-FE9C-9F98-B2EB-359901B6FE67}"/>
+                <a16:creationId xmlns:a16="http://schemas.microsoft.com/office/drawing/2014/main" id="{00462A3D-D24C-025E-9B9B-C8F9481AB05B}"/>
+              </a:ext>
+            </a:extLst>
+          </p:cNvPr>
+          <p:cNvPicPr>
+            <a:picLocks noChangeAspect="1"/>
+          </p:cNvPicPr>
+          <p:nvPr/>
+        </p:nvPicPr>
+        <p:blipFill>
+          <a:blip r:embed="rId8">
+            <a:extLst>
+              <a:ext uri="{28A0092B-C50C-407E-A947-70E740481C1C}">
+                <a14:useLocalDpi xmlns:a14="http://schemas.microsoft.com/office/drawing/2010/main" val="0"/>
+              </a:ext>
+            </a:extLst>
+          </a:blip>
+          <a:stretch>
+            <a:fillRect/>
+          </a:stretch>
+        </p:blipFill>
+        <p:spPr>
+          <a:xfrm>
+            <a:off x="561642" y="26684825"/>
+            <a:ext cx="16459233" cy="5029210"/>
+          </a:xfrm>
+          <a:prstGeom prst="rect">
+            <a:avLst/>
+          </a:prstGeom>
+        </p:spPr>
+      </p:pic>
+      <p:pic>
+        <p:nvPicPr>
+          <p:cNvPr id="1120" name="Picture 1119" descr="A graph of different types of water levels&#10;&#10;AI-generated content may be incorrect.">
+            <a:extLst>
+              <a:ext uri="{FF2B5EF4-FFF2-40B4-BE49-F238E27FC236}">
+                <a16:creationId xmlns:a16="http://schemas.microsoft.com/office/drawing/2014/main" id="{B0C5102B-10F2-E0CF-866D-ECB35E6B9A2F}"/>
               </a:ext>
             </a:extLst>
           </p:cNvPr>
@@ -7071,8 +6629,8 @@
         </p:blipFill>
         <p:spPr>
           <a:xfrm>
-            <a:off x="17737870" y="8163823"/>
-            <a:ext cx="16459233" cy="8229616"/>
+            <a:off x="17778325" y="8099895"/>
+            <a:ext cx="16459233" cy="7772415"/>
           </a:xfrm>
           <a:prstGeom prst="rect">
             <a:avLst/>

--- a/ReadZ_GCReW_Symposium_Poster_2026.pptx
+++ b/ReadZ_GCReW_Symposium_Poster_2026.pptx
@@ -136,7 +136,7 @@
 <file path=ppt/revisionInfo.xml><?xml version="1.0" encoding="utf-8"?>
 <p1510:revInfo xmlns:a="http://schemas.openxmlformats.org/drawingml/2006/main" xmlns:r="http://schemas.openxmlformats.org/officeDocument/2006/relationships" xmlns:p1510="http://schemas.microsoft.com/office/powerpoint/2015/10/main">
   <p1510:revLst>
-    <p1510:client id="{43AB8F2F-7ED7-4FE6-9983-ECD9988C75B8}" v="6" dt="2026-03-16T11:35:47.524"/>
+    <p1510:client id="{43AB8F2F-7ED7-4FE6-9983-ECD9988C75B8}" v="15" dt="2026-03-23T13:17:30.714"/>
   </p1510:revLst>
 </p1510:revInfo>
 </file>
@@ -146,12 +146,12 @@
   <pc:docChgLst>
     <pc:chgData name="Read, Zoe" userId="b08cd0fd-26d2-470b-8ec0-c6e6cb2a79bd" providerId="ADAL" clId="{5AEB2719-95A5-4ED2-9E0E-ED462BB10526}"/>
     <pc:docChg chg="undo custSel addSld delSld modSld modMainMaster">
-      <pc:chgData name="Read, Zoe" userId="b08cd0fd-26d2-470b-8ec0-c6e6cb2a79bd" providerId="ADAL" clId="{5AEB2719-95A5-4ED2-9E0E-ED462BB10526}" dt="2026-03-16T11:36:02.334" v="6657" actId="1035"/>
+      <pc:chgData name="Read, Zoe" userId="b08cd0fd-26d2-470b-8ec0-c6e6cb2a79bd" providerId="ADAL" clId="{5AEB2719-95A5-4ED2-9E0E-ED462BB10526}" dt="2026-03-23T13:24:28.163" v="6786" actId="1076"/>
       <pc:docMkLst>
         <pc:docMk/>
       </pc:docMkLst>
       <pc:sldChg chg="addSp delSp modSp mod modCm modNotesTx">
-        <pc:chgData name="Read, Zoe" userId="b08cd0fd-26d2-470b-8ec0-c6e6cb2a79bd" providerId="ADAL" clId="{5AEB2719-95A5-4ED2-9E0E-ED462BB10526}" dt="2026-03-16T11:36:02.334" v="6657" actId="1035"/>
+        <pc:chgData name="Read, Zoe" userId="b08cd0fd-26d2-470b-8ec0-c6e6cb2a79bd" providerId="ADAL" clId="{5AEB2719-95A5-4ED2-9E0E-ED462BB10526}" dt="2026-03-23T13:24:28.163" v="6786" actId="1076"/>
         <pc:sldMkLst>
           <pc:docMk/>
           <pc:sldMk cId="2005456116" sldId="257"/>
@@ -165,7 +165,7 @@
           </ac:spMkLst>
         </pc:spChg>
         <pc:spChg chg="mod">
-          <ac:chgData name="Read, Zoe" userId="b08cd0fd-26d2-470b-8ec0-c6e6cb2a79bd" providerId="ADAL" clId="{5AEB2719-95A5-4ED2-9E0E-ED462BB10526}" dt="2026-03-16T11:22:42.938" v="6443" actId="20577"/>
+          <ac:chgData name="Read, Zoe" userId="b08cd0fd-26d2-470b-8ec0-c6e6cb2a79bd" providerId="ADAL" clId="{5AEB2719-95A5-4ED2-9E0E-ED462BB10526}" dt="2026-03-23T13:13:29.329" v="6667"/>
           <ac:spMkLst>
             <pc:docMk/>
             <pc:sldMk cId="2005456116" sldId="257"/>
@@ -181,7 +181,7 @@
           </ac:spMkLst>
         </pc:spChg>
         <pc:spChg chg="add mod ord">
-          <ac:chgData name="Read, Zoe" userId="b08cd0fd-26d2-470b-8ec0-c6e6cb2a79bd" providerId="ADAL" clId="{5AEB2719-95A5-4ED2-9E0E-ED462BB10526}" dt="2026-03-16T11:23:15.018" v="6445" actId="207"/>
+          <ac:chgData name="Read, Zoe" userId="b08cd0fd-26d2-470b-8ec0-c6e6cb2a79bd" providerId="ADAL" clId="{5AEB2719-95A5-4ED2-9E0E-ED462BB10526}" dt="2026-03-23T13:23:07.185" v="6778" actId="20577"/>
           <ac:spMkLst>
             <pc:docMk/>
             <pc:sldMk cId="2005456116" sldId="257"/>
@@ -189,7 +189,7 @@
           </ac:spMkLst>
         </pc:spChg>
         <pc:spChg chg="mod">
-          <ac:chgData name="Read, Zoe" userId="b08cd0fd-26d2-470b-8ec0-c6e6cb2a79bd" providerId="ADAL" clId="{5AEB2719-95A5-4ED2-9E0E-ED462BB10526}" dt="2026-03-13T15:56:17.329" v="5363" actId="1036"/>
+          <ac:chgData name="Read, Zoe" userId="b08cd0fd-26d2-470b-8ec0-c6e6cb2a79bd" providerId="ADAL" clId="{5AEB2719-95A5-4ED2-9E0E-ED462BB10526}" dt="2026-03-23T13:15:54.586" v="6724" actId="20577"/>
           <ac:spMkLst>
             <pc:docMk/>
             <pc:sldMk cId="2005456116" sldId="257"/>
@@ -285,7 +285,7 @@
           </ac:spMkLst>
         </pc:spChg>
         <pc:spChg chg="mod">
-          <ac:chgData name="Read, Zoe" userId="b08cd0fd-26d2-470b-8ec0-c6e6cb2a79bd" providerId="ADAL" clId="{5AEB2719-95A5-4ED2-9E0E-ED462BB10526}" dt="2026-03-13T15:50:15.459" v="5087" actId="1036"/>
+          <ac:chgData name="Read, Zoe" userId="b08cd0fd-26d2-470b-8ec0-c6e6cb2a79bd" providerId="ADAL" clId="{5AEB2719-95A5-4ED2-9E0E-ED462BB10526}" dt="2026-03-23T13:24:28.163" v="6786" actId="1076"/>
           <ac:spMkLst>
             <pc:docMk/>
             <pc:sldMk cId="2005456116" sldId="257"/>
@@ -293,7 +293,7 @@
           </ac:spMkLst>
         </pc:spChg>
         <pc:spChg chg="add mod">
-          <ac:chgData name="Read, Zoe" userId="b08cd0fd-26d2-470b-8ec0-c6e6cb2a79bd" providerId="ADAL" clId="{5AEB2719-95A5-4ED2-9E0E-ED462BB10526}" dt="2026-03-16T11:34:59.565" v="6645" actId="1035"/>
+          <ac:chgData name="Read, Zoe" userId="b08cd0fd-26d2-470b-8ec0-c6e6cb2a79bd" providerId="ADAL" clId="{5AEB2719-95A5-4ED2-9E0E-ED462BB10526}" dt="2026-03-23T13:22:18.367" v="6776" actId="20577"/>
           <ac:spMkLst>
             <pc:docMk/>
             <pc:sldMk cId="2005456116" sldId="257"/>
@@ -301,7 +301,7 @@
           </ac:spMkLst>
         </pc:spChg>
         <pc:spChg chg="add mod">
-          <ac:chgData name="Read, Zoe" userId="b08cd0fd-26d2-470b-8ec0-c6e6cb2a79bd" providerId="ADAL" clId="{5AEB2719-95A5-4ED2-9E0E-ED462BB10526}" dt="2026-03-16T11:23:07.849" v="6444" actId="207"/>
+          <ac:chgData name="Read, Zoe" userId="b08cd0fd-26d2-470b-8ec0-c6e6cb2a79bd" providerId="ADAL" clId="{5AEB2719-95A5-4ED2-9E0E-ED462BB10526}" dt="2026-03-23T13:17:01.169" v="6730" actId="20577"/>
           <ac:spMkLst>
             <pc:docMk/>
             <pc:sldMk cId="2005456116" sldId="257"/>
@@ -309,7 +309,7 @@
           </ac:spMkLst>
         </pc:spChg>
         <pc:spChg chg="add mod">
-          <ac:chgData name="Read, Zoe" userId="b08cd0fd-26d2-470b-8ec0-c6e6cb2a79bd" providerId="ADAL" clId="{5AEB2719-95A5-4ED2-9E0E-ED462BB10526}" dt="2026-03-16T11:23:25.664" v="6446" actId="207"/>
+          <ac:chgData name="Read, Zoe" userId="b08cd0fd-26d2-470b-8ec0-c6e6cb2a79bd" providerId="ADAL" clId="{5AEB2719-95A5-4ED2-9E0E-ED462BB10526}" dt="2026-03-23T13:18:20.272" v="6734" actId="20577"/>
           <ac:spMkLst>
             <pc:docMk/>
             <pc:sldMk cId="2005456116" sldId="257"/>
@@ -317,7 +317,7 @@
           </ac:spMkLst>
         </pc:spChg>
         <pc:spChg chg="mod">
-          <ac:chgData name="Read, Zoe" userId="b08cd0fd-26d2-470b-8ec0-c6e6cb2a79bd" providerId="ADAL" clId="{5AEB2719-95A5-4ED2-9E0E-ED462BB10526}" dt="2026-03-16T11:36:02.334" v="6657" actId="1035"/>
+          <ac:chgData name="Read, Zoe" userId="b08cd0fd-26d2-470b-8ec0-c6e6cb2a79bd" providerId="ADAL" clId="{5AEB2719-95A5-4ED2-9E0E-ED462BB10526}" dt="2026-03-23T13:20:13.186" v="6747" actId="20577"/>
           <ac:spMkLst>
             <pc:docMk/>
             <pc:sldMk cId="2005456116" sldId="257"/>
@@ -325,37 +325,13 @@
           </ac:spMkLst>
         </pc:spChg>
         <pc:graphicFrameChg chg="mod modGraphic">
-          <ac:chgData name="Read, Zoe" userId="b08cd0fd-26d2-470b-8ec0-c6e6cb2a79bd" providerId="ADAL" clId="{5AEB2719-95A5-4ED2-9E0E-ED462BB10526}" dt="2026-03-13T18:11:25.336" v="5465" actId="1076"/>
+          <ac:chgData name="Read, Zoe" userId="b08cd0fd-26d2-470b-8ec0-c6e6cb2a79bd" providerId="ADAL" clId="{5AEB2719-95A5-4ED2-9E0E-ED462BB10526}" dt="2026-03-23T13:24:17.114" v="6782" actId="20577"/>
           <ac:graphicFrameMkLst>
             <pc:docMk/>
             <pc:sldMk cId="2005456116" sldId="257"/>
             <ac:graphicFrameMk id="20" creationId="{6EE1AE5B-A26D-71DD-8EF3-D283BC117F1C}"/>
           </ac:graphicFrameMkLst>
         </pc:graphicFrameChg>
-        <pc:picChg chg="add del mod ord">
-          <ac:chgData name="Read, Zoe" userId="b08cd0fd-26d2-470b-8ec0-c6e6cb2a79bd" providerId="ADAL" clId="{5AEB2719-95A5-4ED2-9E0E-ED462BB10526}" dt="2026-03-16T11:28:05.199" v="6542" actId="478"/>
-          <ac:picMkLst>
-            <pc:docMk/>
-            <pc:sldMk cId="2005456116" sldId="257"/>
-            <ac:picMk id="6" creationId="{65D6C5CC-18B1-CDA4-E731-06FAAFE46261}"/>
-          </ac:picMkLst>
-        </pc:picChg>
-        <pc:picChg chg="add del mod">
-          <ac:chgData name="Read, Zoe" userId="b08cd0fd-26d2-470b-8ec0-c6e6cb2a79bd" providerId="ADAL" clId="{5AEB2719-95A5-4ED2-9E0E-ED462BB10526}" dt="2026-03-16T11:28:46.704" v="6548" actId="478"/>
-          <ac:picMkLst>
-            <pc:docMk/>
-            <pc:sldMk cId="2005456116" sldId="257"/>
-            <ac:picMk id="8" creationId="{5CF41111-8529-1268-9415-CABE9AC20ADC}"/>
-          </ac:picMkLst>
-        </pc:picChg>
-        <pc:picChg chg="add del mod">
-          <ac:chgData name="Read, Zoe" userId="b08cd0fd-26d2-470b-8ec0-c6e6cb2a79bd" providerId="ADAL" clId="{5AEB2719-95A5-4ED2-9E0E-ED462BB10526}" dt="2026-03-16T11:32:18.188" v="6634" actId="478"/>
-          <ac:picMkLst>
-            <pc:docMk/>
-            <pc:sldMk cId="2005456116" sldId="257"/>
-            <ac:picMk id="9" creationId="{85DA710A-FE9C-9F98-B2EB-359901B6FE67}"/>
-          </ac:picMkLst>
-        </pc:picChg>
         <pc:picChg chg="add mod ord">
           <ac:chgData name="Read, Zoe" userId="b08cd0fd-26d2-470b-8ec0-c6e6cb2a79bd" providerId="ADAL" clId="{5AEB2719-95A5-4ED2-9E0E-ED462BB10526}" dt="2026-03-16T11:28:57.449" v="6551" actId="1076"/>
           <ac:picMkLst>
@@ -364,28 +340,12 @@
             <ac:picMk id="11" creationId="{DA28F95C-2111-E10A-4CC1-C069E3C51045}"/>
           </ac:picMkLst>
         </pc:picChg>
-        <pc:picChg chg="add del mod">
-          <ac:chgData name="Read, Zoe" userId="b08cd0fd-26d2-470b-8ec0-c6e6cb2a79bd" providerId="ADAL" clId="{5AEB2719-95A5-4ED2-9E0E-ED462BB10526}" dt="2026-03-16T11:35:39.896" v="6650" actId="478"/>
-          <ac:picMkLst>
-            <pc:docMk/>
-            <pc:sldMk cId="2005456116" sldId="257"/>
-            <ac:picMk id="15" creationId="{D5EFE006-592F-3411-CBFD-F9BC7ECA928A}"/>
-          </ac:picMkLst>
-        </pc:picChg>
         <pc:picChg chg="add mod">
           <ac:chgData name="Read, Zoe" userId="b08cd0fd-26d2-470b-8ec0-c6e6cb2a79bd" providerId="ADAL" clId="{5AEB2719-95A5-4ED2-9E0E-ED462BB10526}" dt="2026-03-16T11:34:11.066" v="6642" actId="1076"/>
           <ac:picMkLst>
             <pc:docMk/>
             <pc:sldMk cId="2005456116" sldId="257"/>
             <ac:picMk id="22" creationId="{00462A3D-D24C-025E-9B9B-C8F9481AB05B}"/>
-          </ac:picMkLst>
-        </pc:picChg>
-        <pc:picChg chg="add del mod">
-          <ac:chgData name="Read, Zoe" userId="b08cd0fd-26d2-470b-8ec0-c6e6cb2a79bd" providerId="ADAL" clId="{5AEB2719-95A5-4ED2-9E0E-ED462BB10526}" dt="2026-03-16T11:34:01.951" v="6640" actId="478"/>
-          <ac:picMkLst>
-            <pc:docMk/>
-            <pc:sldMk cId="2005456116" sldId="257"/>
-            <ac:picMk id="1085" creationId="{9E2D53CD-2078-3011-EB8F-F1979C9B3B22}"/>
           </ac:picMkLst>
         </pc:picChg>
         <pc:picChg chg="add mod">
@@ -453,7 +413,7 @@
           </ac:cxnSpMkLst>
         </pc:cxnChg>
         <pc:cxnChg chg="add mod">
-          <ac:chgData name="Read, Zoe" userId="b08cd0fd-26d2-470b-8ec0-c6e6cb2a79bd" providerId="ADAL" clId="{5AEB2719-95A5-4ED2-9E0E-ED462BB10526}" dt="2026-03-13T20:07:33.645" v="6439" actId="1038"/>
+          <ac:chgData name="Read, Zoe" userId="b08cd0fd-26d2-470b-8ec0-c6e6cb2a79bd" providerId="ADAL" clId="{5AEB2719-95A5-4ED2-9E0E-ED462BB10526}" dt="2026-03-23T13:20:54.859" v="6756" actId="1038"/>
           <ac:cxnSpMkLst>
             <pc:docMk/>
             <pc:sldMk cId="2005456116" sldId="257"/>
@@ -461,7 +421,7 @@
           </ac:cxnSpMkLst>
         </pc:cxnChg>
         <pc:cxnChg chg="add mod">
-          <ac:chgData name="Read, Zoe" userId="b08cd0fd-26d2-470b-8ec0-c6e6cb2a79bd" providerId="ADAL" clId="{5AEB2719-95A5-4ED2-9E0E-ED462BB10526}" dt="2026-03-13T20:07:33.645" v="6439" actId="1038"/>
+          <ac:chgData name="Read, Zoe" userId="b08cd0fd-26d2-470b-8ec0-c6e6cb2a79bd" providerId="ADAL" clId="{5AEB2719-95A5-4ED2-9E0E-ED462BB10526}" dt="2026-03-23T13:20:56.054" v="6757" actId="1038"/>
           <ac:cxnSpMkLst>
             <pc:docMk/>
             <pc:sldMk cId="2005456116" sldId="257"/>
@@ -469,7 +429,7 @@
           </ac:cxnSpMkLst>
         </pc:cxnChg>
         <pc:cxnChg chg="add mod">
-          <ac:chgData name="Read, Zoe" userId="b08cd0fd-26d2-470b-8ec0-c6e6cb2a79bd" providerId="ADAL" clId="{5AEB2719-95A5-4ED2-9E0E-ED462BB10526}" dt="2026-03-13T20:07:33.645" v="6439" actId="1038"/>
+          <ac:chgData name="Read, Zoe" userId="b08cd0fd-26d2-470b-8ec0-c6e6cb2a79bd" providerId="ADAL" clId="{5AEB2719-95A5-4ED2-9E0E-ED462BB10526}" dt="2026-03-23T13:20:24.923" v="6751" actId="1076"/>
           <ac:cxnSpMkLst>
             <pc:docMk/>
             <pc:sldMk cId="2005456116" sldId="257"/>
@@ -477,7 +437,7 @@
           </ac:cxnSpMkLst>
         </pc:cxnChg>
         <pc:cxnChg chg="add mod">
-          <ac:chgData name="Read, Zoe" userId="b08cd0fd-26d2-470b-8ec0-c6e6cb2a79bd" providerId="ADAL" clId="{5AEB2719-95A5-4ED2-9E0E-ED462BB10526}" dt="2026-03-13T20:07:33.645" v="6439" actId="1038"/>
+          <ac:chgData name="Read, Zoe" userId="b08cd0fd-26d2-470b-8ec0-c6e6cb2a79bd" providerId="ADAL" clId="{5AEB2719-95A5-4ED2-9E0E-ED462BB10526}" dt="2026-03-23T13:20:21.804" v="6750" actId="1076"/>
           <ac:cxnSpMkLst>
             <pc:docMk/>
             <pc:sldMk cId="2005456116" sldId="257"/>
@@ -485,7 +445,7 @@
           </ac:cxnSpMkLst>
         </pc:cxnChg>
         <pc:cxnChg chg="add mod">
-          <ac:chgData name="Read, Zoe" userId="b08cd0fd-26d2-470b-8ec0-c6e6cb2a79bd" providerId="ADAL" clId="{5AEB2719-95A5-4ED2-9E0E-ED462BB10526}" dt="2026-03-13T19:36:41.872" v="6375" actId="1076"/>
+          <ac:chgData name="Read, Zoe" userId="b08cd0fd-26d2-470b-8ec0-c6e6cb2a79bd" providerId="ADAL" clId="{5AEB2719-95A5-4ED2-9E0E-ED462BB10526}" dt="2026-03-23T13:20:18.582" v="6748" actId="1076"/>
           <ac:cxnSpMkLst>
             <pc:docMk/>
             <pc:sldMk cId="2005456116" sldId="257"/>
@@ -493,7 +453,7 @@
           </ac:cxnSpMkLst>
         </pc:cxnChg>
         <pc:cxnChg chg="add mod">
-          <ac:chgData name="Read, Zoe" userId="b08cd0fd-26d2-470b-8ec0-c6e6cb2a79bd" providerId="ADAL" clId="{5AEB2719-95A5-4ED2-9E0E-ED462BB10526}" dt="2026-03-13T20:07:33.645" v="6439" actId="1038"/>
+          <ac:chgData name="Read, Zoe" userId="b08cd0fd-26d2-470b-8ec0-c6e6cb2a79bd" providerId="ADAL" clId="{5AEB2719-95A5-4ED2-9E0E-ED462BB10526}" dt="2026-03-23T13:21:00.940" v="6761" actId="1037"/>
           <ac:cxnSpMkLst>
             <pc:docMk/>
             <pc:sldMk cId="2005456116" sldId="257"/>
@@ -501,7 +461,7 @@
           </ac:cxnSpMkLst>
         </pc:cxnChg>
         <pc:cxnChg chg="add mod">
-          <ac:chgData name="Read, Zoe" userId="b08cd0fd-26d2-470b-8ec0-c6e6cb2a79bd" providerId="ADAL" clId="{5AEB2719-95A5-4ED2-9E0E-ED462BB10526}" dt="2026-03-13T20:07:33.645" v="6439" actId="1038"/>
+          <ac:chgData name="Read, Zoe" userId="b08cd0fd-26d2-470b-8ec0-c6e6cb2a79bd" providerId="ADAL" clId="{5AEB2719-95A5-4ED2-9E0E-ED462BB10526}" dt="2026-03-23T13:21:01.835" v="6762" actId="1037"/>
           <ac:cxnSpMkLst>
             <pc:docMk/>
             <pc:sldMk cId="2005456116" sldId="257"/>
@@ -509,7 +469,7 @@
           </ac:cxnSpMkLst>
         </pc:cxnChg>
         <pc:cxnChg chg="add mod">
-          <ac:chgData name="Read, Zoe" userId="b08cd0fd-26d2-470b-8ec0-c6e6cb2a79bd" providerId="ADAL" clId="{5AEB2719-95A5-4ED2-9E0E-ED462BB10526}" dt="2026-03-16T11:24:24.947" v="6504" actId="1076"/>
+          <ac:chgData name="Read, Zoe" userId="b08cd0fd-26d2-470b-8ec0-c6e6cb2a79bd" providerId="ADAL" clId="{5AEB2719-95A5-4ED2-9E0E-ED462BB10526}" dt="2026-03-23T13:21:08.722" v="6765" actId="1037"/>
           <ac:cxnSpMkLst>
             <pc:docMk/>
             <pc:sldMk cId="2005456116" sldId="257"/>
@@ -517,7 +477,7 @@
           </ac:cxnSpMkLst>
         </pc:cxnChg>
         <pc:cxnChg chg="add mod">
-          <ac:chgData name="Read, Zoe" userId="b08cd0fd-26d2-470b-8ec0-c6e6cb2a79bd" providerId="ADAL" clId="{5AEB2719-95A5-4ED2-9E0E-ED462BB10526}" dt="2026-03-13T20:07:33.645" v="6439" actId="1038"/>
+          <ac:chgData name="Read, Zoe" userId="b08cd0fd-26d2-470b-8ec0-c6e6cb2a79bd" providerId="ADAL" clId="{5AEB2719-95A5-4ED2-9E0E-ED462BB10526}" dt="2026-03-23T13:20:50.027" v="6755" actId="1038"/>
           <ac:cxnSpMkLst>
             <pc:docMk/>
             <pc:sldMk cId="2005456116" sldId="257"/>
@@ -525,7 +485,7 @@
           </ac:cxnSpMkLst>
         </pc:cxnChg>
         <pc:cxnChg chg="add mod">
-          <ac:chgData name="Read, Zoe" userId="b08cd0fd-26d2-470b-8ec0-c6e6cb2a79bd" providerId="ADAL" clId="{5AEB2719-95A5-4ED2-9E0E-ED462BB10526}" dt="2026-03-13T19:36:41.872" v="6375" actId="1076"/>
+          <ac:chgData name="Read, Zoe" userId="b08cd0fd-26d2-470b-8ec0-c6e6cb2a79bd" providerId="ADAL" clId="{5AEB2719-95A5-4ED2-9E0E-ED462BB10526}" dt="2026-03-23T13:20:43.012" v="6752" actId="1076"/>
           <ac:cxnSpMkLst>
             <pc:docMk/>
             <pc:sldMk cId="2005456116" sldId="257"/>
@@ -533,7 +493,7 @@
           </ac:cxnSpMkLst>
         </pc:cxnChg>
         <pc:cxnChg chg="add mod">
-          <ac:chgData name="Read, Zoe" userId="b08cd0fd-26d2-470b-8ec0-c6e6cb2a79bd" providerId="ADAL" clId="{5AEB2719-95A5-4ED2-9E0E-ED462BB10526}" dt="2026-03-13T20:07:33.645" v="6439" actId="1038"/>
+          <ac:chgData name="Read, Zoe" userId="b08cd0fd-26d2-470b-8ec0-c6e6cb2a79bd" providerId="ADAL" clId="{5AEB2719-95A5-4ED2-9E0E-ED462BB10526}" dt="2026-03-23T13:20:47.109" v="6754" actId="1037"/>
           <ac:cxnSpMkLst>
             <pc:docMk/>
             <pc:sldMk cId="2005456116" sldId="257"/>
@@ -595,32 +555,6 @@
     </pc:docChg>
   </pc:docChgLst>
 </pc:chgInfo>
-</file>
-
-<file path=ppt/comments/modernComment_101_7788D4F4.xml><?xml version="1.0" encoding="utf-8"?>
-<p188:cmLst xmlns:a="http://schemas.openxmlformats.org/drawingml/2006/main" xmlns:r="http://schemas.openxmlformats.org/officeDocument/2006/relationships" xmlns:p188="http://schemas.microsoft.com/office/powerpoint/2018/8/main">
-  <p188:cm id="{597E5C60-A8AD-485E-8A84-796A7E2CF6A3}" authorId="{231D7B86-FC17-2341-A59E-74856DBD8393}" status="resolved" created="2026-03-13T21:58:16.626" complete="100000">
-    <ac:txMkLst xmlns:ac="http://schemas.microsoft.com/office/drawing/2013/main/command">
-      <pc:docMk xmlns:pc="http://schemas.microsoft.com/office/powerpoint/2013/main/command"/>
-      <pc:sldMk xmlns:pc="http://schemas.microsoft.com/office/powerpoint/2013/main/command" cId="2005456116" sldId="257"/>
-      <ac:spMk id="1046" creationId="{3D22E29A-542C-2707-EE87-D32E923FD26A}"/>
-      <ac:txMk cp="339" len="10">
-        <ac:context len="445" hash="2235153434"/>
-      </ac:txMk>
-    </ac:txMkLst>
-    <p188:pos x="13446686" y="1916171"/>
-    <p188:txBody>
-      <a:bodyPr/>
-      <a:lstStyle/>
-      <a:p>
-        <a:r>
-          <a:rPr lang="en-US"/>
-          <a:t>Not necessary for now, but we might plot this same graph of the 0cm  /SW samples and see if they follow the same pattern - it might be that the surface water salinity drives the sulfate concentrations? </a:t>
-        </a:r>
-      </a:p>
-    </p188:txBody>
-  </p188:cm>
-</p188:cmLst>
 </file>
 
 <file path=ppt/notesMasters/notesMaster1.xml><?xml version="1.0" encoding="utf-8"?>
@@ -705,7 +639,7 @@
           <a:p>
             <a:fld id="{0407BD97-90D8-3541-9414-B17D17D02539}" type="datetimeFigureOut">
               <a:rPr lang="en-US" smtClean="0"/>
-              <a:t>3/16/2026</a:t>
+              <a:t>3/23/2026</a:t>
             </a:fld>
             <a:endParaRPr lang="en-US"/>
           </a:p>
@@ -1025,10 +959,7 @@
               <a:buFontTx/>
               <a:buChar char="-"/>
             </a:pPr>
-            <a:r>
-              <a:rPr lang="en-US" baseline="0" dirty="0"/>
-              <a:t>- If have time, could try adding stacked x-axis with month and year below it </a:t>
-            </a:r>
+            <a:endParaRPr lang="en-US" baseline="0" dirty="0"/>
           </a:p>
         </p:txBody>
       </p:sp>
@@ -2286,7 +2217,7 @@
           <p:nvPr/>
         </p:nvPicPr>
         <p:blipFill>
-          <a:blip r:embed="rId4">
+          <a:blip r:embed="rId3">
             <a:extLst>
               <a:ext uri="{28A0092B-C50C-407E-A947-70E740481C1C}">
                 <a14:useLocalDpi xmlns:a14="http://schemas.microsoft.com/office/drawing/2010/main" val="0"/>
@@ -2322,7 +2253,7 @@
           <p:nvPr/>
         </p:nvPicPr>
         <p:blipFill>
-          <a:blip r:embed="rId5">
+          <a:blip r:embed="rId4">
             <a:extLst>
               <a:ext uri="{28A0092B-C50C-407E-A947-70E740481C1C}">
                 <a14:useLocalDpi xmlns:a14="http://schemas.microsoft.com/office/drawing/2010/main" val="0"/>
@@ -2449,11 +2380,67 @@
           <a:p>
             <a:r>
               <a:rPr lang="en-US" sz="3600" b="1" dirty="0"/>
-              <a:t>Zoe Read, </a:t>
+              <a:t>Zoe Read</a:t>
+            </a:r>
+            <a:r>
+              <a:rPr lang="en-US" sz="3600" baseline="30000" dirty="0"/>
+              <a:t>1</a:t>
+            </a:r>
+            <a:r>
+              <a:rPr lang="en-US" sz="3600" b="1" dirty="0"/>
+              <a:t>, </a:t>
             </a:r>
             <a:r>
               <a:rPr lang="en-US" sz="3600" dirty="0"/>
-              <a:t>Stephanie J. Wilson, Alice Stearns, Evan Phillips, Nathan Chin, Pat Megonigal, Ben Bond-Lamberty, and the COMPASS team </a:t>
+              <a:t>Stephanie J. Wilson</a:t>
+            </a:r>
+            <a:r>
+              <a:rPr lang="en-US" sz="3600" baseline="30000" dirty="0"/>
+              <a:t>1</a:t>
+            </a:r>
+            <a:r>
+              <a:rPr lang="en-US" sz="3600" dirty="0"/>
+              <a:t>, Alice Stearns</a:t>
+            </a:r>
+            <a:r>
+              <a:rPr lang="en-US" sz="3600" baseline="30000" dirty="0"/>
+              <a:t>1</a:t>
+            </a:r>
+            <a:r>
+              <a:rPr lang="en-US" sz="3600" dirty="0"/>
+              <a:t>, Evan Phillips</a:t>
+            </a:r>
+            <a:r>
+              <a:rPr lang="en-US" sz="3600" baseline="30000" dirty="0"/>
+              <a:t>1</a:t>
+            </a:r>
+            <a:r>
+              <a:rPr lang="en-US" sz="3600" dirty="0"/>
+              <a:t>, Nathan Chin</a:t>
+            </a:r>
+            <a:r>
+              <a:rPr lang="en-US" sz="3600" baseline="30000" dirty="0"/>
+              <a:t>1</a:t>
+            </a:r>
+            <a:r>
+              <a:rPr lang="en-US" sz="3600" dirty="0"/>
+              <a:t>, Pat Megonigal</a:t>
+            </a:r>
+            <a:r>
+              <a:rPr lang="en-US" sz="3600" baseline="30000" dirty="0"/>
+              <a:t>1</a:t>
+            </a:r>
+            <a:r>
+              <a:rPr lang="en-US" sz="3600" dirty="0"/>
+              <a:t>, Ben Bond-Lamberty</a:t>
+            </a:r>
+            <a:r>
+              <a:rPr lang="en-US" sz="3600" baseline="30000" dirty="0"/>
+              <a:t>2</a:t>
+            </a:r>
+            <a:r>
+              <a:rPr lang="en-US" sz="3600" dirty="0"/>
+              <a:t>, and the COMPASS team </a:t>
             </a:r>
           </a:p>
           <a:p>
@@ -2659,7 +2646,7 @@
             </a:pPr>
             <a:r>
               <a:rPr lang="en-US" sz="2800" dirty="0"/>
-              <a:t>We monitor transects including upland coastal forest, forest transitioning to wetland, and wetlands </a:t>
+              <a:t>Monitoring transects include upland coastal forest, forest transitioning to wetland, and wetlands </a:t>
             </a:r>
             <a:r>
               <a:rPr lang="en-US" sz="2800" dirty="0">
@@ -2677,7 +2664,21 @@
                 <a:latin typeface="Arial" panose="020B0604020202020204" pitchFamily="34" charset="0"/>
                 <a:cs typeface="Arial" panose="020B0604020202020204" pitchFamily="34" charset="0"/>
               </a:rPr>
-              <a:t>that are oligohaline, mesohaline, and polyhaline </a:t>
+              <a:t>that are oligohaline, mesohaline, and </a:t>
+            </a:r>
+            <a:r>
+              <a:rPr lang="en-US" sz="2800" dirty="0" err="1">
+                <a:latin typeface="Arial" panose="020B0604020202020204" pitchFamily="34" charset="0"/>
+                <a:cs typeface="Arial" panose="020B0604020202020204" pitchFamily="34" charset="0"/>
+              </a:rPr>
+              <a:t>polyhaline</a:t>
+            </a:r>
+            <a:r>
+              <a:rPr lang="en-US" sz="2800" dirty="0">
+                <a:latin typeface="Arial" panose="020B0604020202020204" pitchFamily="34" charset="0"/>
+                <a:cs typeface="Arial" panose="020B0604020202020204" pitchFamily="34" charset="0"/>
+              </a:rPr>
+              <a:t>. </a:t>
             </a:r>
           </a:p>
           <a:p>
@@ -2690,7 +2691,7 @@
                 <a:latin typeface="Arial" panose="020B0604020202020204" pitchFamily="34" charset="0"/>
                 <a:cs typeface="Arial" panose="020B0604020202020204" pitchFamily="34" charset="0"/>
               </a:rPr>
-              <a:t>Porewater sampling from 2022-2025 </a:t>
+              <a:t>Porewater sampled from 2022-2025 </a:t>
             </a:r>
             <a:r>
               <a:rPr lang="en-US" sz="2800" dirty="0">
@@ -2698,14 +2699,20 @@
                 <a:cs typeface="Arial" panose="020B0604020202020204" pitchFamily="34" charset="0"/>
                 <a:sym typeface="Wingdings" panose="05000000000000000000" pitchFamily="2" charset="2"/>
               </a:rPr>
-              <a:t> </a:t>
+              <a:t>was </a:t>
+            </a:r>
+            <a:r>
+              <a:rPr lang="en-US" sz="2800" dirty="0">
+                <a:sym typeface="Wingdings" panose="05000000000000000000" pitchFamily="2" charset="2"/>
+              </a:rPr>
+              <a:t>a</a:t>
             </a:r>
             <a:r>
               <a:rPr lang="en-US" sz="2800" dirty="0">
                 <a:latin typeface="Arial" panose="020B0604020202020204" pitchFamily="34" charset="0"/>
                 <a:cs typeface="Arial" panose="020B0604020202020204" pitchFamily="34" charset="0"/>
               </a:rPr>
-              <a:t>Analyzed for DIC, DOC, Total Alkalinity, CDOM, H</a:t>
+              <a:t>nalyzed for DIC, DOC, Total Alkalinity, CDOM, H</a:t>
             </a:r>
             <a:r>
               <a:rPr lang="en-US" sz="2800" baseline="-25000" dirty="0">
@@ -2736,26 +2743,28 @@
               <a:t>, Nutrients, and </a:t>
             </a:r>
             <a:r>
-              <a:rPr lang="en-US" sz="2800" b="1" dirty="0">
+              <a:rPr lang="en-US" sz="2800" b="1" dirty="0"/>
+              <a:t>SO</a:t>
+            </a:r>
+            <a:r>
+              <a:rPr lang="en-US" sz="2800" b="1" baseline="-25000" dirty="0"/>
+              <a:t>4</a:t>
+            </a:r>
+            <a:r>
+              <a:rPr lang="en-US" sz="2800" b="1" baseline="30000" dirty="0"/>
+              <a:t>2-</a:t>
+            </a:r>
+            <a:r>
+              <a:rPr lang="en-US" sz="2800" dirty="0">
                 <a:latin typeface="Arial" panose="020B0604020202020204" pitchFamily="34" charset="0"/>
                 <a:cs typeface="Arial" panose="020B0604020202020204" pitchFamily="34" charset="0"/>
               </a:rPr>
-              <a:t>SO</a:t>
-            </a:r>
-            <a:r>
-              <a:rPr lang="en-US" sz="2800" b="1" baseline="-25000" dirty="0">
-                <a:latin typeface="Arial" panose="020B0604020202020204" pitchFamily="34" charset="0"/>
-                <a:cs typeface="Arial" panose="020B0604020202020204" pitchFamily="34" charset="0"/>
-              </a:rPr>
-              <a:t>4</a:t>
-            </a:r>
-            <a:r>
-              <a:rPr lang="en-US" sz="2800" b="1" baseline="30000" dirty="0">
-                <a:latin typeface="Arial" panose="020B0604020202020204" pitchFamily="34" charset="0"/>
-                <a:cs typeface="Arial" panose="020B0604020202020204" pitchFamily="34" charset="0"/>
-              </a:rPr>
-              <a:t>2-</a:t>
-            </a:r>
+              <a:t>.</a:t>
+            </a:r>
+            <a:endParaRPr lang="en-US" sz="2800" b="1" baseline="30000" dirty="0">
+              <a:latin typeface="Arial" panose="020B0604020202020204" pitchFamily="34" charset="0"/>
+              <a:cs typeface="Arial" panose="020B0604020202020204" pitchFamily="34" charset="0"/>
+            </a:endParaRPr>
           </a:p>
           <a:p>
             <a:pPr marL="457200" indent="-457200">
@@ -2768,7 +2777,7 @@
             </a:r>
             <a:r>
               <a:rPr lang="en-US" sz="2800" dirty="0"/>
-              <a:t> AQ600 sensors deployed in the field, collecting continuous ground and soil water and salinity values</a:t>
+              <a:t> AQ600 sensors are deployed in the field, collecting continuous ground and soil water and salinity values. </a:t>
             </a:r>
           </a:p>
           <a:p>
@@ -3144,15 +3153,7 @@
             </a:r>
             <a:r>
               <a:rPr lang="en-US" sz="2800" dirty="0"/>
-              <a:t> tends to increase throughout each year, especially in the fall, and decrease at the start of a new year. This could be because sulfate-reducing microbes are less active as temperatures decrease at the end of each year, or this could be related to changes in precipitation or </a:t>
-            </a:r>
-            <a:r>
-              <a:rPr lang="en-US" sz="2800" dirty="0" err="1"/>
-              <a:t>surfacewater</a:t>
-            </a:r>
-            <a:r>
-              <a:rPr lang="en-US" sz="2800" dirty="0"/>
-              <a:t> salinities throughout the year. </a:t>
+              <a:t> tends to increase throughout each year, especially in the fall, and decrease at the start of a new year. This could be because sulfate-reducing microbes are less active as temperatures decrease at the end of each year, or this could be related to changes in precipitation or surface water salinities throughout the year. </a:t>
             </a:r>
           </a:p>
           <a:p>
@@ -3162,7 +3163,7 @@
             </a:pPr>
             <a:r>
               <a:rPr lang="en-US" sz="2800" dirty="0"/>
-              <a:t>SO</a:t>
+              <a:t>Peak annual SO</a:t>
             </a:r>
             <a:r>
               <a:rPr lang="en-US" sz="2800" baseline="-25000" dirty="0"/>
@@ -3590,7 +3591,7 @@
               <p:nvPr>
                 <p:extLst>
                   <p:ext uri="{D42A27DB-BD31-4B8C-83A1-F6EECF244321}">
-                    <p14:modId xmlns:p14="http://schemas.microsoft.com/office/powerpoint/2010/main" val="4074627904"/>
+                    <p14:modId xmlns:p14="http://schemas.microsoft.com/office/powerpoint/2010/main" val="132753171"/>
                   </p:ext>
                 </p:extLst>
               </p:nvPr>
@@ -3796,14 +3797,14 @@
                             <a:rPr lang="en-US" sz="2400" dirty="0">
                               <a:latin typeface="+mj-lt"/>
                             </a:rPr>
-                            <a:t>Sweethall</a:t>
+                            <a:t>Sweet Hall</a:t>
                           </a:r>
                           <a:endParaRPr sz="2400" dirty="0">
                             <a:latin typeface="+mj-lt"/>
                           </a:endParaRPr>
                         </a:p>
                       </a:txBody>
-                      <a:tcPr marL="91450" marR="91450" marT="45725" marB="45725">
+                      <a:tcPr marL="91450" marR="91450" marT="45725" marB="45725" anchor="ctr">
                         <a:lnL w="9525" cap="flat" cmpd="sng">
                           <a:solidFill>
                             <a:srgbClr val="242424"/>
@@ -3873,7 +3874,7 @@
                           </a:endParaRPr>
                         </a:p>
                       </a:txBody>
-                      <a:tcPr marL="91450" marR="91450" marT="45725" marB="45725">
+                      <a:tcPr marL="91450" marR="91450" marT="45725" marB="45725" anchor="ctr">
                         <a:lnL w="9525" cap="flat" cmpd="sng">
                           <a:solidFill>
                             <a:srgbClr val="242424"/>
@@ -3950,7 +3951,7 @@
                           </a:endParaRPr>
                         </a:p>
                       </a:txBody>
-                      <a:tcPr marL="91450" marR="91450" marT="45725" marB="45725">
+                      <a:tcPr marL="91450" marR="91450" marT="45725" marB="45725" anchor="ctr">
                         <a:lnL w="9525" cap="flat" cmpd="sng">
                           <a:solidFill>
                             <a:srgbClr val="242424"/>
@@ -4020,7 +4021,7 @@
                           </a:endParaRPr>
                         </a:p>
                       </a:txBody>
-                      <a:tcPr marL="91450" marR="91450" marT="45725" marB="45725">
+                      <a:tcPr marL="91450" marR="91450" marT="45725" marB="45725" anchor="ctr">
                         <a:lnL w="9525" cap="flat" cmpd="sng">
                           <a:solidFill>
                             <a:srgbClr val="242424"/>
@@ -4096,14 +4097,14 @@
                             <a:rPr lang="en-US" sz="2400" dirty="0">
                               <a:latin typeface="+mj-lt"/>
                             </a:rPr>
-                            <a:t>oneyStump</a:t>
+                            <a:t>oney Stump</a:t>
                           </a:r>
                           <a:endParaRPr sz="2400" dirty="0">
                             <a:latin typeface="+mj-lt"/>
                           </a:endParaRPr>
                         </a:p>
                       </a:txBody>
-                      <a:tcPr marL="91450" marR="91450" marT="45725" marB="45725">
+                      <a:tcPr marL="91450" marR="91450" marT="45725" marB="45725" anchor="ctr">
                         <a:lnL w="9525" cap="flat" cmpd="sng">
                           <a:solidFill>
                             <a:srgbClr val="242424"/>
@@ -4160,7 +4161,7 @@
                             <a:buNone/>
                           </a:pPr>
                           <a:r>
-                            <a:rPr lang="en-US" sz="2400" u="none" strike="noStrike" cap="none">
+                            <a:rPr lang="en-US" sz="2400" u="none" strike="noStrike" cap="none" dirty="0">
                               <a:solidFill>
                                 <a:srgbClr val="000000"/>
                               </a:solidFill>
@@ -4168,12 +4169,12 @@
                             </a:rPr>
                             <a:t>8-10</a:t>
                           </a:r>
-                          <a:endParaRPr sz="2400">
+                          <a:endParaRPr sz="2400" dirty="0">
                             <a:latin typeface="+mj-lt"/>
                           </a:endParaRPr>
                         </a:p>
                       </a:txBody>
-                      <a:tcPr marL="91450" marR="91450" marT="45725" marB="45725">
+                      <a:tcPr marL="91450" marR="91450" marT="45725" marB="45725" anchor="ctr">
                         <a:lnL w="9525" cap="flat" cmpd="sng">
                           <a:solidFill>
                             <a:srgbClr val="242424"/>
@@ -4256,7 +4257,7 @@
                           </a:endParaRPr>
                         </a:p>
                       </a:txBody>
-                      <a:tcPr marL="91450" marR="91450" marT="45725" marB="45725">
+                      <a:tcPr marL="91450" marR="91450" marT="45725" marB="45725" anchor="ctr">
                         <a:lnL w="9525" cap="flat" cmpd="sng">
                           <a:solidFill>
                             <a:srgbClr val="242424"/>
@@ -4326,7 +4327,7 @@
                           </a:endParaRPr>
                         </a:p>
                       </a:txBody>
-                      <a:tcPr marL="91450" marR="91450" marT="45725" marB="45725">
+                      <a:tcPr marL="91450" marR="91450" marT="45725" marB="45725" anchor="ctr">
                         <a:lnL w="9525" cap="flat" cmpd="sng">
                           <a:solidFill>
                             <a:srgbClr val="242424"/>
@@ -4582,7 +4583,7 @@
                   <p:nvPr/>
                 </p:nvPicPr>
                 <p:blipFill rotWithShape="1">
-                  <a:blip r:embed="rId6">
+                  <a:blip r:embed="rId5">
                     <a:extLst>
                       <a:ext uri="{28A0092B-C50C-407E-A947-70E740481C1C}">
                         <a14:useLocalDpi xmlns:a14="http://schemas.microsoft.com/office/drawing/2010/main" val="0"/>
@@ -4632,7 +4633,7 @@
                   <p:nvPr/>
                 </p:nvPicPr>
                 <p:blipFill rotWithShape="1">
-                  <a:blip r:embed="rId7" cstate="print">
+                  <a:blip r:embed="rId6" cstate="print">
                     <a:extLst>
                       <a:ext uri="{28A0092B-C50C-407E-A947-70E740481C1C}">
                         <a14:useLocalDpi xmlns:a14="http://schemas.microsoft.com/office/drawing/2010/main" val="0"/>
@@ -5047,8 +5048,8 @@
                 </p:nvSpPr>
                 <p:spPr>
                   <a:xfrm>
-                    <a:off x="1014980" y="9118251"/>
-                    <a:ext cx="1750958" cy="253253"/>
+                    <a:off x="998527" y="9183860"/>
+                    <a:ext cx="1750958" cy="260031"/>
                   </a:xfrm>
                   <a:prstGeom prst="rect">
                     <a:avLst/>
@@ -5063,7 +5064,7 @@
                   <a:p>
                     <a:r>
                       <a:rPr lang="en-US" sz="1800" dirty="0"/>
-                      <a:t>Sweethall</a:t>
+                      <a:t>Sweet Hall</a:t>
                     </a:r>
                   </a:p>
                 </p:txBody>
@@ -5311,7 +5312,7 @@
             </a:r>
             <a:r>
               <a:rPr lang="en-US" sz="2800" dirty="0"/>
-              <a:t> – depth relationship and surface water SO</a:t>
+              <a:t> - depth relationship and surface water SO</a:t>
             </a:r>
             <a:r>
               <a:rPr lang="en-US" sz="2800" baseline="-25000" dirty="0"/>
@@ -5323,7 +5324,7 @@
             </a:r>
             <a:r>
               <a:rPr lang="en-US" sz="2800" dirty="0"/>
-              <a:t> patterns to determine if there are patterns that explain its variability across sites and zones. </a:t>
+              <a:t> patterns to determine if there are trends that explain the variability across sites and zones. </a:t>
             </a:r>
           </a:p>
         </p:txBody>
@@ -5522,12 +5523,9 @@
             </a:r>
             <a:r>
               <a:rPr lang="en-US" sz="2800" dirty="0"/>
-              <a:t>, n=2,293) </a:t>
-            </a:r>
-            <a:r>
-              <a:rPr lang="en-US" sz="2800" strike="sngStrike" dirty="0"/>
-              <a:t>in 2,293 samples</a:t>
-            </a:r>
+              <a:t>, n = 2,293). </a:t>
+            </a:r>
+            <a:endParaRPr lang="en-US" sz="2800" strike="sngStrike" dirty="0"/>
           </a:p>
           <a:p>
             <a:pPr marL="457200" indent="-457200">
@@ -5548,7 +5546,7 @@
             </a:r>
             <a:r>
               <a:rPr lang="en-US" sz="2800" dirty="0"/>
-              <a:t> increased from upland forest through transition zones to the wetland </a:t>
+              <a:t> increased from upland forest through transition zones to the wetland. </a:t>
             </a:r>
           </a:p>
           <a:p>
@@ -5806,7 +5804,7 @@
             </a:r>
             <a:r>
               <a:rPr lang="en-US" sz="2800" dirty="0"/>
-              <a:t> increases with increasing groundwater salinity, groundwater water level, soil electrical conductivity, and soil volumetric water content. </a:t>
+              <a:t> increases with increasing groundwater salinity, groundwater level, soil electrical conductivity, and soil volumetric water content. </a:t>
             </a:r>
           </a:p>
           <a:p>
@@ -6007,7 +6005,7 @@
                 <a:latin typeface="Arial" panose="020B0604020202020204" pitchFamily="34" charset="0"/>
                 <a:cs typeface="Arial" panose="020B0604020202020204" pitchFamily="34" charset="0"/>
               </a:rPr>
-              <a:t>Porewater was sampled at three soil depths: 10, 20, and 45 cm</a:t>
+              <a:t>Porewater was sampled at three soil depths: 10, 20, and 45 cm. </a:t>
             </a:r>
           </a:p>
           <a:p>
@@ -6016,15 +6014,24 @@
               <a:buChar char="•"/>
             </a:pPr>
             <a:r>
-              <a:rPr lang="en-US" sz="2800" dirty="0"/>
+              <a:rPr lang="en-US" sz="2800" dirty="0">
+                <a:latin typeface="Arial" panose="020B0604020202020204" pitchFamily="34" charset="0"/>
+                <a:cs typeface="Arial" panose="020B0604020202020204" pitchFamily="34" charset="0"/>
+              </a:rPr>
               <a:t>SO</a:t>
             </a:r>
             <a:r>
-              <a:rPr lang="en-US" sz="2800" baseline="-25000" dirty="0"/>
+              <a:rPr lang="en-US" sz="2800" baseline="-25000" dirty="0">
+                <a:latin typeface="Arial" panose="020B0604020202020204" pitchFamily="34" charset="0"/>
+                <a:cs typeface="Arial" panose="020B0604020202020204" pitchFamily="34" charset="0"/>
+              </a:rPr>
               <a:t>4</a:t>
             </a:r>
             <a:r>
-              <a:rPr lang="en-US" sz="2800" baseline="30000" dirty="0"/>
+              <a:rPr lang="en-US" sz="2800" baseline="30000" dirty="0">
+                <a:latin typeface="Arial" panose="020B0604020202020204" pitchFamily="34" charset="0"/>
+                <a:cs typeface="Arial" panose="020B0604020202020204" pitchFamily="34" charset="0"/>
+              </a:rPr>
               <a:t>2-</a:t>
             </a:r>
             <a:r>
@@ -6097,7 +6104,7 @@
         </p:nvCxnSpPr>
         <p:spPr>
           <a:xfrm>
-            <a:off x="21400102" y="20296787"/>
+            <a:off x="21488400" y="20296787"/>
             <a:ext cx="0" cy="3161485"/>
           </a:xfrm>
           <a:prstGeom prst="line">
@@ -6141,7 +6148,7 @@
         </p:nvCxnSpPr>
         <p:spPr>
           <a:xfrm>
-            <a:off x="24600502" y="20337022"/>
+            <a:off x="24688800" y="20337022"/>
             <a:ext cx="0" cy="3161485"/>
           </a:xfrm>
           <a:prstGeom prst="line">
@@ -6185,7 +6192,7 @@
         </p:nvCxnSpPr>
         <p:spPr>
           <a:xfrm>
-            <a:off x="28715302" y="20337021"/>
+            <a:off x="28791502" y="20337020"/>
             <a:ext cx="0" cy="3161485"/>
           </a:xfrm>
           <a:prstGeom prst="line">
@@ -6229,7 +6236,7 @@
         </p:nvCxnSpPr>
         <p:spPr>
           <a:xfrm>
-            <a:off x="31306102" y="20337020"/>
+            <a:off x="31394400" y="20337020"/>
             <a:ext cx="0" cy="3161485"/>
           </a:xfrm>
           <a:prstGeom prst="line">
@@ -6273,7 +6280,7 @@
         </p:nvCxnSpPr>
         <p:spPr>
           <a:xfrm>
-            <a:off x="32982502" y="20337020"/>
+            <a:off x="33070800" y="20337020"/>
             <a:ext cx="0" cy="3161485"/>
           </a:xfrm>
           <a:prstGeom prst="line">
@@ -6317,7 +6324,7 @@
         </p:nvCxnSpPr>
         <p:spPr>
           <a:xfrm>
-            <a:off x="20714302" y="24906072"/>
+            <a:off x="20726400" y="24906072"/>
             <a:ext cx="0" cy="3200400"/>
           </a:xfrm>
           <a:prstGeom prst="line">
@@ -6361,7 +6368,7 @@
         </p:nvCxnSpPr>
         <p:spPr>
           <a:xfrm>
-            <a:off x="23457502" y="24906071"/>
+            <a:off x="23469600" y="24906071"/>
             <a:ext cx="0" cy="3200401"/>
           </a:xfrm>
           <a:prstGeom prst="line">
@@ -6405,7 +6412,7 @@
         </p:nvCxnSpPr>
         <p:spPr>
           <a:xfrm>
-            <a:off x="24829102" y="24906071"/>
+            <a:off x="24841200" y="24906071"/>
             <a:ext cx="0" cy="3200401"/>
           </a:xfrm>
           <a:prstGeom prst="line">
@@ -6449,7 +6456,7 @@
         </p:nvCxnSpPr>
         <p:spPr>
           <a:xfrm>
-            <a:off x="28791502" y="24906071"/>
+            <a:off x="28879800" y="24906071"/>
             <a:ext cx="0" cy="3200401"/>
           </a:xfrm>
           <a:prstGeom prst="line">
@@ -6493,7 +6500,7 @@
         </p:nvCxnSpPr>
         <p:spPr>
           <a:xfrm>
-            <a:off x="31534702" y="24906071"/>
+            <a:off x="31623000" y="24906071"/>
             <a:ext cx="0" cy="3200401"/>
           </a:xfrm>
           <a:prstGeom prst="line">
@@ -6537,7 +6544,7 @@
         </p:nvCxnSpPr>
         <p:spPr>
           <a:xfrm>
-            <a:off x="32906302" y="24906071"/>
+            <a:off x="32994600" y="24906071"/>
             <a:ext cx="0" cy="3200401"/>
           </a:xfrm>
           <a:prstGeom prst="line">
@@ -6580,7 +6587,7 @@
           <p:nvPr/>
         </p:nvPicPr>
         <p:blipFill>
-          <a:blip r:embed="rId8">
+          <a:blip r:embed="rId7">
             <a:extLst>
               <a:ext uri="{28A0092B-C50C-407E-A947-70E740481C1C}">
                 <a14:useLocalDpi xmlns:a14="http://schemas.microsoft.com/office/drawing/2010/main" val="0"/>
@@ -6616,7 +6623,7 @@
           <p:nvPr/>
         </p:nvPicPr>
         <p:blipFill>
-          <a:blip r:embed="rId9">
+          <a:blip r:embed="rId8">
             <a:extLst>
               <a:ext uri="{28A0092B-C50C-407E-A947-70E740481C1C}">
                 <a14:useLocalDpi xmlns:a14="http://schemas.microsoft.com/office/drawing/2010/main" val="0"/>
@@ -6647,11 +6654,6 @@
   <p:clrMapOvr>
     <a:masterClrMapping/>
   </p:clrMapOvr>
-  <p:extLst>
-    <p:ext uri="{6950BFC3-D8DA-4A85-94F7-54DA5524770B}">
-      <p188:commentRel xmlns:p188="http://schemas.microsoft.com/office/powerpoint/2018/8/main" r:id="rId3"/>
-    </p:ext>
-  </p:extLst>
 </p:sld>
 </file>
 
